--- a/Chapter01_Overall_Pipeline.pptx
+++ b/Chapter01_Overall_Pipeline.pptx
@@ -7,7 +7,6 @@
   <p:sldIdLst>
     <p:sldId id="256" r:id="rId7"/>
     <p:sldId id="257" r:id="rId8"/>
-    <p:sldId id="258" r:id="rId9"/>
   </p:sldIdLst>
   <p:sldSz cx="12191695" cy="6858000" type="screen4x3"/>
   <p:notesSz cx="6858000" cy="9144000"/>
@@ -3098,8 +3097,8 @@
         </p:nvSpPr>
         <p:spPr>
           <a:xfrm>
-            <a:off x="731520" y="365760"/>
-            <a:ext cx="10728655" cy="822960"/>
+            <a:off x="731520" y="411480"/>
+            <a:ext cx="10728655" cy="777240"/>
           </a:xfrm>
           <a:prstGeom prst="rect">
             <a:avLst/>
@@ -3115,26 +3114,26 @@
             <a:pPr>
               <a:defRPr sz="2200" b="1">
                 <a:solidFill>
-                  <a:srgbClr val="1A202C"/>
-                </a:solidFill>
-                <a:latin typeface="Arial"/>
+                  <a:srgbClr val="000000"/>
+                </a:solidFill>
+                <a:latin typeface="Times New Roman"/>
               </a:defRPr>
             </a:pPr>
             <a:r>
-              <a:t>专著整体框架与章节映射流程图 (Overall Framework &amp; Chapter Structure)</a:t>
+              <a:t>专著总体框架与章节结构图</a:t>
             </a:r>
           </a:p>
           <a:p>
             <a:pPr>
               <a:defRPr sz="1200">
                 <a:solidFill>
-                  <a:srgbClr val="4A5568"/>
-                </a:solidFill>
-                <a:latin typeface="Microsoft YaHei"/>
+                  <a:srgbClr val="5A5A5A"/>
+                </a:solidFill>
+                <a:latin typeface="Times New Roman"/>
               </a:defRPr>
             </a:pPr>
             <a:r>
-              <a:t>书名: AI-Driven UAV Building Inspection: An End-to-End Framework from Autonomous Flight to Digital Twins (第1章导论映射)</a:t>
+              <a:t>AI-Driven UAV Building Inspection: An End-to-End Framework from Autonomous Flight to Digital Twins</a:t>
             </a:r>
           </a:p>
         </p:txBody>
@@ -3148,17 +3147,17 @@
         <p:spPr>
           <a:xfrm>
             <a:off x="731520" y="1371600"/>
-            <a:ext cx="2468880" cy="4663440"/>
+            <a:ext cx="2423160" cy="457200"/>
           </a:xfrm>
           <a:prstGeom prst="rect">
             <a:avLst/>
           </a:prstGeom>
           <a:solidFill>
-            <a:srgbClr val="F8FAFC"/>
+            <a:srgbClr val="FFFFFF"/>
           </a:solidFill>
-          <a:ln w="19050">
+          <a:ln w="15875">
             <a:solidFill>
-              <a:srgbClr val="94A3B8"/>
+              <a:srgbClr val="000000"/>
             </a:solidFill>
           </a:ln>
         </p:spPr>
@@ -3180,7 +3179,17 @@
           <a:bodyPr rtlCol="0" anchor="ctr"/>
           <a:lstStyle/>
           <a:p>
-            <a:pPr algn="ctr"/>
+            <a:pPr algn="ctr">
+              <a:defRPr sz="1100" b="1">
+                <a:solidFill>
+                  <a:srgbClr val="000000"/>
+                </a:solidFill>
+                <a:latin typeface="Times New Roman"/>
+              </a:defRPr>
+            </a:pPr>
+            <a:r>
+              <a:t>阶段一：自主采集与规划</a:t>
+            </a:r>
           </a:p>
         </p:txBody>
       </p:sp>
@@ -3192,63 +3201,10 @@
         </p:nvSpPr>
         <p:spPr>
           <a:xfrm>
-            <a:off x="731520" y="1371600"/>
-            <a:ext cx="2468880" cy="594360"/>
+            <a:off x="731520" y="1920240"/>
+            <a:ext cx="2423160" cy="2002536"/>
           </a:xfrm>
           <a:prstGeom prst="rect">
-            <a:avLst/>
-          </a:prstGeom>
-          <a:solidFill>
-            <a:srgbClr val="94A3B8"/>
-          </a:solidFill>
-          <a:ln>
-            <a:noFill/>
-          </a:ln>
-        </p:spPr>
-        <p:style>
-          <a:lnRef idx="1">
-            <a:schemeClr val="accent1"/>
-          </a:lnRef>
-          <a:fillRef idx="3">
-            <a:schemeClr val="accent1"/>
-          </a:fillRef>
-          <a:effectRef idx="2">
-            <a:schemeClr val="accent1"/>
-          </a:effectRef>
-          <a:fontRef idx="minor">
-            <a:schemeClr val="lt1"/>
-          </a:fontRef>
-        </p:style>
-        <p:txBody>
-          <a:bodyPr rtlCol="0" anchor="ctr" wrap="square"/>
-          <a:lstStyle/>
-          <a:p>
-            <a:pPr algn="ctr">
-              <a:defRPr sz="1100" b="1">
-                <a:solidFill>
-                  <a:srgbClr val="FFFFFF"/>
-                </a:solidFill>
-                <a:latin typeface="Microsoft YaHei"/>
-              </a:defRPr>
-            </a:pPr>
-            <a:r>
-              <a:t>阶段一: 自主飞行与数据采集</a:t>
-            </a:r>
-          </a:p>
-        </p:txBody>
-      </p:sp>
-      <p:sp>
-        <p:nvSpPr>
-          <p:cNvPr id="5" name="Rounded Rectangle 4"/>
-          <p:cNvSpPr/>
-          <p:nvPr/>
-        </p:nvSpPr>
-        <p:spPr>
-          <a:xfrm>
-            <a:off x="841248" y="2057400"/>
-            <a:ext cx="2249424" cy="1805940"/>
-          </a:xfrm>
-          <a:prstGeom prst="roundRect">
             <a:avLst/>
           </a:prstGeom>
           <a:solidFill>
@@ -3256,7 +3212,7 @@
           </a:solidFill>
           <a:ln w="12700">
             <a:solidFill>
-              <a:srgbClr val="CBD5E1"/>
+              <a:srgbClr val="000000"/>
             </a:solidFill>
           </a:ln>
         </p:spPr>
@@ -3275,48 +3231,55 @@
           </a:fontRef>
         </p:style>
         <p:txBody>
-          <a:bodyPr rtlCol="0" anchor="ctr" wrap="square" tIns="73152" bIns="73152"/>
+          <a:bodyPr rtlCol="0" anchor="t" wrap="square" lIns="109728" rIns="109728" tIns="109728"/>
           <a:lstStyle/>
           <a:p>
             <a:pPr algn="ctr">
-              <a:defRPr sz="1100" b="1">
-                <a:solidFill>
-                  <a:srgbClr val="1A202C"/>
-                </a:solidFill>
-                <a:latin typeface="Microsoft YaHei"/>
+              <a:spcAft>
+                <a:spcPts val="400"/>
+              </a:spcAft>
+              <a:defRPr sz="1050" b="1">
+                <a:solidFill>
+                  <a:srgbClr val="000000"/>
+                </a:solidFill>
+                <a:latin typeface="Times New Roman"/>
               </a:defRPr>
             </a:pPr>
             <a:r>
-              <a:t>【第 2 章】任务规划 (Task Planning)</a:t>
+              <a:t>第 2 章：任务规划</a:t>
             </a:r>
           </a:p>
           <a:p>
             <a:pPr>
               <a:defRPr sz="950">
                 <a:solidFill>
-                  <a:srgbClr val="4A5568"/>
-                </a:solidFill>
-                <a:latin typeface="Microsoft YaHei"/>
+                  <a:srgbClr val="000000"/>
+                </a:solidFill>
+                <a:latin typeface="Times New Roman"/>
               </a:defRPr>
             </a:pPr>
             <a:r>
-              <a:t>立面巡检覆盖规划 • ROI区域定义 • 多无人机路径生成</a:t>
-            </a:r>
-          </a:p>
-        </p:txBody>
-      </p:sp>
-      <p:sp>
-        <p:nvSpPr>
-          <p:cNvPr id="6" name="Rounded Rectangle 5"/>
+              <a:t>• 立面巡检覆盖路径规划</a:t>
+            </a:r>
+            <a:br/>
+            <a:r>
+              <a:t>• ROI 区域定义与多机协同</a:t>
+            </a:r>
+          </a:p>
+        </p:txBody>
+      </p:sp>
+      <p:sp>
+        <p:nvSpPr>
+          <p:cNvPr id="5" name="Rectangle 4"/>
           <p:cNvSpPr/>
           <p:nvPr/>
         </p:nvSpPr>
         <p:spPr>
           <a:xfrm>
-            <a:off x="841248" y="3954780"/>
-            <a:ext cx="2249424" cy="1805940"/>
-          </a:xfrm>
-          <a:prstGeom prst="roundRect">
+            <a:off x="731520" y="4032504"/>
+            <a:ext cx="2423160" cy="2002536"/>
+          </a:xfrm>
+          <a:prstGeom prst="rect">
             <a:avLst/>
           </a:prstGeom>
           <a:solidFill>
@@ -3324,7 +3287,7 @@
           </a:solidFill>
           <a:ln w="12700">
             <a:solidFill>
-              <a:srgbClr val="CBD5E1"/>
+              <a:srgbClr val="000000"/>
             </a:solidFill>
           </a:ln>
         </p:spPr>
@@ -3343,52 +3306,59 @@
           </a:fontRef>
         </p:style>
         <p:txBody>
-          <a:bodyPr rtlCol="0" anchor="ctr" wrap="square" tIns="73152" bIns="73152"/>
+          <a:bodyPr rtlCol="0" anchor="t" wrap="square" lIns="109728" rIns="109728" tIns="109728"/>
           <a:lstStyle/>
           <a:p>
             <a:pPr algn="ctr">
-              <a:defRPr sz="1100" b="1">
-                <a:solidFill>
-                  <a:srgbClr val="1A202C"/>
-                </a:solidFill>
-                <a:latin typeface="Microsoft YaHei"/>
+              <a:spcAft>
+                <a:spcPts val="400"/>
+              </a:spcAft>
+              <a:defRPr sz="1050" b="1">
+                <a:solidFill>
+                  <a:srgbClr val="000000"/>
+                </a:solidFill>
+                <a:latin typeface="Times New Roman"/>
               </a:defRPr>
             </a:pPr>
             <a:r>
-              <a:t>【第 3 章】运动规划与执行 (Motion Planning)</a:t>
+              <a:t>第 3 章：运动规划</a:t>
             </a:r>
           </a:p>
           <a:p>
             <a:pPr>
               <a:defRPr sz="950">
                 <a:solidFill>
-                  <a:srgbClr val="4A5568"/>
-                </a:solidFill>
-                <a:latin typeface="Microsoft YaHei"/>
+                  <a:srgbClr val="000000"/>
+                </a:solidFill>
+                <a:latin typeface="Times New Roman"/>
               </a:defRPr>
             </a:pPr>
             <a:r>
-              <a:t>实时避障 • 轨迹优化与控制 • 风场适应与自主飞行</a:t>
-            </a:r>
-          </a:p>
-        </p:txBody>
-      </p:sp>
-      <p:sp>
-        <p:nvSpPr>
-          <p:cNvPr id="7" name="Right Arrow 6"/>
+              <a:t>• 实时避障与轨迹优化</a:t>
+            </a:r>
+            <a:br/>
+            <a:r>
+              <a:t>• 风场扰动适应与自主控制</a:t>
+            </a:r>
+          </a:p>
+        </p:txBody>
+      </p:sp>
+      <p:sp>
+        <p:nvSpPr>
+          <p:cNvPr id="6" name="Right Arrow 5"/>
           <p:cNvSpPr/>
           <p:nvPr/>
         </p:nvSpPr>
         <p:spPr>
           <a:xfrm>
-            <a:off x="3246120" y="3566160"/>
-            <a:ext cx="182880" cy="274320"/>
+            <a:off x="3227832" y="3593592"/>
+            <a:ext cx="201168" cy="219456"/>
           </a:xfrm>
           <a:prstGeom prst="rightArrow">
             <a:avLst/>
           </a:prstGeom>
           <a:solidFill>
-            <a:srgbClr val="4A5568"/>
+            <a:srgbClr val="000000"/>
           </a:solidFill>
           <a:ln>
             <a:noFill/>
@@ -3418,24 +3388,24 @@
       </p:sp>
       <p:sp>
         <p:nvSpPr>
-          <p:cNvPr id="8" name="Rectangle 7"/>
+          <p:cNvPr id="7" name="Rectangle 6"/>
           <p:cNvSpPr/>
           <p:nvPr/>
         </p:nvSpPr>
         <p:spPr>
           <a:xfrm>
-            <a:off x="3474720" y="1371600"/>
-            <a:ext cx="2468880" cy="4663440"/>
+            <a:off x="3502152" y="1371600"/>
+            <a:ext cx="2423160" cy="457200"/>
           </a:xfrm>
           <a:prstGeom prst="rect">
             <a:avLst/>
           </a:prstGeom>
           <a:solidFill>
-            <a:srgbClr val="F8FAFC"/>
+            <a:srgbClr val="FFFFFF"/>
           </a:solidFill>
-          <a:ln w="19050">
+          <a:ln w="15875">
             <a:solidFill>
-              <a:srgbClr val="94A3B8"/>
+              <a:srgbClr val="000000"/>
             </a:solidFill>
           </a:ln>
         </p:spPr>
@@ -3457,75 +3427,32 @@
           <a:bodyPr rtlCol="0" anchor="ctr"/>
           <a:lstStyle/>
           <a:p>
-            <a:pPr algn="ctr"/>
-          </a:p>
-        </p:txBody>
-      </p:sp>
-      <p:sp>
-        <p:nvSpPr>
-          <p:cNvPr id="9" name="Rectangle 8"/>
+            <a:pPr algn="ctr">
+              <a:defRPr sz="1100" b="1">
+                <a:solidFill>
+                  <a:srgbClr val="000000"/>
+                </a:solidFill>
+                <a:latin typeface="Times New Roman"/>
+              </a:defRPr>
+            </a:pPr>
+            <a:r>
+              <a:t>阶段二：重建与数据表达</a:t>
+            </a:r>
+          </a:p>
+        </p:txBody>
+      </p:sp>
+      <p:sp>
+        <p:nvSpPr>
+          <p:cNvPr id="8" name="Rectangle 7"/>
           <p:cNvSpPr/>
           <p:nvPr/>
         </p:nvSpPr>
         <p:spPr>
           <a:xfrm>
-            <a:off x="3474720" y="1371600"/>
-            <a:ext cx="2468880" cy="594360"/>
+            <a:off x="3502152" y="1920240"/>
+            <a:ext cx="2423160" cy="2002536"/>
           </a:xfrm>
           <a:prstGeom prst="rect">
-            <a:avLst/>
-          </a:prstGeom>
-          <a:solidFill>
-            <a:srgbClr val="94A3B8"/>
-          </a:solidFill>
-          <a:ln>
-            <a:noFill/>
-          </a:ln>
-        </p:spPr>
-        <p:style>
-          <a:lnRef idx="1">
-            <a:schemeClr val="accent1"/>
-          </a:lnRef>
-          <a:fillRef idx="3">
-            <a:schemeClr val="accent1"/>
-          </a:fillRef>
-          <a:effectRef idx="2">
-            <a:schemeClr val="accent1"/>
-          </a:effectRef>
-          <a:fontRef idx="minor">
-            <a:schemeClr val="lt1"/>
-          </a:fontRef>
-        </p:style>
-        <p:txBody>
-          <a:bodyPr rtlCol="0" anchor="ctr" wrap="square"/>
-          <a:lstStyle/>
-          <a:p>
-            <a:pPr algn="ctr">
-              <a:defRPr sz="1100" b="1">
-                <a:solidFill>
-                  <a:srgbClr val="FFFFFF"/>
-                </a:solidFill>
-                <a:latin typeface="Microsoft YaHei"/>
-              </a:defRPr>
-            </a:pPr>
-            <a:r>
-              <a:t>阶段二: 空间重建与数据表达</a:t>
-            </a:r>
-          </a:p>
-        </p:txBody>
-      </p:sp>
-      <p:sp>
-        <p:nvSpPr>
-          <p:cNvPr id="10" name="Rounded Rectangle 9"/>
-          <p:cNvSpPr/>
-          <p:nvPr/>
-        </p:nvSpPr>
-        <p:spPr>
-          <a:xfrm>
-            <a:off x="3584448" y="2057400"/>
-            <a:ext cx="2249424" cy="1805940"/>
-          </a:xfrm>
-          <a:prstGeom prst="roundRect">
             <a:avLst/>
           </a:prstGeom>
           <a:solidFill>
@@ -3533,7 +3460,7 @@
           </a:solidFill>
           <a:ln w="12700">
             <a:solidFill>
-              <a:srgbClr val="CBD5E1"/>
+              <a:srgbClr val="000000"/>
             </a:solidFill>
           </a:ln>
         </p:spPr>
@@ -3552,48 +3479,55 @@
           </a:fontRef>
         </p:style>
         <p:txBody>
-          <a:bodyPr rtlCol="0" anchor="ctr" wrap="square" tIns="73152" bIns="73152"/>
+          <a:bodyPr rtlCol="0" anchor="t" wrap="square" lIns="109728" rIns="109728" tIns="109728"/>
           <a:lstStyle/>
           <a:p>
             <a:pPr algn="ctr">
-              <a:defRPr sz="1100" b="1">
-                <a:solidFill>
-                  <a:srgbClr val="1A202C"/>
-                </a:solidFill>
-                <a:latin typeface="Microsoft YaHei"/>
+              <a:spcAft>
+                <a:spcPts val="400"/>
+              </a:spcAft>
+              <a:defRPr sz="1050" b="1">
+                <a:solidFill>
+                  <a:srgbClr val="000000"/>
+                </a:solidFill>
+                <a:latin typeface="Times New Roman"/>
               </a:defRPr>
             </a:pPr>
             <a:r>
-              <a:t>【第 4 章】3D重建与资产映射 (3D Reconstruction)</a:t>
+              <a:t>第 4 章：三维重建</a:t>
             </a:r>
           </a:p>
           <a:p>
             <a:pPr>
               <a:defRPr sz="950">
                 <a:solidFill>
-                  <a:srgbClr val="4A5568"/>
-                </a:solidFill>
-                <a:latin typeface="Microsoft YaHei"/>
+                  <a:srgbClr val="000000"/>
+                </a:solidFill>
+                <a:latin typeface="Times New Roman"/>
               </a:defRPr>
             </a:pPr>
             <a:r>
-              <a:t>摄影测量 • 点云与网格建模 • BIM/坐标系精准对齐</a:t>
-            </a:r>
-          </a:p>
-        </p:txBody>
-      </p:sp>
-      <p:sp>
-        <p:nvSpPr>
-          <p:cNvPr id="11" name="Rounded Rectangle 10"/>
+              <a:t>• 倾斜摄影测量与点云建模</a:t>
+            </a:r>
+            <a:br/>
+            <a:r>
+              <a:t>• Mesh 构网与 BIM 坐标对齐</a:t>
+            </a:r>
+          </a:p>
+        </p:txBody>
+      </p:sp>
+      <p:sp>
+        <p:nvSpPr>
+          <p:cNvPr id="9" name="Rectangle 8"/>
           <p:cNvSpPr/>
           <p:nvPr/>
         </p:nvSpPr>
         <p:spPr>
           <a:xfrm>
-            <a:off x="3584448" y="3954780"/>
-            <a:ext cx="2249424" cy="1805940"/>
-          </a:xfrm>
-          <a:prstGeom prst="roundRect">
+            <a:off x="3502152" y="4032504"/>
+            <a:ext cx="2423160" cy="2002536"/>
+          </a:xfrm>
+          <a:prstGeom prst="rect">
             <a:avLst/>
           </a:prstGeom>
           <a:solidFill>
@@ -3601,7 +3535,7 @@
           </a:solidFill>
           <a:ln w="12700">
             <a:solidFill>
-              <a:srgbClr val="CBD5E1"/>
+              <a:srgbClr val="000000"/>
             </a:solidFill>
           </a:ln>
         </p:spPr>
@@ -3620,52 +3554,59 @@
           </a:fontRef>
         </p:style>
         <p:txBody>
-          <a:bodyPr rtlCol="0" anchor="ctr" wrap="square" tIns="73152" bIns="73152"/>
+          <a:bodyPr rtlCol="0" anchor="t" wrap="square" lIns="109728" rIns="109728" tIns="109728"/>
           <a:lstStyle/>
           <a:p>
             <a:pPr algn="ctr">
-              <a:defRPr sz="1100" b="1">
-                <a:solidFill>
-                  <a:srgbClr val="1A202C"/>
-                </a:solidFill>
-                <a:latin typeface="Microsoft YaHei"/>
+              <a:spcAft>
+                <a:spcPts val="400"/>
+              </a:spcAft>
+              <a:defRPr sz="1050" b="1">
+                <a:solidFill>
+                  <a:srgbClr val="000000"/>
+                </a:solidFill>
+                <a:latin typeface="Times New Roman"/>
               </a:defRPr>
             </a:pPr>
             <a:r>
-              <a:t>【第 5 章】巡检数据集与多模态数据 (Datasets)</a:t>
+              <a:t>第 5 章：巡检数据集</a:t>
             </a:r>
           </a:p>
           <a:p>
             <a:pPr>
               <a:defRPr sz="950">
                 <a:solidFill>
-                  <a:srgbClr val="4A5568"/>
-                </a:solidFill>
-                <a:latin typeface="Microsoft YaHei"/>
+                  <a:srgbClr val="000000"/>
+                </a:solidFill>
+                <a:latin typeface="Times New Roman"/>
               </a:defRPr>
             </a:pPr>
             <a:r>
-              <a:t>RGB/热成像数据采集 • 缺陷标注规范 • 基准集构建</a:t>
-            </a:r>
-          </a:p>
-        </p:txBody>
-      </p:sp>
-      <p:sp>
-        <p:nvSpPr>
-          <p:cNvPr id="12" name="Right Arrow 11"/>
+              <a:t>• RGB / 热成像多模态采集</a:t>
+            </a:r>
+            <a:br/>
+            <a:r>
+              <a:t>• 缺陷标注规范与基准集</a:t>
+            </a:r>
+          </a:p>
+        </p:txBody>
+      </p:sp>
+      <p:sp>
+        <p:nvSpPr>
+          <p:cNvPr id="10" name="Right Arrow 9"/>
           <p:cNvSpPr/>
           <p:nvPr/>
         </p:nvSpPr>
         <p:spPr>
           <a:xfrm>
-            <a:off x="5989320" y="3566160"/>
-            <a:ext cx="182880" cy="274320"/>
+            <a:off x="5998464" y="3593592"/>
+            <a:ext cx="201168" cy="219456"/>
           </a:xfrm>
           <a:prstGeom prst="rightArrow">
             <a:avLst/>
           </a:prstGeom>
           <a:solidFill>
-            <a:srgbClr val="4A5568"/>
+            <a:srgbClr val="000000"/>
           </a:solidFill>
           <a:ln>
             <a:noFill/>
@@ -3695,24 +3636,24 @@
       </p:sp>
       <p:sp>
         <p:nvSpPr>
-          <p:cNvPr id="13" name="Rectangle 12"/>
+          <p:cNvPr id="11" name="Rectangle 10"/>
           <p:cNvSpPr/>
           <p:nvPr/>
         </p:nvSpPr>
         <p:spPr>
           <a:xfrm>
-            <a:off x="6217920" y="1371600"/>
-            <a:ext cx="2468880" cy="4663440"/>
+            <a:off x="6272784" y="1371600"/>
+            <a:ext cx="2423160" cy="457200"/>
           </a:xfrm>
           <a:prstGeom prst="rect">
             <a:avLst/>
           </a:prstGeom>
           <a:solidFill>
-            <a:srgbClr val="F8FAFC"/>
+            <a:srgbClr val="FFFFFF"/>
           </a:solidFill>
-          <a:ln w="19050">
+          <a:ln w="15875">
             <a:solidFill>
-              <a:srgbClr val="94A3B8"/>
+              <a:srgbClr val="000000"/>
             </a:solidFill>
           </a:ln>
         </p:spPr>
@@ -3734,75 +3675,32 @@
           <a:bodyPr rtlCol="0" anchor="ctr"/>
           <a:lstStyle/>
           <a:p>
-            <a:pPr algn="ctr"/>
-          </a:p>
-        </p:txBody>
-      </p:sp>
-      <p:sp>
-        <p:nvSpPr>
-          <p:cNvPr id="14" name="Rectangle 13"/>
+            <a:pPr algn="ctr">
+              <a:defRPr sz="1100" b="1">
+                <a:solidFill>
+                  <a:srgbClr val="000000"/>
+                </a:solidFill>
+                <a:latin typeface="Times New Roman"/>
+              </a:defRPr>
+            </a:pPr>
+            <a:r>
+              <a:t>阶段三：AI 缺陷感知</a:t>
+            </a:r>
+          </a:p>
+        </p:txBody>
+      </p:sp>
+      <p:sp>
+        <p:nvSpPr>
+          <p:cNvPr id="12" name="Rectangle 11"/>
           <p:cNvSpPr/>
           <p:nvPr/>
         </p:nvSpPr>
         <p:spPr>
           <a:xfrm>
-            <a:off x="6217920" y="1371600"/>
-            <a:ext cx="2468880" cy="594360"/>
+            <a:off x="6272784" y="1920240"/>
+            <a:ext cx="2423160" cy="4114800"/>
           </a:xfrm>
           <a:prstGeom prst="rect">
-            <a:avLst/>
-          </a:prstGeom>
-          <a:solidFill>
-            <a:srgbClr val="94A3B8"/>
-          </a:solidFill>
-          <a:ln>
-            <a:noFill/>
-          </a:ln>
-        </p:spPr>
-        <p:style>
-          <a:lnRef idx="1">
-            <a:schemeClr val="accent1"/>
-          </a:lnRef>
-          <a:fillRef idx="3">
-            <a:schemeClr val="accent1"/>
-          </a:fillRef>
-          <a:effectRef idx="2">
-            <a:schemeClr val="accent1"/>
-          </a:effectRef>
-          <a:fontRef idx="minor">
-            <a:schemeClr val="lt1"/>
-          </a:fontRef>
-        </p:style>
-        <p:txBody>
-          <a:bodyPr rtlCol="0" anchor="ctr" wrap="square"/>
-          <a:lstStyle/>
-          <a:p>
-            <a:pPr algn="ctr">
-              <a:defRPr sz="1100" b="1">
-                <a:solidFill>
-                  <a:srgbClr val="FFFFFF"/>
-                </a:solidFill>
-                <a:latin typeface="Microsoft YaHei"/>
-              </a:defRPr>
-            </a:pPr>
-            <a:r>
-              <a:t>阶段三: AI 缺陷感知与分析</a:t>
-            </a:r>
-          </a:p>
-        </p:txBody>
-      </p:sp>
-      <p:sp>
-        <p:nvSpPr>
-          <p:cNvPr id="15" name="Rounded Rectangle 14"/>
-          <p:cNvSpPr/>
-          <p:nvPr/>
-        </p:nvSpPr>
-        <p:spPr>
-          <a:xfrm>
-            <a:off x="6327648" y="2057400"/>
-            <a:ext cx="2249424" cy="3886200"/>
-          </a:xfrm>
-          <a:prstGeom prst="roundRect">
             <a:avLst/>
           </a:prstGeom>
           <a:solidFill>
@@ -3810,7 +3708,7 @@
           </a:solidFill>
           <a:ln w="12700">
             <a:solidFill>
-              <a:srgbClr val="CBD5E1"/>
+              <a:srgbClr val="000000"/>
             </a:solidFill>
           </a:ln>
         </p:spPr>
@@ -3829,52 +3727,63 @@
           </a:fontRef>
         </p:style>
         <p:txBody>
-          <a:bodyPr rtlCol="0" anchor="ctr" wrap="square" tIns="73152" bIns="73152"/>
+          <a:bodyPr rtlCol="0" anchor="t" wrap="square" lIns="109728" rIns="109728" tIns="109728"/>
           <a:lstStyle/>
           <a:p>
             <a:pPr algn="ctr">
-              <a:defRPr sz="1100" b="1">
-                <a:solidFill>
-                  <a:srgbClr val="1A202C"/>
-                </a:solidFill>
-                <a:latin typeface="Microsoft YaHei"/>
+              <a:spcAft>
+                <a:spcPts val="400"/>
+              </a:spcAft>
+              <a:defRPr sz="1050" b="1">
+                <a:solidFill>
+                  <a:srgbClr val="000000"/>
+                </a:solidFill>
+                <a:latin typeface="Times New Roman"/>
               </a:defRPr>
             </a:pPr>
             <a:r>
-              <a:t>【第 6 章】缺陷检测 AI 模型 (AI Defect Models)</a:t>
+              <a:t>第 6 章：AI 缺陷检测模型</a:t>
             </a:r>
           </a:p>
           <a:p>
             <a:pPr>
               <a:defRPr sz="950">
                 <a:solidFill>
-                  <a:srgbClr val="4A5568"/>
-                </a:solidFill>
-                <a:latin typeface="Microsoft YaHei"/>
+                  <a:srgbClr val="000000"/>
+                </a:solidFill>
+                <a:latin typeface="Times New Roman"/>
               </a:defRPr>
             </a:pPr>
             <a:r>
-              <a:t>深度学习检测器 • 实例分割 • 缺陷面积与程度量化</a:t>
-            </a:r>
-          </a:p>
-        </p:txBody>
-      </p:sp>
-      <p:sp>
-        <p:nvSpPr>
-          <p:cNvPr id="16" name="Right Arrow 15"/>
+              <a:t>• 深度学习目标检测</a:t>
+            </a:r>
+            <a:br/>
+            <a:r>
+              <a:t>• 构件实例分割与定量量化</a:t>
+            </a:r>
+            <a:br/>
+            <a:r>
+              <a:t>• 缺陷严重程度评估</a:t>
+            </a:r>
+          </a:p>
+        </p:txBody>
+      </p:sp>
+      <p:sp>
+        <p:nvSpPr>
+          <p:cNvPr id="13" name="Right Arrow 12"/>
           <p:cNvSpPr/>
           <p:nvPr/>
         </p:nvSpPr>
         <p:spPr>
           <a:xfrm>
-            <a:off x="8732520" y="3566160"/>
-            <a:ext cx="182880" cy="274320"/>
+            <a:off x="8769096" y="3593592"/>
+            <a:ext cx="201168" cy="219456"/>
           </a:xfrm>
           <a:prstGeom prst="rightArrow">
             <a:avLst/>
           </a:prstGeom>
           <a:solidFill>
-            <a:srgbClr val="4A5568"/>
+            <a:srgbClr val="000000"/>
           </a:solidFill>
           <a:ln>
             <a:noFill/>
@@ -3904,24 +3813,24 @@
       </p:sp>
       <p:sp>
         <p:nvSpPr>
-          <p:cNvPr id="17" name="Rectangle 16"/>
+          <p:cNvPr id="14" name="Rectangle 13"/>
           <p:cNvSpPr/>
           <p:nvPr/>
         </p:nvSpPr>
         <p:spPr>
           <a:xfrm>
-            <a:off x="8961120" y="1371600"/>
-            <a:ext cx="2468880" cy="4663440"/>
+            <a:off x="9043416" y="1371600"/>
+            <a:ext cx="2423160" cy="457200"/>
           </a:xfrm>
           <a:prstGeom prst="rect">
             <a:avLst/>
           </a:prstGeom>
           <a:solidFill>
-            <a:srgbClr val="F1F5F9"/>
+            <a:srgbClr val="FFFFFF"/>
           </a:solidFill>
-          <a:ln w="19050">
+          <a:ln w="15875">
             <a:solidFill>
-              <a:srgbClr val="475569"/>
+              <a:srgbClr val="000000"/>
             </a:solidFill>
           </a:ln>
         </p:spPr>
@@ -3943,75 +3852,32 @@
           <a:bodyPr rtlCol="0" anchor="ctr"/>
           <a:lstStyle/>
           <a:p>
-            <a:pPr algn="ctr"/>
-          </a:p>
-        </p:txBody>
-      </p:sp>
-      <p:sp>
-        <p:nvSpPr>
-          <p:cNvPr id="18" name="Rectangle 17"/>
+            <a:pPr algn="ctr">
+              <a:defRPr sz="1100" b="1">
+                <a:solidFill>
+                  <a:srgbClr val="000000"/>
+                </a:solidFill>
+                <a:latin typeface="Times New Roman"/>
+              </a:defRPr>
+            </a:pPr>
+            <a:r>
+              <a:t>阶段四：数字孪生与决策</a:t>
+            </a:r>
+          </a:p>
+        </p:txBody>
+      </p:sp>
+      <p:sp>
+        <p:nvSpPr>
+          <p:cNvPr id="15" name="Rectangle 14"/>
           <p:cNvSpPr/>
           <p:nvPr/>
         </p:nvSpPr>
         <p:spPr>
           <a:xfrm>
-            <a:off x="8961120" y="1371600"/>
-            <a:ext cx="2468880" cy="594360"/>
+            <a:off x="9043416" y="1920240"/>
+            <a:ext cx="2423160" cy="1298448"/>
           </a:xfrm>
           <a:prstGeom prst="rect">
-            <a:avLst/>
-          </a:prstGeom>
-          <a:solidFill>
-            <a:srgbClr val="475569"/>
-          </a:solidFill>
-          <a:ln>
-            <a:noFill/>
-          </a:ln>
-        </p:spPr>
-        <p:style>
-          <a:lnRef idx="1">
-            <a:schemeClr val="accent1"/>
-          </a:lnRef>
-          <a:fillRef idx="3">
-            <a:schemeClr val="accent1"/>
-          </a:fillRef>
-          <a:effectRef idx="2">
-            <a:schemeClr val="accent1"/>
-          </a:effectRef>
-          <a:fontRef idx="minor">
-            <a:schemeClr val="lt1"/>
-          </a:fontRef>
-        </p:style>
-        <p:txBody>
-          <a:bodyPr rtlCol="0" anchor="ctr" wrap="square"/>
-          <a:lstStyle/>
-          <a:p>
-            <a:pPr algn="ctr">
-              <a:defRPr sz="1100" b="1">
-                <a:solidFill>
-                  <a:srgbClr val="FFFFFF"/>
-                </a:solidFill>
-                <a:latin typeface="Microsoft YaHei"/>
-              </a:defRPr>
-            </a:pPr>
-            <a:r>
-              <a:t>阶段四: 数字孪生与 AI 决策支持</a:t>
-            </a:r>
-          </a:p>
-        </p:txBody>
-      </p:sp>
-      <p:sp>
-        <p:nvSpPr>
-          <p:cNvPr id="19" name="Rounded Rectangle 18"/>
-          <p:cNvSpPr/>
-          <p:nvPr/>
-        </p:nvSpPr>
-        <p:spPr>
-          <a:xfrm>
-            <a:off x="9070848" y="2057400"/>
-            <a:ext cx="2249424" cy="1112520"/>
-          </a:xfrm>
-          <a:prstGeom prst="roundRect">
             <a:avLst/>
           </a:prstGeom>
           <a:solidFill>
@@ -4019,7 +3885,7 @@
           </a:solidFill>
           <a:ln w="12700">
             <a:solidFill>
-              <a:srgbClr val="CBD5E1"/>
+              <a:srgbClr val="000000"/>
             </a:solidFill>
           </a:ln>
         </p:spPr>
@@ -4038,48 +3904,55 @@
           </a:fontRef>
         </p:style>
         <p:txBody>
-          <a:bodyPr rtlCol="0" anchor="ctr" wrap="square" tIns="73152" bIns="73152"/>
+          <a:bodyPr rtlCol="0" anchor="t" wrap="square" lIns="109728" rIns="109728" tIns="109728"/>
           <a:lstStyle/>
           <a:p>
             <a:pPr algn="ctr">
-              <a:defRPr sz="1100" b="1">
-                <a:solidFill>
-                  <a:srgbClr val="1A202C"/>
-                </a:solidFill>
-                <a:latin typeface="Microsoft YaHei"/>
+              <a:spcAft>
+                <a:spcPts val="400"/>
+              </a:spcAft>
+              <a:defRPr sz="1050" b="1">
+                <a:solidFill>
+                  <a:srgbClr val="000000"/>
+                </a:solidFill>
+                <a:latin typeface="Times New Roman"/>
               </a:defRPr>
             </a:pPr>
             <a:r>
-              <a:t>【第 7 章】GIS 与 GeoBIM 集成 (GeoBIM Integration)</a:t>
+              <a:t>第 7 章：GIS 与 GeoBIM 集成</a:t>
             </a:r>
           </a:p>
           <a:p>
             <a:pPr>
               <a:defRPr sz="950">
                 <a:solidFill>
-                  <a:srgbClr val="4A5568"/>
-                </a:solidFill>
-                <a:latin typeface="Microsoft YaHei"/>
+                  <a:srgbClr val="000000"/>
+                </a:solidFill>
+                <a:latin typeface="Times New Roman"/>
               </a:defRPr>
             </a:pPr>
             <a:r>
-              <a:t>空间数据库映射 • GeoBIM Schema • 资产护照挂载</a:t>
-            </a:r>
-          </a:p>
-        </p:txBody>
-      </p:sp>
-      <p:sp>
-        <p:nvSpPr>
-          <p:cNvPr id="20" name="Rounded Rectangle 19"/>
+              <a:t>• 空间数据库与 GeoBIM 映射</a:t>
+            </a:r>
+            <a:br/>
+            <a:r>
+              <a:t>• 缺陷与资产护照 (Passport) 挂载</a:t>
+            </a:r>
+          </a:p>
+        </p:txBody>
+      </p:sp>
+      <p:sp>
+        <p:nvSpPr>
+          <p:cNvPr id="16" name="Rectangle 15"/>
           <p:cNvSpPr/>
           <p:nvPr/>
         </p:nvSpPr>
         <p:spPr>
           <a:xfrm>
-            <a:off x="9070848" y="3261360"/>
-            <a:ext cx="2249424" cy="1112520"/>
-          </a:xfrm>
-          <a:prstGeom prst="roundRect">
+            <a:off x="9043416" y="3328416"/>
+            <a:ext cx="2423160" cy="1298448"/>
+          </a:xfrm>
+          <a:prstGeom prst="rect">
             <a:avLst/>
           </a:prstGeom>
           <a:solidFill>
@@ -4087,7 +3960,7 @@
           </a:solidFill>
           <a:ln w="12700">
             <a:solidFill>
-              <a:srgbClr val="CBD5E1"/>
+              <a:srgbClr val="000000"/>
             </a:solidFill>
           </a:ln>
         </p:spPr>
@@ -4106,48 +3979,55 @@
           </a:fontRef>
         </p:style>
         <p:txBody>
-          <a:bodyPr rtlCol="0" anchor="ctr" wrap="square" tIns="73152" bIns="73152"/>
+          <a:bodyPr rtlCol="0" anchor="t" wrap="square" lIns="109728" rIns="109728" tIns="109728"/>
           <a:lstStyle/>
           <a:p>
             <a:pPr algn="ctr">
-              <a:defRPr sz="1100" b="1">
-                <a:solidFill>
-                  <a:srgbClr val="1A202C"/>
-                </a:solidFill>
-                <a:latin typeface="Microsoft YaHei"/>
+              <a:spcAft>
+                <a:spcPts val="400"/>
+              </a:spcAft>
+              <a:defRPr sz="1050" b="1">
+                <a:solidFill>
+                  <a:srgbClr val="000000"/>
+                </a:solidFill>
+                <a:latin typeface="Times New Roman"/>
               </a:defRPr>
             </a:pPr>
             <a:r>
-              <a:t>【第 8 章】数字孪生与大模型 (DT &amp; LLM Reasoning)</a:t>
+              <a:t>第 8 章：数字孪生与大模型</a:t>
             </a:r>
           </a:p>
           <a:p>
             <a:pPr>
               <a:defRPr sz="950">
                 <a:solidFill>
-                  <a:srgbClr val="4A5568"/>
-                </a:solidFill>
-                <a:latin typeface="Microsoft YaHei"/>
+                  <a:srgbClr val="000000"/>
+                </a:solidFill>
+                <a:latin typeface="Times New Roman"/>
               </a:defRPr>
             </a:pPr>
             <a:r>
-              <a:t>LLM/VLM推理 • 检索增强生成(RAG) • 预测性维护决策</a:t>
-            </a:r>
-          </a:p>
-        </p:txBody>
-      </p:sp>
-      <p:sp>
-        <p:nvSpPr>
-          <p:cNvPr id="21" name="Rounded Rectangle 20"/>
+              <a:t>• LLM / VLM 检索增强推理 (RAG)</a:t>
+            </a:r>
+            <a:br/>
+            <a:r>
+              <a:t>• 历史维保查询与预测性维护</a:t>
+            </a:r>
+          </a:p>
+        </p:txBody>
+      </p:sp>
+      <p:sp>
+        <p:nvSpPr>
+          <p:cNvPr id="17" name="Rectangle 16"/>
           <p:cNvSpPr/>
           <p:nvPr/>
         </p:nvSpPr>
         <p:spPr>
           <a:xfrm>
-            <a:off x="9070848" y="4465320"/>
-            <a:ext cx="2249424" cy="1112520"/>
-          </a:xfrm>
-          <a:prstGeom prst="roundRect">
+            <a:off x="9043416" y="4736592"/>
+            <a:ext cx="2423160" cy="1298448"/>
+          </a:xfrm>
+          <a:prstGeom prst="rect">
             <a:avLst/>
           </a:prstGeom>
           <a:solidFill>
@@ -4155,7 +4035,7 @@
           </a:solidFill>
           <a:ln w="12700">
             <a:solidFill>
-              <a:srgbClr val="CBD5E1"/>
+              <a:srgbClr val="000000"/>
             </a:solidFill>
           </a:ln>
         </p:spPr>
@@ -4174,45 +4054,52 @@
           </a:fontRef>
         </p:style>
         <p:txBody>
-          <a:bodyPr rtlCol="0" anchor="ctr" wrap="square" tIns="73152" bIns="73152"/>
+          <a:bodyPr rtlCol="0" anchor="t" wrap="square" lIns="109728" rIns="109728" tIns="109728"/>
           <a:lstStyle/>
           <a:p>
             <a:pPr algn="ctr">
-              <a:defRPr sz="1100" b="1">
-                <a:solidFill>
-                  <a:srgbClr val="1A202C"/>
-                </a:solidFill>
-                <a:latin typeface="Microsoft YaHei"/>
+              <a:spcAft>
+                <a:spcPts val="400"/>
+              </a:spcAft>
+              <a:defRPr sz="1050" b="1">
+                <a:solidFill>
+                  <a:srgbClr val="000000"/>
+                </a:solidFill>
+                <a:latin typeface="Times New Roman"/>
               </a:defRPr>
             </a:pPr>
             <a:r>
-              <a:t>【第 9 章】总结与展望 (Conclusion &amp; Future)</a:t>
+              <a:t>第 9 章：总结与展望</a:t>
             </a:r>
           </a:p>
           <a:p>
             <a:pPr>
               <a:defRPr sz="950">
                 <a:solidFill>
-                  <a:srgbClr val="4A5568"/>
-                </a:solidFill>
-                <a:latin typeface="Microsoft YaHei"/>
+                  <a:srgbClr val="000000"/>
+                </a:solidFill>
+                <a:latin typeface="Times New Roman"/>
               </a:defRPr>
             </a:pPr>
             <a:r>
-              <a:t>现场部署经验审计 • 开放挑战与下一代智能运维展望</a:t>
-            </a:r>
-          </a:p>
-        </p:txBody>
-      </p:sp>
-      <p:sp>
-        <p:nvSpPr>
-          <p:cNvPr id="22" name="TextBox 21"/>
+              <a:t>• 现场部署经验审计</a:t>
+            </a:r>
+            <a:br/>
+            <a:r>
+              <a:t>• 开放挑战与下一代系统展望</a:t>
+            </a:r>
+          </a:p>
+        </p:txBody>
+      </p:sp>
+      <p:sp>
+        <p:nvSpPr>
+          <p:cNvPr id="18" name="TextBox 17"/>
           <p:cNvSpPr txBox="1"/>
           <p:nvPr/>
         </p:nvSpPr>
         <p:spPr>
           <a:xfrm>
-            <a:off x="731520" y="6172200"/>
+            <a:off x="731520" y="6217920"/>
             <a:ext cx="10728655" cy="365760"/>
           </a:xfrm>
           <a:prstGeom prst="rect">
@@ -4227,15 +4114,15 @@
           <a:lstStyle/>
           <a:p>
             <a:pPr>
-              <a:defRPr sz="1000" i="1">
-                <a:solidFill>
-                  <a:srgbClr val="4A5568"/>
-                </a:solidFill>
-                <a:latin typeface="Microsoft YaHei"/>
+              <a:defRPr sz="1000" b="1">
+                <a:solidFill>
+                  <a:srgbClr val="000000"/>
+                </a:solidFill>
+                <a:latin typeface="Times New Roman"/>
               </a:defRPr>
             </a:pPr>
             <a:r>
-              <a:t>注：从第2/3章自主飞行与采集，到第4/5章空间重建，第6章缺陷识别，最终至第7/8/9章数字孪生与大模型决策，形成完整的端到端智能运维闭环。</a:t>
+              <a:t>图 1.1：专著四阶段端到端技术路线与章节映射关系（从物理采集、三维重建到大模型决策支持）</a:t>
             </a:r>
           </a:p>
         </p:txBody>
@@ -4266,8 +4153,8 @@
         </p:nvSpPr>
         <p:spPr>
           <a:xfrm>
-            <a:off x="731520" y="365760"/>
-            <a:ext cx="10728655" cy="822960"/>
+            <a:off x="731520" y="411480"/>
+            <a:ext cx="10728655" cy="777240"/>
           </a:xfrm>
           <a:prstGeom prst="rect">
             <a:avLst/>
@@ -4275,7 +4162,7 @@
           <a:noFill/>
         </p:spPr>
         <p:txBody>
-          <a:bodyPr wrap="square">
+          <a:bodyPr wrap="square" lIns="0" tIns="0" rIns="0" bIns="0">
             <a:spAutoFit/>
           </a:bodyPr>
           <a:lstStyle/>
@@ -4283,761 +4170,26 @@
             <a:pPr>
               <a:defRPr sz="2200" b="1">
                 <a:solidFill>
-                  <a:srgbClr val="1A202C"/>
-                </a:solidFill>
-                <a:latin typeface="Arial"/>
+                  <a:srgbClr val="000000"/>
+                </a:solidFill>
+                <a:latin typeface="Times New Roman"/>
               </a:defRPr>
             </a:pPr>
             <a:r>
-              <a:t>全书章节数据流转与功能接口 (Data Flow &amp; Inter-Chapter Interfaces)</a:t>
+              <a:t>Overall Framework and Chapter Map</a:t>
             </a:r>
           </a:p>
           <a:p>
             <a:pPr>
               <a:defRPr sz="1200">
                 <a:solidFill>
-                  <a:srgbClr val="4A5568"/>
-                </a:solidFill>
-                <a:latin typeface="Microsoft YaHei"/>
+                  <a:srgbClr val="5A5A5A"/>
+                </a:solidFill>
+                <a:latin typeface="Times New Roman"/>
               </a:defRPr>
             </a:pPr>
             <a:r>
-              <a:t>构建从底层物理采样到高层大模型推理的完整数据链条 (Data Chain from Physical Sensing to Cognitive LLM)</a:t>
-            </a:r>
-          </a:p>
-        </p:txBody>
-      </p:sp>
-      <p:graphicFrame>
-        <p:nvGraphicFramePr>
-          <p:cNvPr id="3" name="Table 2"/>
-          <p:cNvGraphicFramePr>
-            <a:graphicFrameLocks noGrp="1"/>
-          </p:cNvGraphicFramePr>
-          <p:nvPr/>
-        </p:nvGraphicFramePr>
-        <p:xfrm>
-          <a:off x="731520" y="1371600"/>
-          <a:ext cx="10728655" cy="4754880"/>
-        </p:xfrm>
-        <a:graphic>
-          <a:graphicData uri="http://schemas.openxmlformats.org/drawingml/2006/table">
-            <a:tbl>
-              <a:tblPr firstRow="1" bandRow="1">
-                <a:tableStyleId>{5C22544A-7EE6-4342-B048-85BDC9FD1C3A}</a:tableStyleId>
-              </a:tblPr>
-              <a:tblGrid>
-                <a:gridCol w="2011680"/>
-                <a:gridCol w="2560320"/>
-                <a:gridCol w="3566160"/>
-                <a:gridCol w="2590495"/>
-              </a:tblGrid>
-              <a:tr h="792480">
-                <a:tc>
-                  <a:txBody>
-                    <a:bodyPr/>
-                    <a:lstStyle/>
-                    <a:p>
-                      <a:pPr algn="ctr">
-                        <a:defRPr sz="1100" b="1">
-                          <a:solidFill>
-                            <a:srgbClr val="1A202C"/>
-                          </a:solidFill>
-                          <a:latin typeface="Microsoft YaHei"/>
-                        </a:defRPr>
-                      </a:pPr>
-                      <a:r>
-                        <a:t>阶段 / 章节 (Phase &amp; Chapter)</a:t>
-                      </a:r>
-                    </a:p>
-                  </a:txBody>
-                  <a:tcPr>
-                    <a:solidFill>
-                      <a:srgbClr val="E2E8F0"/>
-                    </a:solidFill>
-                  </a:tcPr>
-                </a:tc>
-                <a:tc>
-                  <a:txBody>
-                    <a:bodyPr/>
-                    <a:lstStyle/>
-                    <a:p>
-                      <a:pPr algn="ctr">
-                        <a:defRPr sz="1100" b="1">
-                          <a:solidFill>
-                            <a:srgbClr val="1A202C"/>
-                          </a:solidFill>
-                          <a:latin typeface="Microsoft YaHei"/>
-                        </a:defRPr>
-                      </a:pPr>
-                      <a:r>
-                        <a:t>输出数据/资产 (Data &amp; Asset)</a:t>
-                      </a:r>
-                    </a:p>
-                  </a:txBody>
-                  <a:tcPr>
-                    <a:solidFill>
-                      <a:srgbClr val="E2E8F0"/>
-                    </a:solidFill>
-                  </a:tcPr>
-                </a:tc>
-                <a:tc>
-                  <a:txBody>
-                    <a:bodyPr/>
-                    <a:lstStyle/>
-                    <a:p>
-                      <a:pPr algn="ctr">
-                        <a:defRPr sz="1100" b="1">
-                          <a:solidFill>
-                            <a:srgbClr val="1A202C"/>
-                          </a:solidFill>
-                          <a:latin typeface="Microsoft YaHei"/>
-                        </a:defRPr>
-                      </a:pPr>
-                      <a:r>
-                        <a:t>核心处理/功能 (Key Operation)</a:t>
-                      </a:r>
-                    </a:p>
-                  </a:txBody>
-                  <a:tcPr>
-                    <a:solidFill>
-                      <a:srgbClr val="E2E8F0"/>
-                    </a:solidFill>
-                  </a:tcPr>
-                </a:tc>
-                <a:tc>
-                  <a:txBody>
-                    <a:bodyPr/>
-                    <a:lstStyle/>
-                    <a:p>
-                      <a:pPr algn="ctr">
-                        <a:defRPr sz="1100" b="1">
-                          <a:solidFill>
-                            <a:srgbClr val="1A202C"/>
-                          </a:solidFill>
-                          <a:latin typeface="Microsoft YaHei"/>
-                        </a:defRPr>
-                      </a:pPr>
-                      <a:r>
-                        <a:t>下游对接章节 (Target Chapter)</a:t>
-                      </a:r>
-                    </a:p>
-                  </a:txBody>
-                  <a:tcPr>
-                    <a:solidFill>
-                      <a:srgbClr val="E2E8F0"/>
-                    </a:solidFill>
-                  </a:tcPr>
-                </a:tc>
-              </a:tr>
-              <a:tr h="792480">
-                <a:tc>
-                  <a:txBody>
-                    <a:bodyPr/>
-                    <a:lstStyle/>
-                    <a:p>
-                      <a:pPr>
-                        <a:defRPr sz="1000">
-                          <a:solidFill>
-                            <a:srgbClr val="1A202C"/>
-                          </a:solidFill>
-                          <a:latin typeface="Microsoft YaHei"/>
-                        </a:defRPr>
-                      </a:pPr>
-                      <a:r>
-                        <a:t>第 2 &amp; 3 章: 任务与运动规划</a:t>
-                      </a:r>
-                      <a:br/>
-                      <a:r>
-                        <a:t>(Flight &amp; Motion Planning)</a:t>
-                      </a:r>
-                    </a:p>
-                  </a:txBody>
-                  <a:tcPr>
-                    <a:solidFill>
-                      <a:srgbClr val="FFFFFF"/>
-                    </a:solidFill>
-                  </a:tcPr>
-                </a:tc>
-                <a:tc>
-                  <a:txBody>
-                    <a:bodyPr/>
-                    <a:lstStyle/>
-                    <a:p>
-                      <a:pPr>
-                        <a:defRPr sz="1000">
-                          <a:solidFill>
-                            <a:srgbClr val="1A202C"/>
-                          </a:solidFill>
-                          <a:latin typeface="Microsoft YaHei"/>
-                        </a:defRPr>
-                      </a:pPr>
-                      <a:r>
-                        <a:t>三维无碰撞巡检轨迹</a:t>
-                      </a:r>
-                      <a:br/>
-                      <a:r>
-                        <a:t>多模态影像数据集 (RGB/Thermal)</a:t>
-                      </a:r>
-                    </a:p>
-                  </a:txBody>
-                  <a:tcPr>
-                    <a:solidFill>
-                      <a:srgbClr val="FFFFFF"/>
-                    </a:solidFill>
-                  </a:tcPr>
-                </a:tc>
-                <a:tc>
-                  <a:txBody>
-                    <a:bodyPr/>
-                    <a:lstStyle/>
-                    <a:p>
-                      <a:pPr>
-                        <a:defRPr sz="1000">
-                          <a:solidFill>
-                            <a:srgbClr val="1A202C"/>
-                          </a:solidFill>
-                          <a:latin typeface="Microsoft YaHei"/>
-                        </a:defRPr>
-                      </a:pPr>
-                      <a:r>
-                        <a:t>覆盖率优化路径生成、实时避障与风场扰动控制</a:t>
-                      </a:r>
-                    </a:p>
-                  </a:txBody>
-                  <a:tcPr>
-                    <a:solidFill>
-                      <a:srgbClr val="FFFFFF"/>
-                    </a:solidFill>
-                  </a:tcPr>
-                </a:tc>
-                <a:tc>
-                  <a:txBody>
-                    <a:bodyPr/>
-                    <a:lstStyle/>
-                    <a:p>
-                      <a:pPr>
-                        <a:defRPr sz="1000">
-                          <a:solidFill>
-                            <a:srgbClr val="1A202C"/>
-                          </a:solidFill>
-                          <a:latin typeface="Microsoft YaHei"/>
-                        </a:defRPr>
-                      </a:pPr>
-                      <a:r>
-                        <a:t>第 4 &amp; 5 章: 重建与数据集</a:t>
-                      </a:r>
-                    </a:p>
-                  </a:txBody>
-                  <a:tcPr>
-                    <a:solidFill>
-                      <a:srgbClr val="FFFFFF"/>
-                    </a:solidFill>
-                  </a:tcPr>
-                </a:tc>
-              </a:tr>
-              <a:tr h="792480">
-                <a:tc>
-                  <a:txBody>
-                    <a:bodyPr/>
-                    <a:lstStyle/>
-                    <a:p>
-                      <a:pPr>
-                        <a:defRPr sz="1000">
-                          <a:solidFill>
-                            <a:srgbClr val="1A202C"/>
-                          </a:solidFill>
-                          <a:latin typeface="Microsoft YaHei"/>
-                        </a:defRPr>
-                      </a:pPr>
-                      <a:r>
-                        <a:t>第 4 &amp; 5 章: 3D重建与数据集</a:t>
-                      </a:r>
-                      <a:br/>
-                      <a:r>
-                        <a:t>(Reconstruction &amp; Datasets)</a:t>
-                      </a:r>
-                    </a:p>
-                  </a:txBody>
-                  <a:tcPr>
-                    <a:solidFill>
-                      <a:srgbClr val="F8FAFC"/>
-                    </a:solidFill>
-                  </a:tcPr>
-                </a:tc>
-                <a:tc>
-                  <a:txBody>
-                    <a:bodyPr/>
-                    <a:lstStyle/>
-                    <a:p>
-                      <a:pPr>
-                        <a:defRPr sz="1000">
-                          <a:solidFill>
-                            <a:srgbClr val="1A202C"/>
-                          </a:solidFill>
-                          <a:latin typeface="Microsoft YaHei"/>
-                        </a:defRPr>
-                      </a:pPr>
-                      <a:r>
-                        <a:t>高精度点云、网格模型(Mesh)</a:t>
-                      </a:r>
-                      <a:br/>
-                      <a:r>
-                        <a:t>标注对齐的缺陷图像集</a:t>
-                      </a:r>
-                    </a:p>
-                  </a:txBody>
-                  <a:tcPr>
-                    <a:solidFill>
-                      <a:srgbClr val="F8FAFC"/>
-                    </a:solidFill>
-                  </a:tcPr>
-                </a:tc>
-                <a:tc>
-                  <a:txBody>
-                    <a:bodyPr/>
-                    <a:lstStyle/>
-                    <a:p>
-                      <a:pPr>
-                        <a:defRPr sz="1000">
-                          <a:solidFill>
-                            <a:srgbClr val="1A202C"/>
-                          </a:solidFill>
-                          <a:latin typeface="Microsoft YaHei"/>
-                        </a:defRPr>
-                      </a:pPr>
-                      <a:r>
-                        <a:t>倾斜摄影测量、BIM坐标系精准对齐、标定与分割</a:t>
-                      </a:r>
-                    </a:p>
-                  </a:txBody>
-                  <a:tcPr>
-                    <a:solidFill>
-                      <a:srgbClr val="F8FAFC"/>
-                    </a:solidFill>
-                  </a:tcPr>
-                </a:tc>
-                <a:tc>
-                  <a:txBody>
-                    <a:bodyPr/>
-                    <a:lstStyle/>
-                    <a:p>
-                      <a:pPr>
-                        <a:defRPr sz="1000">
-                          <a:solidFill>
-                            <a:srgbClr val="1A202C"/>
-                          </a:solidFill>
-                          <a:latin typeface="Microsoft YaHei"/>
-                        </a:defRPr>
-                      </a:pPr>
-                      <a:r>
-                        <a:t>第 6 章: AI缺陷检测</a:t>
-                      </a:r>
-                      <a:br/>
-                      <a:r>
-                        <a:t>第 7 章: GIS/GeoBIM</a:t>
-                      </a:r>
-                    </a:p>
-                  </a:txBody>
-                  <a:tcPr>
-                    <a:solidFill>
-                      <a:srgbClr val="F8FAFC"/>
-                    </a:solidFill>
-                  </a:tcPr>
-                </a:tc>
-              </a:tr>
-              <a:tr h="792480">
-                <a:tc>
-                  <a:txBody>
-                    <a:bodyPr/>
-                    <a:lstStyle/>
-                    <a:p>
-                      <a:pPr>
-                        <a:defRPr sz="1000">
-                          <a:solidFill>
-                            <a:srgbClr val="1A202C"/>
-                          </a:solidFill>
-                          <a:latin typeface="Microsoft YaHei"/>
-                        </a:defRPr>
-                      </a:pPr>
-                      <a:r>
-                        <a:t>第 6 章: 缺陷检测 AI 模型</a:t>
-                      </a:r>
-                      <a:br/>
-                      <a:r>
-                        <a:t>(AI Defect Perception)</a:t>
-                      </a:r>
-                    </a:p>
-                  </a:txBody>
-                  <a:tcPr>
-                    <a:solidFill>
-                      <a:srgbClr val="FFFFFF"/>
-                    </a:solidFill>
-                  </a:tcPr>
-                </a:tc>
-                <a:tc>
-                  <a:txBody>
-                    <a:bodyPr/>
-                    <a:lstStyle/>
-                    <a:p>
-                      <a:pPr>
-                        <a:defRPr sz="1000">
-                          <a:solidFill>
-                            <a:srgbClr val="1A202C"/>
-                          </a:solidFill>
-                          <a:latin typeface="Microsoft YaHei"/>
-                        </a:defRPr>
-                      </a:pPr>
-                      <a:r>
-                        <a:t>缺陷 bounding boxes/掩码</a:t>
-                      </a:r>
-                      <a:br/>
-                      <a:r>
-                        <a:t>构件级缺陷类型、面积与定量指标</a:t>
-                      </a:r>
-                    </a:p>
-                  </a:txBody>
-                  <a:tcPr>
-                    <a:solidFill>
-                      <a:srgbClr val="FFFFFF"/>
-                    </a:solidFill>
-                  </a:tcPr>
-                </a:tc>
-                <a:tc>
-                  <a:txBody>
-                    <a:bodyPr/>
-                    <a:lstStyle/>
-                    <a:p>
-                      <a:pPr>
-                        <a:defRPr sz="1000">
-                          <a:solidFill>
-                            <a:srgbClr val="1A202C"/>
-                          </a:solidFill>
-                          <a:latin typeface="Microsoft YaHei"/>
-                        </a:defRPr>
-                      </a:pPr>
-                      <a:r>
-                        <a:t>深度学习目标检测、实例分割、缺陷严重程度量化</a:t>
-                      </a:r>
-                    </a:p>
-                  </a:txBody>
-                  <a:tcPr>
-                    <a:solidFill>
-                      <a:srgbClr val="FFFFFF"/>
-                    </a:solidFill>
-                  </a:tcPr>
-                </a:tc>
-                <a:tc>
-                  <a:txBody>
-                    <a:bodyPr/>
-                    <a:lstStyle/>
-                    <a:p>
-                      <a:pPr>
-                        <a:defRPr sz="1000">
-                          <a:solidFill>
-                            <a:srgbClr val="1A202C"/>
-                          </a:solidFill>
-                          <a:latin typeface="Microsoft YaHei"/>
-                        </a:defRPr>
-                      </a:pPr>
-                      <a:r>
-                        <a:t>第 7 章: GeoBIM 挂载</a:t>
-                      </a:r>
-                      <a:br/>
-                      <a:r>
-                        <a:t>第 8 章: 数字孪生推理</a:t>
-                      </a:r>
-                    </a:p>
-                  </a:txBody>
-                  <a:tcPr>
-                    <a:solidFill>
-                      <a:srgbClr val="FFFFFF"/>
-                    </a:solidFill>
-                  </a:tcPr>
-                </a:tc>
-              </a:tr>
-              <a:tr h="792480">
-                <a:tc>
-                  <a:txBody>
-                    <a:bodyPr/>
-                    <a:lstStyle/>
-                    <a:p>
-                      <a:pPr>
-                        <a:defRPr sz="1000">
-                          <a:solidFill>
-                            <a:srgbClr val="1A202C"/>
-                          </a:solidFill>
-                          <a:latin typeface="Microsoft YaHei"/>
-                        </a:defRPr>
-                      </a:pPr>
-                      <a:r>
-                        <a:t>第 7 章: GIS 与 GeoBIM 集成</a:t>
-                      </a:r>
-                      <a:br/>
-                      <a:r>
-                        <a:t>(GeoBIM &amp; Asset Passports)</a:t>
-                      </a:r>
-                    </a:p>
-                  </a:txBody>
-                  <a:tcPr>
-                    <a:solidFill>
-                      <a:srgbClr val="F8FAFC"/>
-                    </a:solidFill>
-                  </a:tcPr>
-                </a:tc>
-                <a:tc>
-                  <a:txBody>
-                    <a:bodyPr/>
-                    <a:lstStyle/>
-                    <a:p>
-                      <a:pPr>
-                        <a:defRPr sz="1000">
-                          <a:solidFill>
-                            <a:srgbClr val="1A202C"/>
-                          </a:solidFill>
-                          <a:latin typeface="Microsoft YaHei"/>
-                        </a:defRPr>
-                      </a:pPr>
-                      <a:r>
-                        <a:t>挂载缺陷的 GeoBIM 资产护照</a:t>
-                      </a:r>
-                      <a:br/>
-                      <a:r>
-                        <a:t>空间拓扑关系数据库 (Spatial Graph)</a:t>
-                      </a:r>
-                    </a:p>
-                  </a:txBody>
-                  <a:tcPr>
-                    <a:solidFill>
-                      <a:srgbClr val="F8FAFC"/>
-                    </a:solidFill>
-                  </a:tcPr>
-                </a:tc>
-                <a:tc>
-                  <a:txBody>
-                    <a:bodyPr/>
-                    <a:lstStyle/>
-                    <a:p>
-                      <a:pPr>
-                        <a:defRPr sz="1000">
-                          <a:solidFill>
-                            <a:srgbClr val="1A202C"/>
-                          </a:solidFill>
-                          <a:latin typeface="Microsoft YaHei"/>
-                        </a:defRPr>
-                      </a:pPr>
-                      <a:r>
-                        <a:t>空间关联分析、Asset-ID 语义绑定、历史维保数据库归档</a:t>
-                      </a:r>
-                    </a:p>
-                  </a:txBody>
-                  <a:tcPr>
-                    <a:solidFill>
-                      <a:srgbClr val="F8FAFC"/>
-                    </a:solidFill>
-                  </a:tcPr>
-                </a:tc>
-                <a:tc>
-                  <a:txBody>
-                    <a:bodyPr/>
-                    <a:lstStyle/>
-                    <a:p>
-                      <a:pPr>
-                        <a:defRPr sz="1000">
-                          <a:solidFill>
-                            <a:srgbClr val="1A202C"/>
-                          </a:solidFill>
-                          <a:latin typeface="Microsoft YaHei"/>
-                        </a:defRPr>
-                      </a:pPr>
-                      <a:r>
-                        <a:t>第 8 章: 大模型决策支持</a:t>
-                      </a:r>
-                    </a:p>
-                  </a:txBody>
-                  <a:tcPr>
-                    <a:solidFill>
-                      <a:srgbClr val="F8FAFC"/>
-                    </a:solidFill>
-                  </a:tcPr>
-                </a:tc>
-              </a:tr>
-              <a:tr h="792480">
-                <a:tc>
-                  <a:txBody>
-                    <a:bodyPr/>
-                    <a:lstStyle/>
-                    <a:p>
-                      <a:pPr>
-                        <a:defRPr sz="1000">
-                          <a:solidFill>
-                            <a:srgbClr val="1A202C"/>
-                          </a:solidFill>
-                          <a:latin typeface="Microsoft YaHei"/>
-                        </a:defRPr>
-                      </a:pPr>
-                      <a:r>
-                        <a:t>第 8 &amp; 9 章: 数字孪生与大模型</a:t>
-                      </a:r>
-                      <a:br/>
-                      <a:r>
-                        <a:t>(DT &amp; LLM Decision Support)</a:t>
-                      </a:r>
-                    </a:p>
-                  </a:txBody>
-                  <a:tcPr>
-                    <a:solidFill>
-                      <a:srgbClr val="FFFFFF"/>
-                    </a:solidFill>
-                  </a:tcPr>
-                </a:tc>
-                <a:tc>
-                  <a:txBody>
-                    <a:bodyPr/>
-                    <a:lstStyle/>
-                    <a:p>
-                      <a:pPr>
-                        <a:defRPr sz="1000">
-                          <a:solidFill>
-                            <a:srgbClr val="1A202C"/>
-                          </a:solidFill>
-                          <a:latin typeface="Microsoft YaHei"/>
-                        </a:defRPr>
-                      </a:pPr>
-                      <a:r>
-                        <a:t>可审计巡检报告、维保建议工单</a:t>
-                      </a:r>
-                      <a:br/>
-                      <a:r>
-                        <a:t>闭环复巡指令 (Re-inspection Task)</a:t>
-                      </a:r>
-                    </a:p>
-                  </a:txBody>
-                  <a:tcPr>
-                    <a:solidFill>
-                      <a:srgbClr val="FFFFFF"/>
-                    </a:solidFill>
-                  </a:tcPr>
-                </a:tc>
-                <a:tc>
-                  <a:txBody>
-                    <a:bodyPr/>
-                    <a:lstStyle/>
-                    <a:p>
-                      <a:pPr>
-                        <a:defRPr sz="1000">
-                          <a:solidFill>
-                            <a:srgbClr val="1A202C"/>
-                          </a:solidFill>
-                          <a:latin typeface="Microsoft YaHei"/>
-                        </a:defRPr>
-                      </a:pPr>
-                      <a:r>
-                        <a:t>检索增强生成 (RAG)、历史记录查询、预测性维护决策</a:t>
-                      </a:r>
-                    </a:p>
-                  </a:txBody>
-                  <a:tcPr>
-                    <a:solidFill>
-                      <a:srgbClr val="FFFFFF"/>
-                    </a:solidFill>
-                  </a:tcPr>
-                </a:tc>
-                <a:tc>
-                  <a:txBody>
-                    <a:bodyPr/>
-                    <a:lstStyle/>
-                    <a:p>
-                      <a:pPr>
-                        <a:defRPr sz="1000">
-                          <a:solidFill>
-                            <a:srgbClr val="1A202C"/>
-                          </a:solidFill>
-                          <a:latin typeface="Microsoft YaHei"/>
-                        </a:defRPr>
-                      </a:pPr>
-                      <a:r>
-                        <a:t>反馈至 第 2 章 闭环复巡</a:t>
-                      </a:r>
-                      <a:br/>
-                      <a:r>
-                        <a:t>及现场运维工程应用</a:t>
-                      </a:r>
-                    </a:p>
-                  </a:txBody>
-                  <a:tcPr>
-                    <a:solidFill>
-                      <a:srgbClr val="FFFFFF"/>
-                    </a:solidFill>
-                  </a:tcPr>
-                </a:tc>
-              </a:tr>
-            </a:tbl>
-          </a:graphicData>
-        </a:graphic>
-      </p:graphicFrame>
-    </p:spTree>
-  </p:cSld>
-  <p:clrMapOvr>
-    <a:masterClrMapping/>
-  </p:clrMapOvr>
-</p:sld>
-</file>
-
-<file path=ppt/slides/slide3.xml><?xml version="1.0" encoding="utf-8"?>
-<p:sld xmlns:a="http://schemas.openxmlformats.org/drawingml/2006/main" xmlns:p="http://schemas.openxmlformats.org/presentationml/2006/main" xmlns:r="http://schemas.openxmlformats.org/officeDocument/2006/relationships">
-  <p:cSld>
-    <p:spTree>
-      <p:nvGrpSpPr>
-        <p:cNvPr id="1" name=""/>
-        <p:cNvGrpSpPr/>
-        <p:nvPr/>
-      </p:nvGrpSpPr>
-      <p:grpSpPr/>
-      <p:sp>
-        <p:nvSpPr>
-          <p:cNvPr id="2" name="TextBox 1"/>
-          <p:cNvSpPr txBox="1"/>
-          <p:nvPr/>
-        </p:nvSpPr>
-        <p:spPr>
-          <a:xfrm>
-            <a:off x="731520" y="365760"/>
-            <a:ext cx="10728655" cy="822960"/>
-          </a:xfrm>
-          <a:prstGeom prst="rect">
-            <a:avLst/>
-          </a:prstGeom>
-          <a:noFill/>
-        </p:spPr>
-        <p:txBody>
-          <a:bodyPr wrap="square">
-            <a:spAutoFit/>
-          </a:bodyPr>
-          <a:lstStyle/>
-          <a:p>
-            <a:pPr>
-              <a:defRPr sz="2200" b="1">
-                <a:solidFill>
-                  <a:srgbClr val="1A202C"/>
-                </a:solidFill>
-                <a:latin typeface="Arial"/>
-              </a:defRPr>
-            </a:pPr>
-            <a:r>
-              <a:t>建筑巡检端到端四层系统架构视图 (Four-Layer System Architecture)</a:t>
-            </a:r>
-          </a:p>
-          <a:p>
-            <a:pPr>
-              <a:defRPr sz="1200">
-                <a:solidFill>
-                  <a:srgbClr val="4A5568"/>
-                </a:solidFill>
-                <a:latin typeface="Microsoft YaHei"/>
-              </a:defRPr>
-            </a:pPr>
-            <a:r>
-              <a:t>物理域、空间域、感知域与认知域的解耦与协同 (Decoupled Co-Design from Flight to Cognitive Reasoning)</a:t>
+              <a:t>AI-Driven UAV Building Inspection: An End-to-End Framework from Autonomous Flight to Digital Twins</a:t>
             </a:r>
           </a:p>
         </p:txBody>
@@ -5051,17 +4203,17 @@
         <p:spPr>
           <a:xfrm>
             <a:off x="731520" y="1371600"/>
-            <a:ext cx="10728655" cy="1051560"/>
+            <a:ext cx="2423160" cy="457200"/>
           </a:xfrm>
           <a:prstGeom prst="rect">
             <a:avLst/>
           </a:prstGeom>
           <a:solidFill>
-            <a:srgbClr val="F1F5F9"/>
+            <a:srgbClr val="FFFFFF"/>
           </a:solidFill>
-          <a:ln w="19050">
+          <a:ln w="15875">
             <a:solidFill>
-              <a:srgbClr val="475569"/>
+              <a:srgbClr val="000000"/>
             </a:solidFill>
           </a:ln>
         </p:spPr>
@@ -5080,55 +4232,44 @@
           </a:fontRef>
         </p:style>
         <p:txBody>
-          <a:bodyPr rtlCol="0" anchor="ctr" wrap="square" lIns="182880" rIns="182880" tIns="91440" bIns="91440"/>
+          <a:bodyPr rtlCol="0" anchor="ctr"/>
           <a:lstStyle/>
           <a:p>
             <a:pPr algn="ctr">
-              <a:defRPr sz="1200" b="1">
-                <a:solidFill>
-                  <a:srgbClr val="1A202C"/>
-                </a:solidFill>
-                <a:latin typeface="Microsoft YaHei"/>
+              <a:defRPr sz="1100" b="1">
+                <a:solidFill>
+                  <a:srgbClr val="000000"/>
+                </a:solidFill>
+                <a:latin typeface="Times New Roman"/>
               </a:defRPr>
             </a:pPr>
             <a:r>
-              <a:t>L4: 认知与决策层 (Cognitive &amp; Decision Domain)   │   对应章节: 第 8 章 (DT + LLM) &amp; 第 9 章 (总结与展望)</a:t>
-            </a:r>
-          </a:p>
-          <a:p>
-            <a:pPr>
-              <a:defRPr sz="1050">
-                <a:solidFill>
-                  <a:srgbClr val="4A5568"/>
-                </a:solidFill>
-                <a:latin typeface="Microsoft YaHei"/>
-              </a:defRPr>
-            </a:pPr>
-            <a:r>
-              <a:t>核心功能组件: 即用型大语言模型 (LLM/VLM) • 检索增强生成 (RAG) • 历史维修记录查询 • 预测性维护决策 • 报告自动生成与工单下发</a:t>
-            </a:r>
-          </a:p>
-        </p:txBody>
-      </p:sp>
-      <p:sp>
-        <p:nvSpPr>
-          <p:cNvPr id="4" name="Down Arrow 3"/>
+              <a:t>Phase I: Flight &amp; Acquisition</a:t>
+            </a:r>
+          </a:p>
+        </p:txBody>
+      </p:sp>
+      <p:sp>
+        <p:nvSpPr>
+          <p:cNvPr id="4" name="Rectangle 3"/>
           <p:cNvSpPr/>
           <p:nvPr/>
         </p:nvSpPr>
         <p:spPr>
           <a:xfrm>
-            <a:off x="5852160" y="2441448"/>
-            <a:ext cx="228600" cy="100584"/>
-          </a:xfrm>
-          <a:prstGeom prst="downArrow">
+            <a:off x="731520" y="1920240"/>
+            <a:ext cx="2423160" cy="2002536"/>
+          </a:xfrm>
+          <a:prstGeom prst="rect">
             <a:avLst/>
           </a:prstGeom>
           <a:solidFill>
-            <a:srgbClr val="4A5568"/>
+            <a:srgbClr val="FFFFFF"/>
           </a:solidFill>
-          <a:ln>
-            <a:noFill/>
+          <a:ln w="12700">
+            <a:solidFill>
+              <a:srgbClr val="000000"/>
+            </a:solidFill>
           </a:ln>
         </p:spPr>
         <p:style>
@@ -5146,10 +4287,40 @@
           </a:fontRef>
         </p:style>
         <p:txBody>
-          <a:bodyPr rtlCol="0" anchor="ctr"/>
-          <a:lstStyle/>
-          <a:p>
-            <a:pPr algn="ctr"/>
+          <a:bodyPr rtlCol="0" anchor="t" wrap="square" lIns="109728" rIns="109728" tIns="109728"/>
+          <a:lstStyle/>
+          <a:p>
+            <a:pPr algn="ctr">
+              <a:spcAft>
+                <a:spcPts val="400"/>
+              </a:spcAft>
+              <a:defRPr sz="1050" b="1">
+                <a:solidFill>
+                  <a:srgbClr val="000000"/>
+                </a:solidFill>
+                <a:latin typeface="Times New Roman"/>
+              </a:defRPr>
+            </a:pPr>
+            <a:r>
+              <a:t>Chapter 2: Task Planning</a:t>
+            </a:r>
+          </a:p>
+          <a:p>
+            <a:pPr>
+              <a:defRPr sz="950">
+                <a:solidFill>
+                  <a:srgbClr val="000000"/>
+                </a:solidFill>
+                <a:latin typeface="Times New Roman"/>
+              </a:defRPr>
+            </a:pPr>
+            <a:r>
+              <a:t>• Façade inspection path planning</a:t>
+            </a:r>
+            <a:br/>
+            <a:r>
+              <a:t>• ROI definition &amp; multi-UAV routing</a:t>
+            </a:r>
           </a:p>
         </p:txBody>
       </p:sp>
@@ -5161,18 +4332,18 @@
         </p:nvSpPr>
         <p:spPr>
           <a:xfrm>
-            <a:off x="731520" y="2560320"/>
-            <a:ext cx="10728655" cy="1051560"/>
+            <a:off x="731520" y="4032504"/>
+            <a:ext cx="2423160" cy="2002536"/>
           </a:xfrm>
           <a:prstGeom prst="rect">
             <a:avLst/>
           </a:prstGeom>
           <a:solidFill>
-            <a:srgbClr val="F8FAFC"/>
+            <a:srgbClr val="FFFFFF"/>
           </a:solidFill>
-          <a:ln w="19050">
+          <a:ln w="12700">
             <a:solidFill>
-              <a:srgbClr val="94A3B8"/>
+              <a:srgbClr val="000000"/>
             </a:solidFill>
           </a:ln>
         </p:spPr>
@@ -5191,52 +4362,59 @@
           </a:fontRef>
         </p:style>
         <p:txBody>
-          <a:bodyPr rtlCol="0" anchor="ctr" wrap="square" lIns="182880" rIns="182880" tIns="91440" bIns="91440"/>
+          <a:bodyPr rtlCol="0" anchor="t" wrap="square" lIns="109728" rIns="109728" tIns="109728"/>
           <a:lstStyle/>
           <a:p>
             <a:pPr algn="ctr">
-              <a:defRPr sz="1200" b="1">
-                <a:solidFill>
-                  <a:srgbClr val="1A202C"/>
-                </a:solidFill>
-                <a:latin typeface="Microsoft YaHei"/>
+              <a:spcAft>
+                <a:spcPts val="400"/>
+              </a:spcAft>
+              <a:defRPr sz="1050" b="1">
+                <a:solidFill>
+                  <a:srgbClr val="000000"/>
+                </a:solidFill>
+                <a:latin typeface="Times New Roman"/>
               </a:defRPr>
             </a:pPr>
             <a:r>
-              <a:t>L3: 感知与资产层 (Perception &amp; Asset Management Domain)   │   对应章节: 第 6 章 (AI检测模型) &amp; 第 7 章 (GIS &amp; GeoBIM集成)</a:t>
+              <a:t>Chapter 3: Motion Planning</a:t>
             </a:r>
           </a:p>
           <a:p>
             <a:pPr>
-              <a:defRPr sz="1050">
-                <a:solidFill>
-                  <a:srgbClr val="4A5568"/>
-                </a:solidFill>
-                <a:latin typeface="Microsoft YaHei"/>
+              <a:defRPr sz="950">
+                <a:solidFill>
+                  <a:srgbClr val="000000"/>
+                </a:solidFill>
+                <a:latin typeface="Times New Roman"/>
               </a:defRPr>
             </a:pPr>
             <a:r>
-              <a:t>核心功能组件: 深度学习缺陷检测/实例分割 • 图像语义分析 • GeoBIM 空间数据库 • 资产护照 (Asset Passport) • 拓扑关系链锚定</a:t>
-            </a:r>
-          </a:p>
-        </p:txBody>
-      </p:sp>
-      <p:sp>
-        <p:nvSpPr>
-          <p:cNvPr id="6" name="Down Arrow 5"/>
+              <a:t>• Obstacle avoidance &amp; trajectory opt.</a:t>
+            </a:r>
+            <a:br/>
+            <a:r>
+              <a:t>• Wind disturbance adaptation</a:t>
+            </a:r>
+          </a:p>
+        </p:txBody>
+      </p:sp>
+      <p:sp>
+        <p:nvSpPr>
+          <p:cNvPr id="6" name="Right Arrow 5"/>
           <p:cNvSpPr/>
           <p:nvPr/>
         </p:nvSpPr>
         <p:spPr>
           <a:xfrm>
-            <a:off x="5852160" y="3630168"/>
-            <a:ext cx="228600" cy="100584"/>
-          </a:xfrm>
-          <a:prstGeom prst="downArrow">
+            <a:off x="3227832" y="3593592"/>
+            <a:ext cx="201168" cy="219456"/>
+          </a:xfrm>
+          <a:prstGeom prst="rightArrow">
             <a:avLst/>
           </a:prstGeom>
           <a:solidFill>
-            <a:srgbClr val="4A5568"/>
+            <a:srgbClr val="000000"/>
           </a:solidFill>
           <a:ln>
             <a:noFill/>
@@ -5272,18 +4450,18 @@
         </p:nvSpPr>
         <p:spPr>
           <a:xfrm>
-            <a:off x="731520" y="3749040"/>
-            <a:ext cx="10728655" cy="1051560"/>
+            <a:off x="3502152" y="1371600"/>
+            <a:ext cx="2423160" cy="457200"/>
           </a:xfrm>
           <a:prstGeom prst="rect">
             <a:avLst/>
           </a:prstGeom>
           <a:solidFill>
-            <a:srgbClr val="F8FAFC"/>
+            <a:srgbClr val="FFFFFF"/>
           </a:solidFill>
-          <a:ln w="19050">
+          <a:ln w="15875">
             <a:solidFill>
-              <a:srgbClr val="94A3B8"/>
+              <a:srgbClr val="000000"/>
             </a:solidFill>
           </a:ln>
         </p:spPr>
@@ -5302,55 +4480,44 @@
           </a:fontRef>
         </p:style>
         <p:txBody>
-          <a:bodyPr rtlCol="0" anchor="ctr" wrap="square" lIns="182880" rIns="182880" tIns="91440" bIns="91440"/>
+          <a:bodyPr rtlCol="0" anchor="ctr"/>
           <a:lstStyle/>
           <a:p>
             <a:pPr algn="ctr">
-              <a:defRPr sz="1200" b="1">
-                <a:solidFill>
-                  <a:srgbClr val="1A202C"/>
-                </a:solidFill>
-                <a:latin typeface="Microsoft YaHei"/>
+              <a:defRPr sz="1100" b="1">
+                <a:solidFill>
+                  <a:srgbClr val="000000"/>
+                </a:solidFill>
+                <a:latin typeface="Times New Roman"/>
               </a:defRPr>
             </a:pPr>
             <a:r>
-              <a:t>L2: 空间与表达层 (Spatial &amp; Data Representation Domain)   │   对应章节: 第 4 章 (3D重建) &amp; 第 5 章 (巡检数据集)</a:t>
-            </a:r>
-          </a:p>
-          <a:p>
-            <a:pPr>
-              <a:defRPr sz="1050">
-                <a:solidFill>
-                  <a:srgbClr val="4A5568"/>
-                </a:solidFill>
-                <a:latin typeface="Microsoft YaHei"/>
-              </a:defRPr>
-            </a:pPr>
-            <a:r>
-              <a:t>核心功能组件: 无人机倾斜摄影测量 • 点云与三维网格建模 (Mesh) • BIM/地理坐标对齐 • 多模态 (RGB/热成像) 数据集构建与标定</a:t>
-            </a:r>
-          </a:p>
-        </p:txBody>
-      </p:sp>
-      <p:sp>
-        <p:nvSpPr>
-          <p:cNvPr id="8" name="Down Arrow 7"/>
+              <a:t>Phase II: Reconstruction &amp; Data</a:t>
+            </a:r>
+          </a:p>
+        </p:txBody>
+      </p:sp>
+      <p:sp>
+        <p:nvSpPr>
+          <p:cNvPr id="8" name="Rectangle 7"/>
           <p:cNvSpPr/>
           <p:nvPr/>
         </p:nvSpPr>
         <p:spPr>
           <a:xfrm>
-            <a:off x="5852160" y="4818888"/>
-            <a:ext cx="228600" cy="100584"/>
-          </a:xfrm>
-          <a:prstGeom prst="downArrow">
+            <a:off x="3502152" y="1920240"/>
+            <a:ext cx="2423160" cy="2002536"/>
+          </a:xfrm>
+          <a:prstGeom prst="rect">
             <a:avLst/>
           </a:prstGeom>
           <a:solidFill>
-            <a:srgbClr val="4A5568"/>
+            <a:srgbClr val="FFFFFF"/>
           </a:solidFill>
-          <a:ln>
-            <a:noFill/>
+          <a:ln w="12700">
+            <a:solidFill>
+              <a:srgbClr val="000000"/>
+            </a:solidFill>
           </a:ln>
         </p:spPr>
         <p:style>
@@ -5368,10 +4535,40 @@
           </a:fontRef>
         </p:style>
         <p:txBody>
-          <a:bodyPr rtlCol="0" anchor="ctr"/>
-          <a:lstStyle/>
-          <a:p>
-            <a:pPr algn="ctr"/>
+          <a:bodyPr rtlCol="0" anchor="t" wrap="square" lIns="109728" rIns="109728" tIns="109728"/>
+          <a:lstStyle/>
+          <a:p>
+            <a:pPr algn="ctr">
+              <a:spcAft>
+                <a:spcPts val="400"/>
+              </a:spcAft>
+              <a:defRPr sz="1050" b="1">
+                <a:solidFill>
+                  <a:srgbClr val="000000"/>
+                </a:solidFill>
+                <a:latin typeface="Times New Roman"/>
+              </a:defRPr>
+            </a:pPr>
+            <a:r>
+              <a:t>Chapter 4: 3D Reconstruction</a:t>
+            </a:r>
+          </a:p>
+          <a:p>
+            <a:pPr>
+              <a:defRPr sz="950">
+                <a:solidFill>
+                  <a:srgbClr val="000000"/>
+                </a:solidFill>
+                <a:latin typeface="Times New Roman"/>
+              </a:defRPr>
+            </a:pPr>
+            <a:r>
+              <a:t>• Photogrammetry &amp; point clouds</a:t>
+            </a:r>
+            <a:br/>
+            <a:r>
+              <a:t>• Mesh modeling &amp; BIM alignment</a:t>
+            </a:r>
           </a:p>
         </p:txBody>
       </p:sp>
@@ -5383,18 +4580,18 @@
         </p:nvSpPr>
         <p:spPr>
           <a:xfrm>
-            <a:off x="731520" y="4937760"/>
-            <a:ext cx="10728655" cy="1051560"/>
+            <a:off x="3502152" y="4032504"/>
+            <a:ext cx="2423160" cy="2002536"/>
           </a:xfrm>
           <a:prstGeom prst="rect">
             <a:avLst/>
           </a:prstGeom>
           <a:solidFill>
-            <a:srgbClr val="F8FAFC"/>
+            <a:srgbClr val="FFFFFF"/>
           </a:solidFill>
-          <a:ln w="19050">
+          <a:ln w="12700">
             <a:solidFill>
-              <a:srgbClr val="94A3B8"/>
+              <a:srgbClr val="000000"/>
             </a:solidFill>
           </a:ln>
         </p:spPr>
@@ -5413,32 +4610,575 @@
           </a:fontRef>
         </p:style>
         <p:txBody>
-          <a:bodyPr rtlCol="0" anchor="ctr" wrap="square" lIns="182880" rIns="182880" tIns="91440" bIns="91440"/>
+          <a:bodyPr rtlCol="0" anchor="t" wrap="square" lIns="109728" rIns="109728" tIns="109728"/>
           <a:lstStyle/>
           <a:p>
             <a:pPr algn="ctr">
-              <a:defRPr sz="1200" b="1">
-                <a:solidFill>
-                  <a:srgbClr val="1A202C"/>
-                </a:solidFill>
-                <a:latin typeface="Microsoft YaHei"/>
+              <a:spcAft>
+                <a:spcPts val="400"/>
+              </a:spcAft>
+              <a:defRPr sz="1050" b="1">
+                <a:solidFill>
+                  <a:srgbClr val="000000"/>
+                </a:solidFill>
+                <a:latin typeface="Times New Roman"/>
               </a:defRPr>
             </a:pPr>
             <a:r>
-              <a:t>L1: 物理与采集层 (Physical &amp; Flight Domain)   │   对应章节: 第 2 章 (任务规划) &amp; 第 3 章 (运动规划与执行)</a:t>
+              <a:t>Chapter 5: Inspection Datasets</a:t>
             </a:r>
           </a:p>
           <a:p>
             <a:pPr>
-              <a:defRPr sz="1050">
-                <a:solidFill>
-                  <a:srgbClr val="4A5568"/>
-                </a:solidFill>
-                <a:latin typeface="Microsoft YaHei"/>
+              <a:defRPr sz="950">
+                <a:solidFill>
+                  <a:srgbClr val="000000"/>
+                </a:solidFill>
+                <a:latin typeface="Times New Roman"/>
               </a:defRPr>
             </a:pPr>
             <a:r>
-              <a:t>核心功能组件: 立面巡检覆盖路径规划 • 实时避障与安全边界 • 轨迹优化控制 • 风场扰动控制 • 无人机平台与多传感器硬件执行</a:t>
+              <a:t>• Multimodal RGB / Thermal capture</a:t>
+            </a:r>
+            <a:br/>
+            <a:r>
+              <a:t>• Defect annotation &amp; benchmarks</a:t>
+            </a:r>
+          </a:p>
+        </p:txBody>
+      </p:sp>
+      <p:sp>
+        <p:nvSpPr>
+          <p:cNvPr id="10" name="Right Arrow 9"/>
+          <p:cNvSpPr/>
+          <p:nvPr/>
+        </p:nvSpPr>
+        <p:spPr>
+          <a:xfrm>
+            <a:off x="5998464" y="3593592"/>
+            <a:ext cx="201168" cy="219456"/>
+          </a:xfrm>
+          <a:prstGeom prst="rightArrow">
+            <a:avLst/>
+          </a:prstGeom>
+          <a:solidFill>
+            <a:srgbClr val="000000"/>
+          </a:solidFill>
+          <a:ln>
+            <a:noFill/>
+          </a:ln>
+        </p:spPr>
+        <p:style>
+          <a:lnRef idx="1">
+            <a:schemeClr val="accent1"/>
+          </a:lnRef>
+          <a:fillRef idx="3">
+            <a:schemeClr val="accent1"/>
+          </a:fillRef>
+          <a:effectRef idx="2">
+            <a:schemeClr val="accent1"/>
+          </a:effectRef>
+          <a:fontRef idx="minor">
+            <a:schemeClr val="lt1"/>
+          </a:fontRef>
+        </p:style>
+        <p:txBody>
+          <a:bodyPr rtlCol="0" anchor="ctr"/>
+          <a:lstStyle/>
+          <a:p>
+            <a:pPr algn="ctr"/>
+          </a:p>
+        </p:txBody>
+      </p:sp>
+      <p:sp>
+        <p:nvSpPr>
+          <p:cNvPr id="11" name="Rectangle 10"/>
+          <p:cNvSpPr/>
+          <p:nvPr/>
+        </p:nvSpPr>
+        <p:spPr>
+          <a:xfrm>
+            <a:off x="6272784" y="1371600"/>
+            <a:ext cx="2423160" cy="457200"/>
+          </a:xfrm>
+          <a:prstGeom prst="rect">
+            <a:avLst/>
+          </a:prstGeom>
+          <a:solidFill>
+            <a:srgbClr val="FFFFFF"/>
+          </a:solidFill>
+          <a:ln w="15875">
+            <a:solidFill>
+              <a:srgbClr val="000000"/>
+            </a:solidFill>
+          </a:ln>
+        </p:spPr>
+        <p:style>
+          <a:lnRef idx="1">
+            <a:schemeClr val="accent1"/>
+          </a:lnRef>
+          <a:fillRef idx="3">
+            <a:schemeClr val="accent1"/>
+          </a:fillRef>
+          <a:effectRef idx="2">
+            <a:schemeClr val="accent1"/>
+          </a:effectRef>
+          <a:fontRef idx="minor">
+            <a:schemeClr val="lt1"/>
+          </a:fontRef>
+        </p:style>
+        <p:txBody>
+          <a:bodyPr rtlCol="0" anchor="ctr"/>
+          <a:lstStyle/>
+          <a:p>
+            <a:pPr algn="ctr">
+              <a:defRPr sz="1100" b="1">
+                <a:solidFill>
+                  <a:srgbClr val="000000"/>
+                </a:solidFill>
+                <a:latin typeface="Times New Roman"/>
+              </a:defRPr>
+            </a:pPr>
+            <a:r>
+              <a:t>Phase III: AI Defect Perception</a:t>
+            </a:r>
+          </a:p>
+        </p:txBody>
+      </p:sp>
+      <p:sp>
+        <p:nvSpPr>
+          <p:cNvPr id="12" name="Rectangle 11"/>
+          <p:cNvSpPr/>
+          <p:nvPr/>
+        </p:nvSpPr>
+        <p:spPr>
+          <a:xfrm>
+            <a:off x="6272784" y="1920240"/>
+            <a:ext cx="2423160" cy="4114800"/>
+          </a:xfrm>
+          <a:prstGeom prst="rect">
+            <a:avLst/>
+          </a:prstGeom>
+          <a:solidFill>
+            <a:srgbClr val="FFFFFF"/>
+          </a:solidFill>
+          <a:ln w="12700">
+            <a:solidFill>
+              <a:srgbClr val="000000"/>
+            </a:solidFill>
+          </a:ln>
+        </p:spPr>
+        <p:style>
+          <a:lnRef idx="1">
+            <a:schemeClr val="accent1"/>
+          </a:lnRef>
+          <a:fillRef idx="3">
+            <a:schemeClr val="accent1"/>
+          </a:fillRef>
+          <a:effectRef idx="2">
+            <a:schemeClr val="accent1"/>
+          </a:effectRef>
+          <a:fontRef idx="minor">
+            <a:schemeClr val="lt1"/>
+          </a:fontRef>
+        </p:style>
+        <p:txBody>
+          <a:bodyPr rtlCol="0" anchor="t" wrap="square" lIns="109728" rIns="109728" tIns="109728"/>
+          <a:lstStyle/>
+          <a:p>
+            <a:pPr algn="ctr">
+              <a:spcAft>
+                <a:spcPts val="400"/>
+              </a:spcAft>
+              <a:defRPr sz="1050" b="1">
+                <a:solidFill>
+                  <a:srgbClr val="000000"/>
+                </a:solidFill>
+                <a:latin typeface="Times New Roman"/>
+              </a:defRPr>
+            </a:pPr>
+            <a:r>
+              <a:t>Chapter 6: AI Defect Models</a:t>
+            </a:r>
+          </a:p>
+          <a:p>
+            <a:pPr>
+              <a:defRPr sz="950">
+                <a:solidFill>
+                  <a:srgbClr val="000000"/>
+                </a:solidFill>
+                <a:latin typeface="Times New Roman"/>
+              </a:defRPr>
+            </a:pPr>
+            <a:r>
+              <a:t>• Deep learning defect detection</a:t>
+            </a:r>
+            <a:br/>
+            <a:r>
+              <a:t>• Instance segmentation &amp; quantification</a:t>
+            </a:r>
+            <a:br/>
+            <a:r>
+              <a:t>• Severity rating</a:t>
+            </a:r>
+          </a:p>
+        </p:txBody>
+      </p:sp>
+      <p:sp>
+        <p:nvSpPr>
+          <p:cNvPr id="13" name="Right Arrow 12"/>
+          <p:cNvSpPr/>
+          <p:nvPr/>
+        </p:nvSpPr>
+        <p:spPr>
+          <a:xfrm>
+            <a:off x="8769096" y="3593592"/>
+            <a:ext cx="201168" cy="219456"/>
+          </a:xfrm>
+          <a:prstGeom prst="rightArrow">
+            <a:avLst/>
+          </a:prstGeom>
+          <a:solidFill>
+            <a:srgbClr val="000000"/>
+          </a:solidFill>
+          <a:ln>
+            <a:noFill/>
+          </a:ln>
+        </p:spPr>
+        <p:style>
+          <a:lnRef idx="1">
+            <a:schemeClr val="accent1"/>
+          </a:lnRef>
+          <a:fillRef idx="3">
+            <a:schemeClr val="accent1"/>
+          </a:fillRef>
+          <a:effectRef idx="2">
+            <a:schemeClr val="accent1"/>
+          </a:effectRef>
+          <a:fontRef idx="minor">
+            <a:schemeClr val="lt1"/>
+          </a:fontRef>
+        </p:style>
+        <p:txBody>
+          <a:bodyPr rtlCol="0" anchor="ctr"/>
+          <a:lstStyle/>
+          <a:p>
+            <a:pPr algn="ctr"/>
+          </a:p>
+        </p:txBody>
+      </p:sp>
+      <p:sp>
+        <p:nvSpPr>
+          <p:cNvPr id="14" name="Rectangle 13"/>
+          <p:cNvSpPr/>
+          <p:nvPr/>
+        </p:nvSpPr>
+        <p:spPr>
+          <a:xfrm>
+            <a:off x="9043416" y="1371600"/>
+            <a:ext cx="2423160" cy="457200"/>
+          </a:xfrm>
+          <a:prstGeom prst="rect">
+            <a:avLst/>
+          </a:prstGeom>
+          <a:solidFill>
+            <a:srgbClr val="FFFFFF"/>
+          </a:solidFill>
+          <a:ln w="15875">
+            <a:solidFill>
+              <a:srgbClr val="000000"/>
+            </a:solidFill>
+          </a:ln>
+        </p:spPr>
+        <p:style>
+          <a:lnRef idx="1">
+            <a:schemeClr val="accent1"/>
+          </a:lnRef>
+          <a:fillRef idx="3">
+            <a:schemeClr val="accent1"/>
+          </a:fillRef>
+          <a:effectRef idx="2">
+            <a:schemeClr val="accent1"/>
+          </a:effectRef>
+          <a:fontRef idx="minor">
+            <a:schemeClr val="lt1"/>
+          </a:fontRef>
+        </p:style>
+        <p:txBody>
+          <a:bodyPr rtlCol="0" anchor="ctr"/>
+          <a:lstStyle/>
+          <a:p>
+            <a:pPr algn="ctr">
+              <a:defRPr sz="1100" b="1">
+                <a:solidFill>
+                  <a:srgbClr val="000000"/>
+                </a:solidFill>
+                <a:latin typeface="Times New Roman"/>
+              </a:defRPr>
+            </a:pPr>
+            <a:r>
+              <a:t>Phase IV: Digital Twin &amp; LLM</a:t>
+            </a:r>
+          </a:p>
+        </p:txBody>
+      </p:sp>
+      <p:sp>
+        <p:nvSpPr>
+          <p:cNvPr id="15" name="Rectangle 14"/>
+          <p:cNvSpPr/>
+          <p:nvPr/>
+        </p:nvSpPr>
+        <p:spPr>
+          <a:xfrm>
+            <a:off x="9043416" y="1920240"/>
+            <a:ext cx="2423160" cy="1298448"/>
+          </a:xfrm>
+          <a:prstGeom prst="rect">
+            <a:avLst/>
+          </a:prstGeom>
+          <a:solidFill>
+            <a:srgbClr val="FFFFFF"/>
+          </a:solidFill>
+          <a:ln w="12700">
+            <a:solidFill>
+              <a:srgbClr val="000000"/>
+            </a:solidFill>
+          </a:ln>
+        </p:spPr>
+        <p:style>
+          <a:lnRef idx="1">
+            <a:schemeClr val="accent1"/>
+          </a:lnRef>
+          <a:fillRef idx="3">
+            <a:schemeClr val="accent1"/>
+          </a:fillRef>
+          <a:effectRef idx="2">
+            <a:schemeClr val="accent1"/>
+          </a:effectRef>
+          <a:fontRef idx="minor">
+            <a:schemeClr val="lt1"/>
+          </a:fontRef>
+        </p:style>
+        <p:txBody>
+          <a:bodyPr rtlCol="0" anchor="t" wrap="square" lIns="109728" rIns="109728" tIns="109728"/>
+          <a:lstStyle/>
+          <a:p>
+            <a:pPr algn="ctr">
+              <a:spcAft>
+                <a:spcPts val="400"/>
+              </a:spcAft>
+              <a:defRPr sz="1050" b="1">
+                <a:solidFill>
+                  <a:srgbClr val="000000"/>
+                </a:solidFill>
+                <a:latin typeface="Times New Roman"/>
+              </a:defRPr>
+            </a:pPr>
+            <a:r>
+              <a:t>Chapter 7: GIS &amp; GeoBIM</a:t>
+            </a:r>
+          </a:p>
+          <a:p>
+            <a:pPr>
+              <a:defRPr sz="950">
+                <a:solidFill>
+                  <a:srgbClr val="000000"/>
+                </a:solidFill>
+                <a:latin typeface="Times New Roman"/>
+              </a:defRPr>
+            </a:pPr>
+            <a:r>
+              <a:t>• Spatial database &amp; GeoBIM mapping</a:t>
+            </a:r>
+            <a:br/>
+            <a:r>
+              <a:t>• Defect &amp; Asset Passport attachment</a:t>
+            </a:r>
+          </a:p>
+        </p:txBody>
+      </p:sp>
+      <p:sp>
+        <p:nvSpPr>
+          <p:cNvPr id="16" name="Rectangle 15"/>
+          <p:cNvSpPr/>
+          <p:nvPr/>
+        </p:nvSpPr>
+        <p:spPr>
+          <a:xfrm>
+            <a:off x="9043416" y="3328416"/>
+            <a:ext cx="2423160" cy="1298448"/>
+          </a:xfrm>
+          <a:prstGeom prst="rect">
+            <a:avLst/>
+          </a:prstGeom>
+          <a:solidFill>
+            <a:srgbClr val="FFFFFF"/>
+          </a:solidFill>
+          <a:ln w="12700">
+            <a:solidFill>
+              <a:srgbClr val="000000"/>
+            </a:solidFill>
+          </a:ln>
+        </p:spPr>
+        <p:style>
+          <a:lnRef idx="1">
+            <a:schemeClr val="accent1"/>
+          </a:lnRef>
+          <a:fillRef idx="3">
+            <a:schemeClr val="accent1"/>
+          </a:fillRef>
+          <a:effectRef idx="2">
+            <a:schemeClr val="accent1"/>
+          </a:effectRef>
+          <a:fontRef idx="minor">
+            <a:schemeClr val="lt1"/>
+          </a:fontRef>
+        </p:style>
+        <p:txBody>
+          <a:bodyPr rtlCol="0" anchor="t" wrap="square" lIns="109728" rIns="109728" tIns="109728"/>
+          <a:lstStyle/>
+          <a:p>
+            <a:pPr algn="ctr">
+              <a:spcAft>
+                <a:spcPts val="400"/>
+              </a:spcAft>
+              <a:defRPr sz="1050" b="1">
+                <a:solidFill>
+                  <a:srgbClr val="000000"/>
+                </a:solidFill>
+                <a:latin typeface="Times New Roman"/>
+              </a:defRPr>
+            </a:pPr>
+            <a:r>
+              <a:t>Chapter 8: Digital Twin &amp; LLM</a:t>
+            </a:r>
+          </a:p>
+          <a:p>
+            <a:pPr>
+              <a:defRPr sz="950">
+                <a:solidFill>
+                  <a:srgbClr val="000000"/>
+                </a:solidFill>
+                <a:latin typeface="Times New Roman"/>
+              </a:defRPr>
+            </a:pPr>
+            <a:r>
+              <a:t>• LLM / VLM RAG reasoning</a:t>
+            </a:r>
+            <a:br/>
+            <a:r>
+              <a:t>• Maintenance query &amp; decision support</a:t>
+            </a:r>
+          </a:p>
+        </p:txBody>
+      </p:sp>
+      <p:sp>
+        <p:nvSpPr>
+          <p:cNvPr id="17" name="Rectangle 16"/>
+          <p:cNvSpPr/>
+          <p:nvPr/>
+        </p:nvSpPr>
+        <p:spPr>
+          <a:xfrm>
+            <a:off x="9043416" y="4736592"/>
+            <a:ext cx="2423160" cy="1298448"/>
+          </a:xfrm>
+          <a:prstGeom prst="rect">
+            <a:avLst/>
+          </a:prstGeom>
+          <a:solidFill>
+            <a:srgbClr val="FFFFFF"/>
+          </a:solidFill>
+          <a:ln w="12700">
+            <a:solidFill>
+              <a:srgbClr val="000000"/>
+            </a:solidFill>
+          </a:ln>
+        </p:spPr>
+        <p:style>
+          <a:lnRef idx="1">
+            <a:schemeClr val="accent1"/>
+          </a:lnRef>
+          <a:fillRef idx="3">
+            <a:schemeClr val="accent1"/>
+          </a:fillRef>
+          <a:effectRef idx="2">
+            <a:schemeClr val="accent1"/>
+          </a:effectRef>
+          <a:fontRef idx="minor">
+            <a:schemeClr val="lt1"/>
+          </a:fontRef>
+        </p:style>
+        <p:txBody>
+          <a:bodyPr rtlCol="0" anchor="t" wrap="square" lIns="109728" rIns="109728" tIns="109728"/>
+          <a:lstStyle/>
+          <a:p>
+            <a:pPr algn="ctr">
+              <a:spcAft>
+                <a:spcPts val="400"/>
+              </a:spcAft>
+              <a:defRPr sz="1050" b="1">
+                <a:solidFill>
+                  <a:srgbClr val="000000"/>
+                </a:solidFill>
+                <a:latin typeface="Times New Roman"/>
+              </a:defRPr>
+            </a:pPr>
+            <a:r>
+              <a:t>Chapter 9: Conclusion &amp; Future</a:t>
+            </a:r>
+          </a:p>
+          <a:p>
+            <a:pPr>
+              <a:defRPr sz="950">
+                <a:solidFill>
+                  <a:srgbClr val="000000"/>
+                </a:solidFill>
+                <a:latin typeface="Times New Roman"/>
+              </a:defRPr>
+            </a:pPr>
+            <a:r>
+              <a:t>• Field deployment audit</a:t>
+            </a:r>
+            <a:br/>
+            <a:r>
+              <a:t>• Open challenges &amp; future outlook</a:t>
+            </a:r>
+          </a:p>
+        </p:txBody>
+      </p:sp>
+      <p:sp>
+        <p:nvSpPr>
+          <p:cNvPr id="18" name="TextBox 17"/>
+          <p:cNvSpPr txBox="1"/>
+          <p:nvPr/>
+        </p:nvSpPr>
+        <p:spPr>
+          <a:xfrm>
+            <a:off x="731520" y="6217920"/>
+            <a:ext cx="10728655" cy="365760"/>
+          </a:xfrm>
+          <a:prstGeom prst="rect">
+            <a:avLst/>
+          </a:prstGeom>
+          <a:noFill/>
+        </p:spPr>
+        <p:txBody>
+          <a:bodyPr wrap="none">
+            <a:spAutoFit/>
+          </a:bodyPr>
+          <a:lstStyle/>
+          <a:p>
+            <a:pPr>
+              <a:defRPr sz="1000" b="1">
+                <a:solidFill>
+                  <a:srgbClr val="000000"/>
+                </a:solidFill>
+                <a:latin typeface="Times New Roman"/>
+              </a:defRPr>
+            </a:pPr>
+            <a:r>
+              <a:t>Figure 1.1: End-to-end four-phase methodology and chapter mapping of the monograph.</a:t>
             </a:r>
           </a:p>
         </p:txBody>

--- a/Chapter01_Overall_Pipeline.pptx
+++ b/Chapter01_Overall_Pipeline.pptx
@@ -3097,8 +3097,8 @@
         </p:nvSpPr>
         <p:spPr>
           <a:xfrm>
-            <a:off x="731520" y="411480"/>
-            <a:ext cx="10728655" cy="777240"/>
+            <a:off x="548640" y="365760"/>
+            <a:ext cx="11094415" cy="777240"/>
           </a:xfrm>
           <a:prstGeom prst="rect">
             <a:avLst/>
@@ -3112,7 +3112,7 @@
           <a:lstStyle/>
           <a:p>
             <a:pPr>
-              <a:defRPr sz="2200" b="1">
+              <a:defRPr sz="2000" b="1">
                 <a:solidFill>
                   <a:srgbClr val="000000"/>
                 </a:solidFill>
@@ -3120,12 +3120,12 @@
               </a:defRPr>
             </a:pPr>
             <a:r>
-              <a:t>专著总体框架与章节结构图</a:t>
+              <a:t>专著总体大纲与四阶段技术路线树状映射图</a:t>
             </a:r>
           </a:p>
           <a:p>
             <a:pPr>
-              <a:defRPr sz="1200">
+              <a:defRPr sz="1100">
                 <a:solidFill>
                   <a:srgbClr val="5A5A5A"/>
                 </a:solidFill>
@@ -3140,16 +3140,16 @@
       </p:sp>
       <p:sp>
         <p:nvSpPr>
-          <p:cNvPr id="3" name="Rectangle 2"/>
-          <p:cNvSpPr/>
-          <p:nvPr/>
-        </p:nvSpPr>
-        <p:spPr>
-          <a:xfrm>
-            <a:off x="731520" y="1371600"/>
-            <a:ext cx="2423160" cy="457200"/>
-          </a:xfrm>
-          <a:prstGeom prst="rect">
+          <p:cNvPr id="3" name="Rounded Rectangle 2"/>
+          <p:cNvSpPr/>
+          <p:nvPr/>
+        </p:nvSpPr>
+        <p:spPr>
+          <a:xfrm>
+            <a:off x="548640" y="1234440"/>
+            <a:ext cx="2560320" cy="347472"/>
+          </a:xfrm>
+          <a:prstGeom prst="roundRect">
             <a:avLst/>
           </a:prstGeom>
           <a:solidFill>
@@ -3176,944 +3176,10 @@
           </a:fontRef>
         </p:style>
         <p:txBody>
-          <a:bodyPr rtlCol="0" anchor="ctr"/>
+          <a:bodyPr rtlCol="0" anchor="ctr" lIns="45720" rIns="45720"/>
           <a:lstStyle/>
           <a:p>
             <a:pPr algn="ctr">
-              <a:defRPr sz="1100" b="1">
-                <a:solidFill>
-                  <a:srgbClr val="000000"/>
-                </a:solidFill>
-                <a:latin typeface="Times New Roman"/>
-              </a:defRPr>
-            </a:pPr>
-            <a:r>
-              <a:t>阶段一：自主采集与规划</a:t>
-            </a:r>
-          </a:p>
-        </p:txBody>
-      </p:sp>
-      <p:sp>
-        <p:nvSpPr>
-          <p:cNvPr id="4" name="Rectangle 3"/>
-          <p:cNvSpPr/>
-          <p:nvPr/>
-        </p:nvSpPr>
-        <p:spPr>
-          <a:xfrm>
-            <a:off x="731520" y="1920240"/>
-            <a:ext cx="2423160" cy="2002536"/>
-          </a:xfrm>
-          <a:prstGeom prst="rect">
-            <a:avLst/>
-          </a:prstGeom>
-          <a:solidFill>
-            <a:srgbClr val="FFFFFF"/>
-          </a:solidFill>
-          <a:ln w="12700">
-            <a:solidFill>
-              <a:srgbClr val="000000"/>
-            </a:solidFill>
-          </a:ln>
-        </p:spPr>
-        <p:style>
-          <a:lnRef idx="1">
-            <a:schemeClr val="accent1"/>
-          </a:lnRef>
-          <a:fillRef idx="3">
-            <a:schemeClr val="accent1"/>
-          </a:fillRef>
-          <a:effectRef idx="2">
-            <a:schemeClr val="accent1"/>
-          </a:effectRef>
-          <a:fontRef idx="minor">
-            <a:schemeClr val="lt1"/>
-          </a:fontRef>
-        </p:style>
-        <p:txBody>
-          <a:bodyPr rtlCol="0" anchor="t" wrap="square" lIns="109728" rIns="109728" tIns="109728"/>
-          <a:lstStyle/>
-          <a:p>
-            <a:pPr algn="ctr">
-              <a:spcAft>
-                <a:spcPts val="400"/>
-              </a:spcAft>
-              <a:defRPr sz="1050" b="1">
-                <a:solidFill>
-                  <a:srgbClr val="000000"/>
-                </a:solidFill>
-                <a:latin typeface="Times New Roman"/>
-              </a:defRPr>
-            </a:pPr>
-            <a:r>
-              <a:t>第 2 章：任务规划</a:t>
-            </a:r>
-          </a:p>
-          <a:p>
-            <a:pPr>
-              <a:defRPr sz="950">
-                <a:solidFill>
-                  <a:srgbClr val="000000"/>
-                </a:solidFill>
-                <a:latin typeface="Times New Roman"/>
-              </a:defRPr>
-            </a:pPr>
-            <a:r>
-              <a:t>• 立面巡检覆盖路径规划</a:t>
-            </a:r>
-            <a:br/>
-            <a:r>
-              <a:t>• ROI 区域定义与多机协同</a:t>
-            </a:r>
-          </a:p>
-        </p:txBody>
-      </p:sp>
-      <p:sp>
-        <p:nvSpPr>
-          <p:cNvPr id="5" name="Rectangle 4"/>
-          <p:cNvSpPr/>
-          <p:nvPr/>
-        </p:nvSpPr>
-        <p:spPr>
-          <a:xfrm>
-            <a:off x="731520" y="4032504"/>
-            <a:ext cx="2423160" cy="2002536"/>
-          </a:xfrm>
-          <a:prstGeom prst="rect">
-            <a:avLst/>
-          </a:prstGeom>
-          <a:solidFill>
-            <a:srgbClr val="FFFFFF"/>
-          </a:solidFill>
-          <a:ln w="12700">
-            <a:solidFill>
-              <a:srgbClr val="000000"/>
-            </a:solidFill>
-          </a:ln>
-        </p:spPr>
-        <p:style>
-          <a:lnRef idx="1">
-            <a:schemeClr val="accent1"/>
-          </a:lnRef>
-          <a:fillRef idx="3">
-            <a:schemeClr val="accent1"/>
-          </a:fillRef>
-          <a:effectRef idx="2">
-            <a:schemeClr val="accent1"/>
-          </a:effectRef>
-          <a:fontRef idx="minor">
-            <a:schemeClr val="lt1"/>
-          </a:fontRef>
-        </p:style>
-        <p:txBody>
-          <a:bodyPr rtlCol="0" anchor="t" wrap="square" lIns="109728" rIns="109728" tIns="109728"/>
-          <a:lstStyle/>
-          <a:p>
-            <a:pPr algn="ctr">
-              <a:spcAft>
-                <a:spcPts val="400"/>
-              </a:spcAft>
-              <a:defRPr sz="1050" b="1">
-                <a:solidFill>
-                  <a:srgbClr val="000000"/>
-                </a:solidFill>
-                <a:latin typeface="Times New Roman"/>
-              </a:defRPr>
-            </a:pPr>
-            <a:r>
-              <a:t>第 3 章：运动规划</a:t>
-            </a:r>
-          </a:p>
-          <a:p>
-            <a:pPr>
-              <a:defRPr sz="950">
-                <a:solidFill>
-                  <a:srgbClr val="000000"/>
-                </a:solidFill>
-                <a:latin typeface="Times New Roman"/>
-              </a:defRPr>
-            </a:pPr>
-            <a:r>
-              <a:t>• 实时避障与轨迹优化</a:t>
-            </a:r>
-            <a:br/>
-            <a:r>
-              <a:t>• 风场扰动适应与自主控制</a:t>
-            </a:r>
-          </a:p>
-        </p:txBody>
-      </p:sp>
-      <p:sp>
-        <p:nvSpPr>
-          <p:cNvPr id="6" name="Right Arrow 5"/>
-          <p:cNvSpPr/>
-          <p:nvPr/>
-        </p:nvSpPr>
-        <p:spPr>
-          <a:xfrm>
-            <a:off x="3227832" y="3593592"/>
-            <a:ext cx="201168" cy="219456"/>
-          </a:xfrm>
-          <a:prstGeom prst="rightArrow">
-            <a:avLst/>
-          </a:prstGeom>
-          <a:solidFill>
-            <a:srgbClr val="000000"/>
-          </a:solidFill>
-          <a:ln>
-            <a:noFill/>
-          </a:ln>
-        </p:spPr>
-        <p:style>
-          <a:lnRef idx="1">
-            <a:schemeClr val="accent1"/>
-          </a:lnRef>
-          <a:fillRef idx="3">
-            <a:schemeClr val="accent1"/>
-          </a:fillRef>
-          <a:effectRef idx="2">
-            <a:schemeClr val="accent1"/>
-          </a:effectRef>
-          <a:fontRef idx="minor">
-            <a:schemeClr val="lt1"/>
-          </a:fontRef>
-        </p:style>
-        <p:txBody>
-          <a:bodyPr rtlCol="0" anchor="ctr"/>
-          <a:lstStyle/>
-          <a:p>
-            <a:pPr algn="ctr"/>
-          </a:p>
-        </p:txBody>
-      </p:sp>
-      <p:sp>
-        <p:nvSpPr>
-          <p:cNvPr id="7" name="Rectangle 6"/>
-          <p:cNvSpPr/>
-          <p:nvPr/>
-        </p:nvSpPr>
-        <p:spPr>
-          <a:xfrm>
-            <a:off x="3502152" y="1371600"/>
-            <a:ext cx="2423160" cy="457200"/>
-          </a:xfrm>
-          <a:prstGeom prst="rect">
-            <a:avLst/>
-          </a:prstGeom>
-          <a:solidFill>
-            <a:srgbClr val="FFFFFF"/>
-          </a:solidFill>
-          <a:ln w="15875">
-            <a:solidFill>
-              <a:srgbClr val="000000"/>
-            </a:solidFill>
-          </a:ln>
-        </p:spPr>
-        <p:style>
-          <a:lnRef idx="1">
-            <a:schemeClr val="accent1"/>
-          </a:lnRef>
-          <a:fillRef idx="3">
-            <a:schemeClr val="accent1"/>
-          </a:fillRef>
-          <a:effectRef idx="2">
-            <a:schemeClr val="accent1"/>
-          </a:effectRef>
-          <a:fontRef idx="minor">
-            <a:schemeClr val="lt1"/>
-          </a:fontRef>
-        </p:style>
-        <p:txBody>
-          <a:bodyPr rtlCol="0" anchor="ctr"/>
-          <a:lstStyle/>
-          <a:p>
-            <a:pPr algn="ctr">
-              <a:defRPr sz="1100" b="1">
-                <a:solidFill>
-                  <a:srgbClr val="000000"/>
-                </a:solidFill>
-                <a:latin typeface="Times New Roman"/>
-              </a:defRPr>
-            </a:pPr>
-            <a:r>
-              <a:t>阶段二：重建与数据表达</a:t>
-            </a:r>
-          </a:p>
-        </p:txBody>
-      </p:sp>
-      <p:sp>
-        <p:nvSpPr>
-          <p:cNvPr id="8" name="Rectangle 7"/>
-          <p:cNvSpPr/>
-          <p:nvPr/>
-        </p:nvSpPr>
-        <p:spPr>
-          <a:xfrm>
-            <a:off x="3502152" y="1920240"/>
-            <a:ext cx="2423160" cy="2002536"/>
-          </a:xfrm>
-          <a:prstGeom prst="rect">
-            <a:avLst/>
-          </a:prstGeom>
-          <a:solidFill>
-            <a:srgbClr val="FFFFFF"/>
-          </a:solidFill>
-          <a:ln w="12700">
-            <a:solidFill>
-              <a:srgbClr val="000000"/>
-            </a:solidFill>
-          </a:ln>
-        </p:spPr>
-        <p:style>
-          <a:lnRef idx="1">
-            <a:schemeClr val="accent1"/>
-          </a:lnRef>
-          <a:fillRef idx="3">
-            <a:schemeClr val="accent1"/>
-          </a:fillRef>
-          <a:effectRef idx="2">
-            <a:schemeClr val="accent1"/>
-          </a:effectRef>
-          <a:fontRef idx="minor">
-            <a:schemeClr val="lt1"/>
-          </a:fontRef>
-        </p:style>
-        <p:txBody>
-          <a:bodyPr rtlCol="0" anchor="t" wrap="square" lIns="109728" rIns="109728" tIns="109728"/>
-          <a:lstStyle/>
-          <a:p>
-            <a:pPr algn="ctr">
-              <a:spcAft>
-                <a:spcPts val="400"/>
-              </a:spcAft>
-              <a:defRPr sz="1050" b="1">
-                <a:solidFill>
-                  <a:srgbClr val="000000"/>
-                </a:solidFill>
-                <a:latin typeface="Times New Roman"/>
-              </a:defRPr>
-            </a:pPr>
-            <a:r>
-              <a:t>第 4 章：三维重建</a:t>
-            </a:r>
-          </a:p>
-          <a:p>
-            <a:pPr>
-              <a:defRPr sz="950">
-                <a:solidFill>
-                  <a:srgbClr val="000000"/>
-                </a:solidFill>
-                <a:latin typeface="Times New Roman"/>
-              </a:defRPr>
-            </a:pPr>
-            <a:r>
-              <a:t>• 倾斜摄影测量与点云建模</a:t>
-            </a:r>
-            <a:br/>
-            <a:r>
-              <a:t>• Mesh 构网与 BIM 坐标对齐</a:t>
-            </a:r>
-          </a:p>
-        </p:txBody>
-      </p:sp>
-      <p:sp>
-        <p:nvSpPr>
-          <p:cNvPr id="9" name="Rectangle 8"/>
-          <p:cNvSpPr/>
-          <p:nvPr/>
-        </p:nvSpPr>
-        <p:spPr>
-          <a:xfrm>
-            <a:off x="3502152" y="4032504"/>
-            <a:ext cx="2423160" cy="2002536"/>
-          </a:xfrm>
-          <a:prstGeom prst="rect">
-            <a:avLst/>
-          </a:prstGeom>
-          <a:solidFill>
-            <a:srgbClr val="FFFFFF"/>
-          </a:solidFill>
-          <a:ln w="12700">
-            <a:solidFill>
-              <a:srgbClr val="000000"/>
-            </a:solidFill>
-          </a:ln>
-        </p:spPr>
-        <p:style>
-          <a:lnRef idx="1">
-            <a:schemeClr val="accent1"/>
-          </a:lnRef>
-          <a:fillRef idx="3">
-            <a:schemeClr val="accent1"/>
-          </a:fillRef>
-          <a:effectRef idx="2">
-            <a:schemeClr val="accent1"/>
-          </a:effectRef>
-          <a:fontRef idx="minor">
-            <a:schemeClr val="lt1"/>
-          </a:fontRef>
-        </p:style>
-        <p:txBody>
-          <a:bodyPr rtlCol="0" anchor="t" wrap="square" lIns="109728" rIns="109728" tIns="109728"/>
-          <a:lstStyle/>
-          <a:p>
-            <a:pPr algn="ctr">
-              <a:spcAft>
-                <a:spcPts val="400"/>
-              </a:spcAft>
-              <a:defRPr sz="1050" b="1">
-                <a:solidFill>
-                  <a:srgbClr val="000000"/>
-                </a:solidFill>
-                <a:latin typeface="Times New Roman"/>
-              </a:defRPr>
-            </a:pPr>
-            <a:r>
-              <a:t>第 5 章：巡检数据集</a:t>
-            </a:r>
-          </a:p>
-          <a:p>
-            <a:pPr>
-              <a:defRPr sz="950">
-                <a:solidFill>
-                  <a:srgbClr val="000000"/>
-                </a:solidFill>
-                <a:latin typeface="Times New Roman"/>
-              </a:defRPr>
-            </a:pPr>
-            <a:r>
-              <a:t>• RGB / 热成像多模态采集</a:t>
-            </a:r>
-            <a:br/>
-            <a:r>
-              <a:t>• 缺陷标注规范与基准集</a:t>
-            </a:r>
-          </a:p>
-        </p:txBody>
-      </p:sp>
-      <p:sp>
-        <p:nvSpPr>
-          <p:cNvPr id="10" name="Right Arrow 9"/>
-          <p:cNvSpPr/>
-          <p:nvPr/>
-        </p:nvSpPr>
-        <p:spPr>
-          <a:xfrm>
-            <a:off x="5998464" y="3593592"/>
-            <a:ext cx="201168" cy="219456"/>
-          </a:xfrm>
-          <a:prstGeom prst="rightArrow">
-            <a:avLst/>
-          </a:prstGeom>
-          <a:solidFill>
-            <a:srgbClr val="000000"/>
-          </a:solidFill>
-          <a:ln>
-            <a:noFill/>
-          </a:ln>
-        </p:spPr>
-        <p:style>
-          <a:lnRef idx="1">
-            <a:schemeClr val="accent1"/>
-          </a:lnRef>
-          <a:fillRef idx="3">
-            <a:schemeClr val="accent1"/>
-          </a:fillRef>
-          <a:effectRef idx="2">
-            <a:schemeClr val="accent1"/>
-          </a:effectRef>
-          <a:fontRef idx="minor">
-            <a:schemeClr val="lt1"/>
-          </a:fontRef>
-        </p:style>
-        <p:txBody>
-          <a:bodyPr rtlCol="0" anchor="ctr"/>
-          <a:lstStyle/>
-          <a:p>
-            <a:pPr algn="ctr"/>
-          </a:p>
-        </p:txBody>
-      </p:sp>
-      <p:sp>
-        <p:nvSpPr>
-          <p:cNvPr id="11" name="Rectangle 10"/>
-          <p:cNvSpPr/>
-          <p:nvPr/>
-        </p:nvSpPr>
-        <p:spPr>
-          <a:xfrm>
-            <a:off x="6272784" y="1371600"/>
-            <a:ext cx="2423160" cy="457200"/>
-          </a:xfrm>
-          <a:prstGeom prst="rect">
-            <a:avLst/>
-          </a:prstGeom>
-          <a:solidFill>
-            <a:srgbClr val="FFFFFF"/>
-          </a:solidFill>
-          <a:ln w="15875">
-            <a:solidFill>
-              <a:srgbClr val="000000"/>
-            </a:solidFill>
-          </a:ln>
-        </p:spPr>
-        <p:style>
-          <a:lnRef idx="1">
-            <a:schemeClr val="accent1"/>
-          </a:lnRef>
-          <a:fillRef idx="3">
-            <a:schemeClr val="accent1"/>
-          </a:fillRef>
-          <a:effectRef idx="2">
-            <a:schemeClr val="accent1"/>
-          </a:effectRef>
-          <a:fontRef idx="minor">
-            <a:schemeClr val="lt1"/>
-          </a:fontRef>
-        </p:style>
-        <p:txBody>
-          <a:bodyPr rtlCol="0" anchor="ctr"/>
-          <a:lstStyle/>
-          <a:p>
-            <a:pPr algn="ctr">
-              <a:defRPr sz="1100" b="1">
-                <a:solidFill>
-                  <a:srgbClr val="000000"/>
-                </a:solidFill>
-                <a:latin typeface="Times New Roman"/>
-              </a:defRPr>
-            </a:pPr>
-            <a:r>
-              <a:t>阶段三：AI 缺陷感知</a:t>
-            </a:r>
-          </a:p>
-        </p:txBody>
-      </p:sp>
-      <p:sp>
-        <p:nvSpPr>
-          <p:cNvPr id="12" name="Rectangle 11"/>
-          <p:cNvSpPr/>
-          <p:nvPr/>
-        </p:nvSpPr>
-        <p:spPr>
-          <a:xfrm>
-            <a:off x="6272784" y="1920240"/>
-            <a:ext cx="2423160" cy="4114800"/>
-          </a:xfrm>
-          <a:prstGeom prst="rect">
-            <a:avLst/>
-          </a:prstGeom>
-          <a:solidFill>
-            <a:srgbClr val="FFFFFF"/>
-          </a:solidFill>
-          <a:ln w="12700">
-            <a:solidFill>
-              <a:srgbClr val="000000"/>
-            </a:solidFill>
-          </a:ln>
-        </p:spPr>
-        <p:style>
-          <a:lnRef idx="1">
-            <a:schemeClr val="accent1"/>
-          </a:lnRef>
-          <a:fillRef idx="3">
-            <a:schemeClr val="accent1"/>
-          </a:fillRef>
-          <a:effectRef idx="2">
-            <a:schemeClr val="accent1"/>
-          </a:effectRef>
-          <a:fontRef idx="minor">
-            <a:schemeClr val="lt1"/>
-          </a:fontRef>
-        </p:style>
-        <p:txBody>
-          <a:bodyPr rtlCol="0" anchor="t" wrap="square" lIns="109728" rIns="109728" tIns="109728"/>
-          <a:lstStyle/>
-          <a:p>
-            <a:pPr algn="ctr">
-              <a:spcAft>
-                <a:spcPts val="400"/>
-              </a:spcAft>
-              <a:defRPr sz="1050" b="1">
-                <a:solidFill>
-                  <a:srgbClr val="000000"/>
-                </a:solidFill>
-                <a:latin typeface="Times New Roman"/>
-              </a:defRPr>
-            </a:pPr>
-            <a:r>
-              <a:t>第 6 章：AI 缺陷检测模型</a:t>
-            </a:r>
-          </a:p>
-          <a:p>
-            <a:pPr>
-              <a:defRPr sz="950">
-                <a:solidFill>
-                  <a:srgbClr val="000000"/>
-                </a:solidFill>
-                <a:latin typeface="Times New Roman"/>
-              </a:defRPr>
-            </a:pPr>
-            <a:r>
-              <a:t>• 深度学习目标检测</a:t>
-            </a:r>
-            <a:br/>
-            <a:r>
-              <a:t>• 构件实例分割与定量量化</a:t>
-            </a:r>
-            <a:br/>
-            <a:r>
-              <a:t>• 缺陷严重程度评估</a:t>
-            </a:r>
-          </a:p>
-        </p:txBody>
-      </p:sp>
-      <p:sp>
-        <p:nvSpPr>
-          <p:cNvPr id="13" name="Right Arrow 12"/>
-          <p:cNvSpPr/>
-          <p:nvPr/>
-        </p:nvSpPr>
-        <p:spPr>
-          <a:xfrm>
-            <a:off x="8769096" y="3593592"/>
-            <a:ext cx="201168" cy="219456"/>
-          </a:xfrm>
-          <a:prstGeom prst="rightArrow">
-            <a:avLst/>
-          </a:prstGeom>
-          <a:solidFill>
-            <a:srgbClr val="000000"/>
-          </a:solidFill>
-          <a:ln>
-            <a:noFill/>
-          </a:ln>
-        </p:spPr>
-        <p:style>
-          <a:lnRef idx="1">
-            <a:schemeClr val="accent1"/>
-          </a:lnRef>
-          <a:fillRef idx="3">
-            <a:schemeClr val="accent1"/>
-          </a:fillRef>
-          <a:effectRef idx="2">
-            <a:schemeClr val="accent1"/>
-          </a:effectRef>
-          <a:fontRef idx="minor">
-            <a:schemeClr val="lt1"/>
-          </a:fontRef>
-        </p:style>
-        <p:txBody>
-          <a:bodyPr rtlCol="0" anchor="ctr"/>
-          <a:lstStyle/>
-          <a:p>
-            <a:pPr algn="ctr"/>
-          </a:p>
-        </p:txBody>
-      </p:sp>
-      <p:sp>
-        <p:nvSpPr>
-          <p:cNvPr id="14" name="Rectangle 13"/>
-          <p:cNvSpPr/>
-          <p:nvPr/>
-        </p:nvSpPr>
-        <p:spPr>
-          <a:xfrm>
-            <a:off x="9043416" y="1371600"/>
-            <a:ext cx="2423160" cy="457200"/>
-          </a:xfrm>
-          <a:prstGeom prst="rect">
-            <a:avLst/>
-          </a:prstGeom>
-          <a:solidFill>
-            <a:srgbClr val="FFFFFF"/>
-          </a:solidFill>
-          <a:ln w="15875">
-            <a:solidFill>
-              <a:srgbClr val="000000"/>
-            </a:solidFill>
-          </a:ln>
-        </p:spPr>
-        <p:style>
-          <a:lnRef idx="1">
-            <a:schemeClr val="accent1"/>
-          </a:lnRef>
-          <a:fillRef idx="3">
-            <a:schemeClr val="accent1"/>
-          </a:fillRef>
-          <a:effectRef idx="2">
-            <a:schemeClr val="accent1"/>
-          </a:effectRef>
-          <a:fontRef idx="minor">
-            <a:schemeClr val="lt1"/>
-          </a:fontRef>
-        </p:style>
-        <p:txBody>
-          <a:bodyPr rtlCol="0" anchor="ctr"/>
-          <a:lstStyle/>
-          <a:p>
-            <a:pPr algn="ctr">
-              <a:defRPr sz="1100" b="1">
-                <a:solidFill>
-                  <a:srgbClr val="000000"/>
-                </a:solidFill>
-                <a:latin typeface="Times New Roman"/>
-              </a:defRPr>
-            </a:pPr>
-            <a:r>
-              <a:t>阶段四：数字孪生与决策</a:t>
-            </a:r>
-          </a:p>
-        </p:txBody>
-      </p:sp>
-      <p:sp>
-        <p:nvSpPr>
-          <p:cNvPr id="15" name="Rectangle 14"/>
-          <p:cNvSpPr/>
-          <p:nvPr/>
-        </p:nvSpPr>
-        <p:spPr>
-          <a:xfrm>
-            <a:off x="9043416" y="1920240"/>
-            <a:ext cx="2423160" cy="1298448"/>
-          </a:xfrm>
-          <a:prstGeom prst="rect">
-            <a:avLst/>
-          </a:prstGeom>
-          <a:solidFill>
-            <a:srgbClr val="FFFFFF"/>
-          </a:solidFill>
-          <a:ln w="12700">
-            <a:solidFill>
-              <a:srgbClr val="000000"/>
-            </a:solidFill>
-          </a:ln>
-        </p:spPr>
-        <p:style>
-          <a:lnRef idx="1">
-            <a:schemeClr val="accent1"/>
-          </a:lnRef>
-          <a:fillRef idx="3">
-            <a:schemeClr val="accent1"/>
-          </a:fillRef>
-          <a:effectRef idx="2">
-            <a:schemeClr val="accent1"/>
-          </a:effectRef>
-          <a:fontRef idx="minor">
-            <a:schemeClr val="lt1"/>
-          </a:fontRef>
-        </p:style>
-        <p:txBody>
-          <a:bodyPr rtlCol="0" anchor="t" wrap="square" lIns="109728" rIns="109728" tIns="109728"/>
-          <a:lstStyle/>
-          <a:p>
-            <a:pPr algn="ctr">
-              <a:spcAft>
-                <a:spcPts val="400"/>
-              </a:spcAft>
-              <a:defRPr sz="1050" b="1">
-                <a:solidFill>
-                  <a:srgbClr val="000000"/>
-                </a:solidFill>
-                <a:latin typeface="Times New Roman"/>
-              </a:defRPr>
-            </a:pPr>
-            <a:r>
-              <a:t>第 7 章：GIS 与 GeoBIM 集成</a:t>
-            </a:r>
-          </a:p>
-          <a:p>
-            <a:pPr>
-              <a:defRPr sz="950">
-                <a:solidFill>
-                  <a:srgbClr val="000000"/>
-                </a:solidFill>
-                <a:latin typeface="Times New Roman"/>
-              </a:defRPr>
-            </a:pPr>
-            <a:r>
-              <a:t>• 空间数据库与 GeoBIM 映射</a:t>
-            </a:r>
-            <a:br/>
-            <a:r>
-              <a:t>• 缺陷与资产护照 (Passport) 挂载</a:t>
-            </a:r>
-          </a:p>
-        </p:txBody>
-      </p:sp>
-      <p:sp>
-        <p:nvSpPr>
-          <p:cNvPr id="16" name="Rectangle 15"/>
-          <p:cNvSpPr/>
-          <p:nvPr/>
-        </p:nvSpPr>
-        <p:spPr>
-          <a:xfrm>
-            <a:off x="9043416" y="3328416"/>
-            <a:ext cx="2423160" cy="1298448"/>
-          </a:xfrm>
-          <a:prstGeom prst="rect">
-            <a:avLst/>
-          </a:prstGeom>
-          <a:solidFill>
-            <a:srgbClr val="FFFFFF"/>
-          </a:solidFill>
-          <a:ln w="12700">
-            <a:solidFill>
-              <a:srgbClr val="000000"/>
-            </a:solidFill>
-          </a:ln>
-        </p:spPr>
-        <p:style>
-          <a:lnRef idx="1">
-            <a:schemeClr val="accent1"/>
-          </a:lnRef>
-          <a:fillRef idx="3">
-            <a:schemeClr val="accent1"/>
-          </a:fillRef>
-          <a:effectRef idx="2">
-            <a:schemeClr val="accent1"/>
-          </a:effectRef>
-          <a:fontRef idx="minor">
-            <a:schemeClr val="lt1"/>
-          </a:fontRef>
-        </p:style>
-        <p:txBody>
-          <a:bodyPr rtlCol="0" anchor="t" wrap="square" lIns="109728" rIns="109728" tIns="109728"/>
-          <a:lstStyle/>
-          <a:p>
-            <a:pPr algn="ctr">
-              <a:spcAft>
-                <a:spcPts val="400"/>
-              </a:spcAft>
-              <a:defRPr sz="1050" b="1">
-                <a:solidFill>
-                  <a:srgbClr val="000000"/>
-                </a:solidFill>
-                <a:latin typeface="Times New Roman"/>
-              </a:defRPr>
-            </a:pPr>
-            <a:r>
-              <a:t>第 8 章：数字孪生与大模型</a:t>
-            </a:r>
-          </a:p>
-          <a:p>
-            <a:pPr>
-              <a:defRPr sz="950">
-                <a:solidFill>
-                  <a:srgbClr val="000000"/>
-                </a:solidFill>
-                <a:latin typeface="Times New Roman"/>
-              </a:defRPr>
-            </a:pPr>
-            <a:r>
-              <a:t>• LLM / VLM 检索增强推理 (RAG)</a:t>
-            </a:r>
-            <a:br/>
-            <a:r>
-              <a:t>• 历史维保查询与预测性维护</a:t>
-            </a:r>
-          </a:p>
-        </p:txBody>
-      </p:sp>
-      <p:sp>
-        <p:nvSpPr>
-          <p:cNvPr id="17" name="Rectangle 16"/>
-          <p:cNvSpPr/>
-          <p:nvPr/>
-        </p:nvSpPr>
-        <p:spPr>
-          <a:xfrm>
-            <a:off x="9043416" y="4736592"/>
-            <a:ext cx="2423160" cy="1298448"/>
-          </a:xfrm>
-          <a:prstGeom prst="rect">
-            <a:avLst/>
-          </a:prstGeom>
-          <a:solidFill>
-            <a:srgbClr val="FFFFFF"/>
-          </a:solidFill>
-          <a:ln w="12700">
-            <a:solidFill>
-              <a:srgbClr val="000000"/>
-            </a:solidFill>
-          </a:ln>
-        </p:spPr>
-        <p:style>
-          <a:lnRef idx="1">
-            <a:schemeClr val="accent1"/>
-          </a:lnRef>
-          <a:fillRef idx="3">
-            <a:schemeClr val="accent1"/>
-          </a:fillRef>
-          <a:effectRef idx="2">
-            <a:schemeClr val="accent1"/>
-          </a:effectRef>
-          <a:fontRef idx="minor">
-            <a:schemeClr val="lt1"/>
-          </a:fontRef>
-        </p:style>
-        <p:txBody>
-          <a:bodyPr rtlCol="0" anchor="t" wrap="square" lIns="109728" rIns="109728" tIns="109728"/>
-          <a:lstStyle/>
-          <a:p>
-            <a:pPr algn="ctr">
-              <a:spcAft>
-                <a:spcPts val="400"/>
-              </a:spcAft>
-              <a:defRPr sz="1050" b="1">
-                <a:solidFill>
-                  <a:srgbClr val="000000"/>
-                </a:solidFill>
-                <a:latin typeface="Times New Roman"/>
-              </a:defRPr>
-            </a:pPr>
-            <a:r>
-              <a:t>第 9 章：总结与展望</a:t>
-            </a:r>
-          </a:p>
-          <a:p>
-            <a:pPr>
-              <a:defRPr sz="950">
-                <a:solidFill>
-                  <a:srgbClr val="000000"/>
-                </a:solidFill>
-                <a:latin typeface="Times New Roman"/>
-              </a:defRPr>
-            </a:pPr>
-            <a:r>
-              <a:t>• 现场部署经验审计</a:t>
-            </a:r>
-            <a:br/>
-            <a:r>
-              <a:t>• 开放挑战与下一代系统展望</a:t>
-            </a:r>
-          </a:p>
-        </p:txBody>
-      </p:sp>
-      <p:sp>
-        <p:nvSpPr>
-          <p:cNvPr id="18" name="TextBox 17"/>
-          <p:cNvSpPr txBox="1"/>
-          <p:nvPr/>
-        </p:nvSpPr>
-        <p:spPr>
-          <a:xfrm>
-            <a:off x="731520" y="6217920"/>
-            <a:ext cx="10728655" cy="365760"/>
-          </a:xfrm>
-          <a:prstGeom prst="rect">
-            <a:avLst/>
-          </a:prstGeom>
-          <a:noFill/>
-        </p:spPr>
-        <p:txBody>
-          <a:bodyPr wrap="none">
-            <a:spAutoFit/>
-          </a:bodyPr>
-          <a:lstStyle/>
-          <a:p>
-            <a:pPr>
               <a:defRPr sz="1000" b="1">
                 <a:solidFill>
                   <a:srgbClr val="000000"/>
@@ -4122,7 +3188,3743 @@
               </a:defRPr>
             </a:pPr>
             <a:r>
-              <a:t>图 1.1：专著四阶段端到端技术路线与章节映射关系（从物理采集、三维重建到大模型决策支持）</a:t>
+              <a:t>阶段一：智能数据采集</a:t>
+            </a:r>
+          </a:p>
+        </p:txBody>
+      </p:sp>
+      <p:sp>
+        <p:nvSpPr>
+          <p:cNvPr id="4" name="Rectangle 3"/>
+          <p:cNvSpPr/>
+          <p:nvPr/>
+        </p:nvSpPr>
+        <p:spPr>
+          <a:xfrm>
+            <a:off x="1824228" y="1581912"/>
+            <a:ext cx="9144" cy="2852928"/>
+          </a:xfrm>
+          <a:prstGeom prst="rect">
+            <a:avLst/>
+          </a:prstGeom>
+          <a:solidFill>
+            <a:srgbClr val="282828"/>
+          </a:solidFill>
+          <a:ln>
+            <a:noFill/>
+          </a:ln>
+        </p:spPr>
+        <p:style>
+          <a:lnRef idx="1">
+            <a:schemeClr val="accent1"/>
+          </a:lnRef>
+          <a:fillRef idx="3">
+            <a:schemeClr val="accent1"/>
+          </a:fillRef>
+          <a:effectRef idx="2">
+            <a:schemeClr val="accent1"/>
+          </a:effectRef>
+          <a:fontRef idx="minor">
+            <a:schemeClr val="lt1"/>
+          </a:fontRef>
+        </p:style>
+        <p:txBody>
+          <a:bodyPr rtlCol="0" anchor="ctr"/>
+          <a:lstStyle/>
+          <a:p>
+            <a:pPr algn="ctr"/>
+          </a:p>
+        </p:txBody>
+      </p:sp>
+      <p:sp>
+        <p:nvSpPr>
+          <p:cNvPr id="5" name="Rounded Rectangle 4"/>
+          <p:cNvSpPr/>
+          <p:nvPr/>
+        </p:nvSpPr>
+        <p:spPr>
+          <a:xfrm>
+            <a:off x="662940" y="1920240"/>
+            <a:ext cx="2331720" cy="329184"/>
+          </a:xfrm>
+          <a:prstGeom prst="roundRect">
+            <a:avLst/>
+          </a:prstGeom>
+          <a:solidFill>
+            <a:srgbClr val="FFFFFF"/>
+          </a:solidFill>
+          <a:ln w="12700">
+            <a:solidFill>
+              <a:srgbClr val="000000"/>
+            </a:solidFill>
+          </a:ln>
+        </p:spPr>
+        <p:style>
+          <a:lnRef idx="1">
+            <a:schemeClr val="accent1"/>
+          </a:lnRef>
+          <a:fillRef idx="3">
+            <a:schemeClr val="accent1"/>
+          </a:fillRef>
+          <a:effectRef idx="2">
+            <a:schemeClr val="accent1"/>
+          </a:effectRef>
+          <a:fontRef idx="minor">
+            <a:schemeClr val="lt1"/>
+          </a:fontRef>
+        </p:style>
+        <p:txBody>
+          <a:bodyPr rtlCol="0" anchor="ctr" lIns="73152" rIns="73152"/>
+          <a:lstStyle/>
+          <a:p>
+            <a:pPr algn="ctr">
+              <a:defRPr sz="919" b="1">
+                <a:solidFill>
+                  <a:srgbClr val="000000"/>
+                </a:solidFill>
+                <a:latin typeface="Times New Roman"/>
+              </a:defRPr>
+            </a:pPr>
+            <a:r>
+              <a:t>第 2 章：无人机任务规划 （Xinyi Wang）</a:t>
+            </a:r>
+          </a:p>
+        </p:txBody>
+      </p:sp>
+      <p:sp>
+        <p:nvSpPr>
+          <p:cNvPr id="6" name="Rectangle 5"/>
+          <p:cNvSpPr/>
+          <p:nvPr/>
+        </p:nvSpPr>
+        <p:spPr>
+          <a:xfrm>
+            <a:off x="736092" y="2249424"/>
+            <a:ext cx="7315" cy="621792"/>
+          </a:xfrm>
+          <a:prstGeom prst="rect">
+            <a:avLst/>
+          </a:prstGeom>
+          <a:solidFill>
+            <a:srgbClr val="282828"/>
+          </a:solidFill>
+          <a:ln>
+            <a:noFill/>
+          </a:ln>
+        </p:spPr>
+        <p:style>
+          <a:lnRef idx="1">
+            <a:schemeClr val="accent1"/>
+          </a:lnRef>
+          <a:fillRef idx="3">
+            <a:schemeClr val="accent1"/>
+          </a:fillRef>
+          <a:effectRef idx="2">
+            <a:schemeClr val="accent1"/>
+          </a:effectRef>
+          <a:fontRef idx="minor">
+            <a:schemeClr val="lt1"/>
+          </a:fontRef>
+        </p:style>
+        <p:txBody>
+          <a:bodyPr rtlCol="0" anchor="ctr"/>
+          <a:lstStyle/>
+          <a:p>
+            <a:pPr algn="ctr"/>
+          </a:p>
+        </p:txBody>
+      </p:sp>
+      <p:sp>
+        <p:nvSpPr>
+          <p:cNvPr id="7" name="Rectangle 6"/>
+          <p:cNvSpPr/>
+          <p:nvPr/>
+        </p:nvSpPr>
+        <p:spPr>
+          <a:xfrm>
+            <a:off x="736092" y="2395728"/>
+            <a:ext cx="73152" cy="7315"/>
+          </a:xfrm>
+          <a:prstGeom prst="rect">
+            <a:avLst/>
+          </a:prstGeom>
+          <a:solidFill>
+            <a:srgbClr val="282828"/>
+          </a:solidFill>
+          <a:ln>
+            <a:noFill/>
+          </a:ln>
+        </p:spPr>
+        <p:style>
+          <a:lnRef idx="1">
+            <a:schemeClr val="accent1"/>
+          </a:lnRef>
+          <a:fillRef idx="3">
+            <a:schemeClr val="accent1"/>
+          </a:fillRef>
+          <a:effectRef idx="2">
+            <a:schemeClr val="accent1"/>
+          </a:effectRef>
+          <a:fontRef idx="minor">
+            <a:schemeClr val="lt1"/>
+          </a:fontRef>
+        </p:style>
+        <p:txBody>
+          <a:bodyPr rtlCol="0" anchor="ctr"/>
+          <a:lstStyle/>
+          <a:p>
+            <a:pPr algn="ctr"/>
+          </a:p>
+        </p:txBody>
+      </p:sp>
+      <p:sp>
+        <p:nvSpPr>
+          <p:cNvPr id="8" name="Rounded Rectangle 7"/>
+          <p:cNvSpPr/>
+          <p:nvPr/>
+        </p:nvSpPr>
+        <p:spPr>
+          <a:xfrm>
+            <a:off x="827532" y="2304288"/>
+            <a:ext cx="2084831" cy="219456"/>
+          </a:xfrm>
+          <a:prstGeom prst="roundRect">
+            <a:avLst/>
+          </a:prstGeom>
+          <a:solidFill>
+            <a:srgbClr val="FFFFFF"/>
+          </a:solidFill>
+          <a:ln w="6350">
+            <a:solidFill>
+              <a:srgbClr val="282828"/>
+            </a:solidFill>
+          </a:ln>
+        </p:spPr>
+        <p:style>
+          <a:lnRef idx="1">
+            <a:schemeClr val="accent1"/>
+          </a:lnRef>
+          <a:fillRef idx="3">
+            <a:schemeClr val="accent1"/>
+          </a:fillRef>
+          <a:effectRef idx="2">
+            <a:schemeClr val="accent1"/>
+          </a:effectRef>
+          <a:fontRef idx="minor">
+            <a:schemeClr val="lt1"/>
+          </a:fontRef>
+        </p:style>
+        <p:txBody>
+          <a:bodyPr rtlCol="0" anchor="ctr" lIns="54864" rIns="54864"/>
+          <a:lstStyle/>
+          <a:p>
+            <a:pPr algn="ctr">
+              <a:defRPr sz="819">
+                <a:solidFill>
+                  <a:srgbClr val="000000"/>
+                </a:solidFill>
+                <a:latin typeface="Times New Roman"/>
+              </a:defRPr>
+            </a:pPr>
+            <a:r>
+              <a:t>2.2 多机协同与任务分配</a:t>
+            </a:r>
+          </a:p>
+        </p:txBody>
+      </p:sp>
+      <p:sp>
+        <p:nvSpPr>
+          <p:cNvPr id="9" name="Rectangle 8"/>
+          <p:cNvSpPr/>
+          <p:nvPr/>
+        </p:nvSpPr>
+        <p:spPr>
+          <a:xfrm>
+            <a:off x="736092" y="2651760"/>
+            <a:ext cx="73152" cy="7315"/>
+          </a:xfrm>
+          <a:prstGeom prst="rect">
+            <a:avLst/>
+          </a:prstGeom>
+          <a:solidFill>
+            <a:srgbClr val="282828"/>
+          </a:solidFill>
+          <a:ln>
+            <a:noFill/>
+          </a:ln>
+        </p:spPr>
+        <p:style>
+          <a:lnRef idx="1">
+            <a:schemeClr val="accent1"/>
+          </a:lnRef>
+          <a:fillRef idx="3">
+            <a:schemeClr val="accent1"/>
+          </a:fillRef>
+          <a:effectRef idx="2">
+            <a:schemeClr val="accent1"/>
+          </a:effectRef>
+          <a:fontRef idx="minor">
+            <a:schemeClr val="lt1"/>
+          </a:fontRef>
+        </p:style>
+        <p:txBody>
+          <a:bodyPr rtlCol="0" anchor="ctr"/>
+          <a:lstStyle/>
+          <a:p>
+            <a:pPr algn="ctr"/>
+          </a:p>
+        </p:txBody>
+      </p:sp>
+      <p:sp>
+        <p:nvSpPr>
+          <p:cNvPr id="10" name="Rounded Rectangle 9"/>
+          <p:cNvSpPr/>
+          <p:nvPr/>
+        </p:nvSpPr>
+        <p:spPr>
+          <a:xfrm>
+            <a:off x="827532" y="2560320"/>
+            <a:ext cx="2084831" cy="219456"/>
+          </a:xfrm>
+          <a:prstGeom prst="roundRect">
+            <a:avLst/>
+          </a:prstGeom>
+          <a:solidFill>
+            <a:srgbClr val="FFFFFF"/>
+          </a:solidFill>
+          <a:ln w="6350">
+            <a:solidFill>
+              <a:srgbClr val="282828"/>
+            </a:solidFill>
+          </a:ln>
+        </p:spPr>
+        <p:style>
+          <a:lnRef idx="1">
+            <a:schemeClr val="accent1"/>
+          </a:lnRef>
+          <a:fillRef idx="3">
+            <a:schemeClr val="accent1"/>
+          </a:fillRef>
+          <a:effectRef idx="2">
+            <a:schemeClr val="accent1"/>
+          </a:effectRef>
+          <a:fontRef idx="minor">
+            <a:schemeClr val="lt1"/>
+          </a:fontRef>
+        </p:style>
+        <p:txBody>
+          <a:bodyPr rtlCol="0" anchor="ctr" lIns="54864" rIns="54864"/>
+          <a:lstStyle/>
+          <a:p>
+            <a:pPr algn="ctr">
+              <a:defRPr sz="819">
+                <a:solidFill>
+                  <a:srgbClr val="000000"/>
+                </a:solidFill>
+                <a:latin typeface="Times New Roman"/>
+              </a:defRPr>
+            </a:pPr>
+            <a:r>
+              <a:t>2.4 立面巡检覆盖路径规划</a:t>
+            </a:r>
+          </a:p>
+        </p:txBody>
+      </p:sp>
+      <p:sp>
+        <p:nvSpPr>
+          <p:cNvPr id="11" name="Rectangle 10"/>
+          <p:cNvSpPr/>
+          <p:nvPr/>
+        </p:nvSpPr>
+        <p:spPr>
+          <a:xfrm>
+            <a:off x="736092" y="2907792"/>
+            <a:ext cx="73152" cy="7315"/>
+          </a:xfrm>
+          <a:prstGeom prst="rect">
+            <a:avLst/>
+          </a:prstGeom>
+          <a:solidFill>
+            <a:srgbClr val="282828"/>
+          </a:solidFill>
+          <a:ln>
+            <a:noFill/>
+          </a:ln>
+        </p:spPr>
+        <p:style>
+          <a:lnRef idx="1">
+            <a:schemeClr val="accent1"/>
+          </a:lnRef>
+          <a:fillRef idx="3">
+            <a:schemeClr val="accent1"/>
+          </a:fillRef>
+          <a:effectRef idx="2">
+            <a:schemeClr val="accent1"/>
+          </a:effectRef>
+          <a:fontRef idx="minor">
+            <a:schemeClr val="lt1"/>
+          </a:fontRef>
+        </p:style>
+        <p:txBody>
+          <a:bodyPr rtlCol="0" anchor="ctr"/>
+          <a:lstStyle/>
+          <a:p>
+            <a:pPr algn="ctr"/>
+          </a:p>
+        </p:txBody>
+      </p:sp>
+      <p:sp>
+        <p:nvSpPr>
+          <p:cNvPr id="12" name="Rounded Rectangle 11"/>
+          <p:cNvSpPr/>
+          <p:nvPr/>
+        </p:nvSpPr>
+        <p:spPr>
+          <a:xfrm>
+            <a:off x="827532" y="2816352"/>
+            <a:ext cx="2084831" cy="219456"/>
+          </a:xfrm>
+          <a:prstGeom prst="roundRect">
+            <a:avLst/>
+          </a:prstGeom>
+          <a:solidFill>
+            <a:srgbClr val="FFFFFF"/>
+          </a:solidFill>
+          <a:ln w="6350">
+            <a:solidFill>
+              <a:srgbClr val="282828"/>
+            </a:solidFill>
+          </a:ln>
+        </p:spPr>
+        <p:style>
+          <a:lnRef idx="1">
+            <a:schemeClr val="accent1"/>
+          </a:lnRef>
+          <a:fillRef idx="3">
+            <a:schemeClr val="accent1"/>
+          </a:fillRef>
+          <a:effectRef idx="2">
+            <a:schemeClr val="accent1"/>
+          </a:effectRef>
+          <a:fontRef idx="minor">
+            <a:schemeClr val="lt1"/>
+          </a:fontRef>
+        </p:style>
+        <p:txBody>
+          <a:bodyPr rtlCol="0" anchor="ctr" lIns="54864" rIns="54864"/>
+          <a:lstStyle/>
+          <a:p>
+            <a:pPr algn="ctr">
+              <a:defRPr sz="819">
+                <a:solidFill>
+                  <a:srgbClr val="000000"/>
+                </a:solidFill>
+                <a:latin typeface="Times New Roman"/>
+              </a:defRPr>
+            </a:pPr>
+            <a:r>
+              <a:t>2.5 能耗感知优化控制</a:t>
+            </a:r>
+          </a:p>
+        </p:txBody>
+      </p:sp>
+      <p:sp>
+        <p:nvSpPr>
+          <p:cNvPr id="13" name="Rounded Rectangle 12"/>
+          <p:cNvSpPr/>
+          <p:nvPr/>
+        </p:nvSpPr>
+        <p:spPr>
+          <a:xfrm>
+            <a:off x="662940" y="4434840"/>
+            <a:ext cx="2331720" cy="329184"/>
+          </a:xfrm>
+          <a:prstGeom prst="roundRect">
+            <a:avLst/>
+          </a:prstGeom>
+          <a:solidFill>
+            <a:srgbClr val="FFFFFF"/>
+          </a:solidFill>
+          <a:ln w="12700">
+            <a:solidFill>
+              <a:srgbClr val="000000"/>
+            </a:solidFill>
+          </a:ln>
+        </p:spPr>
+        <p:style>
+          <a:lnRef idx="1">
+            <a:schemeClr val="accent1"/>
+          </a:lnRef>
+          <a:fillRef idx="3">
+            <a:schemeClr val="accent1"/>
+          </a:fillRef>
+          <a:effectRef idx="2">
+            <a:schemeClr val="accent1"/>
+          </a:effectRef>
+          <a:fontRef idx="minor">
+            <a:schemeClr val="lt1"/>
+          </a:fontRef>
+        </p:style>
+        <p:txBody>
+          <a:bodyPr rtlCol="0" anchor="ctr" lIns="73152" rIns="73152"/>
+          <a:lstStyle/>
+          <a:p>
+            <a:pPr algn="ctr">
+              <a:defRPr sz="919" b="1">
+                <a:solidFill>
+                  <a:srgbClr val="000000"/>
+                </a:solidFill>
+                <a:latin typeface="Times New Roman"/>
+              </a:defRPr>
+            </a:pPr>
+            <a:r>
+              <a:t>第 3 章：环境运动规划 （Chuanxiang Gao）</a:t>
+            </a:r>
+          </a:p>
+        </p:txBody>
+      </p:sp>
+      <p:sp>
+        <p:nvSpPr>
+          <p:cNvPr id="14" name="Rectangle 13"/>
+          <p:cNvSpPr/>
+          <p:nvPr/>
+        </p:nvSpPr>
+        <p:spPr>
+          <a:xfrm>
+            <a:off x="736092" y="4764024"/>
+            <a:ext cx="7315" cy="621792"/>
+          </a:xfrm>
+          <a:prstGeom prst="rect">
+            <a:avLst/>
+          </a:prstGeom>
+          <a:solidFill>
+            <a:srgbClr val="282828"/>
+          </a:solidFill>
+          <a:ln>
+            <a:noFill/>
+          </a:ln>
+        </p:spPr>
+        <p:style>
+          <a:lnRef idx="1">
+            <a:schemeClr val="accent1"/>
+          </a:lnRef>
+          <a:fillRef idx="3">
+            <a:schemeClr val="accent1"/>
+          </a:fillRef>
+          <a:effectRef idx="2">
+            <a:schemeClr val="accent1"/>
+          </a:effectRef>
+          <a:fontRef idx="minor">
+            <a:schemeClr val="lt1"/>
+          </a:fontRef>
+        </p:style>
+        <p:txBody>
+          <a:bodyPr rtlCol="0" anchor="ctr"/>
+          <a:lstStyle/>
+          <a:p>
+            <a:pPr algn="ctr"/>
+          </a:p>
+        </p:txBody>
+      </p:sp>
+      <p:sp>
+        <p:nvSpPr>
+          <p:cNvPr id="15" name="Rectangle 14"/>
+          <p:cNvSpPr/>
+          <p:nvPr/>
+        </p:nvSpPr>
+        <p:spPr>
+          <a:xfrm>
+            <a:off x="736092" y="4910328"/>
+            <a:ext cx="73152" cy="7315"/>
+          </a:xfrm>
+          <a:prstGeom prst="rect">
+            <a:avLst/>
+          </a:prstGeom>
+          <a:solidFill>
+            <a:srgbClr val="282828"/>
+          </a:solidFill>
+          <a:ln>
+            <a:noFill/>
+          </a:ln>
+        </p:spPr>
+        <p:style>
+          <a:lnRef idx="1">
+            <a:schemeClr val="accent1"/>
+          </a:lnRef>
+          <a:fillRef idx="3">
+            <a:schemeClr val="accent1"/>
+          </a:fillRef>
+          <a:effectRef idx="2">
+            <a:schemeClr val="accent1"/>
+          </a:effectRef>
+          <a:fontRef idx="minor">
+            <a:schemeClr val="lt1"/>
+          </a:fontRef>
+        </p:style>
+        <p:txBody>
+          <a:bodyPr rtlCol="0" anchor="ctr"/>
+          <a:lstStyle/>
+          <a:p>
+            <a:pPr algn="ctr"/>
+          </a:p>
+        </p:txBody>
+      </p:sp>
+      <p:sp>
+        <p:nvSpPr>
+          <p:cNvPr id="16" name="Rounded Rectangle 15"/>
+          <p:cNvSpPr/>
+          <p:nvPr/>
+        </p:nvSpPr>
+        <p:spPr>
+          <a:xfrm>
+            <a:off x="827532" y="4818888"/>
+            <a:ext cx="2084831" cy="219456"/>
+          </a:xfrm>
+          <a:prstGeom prst="roundRect">
+            <a:avLst/>
+          </a:prstGeom>
+          <a:solidFill>
+            <a:srgbClr val="FFFFFF"/>
+          </a:solidFill>
+          <a:ln w="6350">
+            <a:solidFill>
+              <a:srgbClr val="282828"/>
+            </a:solidFill>
+          </a:ln>
+        </p:spPr>
+        <p:style>
+          <a:lnRef idx="1">
+            <a:schemeClr val="accent1"/>
+          </a:lnRef>
+          <a:fillRef idx="3">
+            <a:schemeClr val="accent1"/>
+          </a:fillRef>
+          <a:effectRef idx="2">
+            <a:schemeClr val="accent1"/>
+          </a:effectRef>
+          <a:fontRef idx="minor">
+            <a:schemeClr val="lt1"/>
+          </a:fontRef>
+        </p:style>
+        <p:txBody>
+          <a:bodyPr rtlCol="0" anchor="ctr" lIns="54864" rIns="54864"/>
+          <a:lstStyle/>
+          <a:p>
+            <a:pPr algn="ctr">
+              <a:defRPr sz="819">
+                <a:solidFill>
+                  <a:srgbClr val="000000"/>
+                </a:solidFill>
+                <a:latin typeface="Times New Roman"/>
+              </a:defRPr>
+            </a:pPr>
+            <a:r>
+              <a:t>3.2 实时建图与定位</a:t>
+            </a:r>
+          </a:p>
+        </p:txBody>
+      </p:sp>
+      <p:sp>
+        <p:nvSpPr>
+          <p:cNvPr id="17" name="Rectangle 16"/>
+          <p:cNvSpPr/>
+          <p:nvPr/>
+        </p:nvSpPr>
+        <p:spPr>
+          <a:xfrm>
+            <a:off x="736092" y="5166360"/>
+            <a:ext cx="73152" cy="7315"/>
+          </a:xfrm>
+          <a:prstGeom prst="rect">
+            <a:avLst/>
+          </a:prstGeom>
+          <a:solidFill>
+            <a:srgbClr val="282828"/>
+          </a:solidFill>
+          <a:ln>
+            <a:noFill/>
+          </a:ln>
+        </p:spPr>
+        <p:style>
+          <a:lnRef idx="1">
+            <a:schemeClr val="accent1"/>
+          </a:lnRef>
+          <a:fillRef idx="3">
+            <a:schemeClr val="accent1"/>
+          </a:fillRef>
+          <a:effectRef idx="2">
+            <a:schemeClr val="accent1"/>
+          </a:effectRef>
+          <a:fontRef idx="minor">
+            <a:schemeClr val="lt1"/>
+          </a:fontRef>
+        </p:style>
+        <p:txBody>
+          <a:bodyPr rtlCol="0" anchor="ctr"/>
+          <a:lstStyle/>
+          <a:p>
+            <a:pPr algn="ctr"/>
+          </a:p>
+        </p:txBody>
+      </p:sp>
+      <p:sp>
+        <p:nvSpPr>
+          <p:cNvPr id="18" name="Rounded Rectangle 17"/>
+          <p:cNvSpPr/>
+          <p:nvPr/>
+        </p:nvSpPr>
+        <p:spPr>
+          <a:xfrm>
+            <a:off x="827532" y="5074920"/>
+            <a:ext cx="2084831" cy="219456"/>
+          </a:xfrm>
+          <a:prstGeom prst="roundRect">
+            <a:avLst/>
+          </a:prstGeom>
+          <a:solidFill>
+            <a:srgbClr val="FFFFFF"/>
+          </a:solidFill>
+          <a:ln w="6350">
+            <a:solidFill>
+              <a:srgbClr val="282828"/>
+            </a:solidFill>
+          </a:ln>
+        </p:spPr>
+        <p:style>
+          <a:lnRef idx="1">
+            <a:schemeClr val="accent1"/>
+          </a:lnRef>
+          <a:fillRef idx="3">
+            <a:schemeClr val="accent1"/>
+          </a:fillRef>
+          <a:effectRef idx="2">
+            <a:schemeClr val="accent1"/>
+          </a:effectRef>
+          <a:fontRef idx="minor">
+            <a:schemeClr val="lt1"/>
+          </a:fontRef>
+        </p:style>
+        <p:txBody>
+          <a:bodyPr rtlCol="0" anchor="ctr" lIns="54864" rIns="54864"/>
+          <a:lstStyle/>
+          <a:p>
+            <a:pPr algn="ctr">
+              <a:defRPr sz="819">
+                <a:solidFill>
+                  <a:srgbClr val="000000"/>
+                </a:solidFill>
+                <a:latin typeface="Times New Roman"/>
+              </a:defRPr>
+            </a:pPr>
+            <a:r>
+              <a:t>3.3 复杂环境避障轨迹生成</a:t>
+            </a:r>
+          </a:p>
+        </p:txBody>
+      </p:sp>
+      <p:sp>
+        <p:nvSpPr>
+          <p:cNvPr id="19" name="Rectangle 18"/>
+          <p:cNvSpPr/>
+          <p:nvPr/>
+        </p:nvSpPr>
+        <p:spPr>
+          <a:xfrm>
+            <a:off x="736092" y="5422392"/>
+            <a:ext cx="73152" cy="7315"/>
+          </a:xfrm>
+          <a:prstGeom prst="rect">
+            <a:avLst/>
+          </a:prstGeom>
+          <a:solidFill>
+            <a:srgbClr val="282828"/>
+          </a:solidFill>
+          <a:ln>
+            <a:noFill/>
+          </a:ln>
+        </p:spPr>
+        <p:style>
+          <a:lnRef idx="1">
+            <a:schemeClr val="accent1"/>
+          </a:lnRef>
+          <a:fillRef idx="3">
+            <a:schemeClr val="accent1"/>
+          </a:fillRef>
+          <a:effectRef idx="2">
+            <a:schemeClr val="accent1"/>
+          </a:effectRef>
+          <a:fontRef idx="minor">
+            <a:schemeClr val="lt1"/>
+          </a:fontRef>
+        </p:style>
+        <p:txBody>
+          <a:bodyPr rtlCol="0" anchor="ctr"/>
+          <a:lstStyle/>
+          <a:p>
+            <a:pPr algn="ctr"/>
+          </a:p>
+        </p:txBody>
+      </p:sp>
+      <p:sp>
+        <p:nvSpPr>
+          <p:cNvPr id="20" name="Rounded Rectangle 19"/>
+          <p:cNvSpPr/>
+          <p:nvPr/>
+        </p:nvSpPr>
+        <p:spPr>
+          <a:xfrm>
+            <a:off x="827532" y="5330952"/>
+            <a:ext cx="2084831" cy="219456"/>
+          </a:xfrm>
+          <a:prstGeom prst="roundRect">
+            <a:avLst/>
+          </a:prstGeom>
+          <a:solidFill>
+            <a:srgbClr val="FFFFFF"/>
+          </a:solidFill>
+          <a:ln w="6350">
+            <a:solidFill>
+              <a:srgbClr val="282828"/>
+            </a:solidFill>
+          </a:ln>
+        </p:spPr>
+        <p:style>
+          <a:lnRef idx="1">
+            <a:schemeClr val="accent1"/>
+          </a:lnRef>
+          <a:fillRef idx="3">
+            <a:schemeClr val="accent1"/>
+          </a:fillRef>
+          <a:effectRef idx="2">
+            <a:schemeClr val="accent1"/>
+          </a:effectRef>
+          <a:fontRef idx="minor">
+            <a:schemeClr val="lt1"/>
+          </a:fontRef>
+        </p:style>
+        <p:txBody>
+          <a:bodyPr rtlCol="0" anchor="ctr" lIns="54864" rIns="54864"/>
+          <a:lstStyle/>
+          <a:p>
+            <a:pPr algn="ctr">
+              <a:defRPr sz="819">
+                <a:solidFill>
+                  <a:srgbClr val="000000"/>
+                </a:solidFill>
+                <a:latin typeface="Times New Roman"/>
+              </a:defRPr>
+            </a:pPr>
+            <a:r>
+              <a:t>3.4 风场扰动下自主控制</a:t>
+            </a:r>
+          </a:p>
+        </p:txBody>
+      </p:sp>
+      <p:sp>
+        <p:nvSpPr>
+          <p:cNvPr id="21" name="Right Arrow 20"/>
+          <p:cNvSpPr/>
+          <p:nvPr/>
+        </p:nvSpPr>
+        <p:spPr>
+          <a:xfrm>
+            <a:off x="3127248" y="1307592"/>
+            <a:ext cx="182880" cy="201168"/>
+          </a:xfrm>
+          <a:prstGeom prst="rightArrow">
+            <a:avLst/>
+          </a:prstGeom>
+          <a:solidFill>
+            <a:srgbClr val="000000"/>
+          </a:solidFill>
+          <a:ln>
+            <a:noFill/>
+          </a:ln>
+        </p:spPr>
+        <p:style>
+          <a:lnRef idx="1">
+            <a:schemeClr val="accent1"/>
+          </a:lnRef>
+          <a:fillRef idx="3">
+            <a:schemeClr val="accent1"/>
+          </a:fillRef>
+          <a:effectRef idx="2">
+            <a:schemeClr val="accent1"/>
+          </a:effectRef>
+          <a:fontRef idx="minor">
+            <a:schemeClr val="lt1"/>
+          </a:fontRef>
+        </p:style>
+        <p:txBody>
+          <a:bodyPr rtlCol="0" anchor="ctr"/>
+          <a:lstStyle/>
+          <a:p>
+            <a:pPr algn="ctr"/>
+          </a:p>
+        </p:txBody>
+      </p:sp>
+      <p:sp>
+        <p:nvSpPr>
+          <p:cNvPr id="22" name="Rounded Rectangle 21"/>
+          <p:cNvSpPr/>
+          <p:nvPr/>
+        </p:nvSpPr>
+        <p:spPr>
+          <a:xfrm>
+            <a:off x="3328416" y="1234440"/>
+            <a:ext cx="2560320" cy="347472"/>
+          </a:xfrm>
+          <a:prstGeom prst="roundRect">
+            <a:avLst/>
+          </a:prstGeom>
+          <a:solidFill>
+            <a:srgbClr val="FFFFFF"/>
+          </a:solidFill>
+          <a:ln w="15875">
+            <a:solidFill>
+              <a:srgbClr val="000000"/>
+            </a:solidFill>
+          </a:ln>
+        </p:spPr>
+        <p:style>
+          <a:lnRef idx="1">
+            <a:schemeClr val="accent1"/>
+          </a:lnRef>
+          <a:fillRef idx="3">
+            <a:schemeClr val="accent1"/>
+          </a:fillRef>
+          <a:effectRef idx="2">
+            <a:schemeClr val="accent1"/>
+          </a:effectRef>
+          <a:fontRef idx="minor">
+            <a:schemeClr val="lt1"/>
+          </a:fontRef>
+        </p:style>
+        <p:txBody>
+          <a:bodyPr rtlCol="0" anchor="ctr" lIns="45720" rIns="45720"/>
+          <a:lstStyle/>
+          <a:p>
+            <a:pPr algn="ctr">
+              <a:defRPr sz="1000" b="1">
+                <a:solidFill>
+                  <a:srgbClr val="000000"/>
+                </a:solidFill>
+                <a:latin typeface="Times New Roman"/>
+              </a:defRPr>
+            </a:pPr>
+            <a:r>
+              <a:t>阶段二：三维表达与数据基准</a:t>
+            </a:r>
+          </a:p>
+        </p:txBody>
+      </p:sp>
+      <p:sp>
+        <p:nvSpPr>
+          <p:cNvPr id="23" name="Rectangle 22"/>
+          <p:cNvSpPr/>
+          <p:nvPr/>
+        </p:nvSpPr>
+        <p:spPr>
+          <a:xfrm>
+            <a:off x="4604004" y="1581912"/>
+            <a:ext cx="9144" cy="2852928"/>
+          </a:xfrm>
+          <a:prstGeom prst="rect">
+            <a:avLst/>
+          </a:prstGeom>
+          <a:solidFill>
+            <a:srgbClr val="282828"/>
+          </a:solidFill>
+          <a:ln>
+            <a:noFill/>
+          </a:ln>
+        </p:spPr>
+        <p:style>
+          <a:lnRef idx="1">
+            <a:schemeClr val="accent1"/>
+          </a:lnRef>
+          <a:fillRef idx="3">
+            <a:schemeClr val="accent1"/>
+          </a:fillRef>
+          <a:effectRef idx="2">
+            <a:schemeClr val="accent1"/>
+          </a:effectRef>
+          <a:fontRef idx="minor">
+            <a:schemeClr val="lt1"/>
+          </a:fontRef>
+        </p:style>
+        <p:txBody>
+          <a:bodyPr rtlCol="0" anchor="ctr"/>
+          <a:lstStyle/>
+          <a:p>
+            <a:pPr algn="ctr"/>
+          </a:p>
+        </p:txBody>
+      </p:sp>
+      <p:sp>
+        <p:nvSpPr>
+          <p:cNvPr id="24" name="Rounded Rectangle 23"/>
+          <p:cNvSpPr/>
+          <p:nvPr/>
+        </p:nvSpPr>
+        <p:spPr>
+          <a:xfrm>
+            <a:off x="3442716" y="1920240"/>
+            <a:ext cx="2331720" cy="329184"/>
+          </a:xfrm>
+          <a:prstGeom prst="roundRect">
+            <a:avLst/>
+          </a:prstGeom>
+          <a:solidFill>
+            <a:srgbClr val="FFFFFF"/>
+          </a:solidFill>
+          <a:ln w="12700">
+            <a:solidFill>
+              <a:srgbClr val="000000"/>
+            </a:solidFill>
+          </a:ln>
+        </p:spPr>
+        <p:style>
+          <a:lnRef idx="1">
+            <a:schemeClr val="accent1"/>
+          </a:lnRef>
+          <a:fillRef idx="3">
+            <a:schemeClr val="accent1"/>
+          </a:fillRef>
+          <a:effectRef idx="2">
+            <a:schemeClr val="accent1"/>
+          </a:effectRef>
+          <a:fontRef idx="minor">
+            <a:schemeClr val="lt1"/>
+          </a:fontRef>
+        </p:style>
+        <p:txBody>
+          <a:bodyPr rtlCol="0" anchor="ctr" lIns="73152" rIns="73152"/>
+          <a:lstStyle/>
+          <a:p>
+            <a:pPr algn="ctr">
+              <a:defRPr sz="919" b="1">
+                <a:solidFill>
+                  <a:srgbClr val="000000"/>
+                </a:solidFill>
+                <a:latin typeface="Times New Roman"/>
+              </a:defRPr>
+            </a:pPr>
+            <a:r>
+              <a:t>第 4 章：三维重建与映射 （Guidong Yang）</a:t>
+            </a:r>
+          </a:p>
+        </p:txBody>
+      </p:sp>
+      <p:sp>
+        <p:nvSpPr>
+          <p:cNvPr id="25" name="Rectangle 24"/>
+          <p:cNvSpPr/>
+          <p:nvPr/>
+        </p:nvSpPr>
+        <p:spPr>
+          <a:xfrm>
+            <a:off x="3515868" y="2249424"/>
+            <a:ext cx="7315" cy="621792"/>
+          </a:xfrm>
+          <a:prstGeom prst="rect">
+            <a:avLst/>
+          </a:prstGeom>
+          <a:solidFill>
+            <a:srgbClr val="282828"/>
+          </a:solidFill>
+          <a:ln>
+            <a:noFill/>
+          </a:ln>
+        </p:spPr>
+        <p:style>
+          <a:lnRef idx="1">
+            <a:schemeClr val="accent1"/>
+          </a:lnRef>
+          <a:fillRef idx="3">
+            <a:schemeClr val="accent1"/>
+          </a:fillRef>
+          <a:effectRef idx="2">
+            <a:schemeClr val="accent1"/>
+          </a:effectRef>
+          <a:fontRef idx="minor">
+            <a:schemeClr val="lt1"/>
+          </a:fontRef>
+        </p:style>
+        <p:txBody>
+          <a:bodyPr rtlCol="0" anchor="ctr"/>
+          <a:lstStyle/>
+          <a:p>
+            <a:pPr algn="ctr"/>
+          </a:p>
+        </p:txBody>
+      </p:sp>
+      <p:sp>
+        <p:nvSpPr>
+          <p:cNvPr id="26" name="Rectangle 25"/>
+          <p:cNvSpPr/>
+          <p:nvPr/>
+        </p:nvSpPr>
+        <p:spPr>
+          <a:xfrm>
+            <a:off x="3515868" y="2395728"/>
+            <a:ext cx="73152" cy="7315"/>
+          </a:xfrm>
+          <a:prstGeom prst="rect">
+            <a:avLst/>
+          </a:prstGeom>
+          <a:solidFill>
+            <a:srgbClr val="282828"/>
+          </a:solidFill>
+          <a:ln>
+            <a:noFill/>
+          </a:ln>
+        </p:spPr>
+        <p:style>
+          <a:lnRef idx="1">
+            <a:schemeClr val="accent1"/>
+          </a:lnRef>
+          <a:fillRef idx="3">
+            <a:schemeClr val="accent1"/>
+          </a:fillRef>
+          <a:effectRef idx="2">
+            <a:schemeClr val="accent1"/>
+          </a:effectRef>
+          <a:fontRef idx="minor">
+            <a:schemeClr val="lt1"/>
+          </a:fontRef>
+        </p:style>
+        <p:txBody>
+          <a:bodyPr rtlCol="0" anchor="ctr"/>
+          <a:lstStyle/>
+          <a:p>
+            <a:pPr algn="ctr"/>
+          </a:p>
+        </p:txBody>
+      </p:sp>
+      <p:sp>
+        <p:nvSpPr>
+          <p:cNvPr id="27" name="Rounded Rectangle 26"/>
+          <p:cNvSpPr/>
+          <p:nvPr/>
+        </p:nvSpPr>
+        <p:spPr>
+          <a:xfrm>
+            <a:off x="3607308" y="2304288"/>
+            <a:ext cx="2084831" cy="219456"/>
+          </a:xfrm>
+          <a:prstGeom prst="roundRect">
+            <a:avLst/>
+          </a:prstGeom>
+          <a:solidFill>
+            <a:srgbClr val="FFFFFF"/>
+          </a:solidFill>
+          <a:ln w="6350">
+            <a:solidFill>
+              <a:srgbClr val="282828"/>
+            </a:solidFill>
+          </a:ln>
+        </p:spPr>
+        <p:style>
+          <a:lnRef idx="1">
+            <a:schemeClr val="accent1"/>
+          </a:lnRef>
+          <a:fillRef idx="3">
+            <a:schemeClr val="accent1"/>
+          </a:fillRef>
+          <a:effectRef idx="2">
+            <a:schemeClr val="accent1"/>
+          </a:effectRef>
+          <a:fontRef idx="minor">
+            <a:schemeClr val="lt1"/>
+          </a:fontRef>
+        </p:style>
+        <p:txBody>
+          <a:bodyPr rtlCol="0" anchor="ctr" lIns="54864" rIns="54864"/>
+          <a:lstStyle/>
+          <a:p>
+            <a:pPr algn="ctr">
+              <a:defRPr sz="819">
+                <a:solidFill>
+                  <a:srgbClr val="000000"/>
+                </a:solidFill>
+                <a:latin typeface="Times New Roman"/>
+              </a:defRPr>
+            </a:pPr>
+            <a:r>
+              <a:t>4.2 SfM 稀疏与密集重建</a:t>
+            </a:r>
+          </a:p>
+        </p:txBody>
+      </p:sp>
+      <p:sp>
+        <p:nvSpPr>
+          <p:cNvPr id="28" name="Rectangle 27"/>
+          <p:cNvSpPr/>
+          <p:nvPr/>
+        </p:nvSpPr>
+        <p:spPr>
+          <a:xfrm>
+            <a:off x="3515868" y="2651760"/>
+            <a:ext cx="73152" cy="7315"/>
+          </a:xfrm>
+          <a:prstGeom prst="rect">
+            <a:avLst/>
+          </a:prstGeom>
+          <a:solidFill>
+            <a:srgbClr val="282828"/>
+          </a:solidFill>
+          <a:ln>
+            <a:noFill/>
+          </a:ln>
+        </p:spPr>
+        <p:style>
+          <a:lnRef idx="1">
+            <a:schemeClr val="accent1"/>
+          </a:lnRef>
+          <a:fillRef idx="3">
+            <a:schemeClr val="accent1"/>
+          </a:fillRef>
+          <a:effectRef idx="2">
+            <a:schemeClr val="accent1"/>
+          </a:effectRef>
+          <a:fontRef idx="minor">
+            <a:schemeClr val="lt1"/>
+          </a:fontRef>
+        </p:style>
+        <p:txBody>
+          <a:bodyPr rtlCol="0" anchor="ctr"/>
+          <a:lstStyle/>
+          <a:p>
+            <a:pPr algn="ctr"/>
+          </a:p>
+        </p:txBody>
+      </p:sp>
+      <p:sp>
+        <p:nvSpPr>
+          <p:cNvPr id="29" name="Rounded Rectangle 28"/>
+          <p:cNvSpPr/>
+          <p:nvPr/>
+        </p:nvSpPr>
+        <p:spPr>
+          <a:xfrm>
+            <a:off x="3607308" y="2560320"/>
+            <a:ext cx="2084831" cy="219456"/>
+          </a:xfrm>
+          <a:prstGeom prst="roundRect">
+            <a:avLst/>
+          </a:prstGeom>
+          <a:solidFill>
+            <a:srgbClr val="FFFFFF"/>
+          </a:solidFill>
+          <a:ln w="6350">
+            <a:solidFill>
+              <a:srgbClr val="282828"/>
+            </a:solidFill>
+          </a:ln>
+        </p:spPr>
+        <p:style>
+          <a:lnRef idx="1">
+            <a:schemeClr val="accent1"/>
+          </a:lnRef>
+          <a:fillRef idx="3">
+            <a:schemeClr val="accent1"/>
+          </a:fillRef>
+          <a:effectRef idx="2">
+            <a:schemeClr val="accent1"/>
+          </a:effectRef>
+          <a:fontRef idx="minor">
+            <a:schemeClr val="lt1"/>
+          </a:fontRef>
+        </p:style>
+        <p:txBody>
+          <a:bodyPr rtlCol="0" anchor="ctr" lIns="54864" rIns="54864"/>
+          <a:lstStyle/>
+          <a:p>
+            <a:pPr algn="ctr">
+              <a:defRPr sz="819">
+                <a:solidFill>
+                  <a:srgbClr val="000000"/>
+                </a:solidFill>
+                <a:latin typeface="Times New Roman"/>
+              </a:defRPr>
+            </a:pPr>
+            <a:r>
+              <a:t>4.4 神经渲染与 Mesh 构网</a:t>
+            </a:r>
+          </a:p>
+        </p:txBody>
+      </p:sp>
+      <p:sp>
+        <p:nvSpPr>
+          <p:cNvPr id="30" name="Rectangle 29"/>
+          <p:cNvSpPr/>
+          <p:nvPr/>
+        </p:nvSpPr>
+        <p:spPr>
+          <a:xfrm>
+            <a:off x="3515868" y="2907792"/>
+            <a:ext cx="73152" cy="7315"/>
+          </a:xfrm>
+          <a:prstGeom prst="rect">
+            <a:avLst/>
+          </a:prstGeom>
+          <a:solidFill>
+            <a:srgbClr val="282828"/>
+          </a:solidFill>
+          <a:ln>
+            <a:noFill/>
+          </a:ln>
+        </p:spPr>
+        <p:style>
+          <a:lnRef idx="1">
+            <a:schemeClr val="accent1"/>
+          </a:lnRef>
+          <a:fillRef idx="3">
+            <a:schemeClr val="accent1"/>
+          </a:fillRef>
+          <a:effectRef idx="2">
+            <a:schemeClr val="accent1"/>
+          </a:effectRef>
+          <a:fontRef idx="minor">
+            <a:schemeClr val="lt1"/>
+          </a:fontRef>
+        </p:style>
+        <p:txBody>
+          <a:bodyPr rtlCol="0" anchor="ctr"/>
+          <a:lstStyle/>
+          <a:p>
+            <a:pPr algn="ctr"/>
+          </a:p>
+        </p:txBody>
+      </p:sp>
+      <p:sp>
+        <p:nvSpPr>
+          <p:cNvPr id="31" name="Rounded Rectangle 30"/>
+          <p:cNvSpPr/>
+          <p:nvPr/>
+        </p:nvSpPr>
+        <p:spPr>
+          <a:xfrm>
+            <a:off x="3607308" y="2816352"/>
+            <a:ext cx="2084831" cy="219456"/>
+          </a:xfrm>
+          <a:prstGeom prst="roundRect">
+            <a:avLst/>
+          </a:prstGeom>
+          <a:solidFill>
+            <a:srgbClr val="FFFFFF"/>
+          </a:solidFill>
+          <a:ln w="6350">
+            <a:solidFill>
+              <a:srgbClr val="282828"/>
+            </a:solidFill>
+          </a:ln>
+        </p:spPr>
+        <p:style>
+          <a:lnRef idx="1">
+            <a:schemeClr val="accent1"/>
+          </a:lnRef>
+          <a:fillRef idx="3">
+            <a:schemeClr val="accent1"/>
+          </a:fillRef>
+          <a:effectRef idx="2">
+            <a:schemeClr val="accent1"/>
+          </a:effectRef>
+          <a:fontRef idx="minor">
+            <a:schemeClr val="lt1"/>
+          </a:fontRef>
+        </p:style>
+        <p:txBody>
+          <a:bodyPr rtlCol="0" anchor="ctr" lIns="54864" rIns="54864"/>
+          <a:lstStyle/>
+          <a:p>
+            <a:pPr algn="ctr">
+              <a:defRPr sz="819">
+                <a:solidFill>
+                  <a:srgbClr val="000000"/>
+                </a:solidFill>
+                <a:latin typeface="Times New Roman"/>
+              </a:defRPr>
+            </a:pPr>
+            <a:r>
+              <a:t>4.5 点云配准与 BIM 对齐</a:t>
+            </a:r>
+          </a:p>
+        </p:txBody>
+      </p:sp>
+      <p:sp>
+        <p:nvSpPr>
+          <p:cNvPr id="32" name="Rounded Rectangle 31"/>
+          <p:cNvSpPr/>
+          <p:nvPr/>
+        </p:nvSpPr>
+        <p:spPr>
+          <a:xfrm>
+            <a:off x="3442716" y="4434840"/>
+            <a:ext cx="2331720" cy="329184"/>
+          </a:xfrm>
+          <a:prstGeom prst="roundRect">
+            <a:avLst/>
+          </a:prstGeom>
+          <a:solidFill>
+            <a:srgbClr val="FFFFFF"/>
+          </a:solidFill>
+          <a:ln w="12700">
+            <a:solidFill>
+              <a:srgbClr val="000000"/>
+            </a:solidFill>
+          </a:ln>
+        </p:spPr>
+        <p:style>
+          <a:lnRef idx="1">
+            <a:schemeClr val="accent1"/>
+          </a:lnRef>
+          <a:fillRef idx="3">
+            <a:schemeClr val="accent1"/>
+          </a:fillRef>
+          <a:effectRef idx="2">
+            <a:schemeClr val="accent1"/>
+          </a:effectRef>
+          <a:fontRef idx="minor">
+            <a:schemeClr val="lt1"/>
+          </a:fontRef>
+        </p:style>
+        <p:txBody>
+          <a:bodyPr rtlCol="0" anchor="ctr" lIns="73152" rIns="73152"/>
+          <a:lstStyle/>
+          <a:p>
+            <a:pPr algn="ctr">
+              <a:defRPr sz="919" b="1">
+                <a:solidFill>
+                  <a:srgbClr val="000000"/>
+                </a:solidFill>
+                <a:latin typeface="Times New Roman"/>
+              </a:defRPr>
+            </a:pPr>
+            <a:r>
+              <a:t>第 5 章：数据集与基准 （Benyun Zhao）</a:t>
+            </a:r>
+          </a:p>
+        </p:txBody>
+      </p:sp>
+      <p:sp>
+        <p:nvSpPr>
+          <p:cNvPr id="33" name="Rectangle 32"/>
+          <p:cNvSpPr/>
+          <p:nvPr/>
+        </p:nvSpPr>
+        <p:spPr>
+          <a:xfrm>
+            <a:off x="3515868" y="4764024"/>
+            <a:ext cx="7315" cy="621792"/>
+          </a:xfrm>
+          <a:prstGeom prst="rect">
+            <a:avLst/>
+          </a:prstGeom>
+          <a:solidFill>
+            <a:srgbClr val="282828"/>
+          </a:solidFill>
+          <a:ln>
+            <a:noFill/>
+          </a:ln>
+        </p:spPr>
+        <p:style>
+          <a:lnRef idx="1">
+            <a:schemeClr val="accent1"/>
+          </a:lnRef>
+          <a:fillRef idx="3">
+            <a:schemeClr val="accent1"/>
+          </a:fillRef>
+          <a:effectRef idx="2">
+            <a:schemeClr val="accent1"/>
+          </a:effectRef>
+          <a:fontRef idx="minor">
+            <a:schemeClr val="lt1"/>
+          </a:fontRef>
+        </p:style>
+        <p:txBody>
+          <a:bodyPr rtlCol="0" anchor="ctr"/>
+          <a:lstStyle/>
+          <a:p>
+            <a:pPr algn="ctr"/>
+          </a:p>
+        </p:txBody>
+      </p:sp>
+      <p:sp>
+        <p:nvSpPr>
+          <p:cNvPr id="34" name="Rectangle 33"/>
+          <p:cNvSpPr/>
+          <p:nvPr/>
+        </p:nvSpPr>
+        <p:spPr>
+          <a:xfrm>
+            <a:off x="3515868" y="4910328"/>
+            <a:ext cx="73152" cy="7315"/>
+          </a:xfrm>
+          <a:prstGeom prst="rect">
+            <a:avLst/>
+          </a:prstGeom>
+          <a:solidFill>
+            <a:srgbClr val="282828"/>
+          </a:solidFill>
+          <a:ln>
+            <a:noFill/>
+          </a:ln>
+        </p:spPr>
+        <p:style>
+          <a:lnRef idx="1">
+            <a:schemeClr val="accent1"/>
+          </a:lnRef>
+          <a:fillRef idx="3">
+            <a:schemeClr val="accent1"/>
+          </a:fillRef>
+          <a:effectRef idx="2">
+            <a:schemeClr val="accent1"/>
+          </a:effectRef>
+          <a:fontRef idx="minor">
+            <a:schemeClr val="lt1"/>
+          </a:fontRef>
+        </p:style>
+        <p:txBody>
+          <a:bodyPr rtlCol="0" anchor="ctr"/>
+          <a:lstStyle/>
+          <a:p>
+            <a:pPr algn="ctr"/>
+          </a:p>
+        </p:txBody>
+      </p:sp>
+      <p:sp>
+        <p:nvSpPr>
+          <p:cNvPr id="35" name="Rounded Rectangle 34"/>
+          <p:cNvSpPr/>
+          <p:nvPr/>
+        </p:nvSpPr>
+        <p:spPr>
+          <a:xfrm>
+            <a:off x="3607308" y="4818888"/>
+            <a:ext cx="2084831" cy="219456"/>
+          </a:xfrm>
+          <a:prstGeom prst="roundRect">
+            <a:avLst/>
+          </a:prstGeom>
+          <a:solidFill>
+            <a:srgbClr val="FFFFFF"/>
+          </a:solidFill>
+          <a:ln w="6350">
+            <a:solidFill>
+              <a:srgbClr val="282828"/>
+            </a:solidFill>
+          </a:ln>
+        </p:spPr>
+        <p:style>
+          <a:lnRef idx="1">
+            <a:schemeClr val="accent1"/>
+          </a:lnRef>
+          <a:fillRef idx="3">
+            <a:schemeClr val="accent1"/>
+          </a:fillRef>
+          <a:effectRef idx="2">
+            <a:schemeClr val="accent1"/>
+          </a:effectRef>
+          <a:fontRef idx="minor">
+            <a:schemeClr val="lt1"/>
+          </a:fontRef>
+        </p:style>
+        <p:txBody>
+          <a:bodyPr rtlCol="0" anchor="ctr" lIns="54864" rIns="54864"/>
+          <a:lstStyle/>
+          <a:p>
+            <a:pPr algn="ctr">
+              <a:defRPr sz="819">
+                <a:solidFill>
+                  <a:srgbClr val="000000"/>
+                </a:solidFill>
+                <a:latin typeface="Times New Roman"/>
+              </a:defRPr>
+            </a:pPr>
+            <a:r>
+              <a:t>5.2 多模态图像预处理与标注</a:t>
+            </a:r>
+          </a:p>
+        </p:txBody>
+      </p:sp>
+      <p:sp>
+        <p:nvSpPr>
+          <p:cNvPr id="36" name="Rectangle 35"/>
+          <p:cNvSpPr/>
+          <p:nvPr/>
+        </p:nvSpPr>
+        <p:spPr>
+          <a:xfrm>
+            <a:off x="3515868" y="5166360"/>
+            <a:ext cx="73152" cy="7315"/>
+          </a:xfrm>
+          <a:prstGeom prst="rect">
+            <a:avLst/>
+          </a:prstGeom>
+          <a:solidFill>
+            <a:srgbClr val="282828"/>
+          </a:solidFill>
+          <a:ln>
+            <a:noFill/>
+          </a:ln>
+        </p:spPr>
+        <p:style>
+          <a:lnRef idx="1">
+            <a:schemeClr val="accent1"/>
+          </a:lnRef>
+          <a:fillRef idx="3">
+            <a:schemeClr val="accent1"/>
+          </a:fillRef>
+          <a:effectRef idx="2">
+            <a:schemeClr val="accent1"/>
+          </a:effectRef>
+          <a:fontRef idx="minor">
+            <a:schemeClr val="lt1"/>
+          </a:fontRef>
+        </p:style>
+        <p:txBody>
+          <a:bodyPr rtlCol="0" anchor="ctr"/>
+          <a:lstStyle/>
+          <a:p>
+            <a:pPr algn="ctr"/>
+          </a:p>
+        </p:txBody>
+      </p:sp>
+      <p:sp>
+        <p:nvSpPr>
+          <p:cNvPr id="37" name="Rounded Rectangle 36"/>
+          <p:cNvSpPr/>
+          <p:nvPr/>
+        </p:nvSpPr>
+        <p:spPr>
+          <a:xfrm>
+            <a:off x="3607308" y="5074920"/>
+            <a:ext cx="2084831" cy="219456"/>
+          </a:xfrm>
+          <a:prstGeom prst="roundRect">
+            <a:avLst/>
+          </a:prstGeom>
+          <a:solidFill>
+            <a:srgbClr val="FFFFFF"/>
+          </a:solidFill>
+          <a:ln w="6350">
+            <a:solidFill>
+              <a:srgbClr val="282828"/>
+            </a:solidFill>
+          </a:ln>
+        </p:spPr>
+        <p:style>
+          <a:lnRef idx="1">
+            <a:schemeClr val="accent1"/>
+          </a:lnRef>
+          <a:fillRef idx="3">
+            <a:schemeClr val="accent1"/>
+          </a:fillRef>
+          <a:effectRef idx="2">
+            <a:schemeClr val="accent1"/>
+          </a:effectRef>
+          <a:fontRef idx="minor">
+            <a:schemeClr val="lt1"/>
+          </a:fontRef>
+        </p:style>
+        <p:txBody>
+          <a:bodyPr rtlCol="0" anchor="ctr" lIns="54864" rIns="54864"/>
+          <a:lstStyle/>
+          <a:p>
+            <a:pPr algn="ctr">
+              <a:defRPr sz="819">
+                <a:solidFill>
+                  <a:srgbClr val="000000"/>
+                </a:solidFill>
+                <a:latin typeface="Times New Roman"/>
+              </a:defRPr>
+            </a:pPr>
+            <a:r>
+              <a:t>5.3 建筑立面缺陷 Detection</a:t>
+            </a:r>
+          </a:p>
+        </p:txBody>
+      </p:sp>
+      <p:sp>
+        <p:nvSpPr>
+          <p:cNvPr id="38" name="Rectangle 37"/>
+          <p:cNvSpPr/>
+          <p:nvPr/>
+        </p:nvSpPr>
+        <p:spPr>
+          <a:xfrm>
+            <a:off x="3515868" y="5422392"/>
+            <a:ext cx="73152" cy="7315"/>
+          </a:xfrm>
+          <a:prstGeom prst="rect">
+            <a:avLst/>
+          </a:prstGeom>
+          <a:solidFill>
+            <a:srgbClr val="282828"/>
+          </a:solidFill>
+          <a:ln>
+            <a:noFill/>
+          </a:ln>
+        </p:spPr>
+        <p:style>
+          <a:lnRef idx="1">
+            <a:schemeClr val="accent1"/>
+          </a:lnRef>
+          <a:fillRef idx="3">
+            <a:schemeClr val="accent1"/>
+          </a:fillRef>
+          <a:effectRef idx="2">
+            <a:schemeClr val="accent1"/>
+          </a:effectRef>
+          <a:fontRef idx="minor">
+            <a:schemeClr val="lt1"/>
+          </a:fontRef>
+        </p:style>
+        <p:txBody>
+          <a:bodyPr rtlCol="0" anchor="ctr"/>
+          <a:lstStyle/>
+          <a:p>
+            <a:pPr algn="ctr"/>
+          </a:p>
+        </p:txBody>
+      </p:sp>
+      <p:sp>
+        <p:nvSpPr>
+          <p:cNvPr id="39" name="Rounded Rectangle 38"/>
+          <p:cNvSpPr/>
+          <p:nvPr/>
+        </p:nvSpPr>
+        <p:spPr>
+          <a:xfrm>
+            <a:off x="3607308" y="5330952"/>
+            <a:ext cx="2084831" cy="219456"/>
+          </a:xfrm>
+          <a:prstGeom prst="roundRect">
+            <a:avLst/>
+          </a:prstGeom>
+          <a:solidFill>
+            <a:srgbClr val="FFFFFF"/>
+          </a:solidFill>
+          <a:ln w="6350">
+            <a:solidFill>
+              <a:srgbClr val="282828"/>
+            </a:solidFill>
+          </a:ln>
+        </p:spPr>
+        <p:style>
+          <a:lnRef idx="1">
+            <a:schemeClr val="accent1"/>
+          </a:lnRef>
+          <a:fillRef idx="3">
+            <a:schemeClr val="accent1"/>
+          </a:fillRef>
+          <a:effectRef idx="2">
+            <a:schemeClr val="accent1"/>
+          </a:effectRef>
+          <a:fontRef idx="minor">
+            <a:schemeClr val="lt1"/>
+          </a:fontRef>
+        </p:style>
+        <p:txBody>
+          <a:bodyPr rtlCol="0" anchor="ctr" lIns="54864" rIns="54864"/>
+          <a:lstStyle/>
+          <a:p>
+            <a:pPr algn="ctr">
+              <a:defRPr sz="819">
+                <a:solidFill>
+                  <a:srgbClr val="000000"/>
+                </a:solidFill>
+                <a:latin typeface="Times New Roman"/>
+              </a:defRPr>
+            </a:pPr>
+            <a:r>
+              <a:t>5.4 缺陷 Instance Segmentation</a:t>
+            </a:r>
+          </a:p>
+        </p:txBody>
+      </p:sp>
+      <p:sp>
+        <p:nvSpPr>
+          <p:cNvPr id="40" name="Right Arrow 39"/>
+          <p:cNvSpPr/>
+          <p:nvPr/>
+        </p:nvSpPr>
+        <p:spPr>
+          <a:xfrm>
+            <a:off x="5907024" y="1307592"/>
+            <a:ext cx="182880" cy="201168"/>
+          </a:xfrm>
+          <a:prstGeom prst="rightArrow">
+            <a:avLst/>
+          </a:prstGeom>
+          <a:solidFill>
+            <a:srgbClr val="000000"/>
+          </a:solidFill>
+          <a:ln>
+            <a:noFill/>
+          </a:ln>
+        </p:spPr>
+        <p:style>
+          <a:lnRef idx="1">
+            <a:schemeClr val="accent1"/>
+          </a:lnRef>
+          <a:fillRef idx="3">
+            <a:schemeClr val="accent1"/>
+          </a:fillRef>
+          <a:effectRef idx="2">
+            <a:schemeClr val="accent1"/>
+          </a:effectRef>
+          <a:fontRef idx="minor">
+            <a:schemeClr val="lt1"/>
+          </a:fontRef>
+        </p:style>
+        <p:txBody>
+          <a:bodyPr rtlCol="0" anchor="ctr"/>
+          <a:lstStyle/>
+          <a:p>
+            <a:pPr algn="ctr"/>
+          </a:p>
+        </p:txBody>
+      </p:sp>
+      <p:sp>
+        <p:nvSpPr>
+          <p:cNvPr id="41" name="Rounded Rectangle 40"/>
+          <p:cNvSpPr/>
+          <p:nvPr/>
+        </p:nvSpPr>
+        <p:spPr>
+          <a:xfrm>
+            <a:off x="6108192" y="1234440"/>
+            <a:ext cx="2560320" cy="347472"/>
+          </a:xfrm>
+          <a:prstGeom prst="roundRect">
+            <a:avLst/>
+          </a:prstGeom>
+          <a:solidFill>
+            <a:srgbClr val="FFFFFF"/>
+          </a:solidFill>
+          <a:ln w="15875">
+            <a:solidFill>
+              <a:srgbClr val="000000"/>
+            </a:solidFill>
+          </a:ln>
+        </p:spPr>
+        <p:style>
+          <a:lnRef idx="1">
+            <a:schemeClr val="accent1"/>
+          </a:lnRef>
+          <a:fillRef idx="3">
+            <a:schemeClr val="accent1"/>
+          </a:fillRef>
+          <a:effectRef idx="2">
+            <a:schemeClr val="accent1"/>
+          </a:effectRef>
+          <a:fontRef idx="minor">
+            <a:schemeClr val="lt1"/>
+          </a:fontRef>
+        </p:style>
+        <p:txBody>
+          <a:bodyPr rtlCol="0" anchor="ctr" lIns="45720" rIns="45720"/>
+          <a:lstStyle/>
+          <a:p>
+            <a:pPr algn="ctr">
+              <a:defRPr sz="1000" b="1">
+                <a:solidFill>
+                  <a:srgbClr val="000000"/>
+                </a:solidFill>
+                <a:latin typeface="Times New Roman"/>
+              </a:defRPr>
+            </a:pPr>
+            <a:r>
+              <a:t>阶段三：AI 缺陷感知分析</a:t>
+            </a:r>
+          </a:p>
+        </p:txBody>
+      </p:sp>
+      <p:sp>
+        <p:nvSpPr>
+          <p:cNvPr id="42" name="Rectangle 41"/>
+          <p:cNvSpPr/>
+          <p:nvPr/>
+        </p:nvSpPr>
+        <p:spPr>
+          <a:xfrm>
+            <a:off x="7383780" y="1581912"/>
+            <a:ext cx="9144" cy="338328"/>
+          </a:xfrm>
+          <a:prstGeom prst="rect">
+            <a:avLst/>
+          </a:prstGeom>
+          <a:solidFill>
+            <a:srgbClr val="282828"/>
+          </a:solidFill>
+          <a:ln>
+            <a:noFill/>
+          </a:ln>
+        </p:spPr>
+        <p:style>
+          <a:lnRef idx="1">
+            <a:schemeClr val="accent1"/>
+          </a:lnRef>
+          <a:fillRef idx="3">
+            <a:schemeClr val="accent1"/>
+          </a:fillRef>
+          <a:effectRef idx="2">
+            <a:schemeClr val="accent1"/>
+          </a:effectRef>
+          <a:fontRef idx="minor">
+            <a:schemeClr val="lt1"/>
+          </a:fontRef>
+        </p:style>
+        <p:txBody>
+          <a:bodyPr rtlCol="0" anchor="ctr"/>
+          <a:lstStyle/>
+          <a:p>
+            <a:pPr algn="ctr"/>
+          </a:p>
+        </p:txBody>
+      </p:sp>
+      <p:sp>
+        <p:nvSpPr>
+          <p:cNvPr id="43" name="Rounded Rectangle 42"/>
+          <p:cNvSpPr/>
+          <p:nvPr/>
+        </p:nvSpPr>
+        <p:spPr>
+          <a:xfrm>
+            <a:off x="6222492" y="1920240"/>
+            <a:ext cx="2331720" cy="329184"/>
+          </a:xfrm>
+          <a:prstGeom prst="roundRect">
+            <a:avLst/>
+          </a:prstGeom>
+          <a:solidFill>
+            <a:srgbClr val="FFFFFF"/>
+          </a:solidFill>
+          <a:ln w="12700">
+            <a:solidFill>
+              <a:srgbClr val="000000"/>
+            </a:solidFill>
+          </a:ln>
+        </p:spPr>
+        <p:style>
+          <a:lnRef idx="1">
+            <a:schemeClr val="accent1"/>
+          </a:lnRef>
+          <a:fillRef idx="3">
+            <a:schemeClr val="accent1"/>
+          </a:fillRef>
+          <a:effectRef idx="2">
+            <a:schemeClr val="accent1"/>
+          </a:effectRef>
+          <a:fontRef idx="minor">
+            <a:schemeClr val="lt1"/>
+          </a:fontRef>
+        </p:style>
+        <p:txBody>
+          <a:bodyPr rtlCol="0" anchor="ctr" lIns="73152" rIns="73152"/>
+          <a:lstStyle/>
+          <a:p>
+            <a:pPr algn="ctr">
+              <a:defRPr sz="919" b="1">
+                <a:solidFill>
+                  <a:srgbClr val="000000"/>
+                </a:solidFill>
+                <a:latin typeface="Times New Roman"/>
+              </a:defRPr>
+            </a:pPr>
+            <a:r>
+              <a:t>第 6 章：巡检 AI 检测模型 （Benyun Zhao）</a:t>
+            </a:r>
+          </a:p>
+        </p:txBody>
+      </p:sp>
+      <p:sp>
+        <p:nvSpPr>
+          <p:cNvPr id="44" name="Rectangle 43"/>
+          <p:cNvSpPr/>
+          <p:nvPr/>
+        </p:nvSpPr>
+        <p:spPr>
+          <a:xfrm>
+            <a:off x="6295644" y="2249424"/>
+            <a:ext cx="7315" cy="877824"/>
+          </a:xfrm>
+          <a:prstGeom prst="rect">
+            <a:avLst/>
+          </a:prstGeom>
+          <a:solidFill>
+            <a:srgbClr val="282828"/>
+          </a:solidFill>
+          <a:ln>
+            <a:noFill/>
+          </a:ln>
+        </p:spPr>
+        <p:style>
+          <a:lnRef idx="1">
+            <a:schemeClr val="accent1"/>
+          </a:lnRef>
+          <a:fillRef idx="3">
+            <a:schemeClr val="accent1"/>
+          </a:fillRef>
+          <a:effectRef idx="2">
+            <a:schemeClr val="accent1"/>
+          </a:effectRef>
+          <a:fontRef idx="minor">
+            <a:schemeClr val="lt1"/>
+          </a:fontRef>
+        </p:style>
+        <p:txBody>
+          <a:bodyPr rtlCol="0" anchor="ctr"/>
+          <a:lstStyle/>
+          <a:p>
+            <a:pPr algn="ctr"/>
+          </a:p>
+        </p:txBody>
+      </p:sp>
+      <p:sp>
+        <p:nvSpPr>
+          <p:cNvPr id="45" name="Rectangle 44"/>
+          <p:cNvSpPr/>
+          <p:nvPr/>
+        </p:nvSpPr>
+        <p:spPr>
+          <a:xfrm>
+            <a:off x="6295644" y="2395728"/>
+            <a:ext cx="73152" cy="7315"/>
+          </a:xfrm>
+          <a:prstGeom prst="rect">
+            <a:avLst/>
+          </a:prstGeom>
+          <a:solidFill>
+            <a:srgbClr val="282828"/>
+          </a:solidFill>
+          <a:ln>
+            <a:noFill/>
+          </a:ln>
+        </p:spPr>
+        <p:style>
+          <a:lnRef idx="1">
+            <a:schemeClr val="accent1"/>
+          </a:lnRef>
+          <a:fillRef idx="3">
+            <a:schemeClr val="accent1"/>
+          </a:fillRef>
+          <a:effectRef idx="2">
+            <a:schemeClr val="accent1"/>
+          </a:effectRef>
+          <a:fontRef idx="minor">
+            <a:schemeClr val="lt1"/>
+          </a:fontRef>
+        </p:style>
+        <p:txBody>
+          <a:bodyPr rtlCol="0" anchor="ctr"/>
+          <a:lstStyle/>
+          <a:p>
+            <a:pPr algn="ctr"/>
+          </a:p>
+        </p:txBody>
+      </p:sp>
+      <p:sp>
+        <p:nvSpPr>
+          <p:cNvPr id="46" name="Rounded Rectangle 45"/>
+          <p:cNvSpPr/>
+          <p:nvPr/>
+        </p:nvSpPr>
+        <p:spPr>
+          <a:xfrm>
+            <a:off x="6387084" y="2304288"/>
+            <a:ext cx="2084831" cy="219456"/>
+          </a:xfrm>
+          <a:prstGeom prst="roundRect">
+            <a:avLst/>
+          </a:prstGeom>
+          <a:solidFill>
+            <a:srgbClr val="FFFFFF"/>
+          </a:solidFill>
+          <a:ln w="6350">
+            <a:solidFill>
+              <a:srgbClr val="282828"/>
+            </a:solidFill>
+          </a:ln>
+        </p:spPr>
+        <p:style>
+          <a:lnRef idx="1">
+            <a:schemeClr val="accent1"/>
+          </a:lnRef>
+          <a:fillRef idx="3">
+            <a:schemeClr val="accent1"/>
+          </a:fillRef>
+          <a:effectRef idx="2">
+            <a:schemeClr val="accent1"/>
+          </a:effectRef>
+          <a:fontRef idx="minor">
+            <a:schemeClr val="lt1"/>
+          </a:fontRef>
+        </p:style>
+        <p:txBody>
+          <a:bodyPr rtlCol="0" anchor="ctr" lIns="54864" rIns="54864"/>
+          <a:lstStyle/>
+          <a:p>
+            <a:pPr algn="ctr">
+              <a:defRPr sz="819">
+                <a:solidFill>
+                  <a:srgbClr val="000000"/>
+                </a:solidFill>
+                <a:latin typeface="Times New Roman"/>
+              </a:defRPr>
+            </a:pPr>
+            <a:r>
+              <a:t>6.1 机载算力与低时延约束</a:t>
+            </a:r>
+          </a:p>
+        </p:txBody>
+      </p:sp>
+      <p:sp>
+        <p:nvSpPr>
+          <p:cNvPr id="47" name="Rectangle 46"/>
+          <p:cNvSpPr/>
+          <p:nvPr/>
+        </p:nvSpPr>
+        <p:spPr>
+          <a:xfrm>
+            <a:off x="6295644" y="2651760"/>
+            <a:ext cx="73152" cy="7315"/>
+          </a:xfrm>
+          <a:prstGeom prst="rect">
+            <a:avLst/>
+          </a:prstGeom>
+          <a:solidFill>
+            <a:srgbClr val="282828"/>
+          </a:solidFill>
+          <a:ln>
+            <a:noFill/>
+          </a:ln>
+        </p:spPr>
+        <p:style>
+          <a:lnRef idx="1">
+            <a:schemeClr val="accent1"/>
+          </a:lnRef>
+          <a:fillRef idx="3">
+            <a:schemeClr val="accent1"/>
+          </a:fillRef>
+          <a:effectRef idx="2">
+            <a:schemeClr val="accent1"/>
+          </a:effectRef>
+          <a:fontRef idx="minor">
+            <a:schemeClr val="lt1"/>
+          </a:fontRef>
+        </p:style>
+        <p:txBody>
+          <a:bodyPr rtlCol="0" anchor="ctr"/>
+          <a:lstStyle/>
+          <a:p>
+            <a:pPr algn="ctr"/>
+          </a:p>
+        </p:txBody>
+      </p:sp>
+      <p:sp>
+        <p:nvSpPr>
+          <p:cNvPr id="48" name="Rounded Rectangle 47"/>
+          <p:cNvSpPr/>
+          <p:nvPr/>
+        </p:nvSpPr>
+        <p:spPr>
+          <a:xfrm>
+            <a:off x="6387084" y="2560320"/>
+            <a:ext cx="2084831" cy="219456"/>
+          </a:xfrm>
+          <a:prstGeom prst="roundRect">
+            <a:avLst/>
+          </a:prstGeom>
+          <a:solidFill>
+            <a:srgbClr val="FFFFFF"/>
+          </a:solidFill>
+          <a:ln w="6350">
+            <a:solidFill>
+              <a:srgbClr val="282828"/>
+            </a:solidFill>
+          </a:ln>
+        </p:spPr>
+        <p:style>
+          <a:lnRef idx="1">
+            <a:schemeClr val="accent1"/>
+          </a:lnRef>
+          <a:fillRef idx="3">
+            <a:schemeClr val="accent1"/>
+          </a:fillRef>
+          <a:effectRef idx="2">
+            <a:schemeClr val="accent1"/>
+          </a:effectRef>
+          <a:fontRef idx="minor">
+            <a:schemeClr val="lt1"/>
+          </a:fontRef>
+        </p:style>
+        <p:txBody>
+          <a:bodyPr rtlCol="0" anchor="ctr" lIns="54864" rIns="54864"/>
+          <a:lstStyle/>
+          <a:p>
+            <a:pPr algn="ctr">
+              <a:defRPr sz="819">
+                <a:solidFill>
+                  <a:srgbClr val="000000"/>
+                </a:solidFill>
+                <a:latin typeface="Times New Roman"/>
+              </a:defRPr>
+            </a:pPr>
+            <a:r>
+              <a:t>6.3 缺陷检测深度学习架构</a:t>
+            </a:r>
+          </a:p>
+        </p:txBody>
+      </p:sp>
+      <p:sp>
+        <p:nvSpPr>
+          <p:cNvPr id="49" name="Rectangle 48"/>
+          <p:cNvSpPr/>
+          <p:nvPr/>
+        </p:nvSpPr>
+        <p:spPr>
+          <a:xfrm>
+            <a:off x="6295644" y="2907792"/>
+            <a:ext cx="73152" cy="7315"/>
+          </a:xfrm>
+          <a:prstGeom prst="rect">
+            <a:avLst/>
+          </a:prstGeom>
+          <a:solidFill>
+            <a:srgbClr val="282828"/>
+          </a:solidFill>
+          <a:ln>
+            <a:noFill/>
+          </a:ln>
+        </p:spPr>
+        <p:style>
+          <a:lnRef idx="1">
+            <a:schemeClr val="accent1"/>
+          </a:lnRef>
+          <a:fillRef idx="3">
+            <a:schemeClr val="accent1"/>
+          </a:fillRef>
+          <a:effectRef idx="2">
+            <a:schemeClr val="accent1"/>
+          </a:effectRef>
+          <a:fontRef idx="minor">
+            <a:schemeClr val="lt1"/>
+          </a:fontRef>
+        </p:style>
+        <p:txBody>
+          <a:bodyPr rtlCol="0" anchor="ctr"/>
+          <a:lstStyle/>
+          <a:p>
+            <a:pPr algn="ctr"/>
+          </a:p>
+        </p:txBody>
+      </p:sp>
+      <p:sp>
+        <p:nvSpPr>
+          <p:cNvPr id="50" name="Rounded Rectangle 49"/>
+          <p:cNvSpPr/>
+          <p:nvPr/>
+        </p:nvSpPr>
+        <p:spPr>
+          <a:xfrm>
+            <a:off x="6387084" y="2816352"/>
+            <a:ext cx="2084831" cy="219456"/>
+          </a:xfrm>
+          <a:prstGeom prst="roundRect">
+            <a:avLst/>
+          </a:prstGeom>
+          <a:solidFill>
+            <a:srgbClr val="FFFFFF"/>
+          </a:solidFill>
+          <a:ln w="6350">
+            <a:solidFill>
+              <a:srgbClr val="282828"/>
+            </a:solidFill>
+          </a:ln>
+        </p:spPr>
+        <p:style>
+          <a:lnRef idx="1">
+            <a:schemeClr val="accent1"/>
+          </a:lnRef>
+          <a:fillRef idx="3">
+            <a:schemeClr val="accent1"/>
+          </a:fillRef>
+          <a:effectRef idx="2">
+            <a:schemeClr val="accent1"/>
+          </a:effectRef>
+          <a:fontRef idx="minor">
+            <a:schemeClr val="lt1"/>
+          </a:fontRef>
+        </p:style>
+        <p:txBody>
+          <a:bodyPr rtlCol="0" anchor="ctr" lIns="54864" rIns="54864"/>
+          <a:lstStyle/>
+          <a:p>
+            <a:pPr algn="ctr">
+              <a:defRPr sz="819">
+                <a:solidFill>
+                  <a:srgbClr val="000000"/>
+                </a:solidFill>
+                <a:latin typeface="Times New Roman"/>
+              </a:defRPr>
+            </a:pPr>
+            <a:r>
+              <a:t>6.4 实例分割与定量评估</a:t>
+            </a:r>
+          </a:p>
+        </p:txBody>
+      </p:sp>
+      <p:sp>
+        <p:nvSpPr>
+          <p:cNvPr id="51" name="Rectangle 50"/>
+          <p:cNvSpPr/>
+          <p:nvPr/>
+        </p:nvSpPr>
+        <p:spPr>
+          <a:xfrm>
+            <a:off x="6295644" y="3163824"/>
+            <a:ext cx="73152" cy="7315"/>
+          </a:xfrm>
+          <a:prstGeom prst="rect">
+            <a:avLst/>
+          </a:prstGeom>
+          <a:solidFill>
+            <a:srgbClr val="282828"/>
+          </a:solidFill>
+          <a:ln>
+            <a:noFill/>
+          </a:ln>
+        </p:spPr>
+        <p:style>
+          <a:lnRef idx="1">
+            <a:schemeClr val="accent1"/>
+          </a:lnRef>
+          <a:fillRef idx="3">
+            <a:schemeClr val="accent1"/>
+          </a:fillRef>
+          <a:effectRef idx="2">
+            <a:schemeClr val="accent1"/>
+          </a:effectRef>
+          <a:fontRef idx="minor">
+            <a:schemeClr val="lt1"/>
+          </a:fontRef>
+        </p:style>
+        <p:txBody>
+          <a:bodyPr rtlCol="0" anchor="ctr"/>
+          <a:lstStyle/>
+          <a:p>
+            <a:pPr algn="ctr"/>
+          </a:p>
+        </p:txBody>
+      </p:sp>
+      <p:sp>
+        <p:nvSpPr>
+          <p:cNvPr id="52" name="Rounded Rectangle 51"/>
+          <p:cNvSpPr/>
+          <p:nvPr/>
+        </p:nvSpPr>
+        <p:spPr>
+          <a:xfrm>
+            <a:off x="6387084" y="3072384"/>
+            <a:ext cx="2084831" cy="219456"/>
+          </a:xfrm>
+          <a:prstGeom prst="roundRect">
+            <a:avLst/>
+          </a:prstGeom>
+          <a:solidFill>
+            <a:srgbClr val="FFFFFF"/>
+          </a:solidFill>
+          <a:ln w="6350">
+            <a:solidFill>
+              <a:srgbClr val="282828"/>
+            </a:solidFill>
+          </a:ln>
+        </p:spPr>
+        <p:style>
+          <a:lnRef idx="1">
+            <a:schemeClr val="accent1"/>
+          </a:lnRef>
+          <a:fillRef idx="3">
+            <a:schemeClr val="accent1"/>
+          </a:fillRef>
+          <a:effectRef idx="2">
+            <a:schemeClr val="accent1"/>
+          </a:effectRef>
+          <a:fontRef idx="minor">
+            <a:schemeClr val="lt1"/>
+          </a:fontRef>
+        </p:style>
+        <p:txBody>
+          <a:bodyPr rtlCol="0" anchor="ctr" lIns="54864" rIns="54864"/>
+          <a:lstStyle/>
+          <a:p>
+            <a:pPr algn="ctr">
+              <a:defRPr sz="819">
+                <a:solidFill>
+                  <a:srgbClr val="000000"/>
+                </a:solidFill>
+                <a:latin typeface="Times New Roman"/>
+              </a:defRPr>
+            </a:pPr>
+            <a:r>
+              <a:t>6.6 边缘部署与机载实测校验</a:t>
+            </a:r>
+          </a:p>
+        </p:txBody>
+      </p:sp>
+      <p:sp>
+        <p:nvSpPr>
+          <p:cNvPr id="53" name="Right Arrow 52"/>
+          <p:cNvSpPr/>
+          <p:nvPr/>
+        </p:nvSpPr>
+        <p:spPr>
+          <a:xfrm>
+            <a:off x="8686800" y="1307592"/>
+            <a:ext cx="182880" cy="201168"/>
+          </a:xfrm>
+          <a:prstGeom prst="rightArrow">
+            <a:avLst/>
+          </a:prstGeom>
+          <a:solidFill>
+            <a:srgbClr val="000000"/>
+          </a:solidFill>
+          <a:ln>
+            <a:noFill/>
+          </a:ln>
+        </p:spPr>
+        <p:style>
+          <a:lnRef idx="1">
+            <a:schemeClr val="accent1"/>
+          </a:lnRef>
+          <a:fillRef idx="3">
+            <a:schemeClr val="accent1"/>
+          </a:fillRef>
+          <a:effectRef idx="2">
+            <a:schemeClr val="accent1"/>
+          </a:effectRef>
+          <a:fontRef idx="minor">
+            <a:schemeClr val="lt1"/>
+          </a:fontRef>
+        </p:style>
+        <p:txBody>
+          <a:bodyPr rtlCol="0" anchor="ctr"/>
+          <a:lstStyle/>
+          <a:p>
+            <a:pPr algn="ctr"/>
+          </a:p>
+        </p:txBody>
+      </p:sp>
+      <p:sp>
+        <p:nvSpPr>
+          <p:cNvPr id="54" name="Rounded Rectangle 53"/>
+          <p:cNvSpPr/>
+          <p:nvPr/>
+        </p:nvSpPr>
+        <p:spPr>
+          <a:xfrm>
+            <a:off x="8887968" y="1234440"/>
+            <a:ext cx="2560320" cy="347472"/>
+          </a:xfrm>
+          <a:prstGeom prst="roundRect">
+            <a:avLst/>
+          </a:prstGeom>
+          <a:solidFill>
+            <a:srgbClr val="FFFFFF"/>
+          </a:solidFill>
+          <a:ln w="15875">
+            <a:solidFill>
+              <a:srgbClr val="000000"/>
+            </a:solidFill>
+          </a:ln>
+        </p:spPr>
+        <p:style>
+          <a:lnRef idx="1">
+            <a:schemeClr val="accent1"/>
+          </a:lnRef>
+          <a:fillRef idx="3">
+            <a:schemeClr val="accent1"/>
+          </a:fillRef>
+          <a:effectRef idx="2">
+            <a:schemeClr val="accent1"/>
+          </a:effectRef>
+          <a:fontRef idx="minor">
+            <a:schemeClr val="lt1"/>
+          </a:fontRef>
+        </p:style>
+        <p:txBody>
+          <a:bodyPr rtlCol="0" anchor="ctr" lIns="45720" rIns="45720"/>
+          <a:lstStyle/>
+          <a:p>
+            <a:pPr algn="ctr">
+              <a:defRPr sz="1000" b="1">
+                <a:solidFill>
+                  <a:srgbClr val="000000"/>
+                </a:solidFill>
+                <a:latin typeface="Times New Roman"/>
+              </a:defRPr>
+            </a:pPr>
+            <a:r>
+              <a:t>阶段四：数字孪生与大模型</a:t>
+            </a:r>
+          </a:p>
+        </p:txBody>
+      </p:sp>
+      <p:sp>
+        <p:nvSpPr>
+          <p:cNvPr id="55" name="Rectangle 54"/>
+          <p:cNvSpPr/>
+          <p:nvPr/>
+        </p:nvSpPr>
+        <p:spPr>
+          <a:xfrm>
+            <a:off x="10163556" y="1581912"/>
+            <a:ext cx="9144" cy="3813048"/>
+          </a:xfrm>
+          <a:prstGeom prst="rect">
+            <a:avLst/>
+          </a:prstGeom>
+          <a:solidFill>
+            <a:srgbClr val="282828"/>
+          </a:solidFill>
+          <a:ln>
+            <a:noFill/>
+          </a:ln>
+        </p:spPr>
+        <p:style>
+          <a:lnRef idx="1">
+            <a:schemeClr val="accent1"/>
+          </a:lnRef>
+          <a:fillRef idx="3">
+            <a:schemeClr val="accent1"/>
+          </a:fillRef>
+          <a:effectRef idx="2">
+            <a:schemeClr val="accent1"/>
+          </a:effectRef>
+          <a:fontRef idx="minor">
+            <a:schemeClr val="lt1"/>
+          </a:fontRef>
+        </p:style>
+        <p:txBody>
+          <a:bodyPr rtlCol="0" anchor="ctr"/>
+          <a:lstStyle/>
+          <a:p>
+            <a:pPr algn="ctr"/>
+          </a:p>
+        </p:txBody>
+      </p:sp>
+      <p:sp>
+        <p:nvSpPr>
+          <p:cNvPr id="56" name="Rounded Rectangle 55"/>
+          <p:cNvSpPr/>
+          <p:nvPr/>
+        </p:nvSpPr>
+        <p:spPr>
+          <a:xfrm>
+            <a:off x="9002268" y="1920240"/>
+            <a:ext cx="2331720" cy="329184"/>
+          </a:xfrm>
+          <a:prstGeom prst="roundRect">
+            <a:avLst/>
+          </a:prstGeom>
+          <a:solidFill>
+            <a:srgbClr val="FFFFFF"/>
+          </a:solidFill>
+          <a:ln w="12700">
+            <a:solidFill>
+              <a:srgbClr val="000000"/>
+            </a:solidFill>
+          </a:ln>
+        </p:spPr>
+        <p:style>
+          <a:lnRef idx="1">
+            <a:schemeClr val="accent1"/>
+          </a:lnRef>
+          <a:fillRef idx="3">
+            <a:schemeClr val="accent1"/>
+          </a:fillRef>
+          <a:effectRef idx="2">
+            <a:schemeClr val="accent1"/>
+          </a:effectRef>
+          <a:fontRef idx="minor">
+            <a:schemeClr val="lt1"/>
+          </a:fontRef>
+        </p:style>
+        <p:txBody>
+          <a:bodyPr rtlCol="0" anchor="ctr" lIns="73152" rIns="73152"/>
+          <a:lstStyle/>
+          <a:p>
+            <a:pPr algn="ctr">
+              <a:defRPr sz="919" b="1">
+                <a:solidFill>
+                  <a:srgbClr val="000000"/>
+                </a:solidFill>
+                <a:latin typeface="Times New Roman"/>
+              </a:defRPr>
+            </a:pPr>
+            <a:r>
+              <a:t>第 7 章：GIS 与 GeoBIM 集成 （Jihan Zhang）</a:t>
+            </a:r>
+          </a:p>
+        </p:txBody>
+      </p:sp>
+      <p:sp>
+        <p:nvSpPr>
+          <p:cNvPr id="57" name="Rectangle 56"/>
+          <p:cNvSpPr/>
+          <p:nvPr/>
+        </p:nvSpPr>
+        <p:spPr>
+          <a:xfrm>
+            <a:off x="9075420" y="2249424"/>
+            <a:ext cx="7315" cy="621792"/>
+          </a:xfrm>
+          <a:prstGeom prst="rect">
+            <a:avLst/>
+          </a:prstGeom>
+          <a:solidFill>
+            <a:srgbClr val="282828"/>
+          </a:solidFill>
+          <a:ln>
+            <a:noFill/>
+          </a:ln>
+        </p:spPr>
+        <p:style>
+          <a:lnRef idx="1">
+            <a:schemeClr val="accent1"/>
+          </a:lnRef>
+          <a:fillRef idx="3">
+            <a:schemeClr val="accent1"/>
+          </a:fillRef>
+          <a:effectRef idx="2">
+            <a:schemeClr val="accent1"/>
+          </a:effectRef>
+          <a:fontRef idx="minor">
+            <a:schemeClr val="lt1"/>
+          </a:fontRef>
+        </p:style>
+        <p:txBody>
+          <a:bodyPr rtlCol="0" anchor="ctr"/>
+          <a:lstStyle/>
+          <a:p>
+            <a:pPr algn="ctr"/>
+          </a:p>
+        </p:txBody>
+      </p:sp>
+      <p:sp>
+        <p:nvSpPr>
+          <p:cNvPr id="58" name="Rectangle 57"/>
+          <p:cNvSpPr/>
+          <p:nvPr/>
+        </p:nvSpPr>
+        <p:spPr>
+          <a:xfrm>
+            <a:off x="9075420" y="2395728"/>
+            <a:ext cx="73152" cy="7315"/>
+          </a:xfrm>
+          <a:prstGeom prst="rect">
+            <a:avLst/>
+          </a:prstGeom>
+          <a:solidFill>
+            <a:srgbClr val="282828"/>
+          </a:solidFill>
+          <a:ln>
+            <a:noFill/>
+          </a:ln>
+        </p:spPr>
+        <p:style>
+          <a:lnRef idx="1">
+            <a:schemeClr val="accent1"/>
+          </a:lnRef>
+          <a:fillRef idx="3">
+            <a:schemeClr val="accent1"/>
+          </a:fillRef>
+          <a:effectRef idx="2">
+            <a:schemeClr val="accent1"/>
+          </a:effectRef>
+          <a:fontRef idx="minor">
+            <a:schemeClr val="lt1"/>
+          </a:fontRef>
+        </p:style>
+        <p:txBody>
+          <a:bodyPr rtlCol="0" anchor="ctr"/>
+          <a:lstStyle/>
+          <a:p>
+            <a:pPr algn="ctr"/>
+          </a:p>
+        </p:txBody>
+      </p:sp>
+      <p:sp>
+        <p:nvSpPr>
+          <p:cNvPr id="59" name="Rounded Rectangle 58"/>
+          <p:cNvSpPr/>
+          <p:nvPr/>
+        </p:nvSpPr>
+        <p:spPr>
+          <a:xfrm>
+            <a:off x="9166860" y="2304288"/>
+            <a:ext cx="2084831" cy="219456"/>
+          </a:xfrm>
+          <a:prstGeom prst="roundRect">
+            <a:avLst/>
+          </a:prstGeom>
+          <a:solidFill>
+            <a:srgbClr val="FFFFFF"/>
+          </a:solidFill>
+          <a:ln w="6350">
+            <a:solidFill>
+              <a:srgbClr val="282828"/>
+            </a:solidFill>
+          </a:ln>
+        </p:spPr>
+        <p:style>
+          <a:lnRef idx="1">
+            <a:schemeClr val="accent1"/>
+          </a:lnRef>
+          <a:fillRef idx="3">
+            <a:schemeClr val="accent1"/>
+          </a:fillRef>
+          <a:effectRef idx="2">
+            <a:schemeClr val="accent1"/>
+          </a:effectRef>
+          <a:fontRef idx="minor">
+            <a:schemeClr val="lt1"/>
+          </a:fontRef>
+        </p:style>
+        <p:txBody>
+          <a:bodyPr rtlCol="0" anchor="ctr" lIns="54864" rIns="54864"/>
+          <a:lstStyle/>
+          <a:p>
+            <a:pPr algn="ctr">
+              <a:defRPr sz="819">
+                <a:solidFill>
+                  <a:srgbClr val="000000"/>
+                </a:solidFill>
+                <a:latin typeface="Times New Roman"/>
+              </a:defRPr>
+            </a:pPr>
+            <a:r>
+              <a:t>7.2 UAV 数据映射 GeoBIM</a:t>
+            </a:r>
+          </a:p>
+        </p:txBody>
+      </p:sp>
+      <p:sp>
+        <p:nvSpPr>
+          <p:cNvPr id="60" name="Rectangle 59"/>
+          <p:cNvSpPr/>
+          <p:nvPr/>
+        </p:nvSpPr>
+        <p:spPr>
+          <a:xfrm>
+            <a:off x="9075420" y="2651760"/>
+            <a:ext cx="73152" cy="7315"/>
+          </a:xfrm>
+          <a:prstGeom prst="rect">
+            <a:avLst/>
+          </a:prstGeom>
+          <a:solidFill>
+            <a:srgbClr val="282828"/>
+          </a:solidFill>
+          <a:ln>
+            <a:noFill/>
+          </a:ln>
+        </p:spPr>
+        <p:style>
+          <a:lnRef idx="1">
+            <a:schemeClr val="accent1"/>
+          </a:lnRef>
+          <a:fillRef idx="3">
+            <a:schemeClr val="accent1"/>
+          </a:fillRef>
+          <a:effectRef idx="2">
+            <a:schemeClr val="accent1"/>
+          </a:effectRef>
+          <a:fontRef idx="minor">
+            <a:schemeClr val="lt1"/>
+          </a:fontRef>
+        </p:style>
+        <p:txBody>
+          <a:bodyPr rtlCol="0" anchor="ctr"/>
+          <a:lstStyle/>
+          <a:p>
+            <a:pPr algn="ctr"/>
+          </a:p>
+        </p:txBody>
+      </p:sp>
+      <p:sp>
+        <p:nvSpPr>
+          <p:cNvPr id="61" name="Rounded Rectangle 60"/>
+          <p:cNvSpPr/>
+          <p:nvPr/>
+        </p:nvSpPr>
+        <p:spPr>
+          <a:xfrm>
+            <a:off x="9166860" y="2560320"/>
+            <a:ext cx="2084831" cy="219456"/>
+          </a:xfrm>
+          <a:prstGeom prst="roundRect">
+            <a:avLst/>
+          </a:prstGeom>
+          <a:solidFill>
+            <a:srgbClr val="FFFFFF"/>
+          </a:solidFill>
+          <a:ln w="6350">
+            <a:solidFill>
+              <a:srgbClr val="282828"/>
+            </a:solidFill>
+          </a:ln>
+        </p:spPr>
+        <p:style>
+          <a:lnRef idx="1">
+            <a:schemeClr val="accent1"/>
+          </a:lnRef>
+          <a:fillRef idx="3">
+            <a:schemeClr val="accent1"/>
+          </a:fillRef>
+          <a:effectRef idx="2">
+            <a:schemeClr val="accent1"/>
+          </a:effectRef>
+          <a:fontRef idx="minor">
+            <a:schemeClr val="lt1"/>
+          </a:fontRef>
+        </p:style>
+        <p:txBody>
+          <a:bodyPr rtlCol="0" anchor="ctr" lIns="54864" rIns="54864"/>
+          <a:lstStyle/>
+          <a:p>
+            <a:pPr algn="ctr">
+              <a:defRPr sz="819">
+                <a:solidFill>
+                  <a:srgbClr val="000000"/>
+                </a:solidFill>
+                <a:latin typeface="Times New Roman"/>
+              </a:defRPr>
+            </a:pPr>
+            <a:r>
+              <a:t>7.3 结构退化时空分析</a:t>
+            </a:r>
+          </a:p>
+        </p:txBody>
+      </p:sp>
+      <p:sp>
+        <p:nvSpPr>
+          <p:cNvPr id="62" name="Rectangle 61"/>
+          <p:cNvSpPr/>
+          <p:nvPr/>
+        </p:nvSpPr>
+        <p:spPr>
+          <a:xfrm>
+            <a:off x="9075420" y="2907792"/>
+            <a:ext cx="73152" cy="7315"/>
+          </a:xfrm>
+          <a:prstGeom prst="rect">
+            <a:avLst/>
+          </a:prstGeom>
+          <a:solidFill>
+            <a:srgbClr val="282828"/>
+          </a:solidFill>
+          <a:ln>
+            <a:noFill/>
+          </a:ln>
+        </p:spPr>
+        <p:style>
+          <a:lnRef idx="1">
+            <a:schemeClr val="accent1"/>
+          </a:lnRef>
+          <a:fillRef idx="3">
+            <a:schemeClr val="accent1"/>
+          </a:fillRef>
+          <a:effectRef idx="2">
+            <a:schemeClr val="accent1"/>
+          </a:effectRef>
+          <a:fontRef idx="minor">
+            <a:schemeClr val="lt1"/>
+          </a:fontRef>
+        </p:style>
+        <p:txBody>
+          <a:bodyPr rtlCol="0" anchor="ctr"/>
+          <a:lstStyle/>
+          <a:p>
+            <a:pPr algn="ctr"/>
+          </a:p>
+        </p:txBody>
+      </p:sp>
+      <p:sp>
+        <p:nvSpPr>
+          <p:cNvPr id="63" name="Rounded Rectangle 62"/>
+          <p:cNvSpPr/>
+          <p:nvPr/>
+        </p:nvSpPr>
+        <p:spPr>
+          <a:xfrm>
+            <a:off x="9166860" y="2816352"/>
+            <a:ext cx="2084831" cy="219456"/>
+          </a:xfrm>
+          <a:prstGeom prst="roundRect">
+            <a:avLst/>
+          </a:prstGeom>
+          <a:solidFill>
+            <a:srgbClr val="FFFFFF"/>
+          </a:solidFill>
+          <a:ln w="6350">
+            <a:solidFill>
+              <a:srgbClr val="282828"/>
+            </a:solidFill>
+          </a:ln>
+        </p:spPr>
+        <p:style>
+          <a:lnRef idx="1">
+            <a:schemeClr val="accent1"/>
+          </a:lnRef>
+          <a:fillRef idx="3">
+            <a:schemeClr val="accent1"/>
+          </a:fillRef>
+          <a:effectRef idx="2">
+            <a:schemeClr val="accent1"/>
+          </a:effectRef>
+          <a:fontRef idx="minor">
+            <a:schemeClr val="lt1"/>
+          </a:fontRef>
+        </p:style>
+        <p:txBody>
+          <a:bodyPr rtlCol="0" anchor="ctr" lIns="54864" rIns="54864"/>
+          <a:lstStyle/>
+          <a:p>
+            <a:pPr algn="ctr">
+              <a:defRPr sz="819">
+                <a:solidFill>
+                  <a:srgbClr val="000000"/>
+                </a:solidFill>
+                <a:latin typeface="Times New Roman"/>
+              </a:defRPr>
+            </a:pPr>
+            <a:r>
+              <a:t>7.5 城市级资产护照挂载</a:t>
+            </a:r>
+          </a:p>
+        </p:txBody>
+      </p:sp>
+      <p:sp>
+        <p:nvSpPr>
+          <p:cNvPr id="64" name="Rounded Rectangle 63"/>
+          <p:cNvSpPr/>
+          <p:nvPr/>
+        </p:nvSpPr>
+        <p:spPr>
+          <a:xfrm>
+            <a:off x="9002268" y="3657600"/>
+            <a:ext cx="2331720" cy="329184"/>
+          </a:xfrm>
+          <a:prstGeom prst="roundRect">
+            <a:avLst/>
+          </a:prstGeom>
+          <a:solidFill>
+            <a:srgbClr val="FFFFFF"/>
+          </a:solidFill>
+          <a:ln w="12700">
+            <a:solidFill>
+              <a:srgbClr val="000000"/>
+            </a:solidFill>
+          </a:ln>
+        </p:spPr>
+        <p:style>
+          <a:lnRef idx="1">
+            <a:schemeClr val="accent1"/>
+          </a:lnRef>
+          <a:fillRef idx="3">
+            <a:schemeClr val="accent1"/>
+          </a:fillRef>
+          <a:effectRef idx="2">
+            <a:schemeClr val="accent1"/>
+          </a:effectRef>
+          <a:fontRef idx="minor">
+            <a:schemeClr val="lt1"/>
+          </a:fontRef>
+        </p:style>
+        <p:txBody>
+          <a:bodyPr rtlCol="0" anchor="ctr" lIns="73152" rIns="73152"/>
+          <a:lstStyle/>
+          <a:p>
+            <a:pPr algn="ctr">
+              <a:defRPr sz="919" b="1">
+                <a:solidFill>
+                  <a:srgbClr val="000000"/>
+                </a:solidFill>
+                <a:latin typeface="Times New Roman"/>
+              </a:defRPr>
+            </a:pPr>
+            <a:r>
+              <a:t>第 8 章：数字孪生与大模型 （Yijun Huang）</a:t>
+            </a:r>
+          </a:p>
+        </p:txBody>
+      </p:sp>
+      <p:sp>
+        <p:nvSpPr>
+          <p:cNvPr id="65" name="Rectangle 64"/>
+          <p:cNvSpPr/>
+          <p:nvPr/>
+        </p:nvSpPr>
+        <p:spPr>
+          <a:xfrm>
+            <a:off x="9075420" y="3986784"/>
+            <a:ext cx="7315" cy="621792"/>
+          </a:xfrm>
+          <a:prstGeom prst="rect">
+            <a:avLst/>
+          </a:prstGeom>
+          <a:solidFill>
+            <a:srgbClr val="282828"/>
+          </a:solidFill>
+          <a:ln>
+            <a:noFill/>
+          </a:ln>
+        </p:spPr>
+        <p:style>
+          <a:lnRef idx="1">
+            <a:schemeClr val="accent1"/>
+          </a:lnRef>
+          <a:fillRef idx="3">
+            <a:schemeClr val="accent1"/>
+          </a:fillRef>
+          <a:effectRef idx="2">
+            <a:schemeClr val="accent1"/>
+          </a:effectRef>
+          <a:fontRef idx="minor">
+            <a:schemeClr val="lt1"/>
+          </a:fontRef>
+        </p:style>
+        <p:txBody>
+          <a:bodyPr rtlCol="0" anchor="ctr"/>
+          <a:lstStyle/>
+          <a:p>
+            <a:pPr algn="ctr"/>
+          </a:p>
+        </p:txBody>
+      </p:sp>
+      <p:sp>
+        <p:nvSpPr>
+          <p:cNvPr id="66" name="Rectangle 65"/>
+          <p:cNvSpPr/>
+          <p:nvPr/>
+        </p:nvSpPr>
+        <p:spPr>
+          <a:xfrm>
+            <a:off x="9075420" y="4133088"/>
+            <a:ext cx="73152" cy="7315"/>
+          </a:xfrm>
+          <a:prstGeom prst="rect">
+            <a:avLst/>
+          </a:prstGeom>
+          <a:solidFill>
+            <a:srgbClr val="282828"/>
+          </a:solidFill>
+          <a:ln>
+            <a:noFill/>
+          </a:ln>
+        </p:spPr>
+        <p:style>
+          <a:lnRef idx="1">
+            <a:schemeClr val="accent1"/>
+          </a:lnRef>
+          <a:fillRef idx="3">
+            <a:schemeClr val="accent1"/>
+          </a:fillRef>
+          <a:effectRef idx="2">
+            <a:schemeClr val="accent1"/>
+          </a:effectRef>
+          <a:fontRef idx="minor">
+            <a:schemeClr val="lt1"/>
+          </a:fontRef>
+        </p:style>
+        <p:txBody>
+          <a:bodyPr rtlCol="0" anchor="ctr"/>
+          <a:lstStyle/>
+          <a:p>
+            <a:pPr algn="ctr"/>
+          </a:p>
+        </p:txBody>
+      </p:sp>
+      <p:sp>
+        <p:nvSpPr>
+          <p:cNvPr id="67" name="Rounded Rectangle 66"/>
+          <p:cNvSpPr/>
+          <p:nvPr/>
+        </p:nvSpPr>
+        <p:spPr>
+          <a:xfrm>
+            <a:off x="9166860" y="4041648"/>
+            <a:ext cx="2084831" cy="219456"/>
+          </a:xfrm>
+          <a:prstGeom prst="roundRect">
+            <a:avLst/>
+          </a:prstGeom>
+          <a:solidFill>
+            <a:srgbClr val="FFFFFF"/>
+          </a:solidFill>
+          <a:ln w="6350">
+            <a:solidFill>
+              <a:srgbClr val="282828"/>
+            </a:solidFill>
+          </a:ln>
+        </p:spPr>
+        <p:style>
+          <a:lnRef idx="1">
+            <a:schemeClr val="accent1"/>
+          </a:lnRef>
+          <a:fillRef idx="3">
+            <a:schemeClr val="accent1"/>
+          </a:fillRef>
+          <a:effectRef idx="2">
+            <a:schemeClr val="accent1"/>
+          </a:effectRef>
+          <a:fontRef idx="minor">
+            <a:schemeClr val="lt1"/>
+          </a:fontRef>
+        </p:style>
+        <p:txBody>
+          <a:bodyPr rtlCol="0" anchor="ctr" lIns="54864" rIns="54864"/>
+          <a:lstStyle/>
+          <a:p>
+            <a:pPr algn="ctr">
+              <a:defRPr sz="819">
+                <a:solidFill>
+                  <a:srgbClr val="000000"/>
+                </a:solidFill>
+                <a:latin typeface="Times New Roman"/>
+              </a:defRPr>
+            </a:pPr>
+            <a:r>
+              <a:t>8.2 LLM / VLM 领域推理底座</a:t>
+            </a:r>
+          </a:p>
+        </p:txBody>
+      </p:sp>
+      <p:sp>
+        <p:nvSpPr>
+          <p:cNvPr id="68" name="Rectangle 67"/>
+          <p:cNvSpPr/>
+          <p:nvPr/>
+        </p:nvSpPr>
+        <p:spPr>
+          <a:xfrm>
+            <a:off x="9075420" y="4389120"/>
+            <a:ext cx="73152" cy="7315"/>
+          </a:xfrm>
+          <a:prstGeom prst="rect">
+            <a:avLst/>
+          </a:prstGeom>
+          <a:solidFill>
+            <a:srgbClr val="282828"/>
+          </a:solidFill>
+          <a:ln>
+            <a:noFill/>
+          </a:ln>
+        </p:spPr>
+        <p:style>
+          <a:lnRef idx="1">
+            <a:schemeClr val="accent1"/>
+          </a:lnRef>
+          <a:fillRef idx="3">
+            <a:schemeClr val="accent1"/>
+          </a:fillRef>
+          <a:effectRef idx="2">
+            <a:schemeClr val="accent1"/>
+          </a:effectRef>
+          <a:fontRef idx="minor">
+            <a:schemeClr val="lt1"/>
+          </a:fontRef>
+        </p:style>
+        <p:txBody>
+          <a:bodyPr rtlCol="0" anchor="ctr"/>
+          <a:lstStyle/>
+          <a:p>
+            <a:pPr algn="ctr"/>
+          </a:p>
+        </p:txBody>
+      </p:sp>
+      <p:sp>
+        <p:nvSpPr>
+          <p:cNvPr id="69" name="Rounded Rectangle 68"/>
+          <p:cNvSpPr/>
+          <p:nvPr/>
+        </p:nvSpPr>
+        <p:spPr>
+          <a:xfrm>
+            <a:off x="9166860" y="4297680"/>
+            <a:ext cx="2084831" cy="219456"/>
+          </a:xfrm>
+          <a:prstGeom prst="roundRect">
+            <a:avLst/>
+          </a:prstGeom>
+          <a:solidFill>
+            <a:srgbClr val="FFFFFF"/>
+          </a:solidFill>
+          <a:ln w="6350">
+            <a:solidFill>
+              <a:srgbClr val="282828"/>
+            </a:solidFill>
+          </a:ln>
+        </p:spPr>
+        <p:style>
+          <a:lnRef idx="1">
+            <a:schemeClr val="accent1"/>
+          </a:lnRef>
+          <a:fillRef idx="3">
+            <a:schemeClr val="accent1"/>
+          </a:fillRef>
+          <a:effectRef idx="2">
+            <a:schemeClr val="accent1"/>
+          </a:effectRef>
+          <a:fontRef idx="minor">
+            <a:schemeClr val="lt1"/>
+          </a:fontRef>
+        </p:style>
+        <p:txBody>
+          <a:bodyPr rtlCol="0" anchor="ctr" lIns="54864" rIns="54864"/>
+          <a:lstStyle/>
+          <a:p>
+            <a:pPr algn="ctr">
+              <a:defRPr sz="819">
+                <a:solidFill>
+                  <a:srgbClr val="000000"/>
+                </a:solidFill>
+                <a:latin typeface="Times New Roman"/>
+              </a:defRPr>
+            </a:pPr>
+            <a:r>
+              <a:t>8.3 孪生记忆与 RAG 检索</a:t>
+            </a:r>
+          </a:p>
+        </p:txBody>
+      </p:sp>
+      <p:sp>
+        <p:nvSpPr>
+          <p:cNvPr id="70" name="Rectangle 69"/>
+          <p:cNvSpPr/>
+          <p:nvPr/>
+        </p:nvSpPr>
+        <p:spPr>
+          <a:xfrm>
+            <a:off x="9075420" y="4645152"/>
+            <a:ext cx="73152" cy="7315"/>
+          </a:xfrm>
+          <a:prstGeom prst="rect">
+            <a:avLst/>
+          </a:prstGeom>
+          <a:solidFill>
+            <a:srgbClr val="282828"/>
+          </a:solidFill>
+          <a:ln>
+            <a:noFill/>
+          </a:ln>
+        </p:spPr>
+        <p:style>
+          <a:lnRef idx="1">
+            <a:schemeClr val="accent1"/>
+          </a:lnRef>
+          <a:fillRef idx="3">
+            <a:schemeClr val="accent1"/>
+          </a:fillRef>
+          <a:effectRef idx="2">
+            <a:schemeClr val="accent1"/>
+          </a:effectRef>
+          <a:fontRef idx="minor">
+            <a:schemeClr val="lt1"/>
+          </a:fontRef>
+        </p:style>
+        <p:txBody>
+          <a:bodyPr rtlCol="0" anchor="ctr"/>
+          <a:lstStyle/>
+          <a:p>
+            <a:pPr algn="ctr"/>
+          </a:p>
+        </p:txBody>
+      </p:sp>
+      <p:sp>
+        <p:nvSpPr>
+          <p:cNvPr id="71" name="Rounded Rectangle 70"/>
+          <p:cNvSpPr/>
+          <p:nvPr/>
+        </p:nvSpPr>
+        <p:spPr>
+          <a:xfrm>
+            <a:off x="9166860" y="4553712"/>
+            <a:ext cx="2084831" cy="219456"/>
+          </a:xfrm>
+          <a:prstGeom prst="roundRect">
+            <a:avLst/>
+          </a:prstGeom>
+          <a:solidFill>
+            <a:srgbClr val="FFFFFF"/>
+          </a:solidFill>
+          <a:ln w="6350">
+            <a:solidFill>
+              <a:srgbClr val="282828"/>
+            </a:solidFill>
+          </a:ln>
+        </p:spPr>
+        <p:style>
+          <a:lnRef idx="1">
+            <a:schemeClr val="accent1"/>
+          </a:lnRef>
+          <a:fillRef idx="3">
+            <a:schemeClr val="accent1"/>
+          </a:fillRef>
+          <a:effectRef idx="2">
+            <a:schemeClr val="accent1"/>
+          </a:effectRef>
+          <a:fontRef idx="minor">
+            <a:schemeClr val="lt1"/>
+          </a:fontRef>
+        </p:style>
+        <p:txBody>
+          <a:bodyPr rtlCol="0" anchor="ctr" lIns="54864" rIns="54864"/>
+          <a:lstStyle/>
+          <a:p>
+            <a:pPr algn="ctr">
+              <a:defRPr sz="819">
+                <a:solidFill>
+                  <a:srgbClr val="000000"/>
+                </a:solidFill>
+                <a:latin typeface="Times New Roman"/>
+              </a:defRPr>
+            </a:pPr>
+            <a:r>
+              <a:t>8.5/8.6 报告生成与预测维护</a:t>
+            </a:r>
+          </a:p>
+        </p:txBody>
+      </p:sp>
+      <p:sp>
+        <p:nvSpPr>
+          <p:cNvPr id="72" name="Rounded Rectangle 71"/>
+          <p:cNvSpPr/>
+          <p:nvPr/>
+        </p:nvSpPr>
+        <p:spPr>
+          <a:xfrm>
+            <a:off x="9002268" y="5394960"/>
+            <a:ext cx="2331720" cy="329184"/>
+          </a:xfrm>
+          <a:prstGeom prst="roundRect">
+            <a:avLst/>
+          </a:prstGeom>
+          <a:solidFill>
+            <a:srgbClr val="FFFFFF"/>
+          </a:solidFill>
+          <a:ln w="12700">
+            <a:solidFill>
+              <a:srgbClr val="000000"/>
+            </a:solidFill>
+          </a:ln>
+        </p:spPr>
+        <p:style>
+          <a:lnRef idx="1">
+            <a:schemeClr val="accent1"/>
+          </a:lnRef>
+          <a:fillRef idx="3">
+            <a:schemeClr val="accent1"/>
+          </a:fillRef>
+          <a:effectRef idx="2">
+            <a:schemeClr val="accent1"/>
+          </a:effectRef>
+          <a:fontRef idx="minor">
+            <a:schemeClr val="lt1"/>
+          </a:fontRef>
+        </p:style>
+        <p:txBody>
+          <a:bodyPr rtlCol="0" anchor="ctr" lIns="73152" rIns="73152"/>
+          <a:lstStyle/>
+          <a:p>
+            <a:pPr algn="ctr">
+              <a:defRPr sz="919" b="1">
+                <a:solidFill>
+                  <a:srgbClr val="000000"/>
+                </a:solidFill>
+                <a:latin typeface="Times New Roman"/>
+              </a:defRPr>
+            </a:pPr>
+            <a:r>
+              <a:t>第 9 章：总结与展望 （Ben M. Chen et al.）</a:t>
+            </a:r>
+          </a:p>
+        </p:txBody>
+      </p:sp>
+      <p:sp>
+        <p:nvSpPr>
+          <p:cNvPr id="73" name="Rectangle 72"/>
+          <p:cNvSpPr/>
+          <p:nvPr/>
+        </p:nvSpPr>
+        <p:spPr>
+          <a:xfrm>
+            <a:off x="9075420" y="5724144"/>
+            <a:ext cx="7315" cy="621792"/>
+          </a:xfrm>
+          <a:prstGeom prst="rect">
+            <a:avLst/>
+          </a:prstGeom>
+          <a:solidFill>
+            <a:srgbClr val="282828"/>
+          </a:solidFill>
+          <a:ln>
+            <a:noFill/>
+          </a:ln>
+        </p:spPr>
+        <p:style>
+          <a:lnRef idx="1">
+            <a:schemeClr val="accent1"/>
+          </a:lnRef>
+          <a:fillRef idx="3">
+            <a:schemeClr val="accent1"/>
+          </a:fillRef>
+          <a:effectRef idx="2">
+            <a:schemeClr val="accent1"/>
+          </a:effectRef>
+          <a:fontRef idx="minor">
+            <a:schemeClr val="lt1"/>
+          </a:fontRef>
+        </p:style>
+        <p:txBody>
+          <a:bodyPr rtlCol="0" anchor="ctr"/>
+          <a:lstStyle/>
+          <a:p>
+            <a:pPr algn="ctr"/>
+          </a:p>
+        </p:txBody>
+      </p:sp>
+      <p:sp>
+        <p:nvSpPr>
+          <p:cNvPr id="74" name="Rectangle 73"/>
+          <p:cNvSpPr/>
+          <p:nvPr/>
+        </p:nvSpPr>
+        <p:spPr>
+          <a:xfrm>
+            <a:off x="9075420" y="5870448"/>
+            <a:ext cx="73152" cy="7315"/>
+          </a:xfrm>
+          <a:prstGeom prst="rect">
+            <a:avLst/>
+          </a:prstGeom>
+          <a:solidFill>
+            <a:srgbClr val="282828"/>
+          </a:solidFill>
+          <a:ln>
+            <a:noFill/>
+          </a:ln>
+        </p:spPr>
+        <p:style>
+          <a:lnRef idx="1">
+            <a:schemeClr val="accent1"/>
+          </a:lnRef>
+          <a:fillRef idx="3">
+            <a:schemeClr val="accent1"/>
+          </a:fillRef>
+          <a:effectRef idx="2">
+            <a:schemeClr val="accent1"/>
+          </a:effectRef>
+          <a:fontRef idx="minor">
+            <a:schemeClr val="lt1"/>
+          </a:fontRef>
+        </p:style>
+        <p:txBody>
+          <a:bodyPr rtlCol="0" anchor="ctr"/>
+          <a:lstStyle/>
+          <a:p>
+            <a:pPr algn="ctr"/>
+          </a:p>
+        </p:txBody>
+      </p:sp>
+      <p:sp>
+        <p:nvSpPr>
+          <p:cNvPr id="75" name="Rounded Rectangle 74"/>
+          <p:cNvSpPr/>
+          <p:nvPr/>
+        </p:nvSpPr>
+        <p:spPr>
+          <a:xfrm>
+            <a:off x="9166860" y="5779008"/>
+            <a:ext cx="2084831" cy="219456"/>
+          </a:xfrm>
+          <a:prstGeom prst="roundRect">
+            <a:avLst/>
+          </a:prstGeom>
+          <a:solidFill>
+            <a:srgbClr val="FFFFFF"/>
+          </a:solidFill>
+          <a:ln w="6350">
+            <a:solidFill>
+              <a:srgbClr val="282828"/>
+            </a:solidFill>
+          </a:ln>
+        </p:spPr>
+        <p:style>
+          <a:lnRef idx="1">
+            <a:schemeClr val="accent1"/>
+          </a:lnRef>
+          <a:fillRef idx="3">
+            <a:schemeClr val="accent1"/>
+          </a:fillRef>
+          <a:effectRef idx="2">
+            <a:schemeClr val="accent1"/>
+          </a:effectRef>
+          <a:fontRef idx="minor">
+            <a:schemeClr val="lt1"/>
+          </a:fontRef>
+        </p:style>
+        <p:txBody>
+          <a:bodyPr rtlCol="0" anchor="ctr" lIns="54864" rIns="54864"/>
+          <a:lstStyle/>
+          <a:p>
+            <a:pPr algn="ctr">
+              <a:defRPr sz="819">
+                <a:solidFill>
+                  <a:srgbClr val="000000"/>
+                </a:solidFill>
+                <a:latin typeface="Times New Roman"/>
+              </a:defRPr>
+            </a:pPr>
+            <a:r>
+              <a:t>9.1 端到端系统闭环总结</a:t>
+            </a:r>
+          </a:p>
+        </p:txBody>
+      </p:sp>
+      <p:sp>
+        <p:nvSpPr>
+          <p:cNvPr id="76" name="Rectangle 75"/>
+          <p:cNvSpPr/>
+          <p:nvPr/>
+        </p:nvSpPr>
+        <p:spPr>
+          <a:xfrm>
+            <a:off x="9075420" y="6126480"/>
+            <a:ext cx="73152" cy="7315"/>
+          </a:xfrm>
+          <a:prstGeom prst="rect">
+            <a:avLst/>
+          </a:prstGeom>
+          <a:solidFill>
+            <a:srgbClr val="282828"/>
+          </a:solidFill>
+          <a:ln>
+            <a:noFill/>
+          </a:ln>
+        </p:spPr>
+        <p:style>
+          <a:lnRef idx="1">
+            <a:schemeClr val="accent1"/>
+          </a:lnRef>
+          <a:fillRef idx="3">
+            <a:schemeClr val="accent1"/>
+          </a:fillRef>
+          <a:effectRef idx="2">
+            <a:schemeClr val="accent1"/>
+          </a:effectRef>
+          <a:fontRef idx="minor">
+            <a:schemeClr val="lt1"/>
+          </a:fontRef>
+        </p:style>
+        <p:txBody>
+          <a:bodyPr rtlCol="0" anchor="ctr"/>
+          <a:lstStyle/>
+          <a:p>
+            <a:pPr algn="ctr"/>
+          </a:p>
+        </p:txBody>
+      </p:sp>
+      <p:sp>
+        <p:nvSpPr>
+          <p:cNvPr id="77" name="Rounded Rectangle 76"/>
+          <p:cNvSpPr/>
+          <p:nvPr/>
+        </p:nvSpPr>
+        <p:spPr>
+          <a:xfrm>
+            <a:off x="9166860" y="6035040"/>
+            <a:ext cx="2084831" cy="219456"/>
+          </a:xfrm>
+          <a:prstGeom prst="roundRect">
+            <a:avLst/>
+          </a:prstGeom>
+          <a:solidFill>
+            <a:srgbClr val="FFFFFF"/>
+          </a:solidFill>
+          <a:ln w="6350">
+            <a:solidFill>
+              <a:srgbClr val="282828"/>
+            </a:solidFill>
+          </a:ln>
+        </p:spPr>
+        <p:style>
+          <a:lnRef idx="1">
+            <a:schemeClr val="accent1"/>
+          </a:lnRef>
+          <a:fillRef idx="3">
+            <a:schemeClr val="accent1"/>
+          </a:fillRef>
+          <a:effectRef idx="2">
+            <a:schemeClr val="accent1"/>
+          </a:effectRef>
+          <a:fontRef idx="minor">
+            <a:schemeClr val="lt1"/>
+          </a:fontRef>
+        </p:style>
+        <p:txBody>
+          <a:bodyPr rtlCol="0" anchor="ctr" lIns="54864" rIns="54864"/>
+          <a:lstStyle/>
+          <a:p>
+            <a:pPr algn="ctr">
+              <a:defRPr sz="819">
+                <a:solidFill>
+                  <a:srgbClr val="000000"/>
+                </a:solidFill>
+                <a:latin typeface="Times New Roman"/>
+              </a:defRPr>
+            </a:pPr>
+            <a:r>
+              <a:t>9.2 法规、安全与隐私约束</a:t>
+            </a:r>
+          </a:p>
+        </p:txBody>
+      </p:sp>
+      <p:sp>
+        <p:nvSpPr>
+          <p:cNvPr id="78" name="Rectangle 77"/>
+          <p:cNvSpPr/>
+          <p:nvPr/>
+        </p:nvSpPr>
+        <p:spPr>
+          <a:xfrm>
+            <a:off x="9075420" y="6382512"/>
+            <a:ext cx="73152" cy="7315"/>
+          </a:xfrm>
+          <a:prstGeom prst="rect">
+            <a:avLst/>
+          </a:prstGeom>
+          <a:solidFill>
+            <a:srgbClr val="282828"/>
+          </a:solidFill>
+          <a:ln>
+            <a:noFill/>
+          </a:ln>
+        </p:spPr>
+        <p:style>
+          <a:lnRef idx="1">
+            <a:schemeClr val="accent1"/>
+          </a:lnRef>
+          <a:fillRef idx="3">
+            <a:schemeClr val="accent1"/>
+          </a:fillRef>
+          <a:effectRef idx="2">
+            <a:schemeClr val="accent1"/>
+          </a:effectRef>
+          <a:fontRef idx="minor">
+            <a:schemeClr val="lt1"/>
+          </a:fontRef>
+        </p:style>
+        <p:txBody>
+          <a:bodyPr rtlCol="0" anchor="ctr"/>
+          <a:lstStyle/>
+          <a:p>
+            <a:pPr algn="ctr"/>
+          </a:p>
+        </p:txBody>
+      </p:sp>
+      <p:sp>
+        <p:nvSpPr>
+          <p:cNvPr id="79" name="Rounded Rectangle 78"/>
+          <p:cNvSpPr/>
+          <p:nvPr/>
+        </p:nvSpPr>
+        <p:spPr>
+          <a:xfrm>
+            <a:off x="9166860" y="6291072"/>
+            <a:ext cx="2084831" cy="219456"/>
+          </a:xfrm>
+          <a:prstGeom prst="roundRect">
+            <a:avLst/>
+          </a:prstGeom>
+          <a:solidFill>
+            <a:srgbClr val="FFFFFF"/>
+          </a:solidFill>
+          <a:ln w="6350">
+            <a:solidFill>
+              <a:srgbClr val="282828"/>
+            </a:solidFill>
+          </a:ln>
+        </p:spPr>
+        <p:style>
+          <a:lnRef idx="1">
+            <a:schemeClr val="accent1"/>
+          </a:lnRef>
+          <a:fillRef idx="3">
+            <a:schemeClr val="accent1"/>
+          </a:fillRef>
+          <a:effectRef idx="2">
+            <a:schemeClr val="accent1"/>
+          </a:effectRef>
+          <a:fontRef idx="minor">
+            <a:schemeClr val="lt1"/>
+          </a:fontRef>
+        </p:style>
+        <p:txBody>
+          <a:bodyPr rtlCol="0" anchor="ctr" lIns="54864" rIns="54864"/>
+          <a:lstStyle/>
+          <a:p>
+            <a:pPr algn="ctr">
+              <a:defRPr sz="819">
+                <a:solidFill>
+                  <a:srgbClr val="000000"/>
+                </a:solidFill>
+                <a:latin typeface="Times New Roman"/>
+              </a:defRPr>
+            </a:pPr>
+            <a:r>
+              <a:t>9.3 自主集群与下一代 AI</a:t>
+            </a:r>
+          </a:p>
+        </p:txBody>
+      </p:sp>
+      <p:sp>
+        <p:nvSpPr>
+          <p:cNvPr id="80" name="TextBox 79"/>
+          <p:cNvSpPr txBox="1"/>
+          <p:nvPr/>
+        </p:nvSpPr>
+        <p:spPr>
+          <a:xfrm>
+            <a:off x="548640" y="6236208"/>
+            <a:ext cx="11094415" cy="365760"/>
+          </a:xfrm>
+          <a:prstGeom prst="rect">
+            <a:avLst/>
+          </a:prstGeom>
+          <a:noFill/>
+        </p:spPr>
+        <p:txBody>
+          <a:bodyPr wrap="none">
+            <a:spAutoFit/>
+          </a:bodyPr>
+          <a:lstStyle/>
+          <a:p>
+            <a:pPr>
+              <a:defRPr sz="950" b="1">
+                <a:solidFill>
+                  <a:srgbClr val="000000"/>
+                </a:solidFill>
+                <a:latin typeface="Times New Roman"/>
+              </a:defRPr>
+            </a:pPr>
+            <a:r>
+              <a:t>图 1.1：专著四阶段端到端技术路线树状映射图（全书 9 章从物理采集、三维重建、AI 感知到数字孪生大模型决策）</a:t>
             </a:r>
           </a:p>
         </p:txBody>
@@ -4153,8 +6955,8 @@
         </p:nvSpPr>
         <p:spPr>
           <a:xfrm>
-            <a:off x="731520" y="411480"/>
-            <a:ext cx="10728655" cy="777240"/>
+            <a:off x="548640" y="365760"/>
+            <a:ext cx="11094415" cy="777240"/>
           </a:xfrm>
           <a:prstGeom prst="rect">
             <a:avLst/>
@@ -4168,7 +6970,7 @@
           <a:lstStyle/>
           <a:p>
             <a:pPr>
-              <a:defRPr sz="2200" b="1">
+              <a:defRPr sz="2000" b="1">
                 <a:solidFill>
                   <a:srgbClr val="000000"/>
                 </a:solidFill>
@@ -4176,12 +6978,12 @@
               </a:defRPr>
             </a:pPr>
             <a:r>
-              <a:t>Overall Framework and Chapter Map</a:t>
+              <a:t>Monograph Overall Structure and Four-Phase Chapter Tree Roadmap</a:t>
             </a:r>
           </a:p>
           <a:p>
             <a:pPr>
-              <a:defRPr sz="1200">
+              <a:defRPr sz="1100">
                 <a:solidFill>
                   <a:srgbClr val="5A5A5A"/>
                 </a:solidFill>
@@ -4196,16 +6998,16 @@
       </p:sp>
       <p:sp>
         <p:nvSpPr>
-          <p:cNvPr id="3" name="Rectangle 2"/>
-          <p:cNvSpPr/>
-          <p:nvPr/>
-        </p:nvSpPr>
-        <p:spPr>
-          <a:xfrm>
-            <a:off x="731520" y="1371600"/>
-            <a:ext cx="2423160" cy="457200"/>
-          </a:xfrm>
-          <a:prstGeom prst="rect">
+          <p:cNvPr id="3" name="Rounded Rectangle 2"/>
+          <p:cNvSpPr/>
+          <p:nvPr/>
+        </p:nvSpPr>
+        <p:spPr>
+          <a:xfrm>
+            <a:off x="548640" y="1234440"/>
+            <a:ext cx="2560320" cy="347472"/>
+          </a:xfrm>
+          <a:prstGeom prst="roundRect">
             <a:avLst/>
           </a:prstGeom>
           <a:solidFill>
@@ -4232,944 +7034,10 @@
           </a:fontRef>
         </p:style>
         <p:txBody>
-          <a:bodyPr rtlCol="0" anchor="ctr"/>
+          <a:bodyPr rtlCol="0" anchor="ctr" lIns="45720" rIns="45720"/>
           <a:lstStyle/>
           <a:p>
             <a:pPr algn="ctr">
-              <a:defRPr sz="1100" b="1">
-                <a:solidFill>
-                  <a:srgbClr val="000000"/>
-                </a:solidFill>
-                <a:latin typeface="Times New Roman"/>
-              </a:defRPr>
-            </a:pPr>
-            <a:r>
-              <a:t>Phase I: Flight &amp; Acquisition</a:t>
-            </a:r>
-          </a:p>
-        </p:txBody>
-      </p:sp>
-      <p:sp>
-        <p:nvSpPr>
-          <p:cNvPr id="4" name="Rectangle 3"/>
-          <p:cNvSpPr/>
-          <p:nvPr/>
-        </p:nvSpPr>
-        <p:spPr>
-          <a:xfrm>
-            <a:off x="731520" y="1920240"/>
-            <a:ext cx="2423160" cy="2002536"/>
-          </a:xfrm>
-          <a:prstGeom prst="rect">
-            <a:avLst/>
-          </a:prstGeom>
-          <a:solidFill>
-            <a:srgbClr val="FFFFFF"/>
-          </a:solidFill>
-          <a:ln w="12700">
-            <a:solidFill>
-              <a:srgbClr val="000000"/>
-            </a:solidFill>
-          </a:ln>
-        </p:spPr>
-        <p:style>
-          <a:lnRef idx="1">
-            <a:schemeClr val="accent1"/>
-          </a:lnRef>
-          <a:fillRef idx="3">
-            <a:schemeClr val="accent1"/>
-          </a:fillRef>
-          <a:effectRef idx="2">
-            <a:schemeClr val="accent1"/>
-          </a:effectRef>
-          <a:fontRef idx="minor">
-            <a:schemeClr val="lt1"/>
-          </a:fontRef>
-        </p:style>
-        <p:txBody>
-          <a:bodyPr rtlCol="0" anchor="t" wrap="square" lIns="109728" rIns="109728" tIns="109728"/>
-          <a:lstStyle/>
-          <a:p>
-            <a:pPr algn="ctr">
-              <a:spcAft>
-                <a:spcPts val="400"/>
-              </a:spcAft>
-              <a:defRPr sz="1050" b="1">
-                <a:solidFill>
-                  <a:srgbClr val="000000"/>
-                </a:solidFill>
-                <a:latin typeface="Times New Roman"/>
-              </a:defRPr>
-            </a:pPr>
-            <a:r>
-              <a:t>Chapter 2: Task Planning</a:t>
-            </a:r>
-          </a:p>
-          <a:p>
-            <a:pPr>
-              <a:defRPr sz="950">
-                <a:solidFill>
-                  <a:srgbClr val="000000"/>
-                </a:solidFill>
-                <a:latin typeface="Times New Roman"/>
-              </a:defRPr>
-            </a:pPr>
-            <a:r>
-              <a:t>• Façade inspection path planning</a:t>
-            </a:r>
-            <a:br/>
-            <a:r>
-              <a:t>• ROI definition &amp; multi-UAV routing</a:t>
-            </a:r>
-          </a:p>
-        </p:txBody>
-      </p:sp>
-      <p:sp>
-        <p:nvSpPr>
-          <p:cNvPr id="5" name="Rectangle 4"/>
-          <p:cNvSpPr/>
-          <p:nvPr/>
-        </p:nvSpPr>
-        <p:spPr>
-          <a:xfrm>
-            <a:off x="731520" y="4032504"/>
-            <a:ext cx="2423160" cy="2002536"/>
-          </a:xfrm>
-          <a:prstGeom prst="rect">
-            <a:avLst/>
-          </a:prstGeom>
-          <a:solidFill>
-            <a:srgbClr val="FFFFFF"/>
-          </a:solidFill>
-          <a:ln w="12700">
-            <a:solidFill>
-              <a:srgbClr val="000000"/>
-            </a:solidFill>
-          </a:ln>
-        </p:spPr>
-        <p:style>
-          <a:lnRef idx="1">
-            <a:schemeClr val="accent1"/>
-          </a:lnRef>
-          <a:fillRef idx="3">
-            <a:schemeClr val="accent1"/>
-          </a:fillRef>
-          <a:effectRef idx="2">
-            <a:schemeClr val="accent1"/>
-          </a:effectRef>
-          <a:fontRef idx="minor">
-            <a:schemeClr val="lt1"/>
-          </a:fontRef>
-        </p:style>
-        <p:txBody>
-          <a:bodyPr rtlCol="0" anchor="t" wrap="square" lIns="109728" rIns="109728" tIns="109728"/>
-          <a:lstStyle/>
-          <a:p>
-            <a:pPr algn="ctr">
-              <a:spcAft>
-                <a:spcPts val="400"/>
-              </a:spcAft>
-              <a:defRPr sz="1050" b="1">
-                <a:solidFill>
-                  <a:srgbClr val="000000"/>
-                </a:solidFill>
-                <a:latin typeface="Times New Roman"/>
-              </a:defRPr>
-            </a:pPr>
-            <a:r>
-              <a:t>Chapter 3: Motion Planning</a:t>
-            </a:r>
-          </a:p>
-          <a:p>
-            <a:pPr>
-              <a:defRPr sz="950">
-                <a:solidFill>
-                  <a:srgbClr val="000000"/>
-                </a:solidFill>
-                <a:latin typeface="Times New Roman"/>
-              </a:defRPr>
-            </a:pPr>
-            <a:r>
-              <a:t>• Obstacle avoidance &amp; trajectory opt.</a:t>
-            </a:r>
-            <a:br/>
-            <a:r>
-              <a:t>• Wind disturbance adaptation</a:t>
-            </a:r>
-          </a:p>
-        </p:txBody>
-      </p:sp>
-      <p:sp>
-        <p:nvSpPr>
-          <p:cNvPr id="6" name="Right Arrow 5"/>
-          <p:cNvSpPr/>
-          <p:nvPr/>
-        </p:nvSpPr>
-        <p:spPr>
-          <a:xfrm>
-            <a:off x="3227832" y="3593592"/>
-            <a:ext cx="201168" cy="219456"/>
-          </a:xfrm>
-          <a:prstGeom prst="rightArrow">
-            <a:avLst/>
-          </a:prstGeom>
-          <a:solidFill>
-            <a:srgbClr val="000000"/>
-          </a:solidFill>
-          <a:ln>
-            <a:noFill/>
-          </a:ln>
-        </p:spPr>
-        <p:style>
-          <a:lnRef idx="1">
-            <a:schemeClr val="accent1"/>
-          </a:lnRef>
-          <a:fillRef idx="3">
-            <a:schemeClr val="accent1"/>
-          </a:fillRef>
-          <a:effectRef idx="2">
-            <a:schemeClr val="accent1"/>
-          </a:effectRef>
-          <a:fontRef idx="minor">
-            <a:schemeClr val="lt1"/>
-          </a:fontRef>
-        </p:style>
-        <p:txBody>
-          <a:bodyPr rtlCol="0" anchor="ctr"/>
-          <a:lstStyle/>
-          <a:p>
-            <a:pPr algn="ctr"/>
-          </a:p>
-        </p:txBody>
-      </p:sp>
-      <p:sp>
-        <p:nvSpPr>
-          <p:cNvPr id="7" name="Rectangle 6"/>
-          <p:cNvSpPr/>
-          <p:nvPr/>
-        </p:nvSpPr>
-        <p:spPr>
-          <a:xfrm>
-            <a:off x="3502152" y="1371600"/>
-            <a:ext cx="2423160" cy="457200"/>
-          </a:xfrm>
-          <a:prstGeom prst="rect">
-            <a:avLst/>
-          </a:prstGeom>
-          <a:solidFill>
-            <a:srgbClr val="FFFFFF"/>
-          </a:solidFill>
-          <a:ln w="15875">
-            <a:solidFill>
-              <a:srgbClr val="000000"/>
-            </a:solidFill>
-          </a:ln>
-        </p:spPr>
-        <p:style>
-          <a:lnRef idx="1">
-            <a:schemeClr val="accent1"/>
-          </a:lnRef>
-          <a:fillRef idx="3">
-            <a:schemeClr val="accent1"/>
-          </a:fillRef>
-          <a:effectRef idx="2">
-            <a:schemeClr val="accent1"/>
-          </a:effectRef>
-          <a:fontRef idx="minor">
-            <a:schemeClr val="lt1"/>
-          </a:fontRef>
-        </p:style>
-        <p:txBody>
-          <a:bodyPr rtlCol="0" anchor="ctr"/>
-          <a:lstStyle/>
-          <a:p>
-            <a:pPr algn="ctr">
-              <a:defRPr sz="1100" b="1">
-                <a:solidFill>
-                  <a:srgbClr val="000000"/>
-                </a:solidFill>
-                <a:latin typeface="Times New Roman"/>
-              </a:defRPr>
-            </a:pPr>
-            <a:r>
-              <a:t>Phase II: Reconstruction &amp; Data</a:t>
-            </a:r>
-          </a:p>
-        </p:txBody>
-      </p:sp>
-      <p:sp>
-        <p:nvSpPr>
-          <p:cNvPr id="8" name="Rectangle 7"/>
-          <p:cNvSpPr/>
-          <p:nvPr/>
-        </p:nvSpPr>
-        <p:spPr>
-          <a:xfrm>
-            <a:off x="3502152" y="1920240"/>
-            <a:ext cx="2423160" cy="2002536"/>
-          </a:xfrm>
-          <a:prstGeom prst="rect">
-            <a:avLst/>
-          </a:prstGeom>
-          <a:solidFill>
-            <a:srgbClr val="FFFFFF"/>
-          </a:solidFill>
-          <a:ln w="12700">
-            <a:solidFill>
-              <a:srgbClr val="000000"/>
-            </a:solidFill>
-          </a:ln>
-        </p:spPr>
-        <p:style>
-          <a:lnRef idx="1">
-            <a:schemeClr val="accent1"/>
-          </a:lnRef>
-          <a:fillRef idx="3">
-            <a:schemeClr val="accent1"/>
-          </a:fillRef>
-          <a:effectRef idx="2">
-            <a:schemeClr val="accent1"/>
-          </a:effectRef>
-          <a:fontRef idx="minor">
-            <a:schemeClr val="lt1"/>
-          </a:fontRef>
-        </p:style>
-        <p:txBody>
-          <a:bodyPr rtlCol="0" anchor="t" wrap="square" lIns="109728" rIns="109728" tIns="109728"/>
-          <a:lstStyle/>
-          <a:p>
-            <a:pPr algn="ctr">
-              <a:spcAft>
-                <a:spcPts val="400"/>
-              </a:spcAft>
-              <a:defRPr sz="1050" b="1">
-                <a:solidFill>
-                  <a:srgbClr val="000000"/>
-                </a:solidFill>
-                <a:latin typeface="Times New Roman"/>
-              </a:defRPr>
-            </a:pPr>
-            <a:r>
-              <a:t>Chapter 4: 3D Reconstruction</a:t>
-            </a:r>
-          </a:p>
-          <a:p>
-            <a:pPr>
-              <a:defRPr sz="950">
-                <a:solidFill>
-                  <a:srgbClr val="000000"/>
-                </a:solidFill>
-                <a:latin typeface="Times New Roman"/>
-              </a:defRPr>
-            </a:pPr>
-            <a:r>
-              <a:t>• Photogrammetry &amp; point clouds</a:t>
-            </a:r>
-            <a:br/>
-            <a:r>
-              <a:t>• Mesh modeling &amp; BIM alignment</a:t>
-            </a:r>
-          </a:p>
-        </p:txBody>
-      </p:sp>
-      <p:sp>
-        <p:nvSpPr>
-          <p:cNvPr id="9" name="Rectangle 8"/>
-          <p:cNvSpPr/>
-          <p:nvPr/>
-        </p:nvSpPr>
-        <p:spPr>
-          <a:xfrm>
-            <a:off x="3502152" y="4032504"/>
-            <a:ext cx="2423160" cy="2002536"/>
-          </a:xfrm>
-          <a:prstGeom prst="rect">
-            <a:avLst/>
-          </a:prstGeom>
-          <a:solidFill>
-            <a:srgbClr val="FFFFFF"/>
-          </a:solidFill>
-          <a:ln w="12700">
-            <a:solidFill>
-              <a:srgbClr val="000000"/>
-            </a:solidFill>
-          </a:ln>
-        </p:spPr>
-        <p:style>
-          <a:lnRef idx="1">
-            <a:schemeClr val="accent1"/>
-          </a:lnRef>
-          <a:fillRef idx="3">
-            <a:schemeClr val="accent1"/>
-          </a:fillRef>
-          <a:effectRef idx="2">
-            <a:schemeClr val="accent1"/>
-          </a:effectRef>
-          <a:fontRef idx="minor">
-            <a:schemeClr val="lt1"/>
-          </a:fontRef>
-        </p:style>
-        <p:txBody>
-          <a:bodyPr rtlCol="0" anchor="t" wrap="square" lIns="109728" rIns="109728" tIns="109728"/>
-          <a:lstStyle/>
-          <a:p>
-            <a:pPr algn="ctr">
-              <a:spcAft>
-                <a:spcPts val="400"/>
-              </a:spcAft>
-              <a:defRPr sz="1050" b="1">
-                <a:solidFill>
-                  <a:srgbClr val="000000"/>
-                </a:solidFill>
-                <a:latin typeface="Times New Roman"/>
-              </a:defRPr>
-            </a:pPr>
-            <a:r>
-              <a:t>Chapter 5: Inspection Datasets</a:t>
-            </a:r>
-          </a:p>
-          <a:p>
-            <a:pPr>
-              <a:defRPr sz="950">
-                <a:solidFill>
-                  <a:srgbClr val="000000"/>
-                </a:solidFill>
-                <a:latin typeface="Times New Roman"/>
-              </a:defRPr>
-            </a:pPr>
-            <a:r>
-              <a:t>• Multimodal RGB / Thermal capture</a:t>
-            </a:r>
-            <a:br/>
-            <a:r>
-              <a:t>• Defect annotation &amp; benchmarks</a:t>
-            </a:r>
-          </a:p>
-        </p:txBody>
-      </p:sp>
-      <p:sp>
-        <p:nvSpPr>
-          <p:cNvPr id="10" name="Right Arrow 9"/>
-          <p:cNvSpPr/>
-          <p:nvPr/>
-        </p:nvSpPr>
-        <p:spPr>
-          <a:xfrm>
-            <a:off x="5998464" y="3593592"/>
-            <a:ext cx="201168" cy="219456"/>
-          </a:xfrm>
-          <a:prstGeom prst="rightArrow">
-            <a:avLst/>
-          </a:prstGeom>
-          <a:solidFill>
-            <a:srgbClr val="000000"/>
-          </a:solidFill>
-          <a:ln>
-            <a:noFill/>
-          </a:ln>
-        </p:spPr>
-        <p:style>
-          <a:lnRef idx="1">
-            <a:schemeClr val="accent1"/>
-          </a:lnRef>
-          <a:fillRef idx="3">
-            <a:schemeClr val="accent1"/>
-          </a:fillRef>
-          <a:effectRef idx="2">
-            <a:schemeClr val="accent1"/>
-          </a:effectRef>
-          <a:fontRef idx="minor">
-            <a:schemeClr val="lt1"/>
-          </a:fontRef>
-        </p:style>
-        <p:txBody>
-          <a:bodyPr rtlCol="0" anchor="ctr"/>
-          <a:lstStyle/>
-          <a:p>
-            <a:pPr algn="ctr"/>
-          </a:p>
-        </p:txBody>
-      </p:sp>
-      <p:sp>
-        <p:nvSpPr>
-          <p:cNvPr id="11" name="Rectangle 10"/>
-          <p:cNvSpPr/>
-          <p:nvPr/>
-        </p:nvSpPr>
-        <p:spPr>
-          <a:xfrm>
-            <a:off x="6272784" y="1371600"/>
-            <a:ext cx="2423160" cy="457200"/>
-          </a:xfrm>
-          <a:prstGeom prst="rect">
-            <a:avLst/>
-          </a:prstGeom>
-          <a:solidFill>
-            <a:srgbClr val="FFFFFF"/>
-          </a:solidFill>
-          <a:ln w="15875">
-            <a:solidFill>
-              <a:srgbClr val="000000"/>
-            </a:solidFill>
-          </a:ln>
-        </p:spPr>
-        <p:style>
-          <a:lnRef idx="1">
-            <a:schemeClr val="accent1"/>
-          </a:lnRef>
-          <a:fillRef idx="3">
-            <a:schemeClr val="accent1"/>
-          </a:fillRef>
-          <a:effectRef idx="2">
-            <a:schemeClr val="accent1"/>
-          </a:effectRef>
-          <a:fontRef idx="minor">
-            <a:schemeClr val="lt1"/>
-          </a:fontRef>
-        </p:style>
-        <p:txBody>
-          <a:bodyPr rtlCol="0" anchor="ctr"/>
-          <a:lstStyle/>
-          <a:p>
-            <a:pPr algn="ctr">
-              <a:defRPr sz="1100" b="1">
-                <a:solidFill>
-                  <a:srgbClr val="000000"/>
-                </a:solidFill>
-                <a:latin typeface="Times New Roman"/>
-              </a:defRPr>
-            </a:pPr>
-            <a:r>
-              <a:t>Phase III: AI Defect Perception</a:t>
-            </a:r>
-          </a:p>
-        </p:txBody>
-      </p:sp>
-      <p:sp>
-        <p:nvSpPr>
-          <p:cNvPr id="12" name="Rectangle 11"/>
-          <p:cNvSpPr/>
-          <p:nvPr/>
-        </p:nvSpPr>
-        <p:spPr>
-          <a:xfrm>
-            <a:off x="6272784" y="1920240"/>
-            <a:ext cx="2423160" cy="4114800"/>
-          </a:xfrm>
-          <a:prstGeom prst="rect">
-            <a:avLst/>
-          </a:prstGeom>
-          <a:solidFill>
-            <a:srgbClr val="FFFFFF"/>
-          </a:solidFill>
-          <a:ln w="12700">
-            <a:solidFill>
-              <a:srgbClr val="000000"/>
-            </a:solidFill>
-          </a:ln>
-        </p:spPr>
-        <p:style>
-          <a:lnRef idx="1">
-            <a:schemeClr val="accent1"/>
-          </a:lnRef>
-          <a:fillRef idx="3">
-            <a:schemeClr val="accent1"/>
-          </a:fillRef>
-          <a:effectRef idx="2">
-            <a:schemeClr val="accent1"/>
-          </a:effectRef>
-          <a:fontRef idx="minor">
-            <a:schemeClr val="lt1"/>
-          </a:fontRef>
-        </p:style>
-        <p:txBody>
-          <a:bodyPr rtlCol="0" anchor="t" wrap="square" lIns="109728" rIns="109728" tIns="109728"/>
-          <a:lstStyle/>
-          <a:p>
-            <a:pPr algn="ctr">
-              <a:spcAft>
-                <a:spcPts val="400"/>
-              </a:spcAft>
-              <a:defRPr sz="1050" b="1">
-                <a:solidFill>
-                  <a:srgbClr val="000000"/>
-                </a:solidFill>
-                <a:latin typeface="Times New Roman"/>
-              </a:defRPr>
-            </a:pPr>
-            <a:r>
-              <a:t>Chapter 6: AI Defect Models</a:t>
-            </a:r>
-          </a:p>
-          <a:p>
-            <a:pPr>
-              <a:defRPr sz="950">
-                <a:solidFill>
-                  <a:srgbClr val="000000"/>
-                </a:solidFill>
-                <a:latin typeface="Times New Roman"/>
-              </a:defRPr>
-            </a:pPr>
-            <a:r>
-              <a:t>• Deep learning defect detection</a:t>
-            </a:r>
-            <a:br/>
-            <a:r>
-              <a:t>• Instance segmentation &amp; quantification</a:t>
-            </a:r>
-            <a:br/>
-            <a:r>
-              <a:t>• Severity rating</a:t>
-            </a:r>
-          </a:p>
-        </p:txBody>
-      </p:sp>
-      <p:sp>
-        <p:nvSpPr>
-          <p:cNvPr id="13" name="Right Arrow 12"/>
-          <p:cNvSpPr/>
-          <p:nvPr/>
-        </p:nvSpPr>
-        <p:spPr>
-          <a:xfrm>
-            <a:off x="8769096" y="3593592"/>
-            <a:ext cx="201168" cy="219456"/>
-          </a:xfrm>
-          <a:prstGeom prst="rightArrow">
-            <a:avLst/>
-          </a:prstGeom>
-          <a:solidFill>
-            <a:srgbClr val="000000"/>
-          </a:solidFill>
-          <a:ln>
-            <a:noFill/>
-          </a:ln>
-        </p:spPr>
-        <p:style>
-          <a:lnRef idx="1">
-            <a:schemeClr val="accent1"/>
-          </a:lnRef>
-          <a:fillRef idx="3">
-            <a:schemeClr val="accent1"/>
-          </a:fillRef>
-          <a:effectRef idx="2">
-            <a:schemeClr val="accent1"/>
-          </a:effectRef>
-          <a:fontRef idx="minor">
-            <a:schemeClr val="lt1"/>
-          </a:fontRef>
-        </p:style>
-        <p:txBody>
-          <a:bodyPr rtlCol="0" anchor="ctr"/>
-          <a:lstStyle/>
-          <a:p>
-            <a:pPr algn="ctr"/>
-          </a:p>
-        </p:txBody>
-      </p:sp>
-      <p:sp>
-        <p:nvSpPr>
-          <p:cNvPr id="14" name="Rectangle 13"/>
-          <p:cNvSpPr/>
-          <p:nvPr/>
-        </p:nvSpPr>
-        <p:spPr>
-          <a:xfrm>
-            <a:off x="9043416" y="1371600"/>
-            <a:ext cx="2423160" cy="457200"/>
-          </a:xfrm>
-          <a:prstGeom prst="rect">
-            <a:avLst/>
-          </a:prstGeom>
-          <a:solidFill>
-            <a:srgbClr val="FFFFFF"/>
-          </a:solidFill>
-          <a:ln w="15875">
-            <a:solidFill>
-              <a:srgbClr val="000000"/>
-            </a:solidFill>
-          </a:ln>
-        </p:spPr>
-        <p:style>
-          <a:lnRef idx="1">
-            <a:schemeClr val="accent1"/>
-          </a:lnRef>
-          <a:fillRef idx="3">
-            <a:schemeClr val="accent1"/>
-          </a:fillRef>
-          <a:effectRef idx="2">
-            <a:schemeClr val="accent1"/>
-          </a:effectRef>
-          <a:fontRef idx="minor">
-            <a:schemeClr val="lt1"/>
-          </a:fontRef>
-        </p:style>
-        <p:txBody>
-          <a:bodyPr rtlCol="0" anchor="ctr"/>
-          <a:lstStyle/>
-          <a:p>
-            <a:pPr algn="ctr">
-              <a:defRPr sz="1100" b="1">
-                <a:solidFill>
-                  <a:srgbClr val="000000"/>
-                </a:solidFill>
-                <a:latin typeface="Times New Roman"/>
-              </a:defRPr>
-            </a:pPr>
-            <a:r>
-              <a:t>Phase IV: Digital Twin &amp; LLM</a:t>
-            </a:r>
-          </a:p>
-        </p:txBody>
-      </p:sp>
-      <p:sp>
-        <p:nvSpPr>
-          <p:cNvPr id="15" name="Rectangle 14"/>
-          <p:cNvSpPr/>
-          <p:nvPr/>
-        </p:nvSpPr>
-        <p:spPr>
-          <a:xfrm>
-            <a:off x="9043416" y="1920240"/>
-            <a:ext cx="2423160" cy="1298448"/>
-          </a:xfrm>
-          <a:prstGeom prst="rect">
-            <a:avLst/>
-          </a:prstGeom>
-          <a:solidFill>
-            <a:srgbClr val="FFFFFF"/>
-          </a:solidFill>
-          <a:ln w="12700">
-            <a:solidFill>
-              <a:srgbClr val="000000"/>
-            </a:solidFill>
-          </a:ln>
-        </p:spPr>
-        <p:style>
-          <a:lnRef idx="1">
-            <a:schemeClr val="accent1"/>
-          </a:lnRef>
-          <a:fillRef idx="3">
-            <a:schemeClr val="accent1"/>
-          </a:fillRef>
-          <a:effectRef idx="2">
-            <a:schemeClr val="accent1"/>
-          </a:effectRef>
-          <a:fontRef idx="minor">
-            <a:schemeClr val="lt1"/>
-          </a:fontRef>
-        </p:style>
-        <p:txBody>
-          <a:bodyPr rtlCol="0" anchor="t" wrap="square" lIns="109728" rIns="109728" tIns="109728"/>
-          <a:lstStyle/>
-          <a:p>
-            <a:pPr algn="ctr">
-              <a:spcAft>
-                <a:spcPts val="400"/>
-              </a:spcAft>
-              <a:defRPr sz="1050" b="1">
-                <a:solidFill>
-                  <a:srgbClr val="000000"/>
-                </a:solidFill>
-                <a:latin typeface="Times New Roman"/>
-              </a:defRPr>
-            </a:pPr>
-            <a:r>
-              <a:t>Chapter 7: GIS &amp; GeoBIM</a:t>
-            </a:r>
-          </a:p>
-          <a:p>
-            <a:pPr>
-              <a:defRPr sz="950">
-                <a:solidFill>
-                  <a:srgbClr val="000000"/>
-                </a:solidFill>
-                <a:latin typeface="Times New Roman"/>
-              </a:defRPr>
-            </a:pPr>
-            <a:r>
-              <a:t>• Spatial database &amp; GeoBIM mapping</a:t>
-            </a:r>
-            <a:br/>
-            <a:r>
-              <a:t>• Defect &amp; Asset Passport attachment</a:t>
-            </a:r>
-          </a:p>
-        </p:txBody>
-      </p:sp>
-      <p:sp>
-        <p:nvSpPr>
-          <p:cNvPr id="16" name="Rectangle 15"/>
-          <p:cNvSpPr/>
-          <p:nvPr/>
-        </p:nvSpPr>
-        <p:spPr>
-          <a:xfrm>
-            <a:off x="9043416" y="3328416"/>
-            <a:ext cx="2423160" cy="1298448"/>
-          </a:xfrm>
-          <a:prstGeom prst="rect">
-            <a:avLst/>
-          </a:prstGeom>
-          <a:solidFill>
-            <a:srgbClr val="FFFFFF"/>
-          </a:solidFill>
-          <a:ln w="12700">
-            <a:solidFill>
-              <a:srgbClr val="000000"/>
-            </a:solidFill>
-          </a:ln>
-        </p:spPr>
-        <p:style>
-          <a:lnRef idx="1">
-            <a:schemeClr val="accent1"/>
-          </a:lnRef>
-          <a:fillRef idx="3">
-            <a:schemeClr val="accent1"/>
-          </a:fillRef>
-          <a:effectRef idx="2">
-            <a:schemeClr val="accent1"/>
-          </a:effectRef>
-          <a:fontRef idx="minor">
-            <a:schemeClr val="lt1"/>
-          </a:fontRef>
-        </p:style>
-        <p:txBody>
-          <a:bodyPr rtlCol="0" anchor="t" wrap="square" lIns="109728" rIns="109728" tIns="109728"/>
-          <a:lstStyle/>
-          <a:p>
-            <a:pPr algn="ctr">
-              <a:spcAft>
-                <a:spcPts val="400"/>
-              </a:spcAft>
-              <a:defRPr sz="1050" b="1">
-                <a:solidFill>
-                  <a:srgbClr val="000000"/>
-                </a:solidFill>
-                <a:latin typeface="Times New Roman"/>
-              </a:defRPr>
-            </a:pPr>
-            <a:r>
-              <a:t>Chapter 8: Digital Twin &amp; LLM</a:t>
-            </a:r>
-          </a:p>
-          <a:p>
-            <a:pPr>
-              <a:defRPr sz="950">
-                <a:solidFill>
-                  <a:srgbClr val="000000"/>
-                </a:solidFill>
-                <a:latin typeface="Times New Roman"/>
-              </a:defRPr>
-            </a:pPr>
-            <a:r>
-              <a:t>• LLM / VLM RAG reasoning</a:t>
-            </a:r>
-            <a:br/>
-            <a:r>
-              <a:t>• Maintenance query &amp; decision support</a:t>
-            </a:r>
-          </a:p>
-        </p:txBody>
-      </p:sp>
-      <p:sp>
-        <p:nvSpPr>
-          <p:cNvPr id="17" name="Rectangle 16"/>
-          <p:cNvSpPr/>
-          <p:nvPr/>
-        </p:nvSpPr>
-        <p:spPr>
-          <a:xfrm>
-            <a:off x="9043416" y="4736592"/>
-            <a:ext cx="2423160" cy="1298448"/>
-          </a:xfrm>
-          <a:prstGeom prst="rect">
-            <a:avLst/>
-          </a:prstGeom>
-          <a:solidFill>
-            <a:srgbClr val="FFFFFF"/>
-          </a:solidFill>
-          <a:ln w="12700">
-            <a:solidFill>
-              <a:srgbClr val="000000"/>
-            </a:solidFill>
-          </a:ln>
-        </p:spPr>
-        <p:style>
-          <a:lnRef idx="1">
-            <a:schemeClr val="accent1"/>
-          </a:lnRef>
-          <a:fillRef idx="3">
-            <a:schemeClr val="accent1"/>
-          </a:fillRef>
-          <a:effectRef idx="2">
-            <a:schemeClr val="accent1"/>
-          </a:effectRef>
-          <a:fontRef idx="minor">
-            <a:schemeClr val="lt1"/>
-          </a:fontRef>
-        </p:style>
-        <p:txBody>
-          <a:bodyPr rtlCol="0" anchor="t" wrap="square" lIns="109728" rIns="109728" tIns="109728"/>
-          <a:lstStyle/>
-          <a:p>
-            <a:pPr algn="ctr">
-              <a:spcAft>
-                <a:spcPts val="400"/>
-              </a:spcAft>
-              <a:defRPr sz="1050" b="1">
-                <a:solidFill>
-                  <a:srgbClr val="000000"/>
-                </a:solidFill>
-                <a:latin typeface="Times New Roman"/>
-              </a:defRPr>
-            </a:pPr>
-            <a:r>
-              <a:t>Chapter 9: Conclusion &amp; Future</a:t>
-            </a:r>
-          </a:p>
-          <a:p>
-            <a:pPr>
-              <a:defRPr sz="950">
-                <a:solidFill>
-                  <a:srgbClr val="000000"/>
-                </a:solidFill>
-                <a:latin typeface="Times New Roman"/>
-              </a:defRPr>
-            </a:pPr>
-            <a:r>
-              <a:t>• Field deployment audit</a:t>
-            </a:r>
-            <a:br/>
-            <a:r>
-              <a:t>• Open challenges &amp; future outlook</a:t>
-            </a:r>
-          </a:p>
-        </p:txBody>
-      </p:sp>
-      <p:sp>
-        <p:nvSpPr>
-          <p:cNvPr id="18" name="TextBox 17"/>
-          <p:cNvSpPr txBox="1"/>
-          <p:nvPr/>
-        </p:nvSpPr>
-        <p:spPr>
-          <a:xfrm>
-            <a:off x="731520" y="6217920"/>
-            <a:ext cx="10728655" cy="365760"/>
-          </a:xfrm>
-          <a:prstGeom prst="rect">
-            <a:avLst/>
-          </a:prstGeom>
-          <a:noFill/>
-        </p:spPr>
-        <p:txBody>
-          <a:bodyPr wrap="none">
-            <a:spAutoFit/>
-          </a:bodyPr>
-          <a:lstStyle/>
-          <a:p>
-            <a:pPr>
               <a:defRPr sz="1000" b="1">
                 <a:solidFill>
                   <a:srgbClr val="000000"/>
@@ -5178,7 +7046,3743 @@
               </a:defRPr>
             </a:pPr>
             <a:r>
-              <a:t>Figure 1.1: End-to-end four-phase methodology and chapter mapping of the monograph.</a:t>
+              <a:t>Phase I: Data Acquisition</a:t>
+            </a:r>
+          </a:p>
+        </p:txBody>
+      </p:sp>
+      <p:sp>
+        <p:nvSpPr>
+          <p:cNvPr id="4" name="Rectangle 3"/>
+          <p:cNvSpPr/>
+          <p:nvPr/>
+        </p:nvSpPr>
+        <p:spPr>
+          <a:xfrm>
+            <a:off x="1824228" y="1581912"/>
+            <a:ext cx="9144" cy="2852928"/>
+          </a:xfrm>
+          <a:prstGeom prst="rect">
+            <a:avLst/>
+          </a:prstGeom>
+          <a:solidFill>
+            <a:srgbClr val="282828"/>
+          </a:solidFill>
+          <a:ln>
+            <a:noFill/>
+          </a:ln>
+        </p:spPr>
+        <p:style>
+          <a:lnRef idx="1">
+            <a:schemeClr val="accent1"/>
+          </a:lnRef>
+          <a:fillRef idx="3">
+            <a:schemeClr val="accent1"/>
+          </a:fillRef>
+          <a:effectRef idx="2">
+            <a:schemeClr val="accent1"/>
+          </a:effectRef>
+          <a:fontRef idx="minor">
+            <a:schemeClr val="lt1"/>
+          </a:fontRef>
+        </p:style>
+        <p:txBody>
+          <a:bodyPr rtlCol="0" anchor="ctr"/>
+          <a:lstStyle/>
+          <a:p>
+            <a:pPr algn="ctr"/>
+          </a:p>
+        </p:txBody>
+      </p:sp>
+      <p:sp>
+        <p:nvSpPr>
+          <p:cNvPr id="5" name="Rounded Rectangle 4"/>
+          <p:cNvSpPr/>
+          <p:nvPr/>
+        </p:nvSpPr>
+        <p:spPr>
+          <a:xfrm>
+            <a:off x="662940" y="1920240"/>
+            <a:ext cx="2331720" cy="329184"/>
+          </a:xfrm>
+          <a:prstGeom prst="roundRect">
+            <a:avLst/>
+          </a:prstGeom>
+          <a:solidFill>
+            <a:srgbClr val="FFFFFF"/>
+          </a:solidFill>
+          <a:ln w="12700">
+            <a:solidFill>
+              <a:srgbClr val="000000"/>
+            </a:solidFill>
+          </a:ln>
+        </p:spPr>
+        <p:style>
+          <a:lnRef idx="1">
+            <a:schemeClr val="accent1"/>
+          </a:lnRef>
+          <a:fillRef idx="3">
+            <a:schemeClr val="accent1"/>
+          </a:fillRef>
+          <a:effectRef idx="2">
+            <a:schemeClr val="accent1"/>
+          </a:effectRef>
+          <a:fontRef idx="minor">
+            <a:schemeClr val="lt1"/>
+          </a:fontRef>
+        </p:style>
+        <p:txBody>
+          <a:bodyPr rtlCol="0" anchor="ctr" lIns="73152" rIns="73152"/>
+          <a:lstStyle/>
+          <a:p>
+            <a:pPr algn="ctr">
+              <a:defRPr sz="919" b="1">
+                <a:solidFill>
+                  <a:srgbClr val="000000"/>
+                </a:solidFill>
+                <a:latin typeface="Times New Roman"/>
+              </a:defRPr>
+            </a:pPr>
+            <a:r>
+              <a:t>Chapter 2: Task Planning (Xinyi Wang)</a:t>
+            </a:r>
+          </a:p>
+        </p:txBody>
+      </p:sp>
+      <p:sp>
+        <p:nvSpPr>
+          <p:cNvPr id="6" name="Rectangle 5"/>
+          <p:cNvSpPr/>
+          <p:nvPr/>
+        </p:nvSpPr>
+        <p:spPr>
+          <a:xfrm>
+            <a:off x="736092" y="2249424"/>
+            <a:ext cx="7315" cy="621792"/>
+          </a:xfrm>
+          <a:prstGeom prst="rect">
+            <a:avLst/>
+          </a:prstGeom>
+          <a:solidFill>
+            <a:srgbClr val="282828"/>
+          </a:solidFill>
+          <a:ln>
+            <a:noFill/>
+          </a:ln>
+        </p:spPr>
+        <p:style>
+          <a:lnRef idx="1">
+            <a:schemeClr val="accent1"/>
+          </a:lnRef>
+          <a:fillRef idx="3">
+            <a:schemeClr val="accent1"/>
+          </a:fillRef>
+          <a:effectRef idx="2">
+            <a:schemeClr val="accent1"/>
+          </a:effectRef>
+          <a:fontRef idx="minor">
+            <a:schemeClr val="lt1"/>
+          </a:fontRef>
+        </p:style>
+        <p:txBody>
+          <a:bodyPr rtlCol="0" anchor="ctr"/>
+          <a:lstStyle/>
+          <a:p>
+            <a:pPr algn="ctr"/>
+          </a:p>
+        </p:txBody>
+      </p:sp>
+      <p:sp>
+        <p:nvSpPr>
+          <p:cNvPr id="7" name="Rectangle 6"/>
+          <p:cNvSpPr/>
+          <p:nvPr/>
+        </p:nvSpPr>
+        <p:spPr>
+          <a:xfrm>
+            <a:off x="736092" y="2395728"/>
+            <a:ext cx="73152" cy="7315"/>
+          </a:xfrm>
+          <a:prstGeom prst="rect">
+            <a:avLst/>
+          </a:prstGeom>
+          <a:solidFill>
+            <a:srgbClr val="282828"/>
+          </a:solidFill>
+          <a:ln>
+            <a:noFill/>
+          </a:ln>
+        </p:spPr>
+        <p:style>
+          <a:lnRef idx="1">
+            <a:schemeClr val="accent1"/>
+          </a:lnRef>
+          <a:fillRef idx="3">
+            <a:schemeClr val="accent1"/>
+          </a:fillRef>
+          <a:effectRef idx="2">
+            <a:schemeClr val="accent1"/>
+          </a:effectRef>
+          <a:fontRef idx="minor">
+            <a:schemeClr val="lt1"/>
+          </a:fontRef>
+        </p:style>
+        <p:txBody>
+          <a:bodyPr rtlCol="0" anchor="ctr"/>
+          <a:lstStyle/>
+          <a:p>
+            <a:pPr algn="ctr"/>
+          </a:p>
+        </p:txBody>
+      </p:sp>
+      <p:sp>
+        <p:nvSpPr>
+          <p:cNvPr id="8" name="Rounded Rectangle 7"/>
+          <p:cNvSpPr/>
+          <p:nvPr/>
+        </p:nvSpPr>
+        <p:spPr>
+          <a:xfrm>
+            <a:off x="827532" y="2304288"/>
+            <a:ext cx="2084831" cy="219456"/>
+          </a:xfrm>
+          <a:prstGeom prst="roundRect">
+            <a:avLst/>
+          </a:prstGeom>
+          <a:solidFill>
+            <a:srgbClr val="FFFFFF"/>
+          </a:solidFill>
+          <a:ln w="6350">
+            <a:solidFill>
+              <a:srgbClr val="282828"/>
+            </a:solidFill>
+          </a:ln>
+        </p:spPr>
+        <p:style>
+          <a:lnRef idx="1">
+            <a:schemeClr val="accent1"/>
+          </a:lnRef>
+          <a:fillRef idx="3">
+            <a:schemeClr val="accent1"/>
+          </a:fillRef>
+          <a:effectRef idx="2">
+            <a:schemeClr val="accent1"/>
+          </a:effectRef>
+          <a:fontRef idx="minor">
+            <a:schemeClr val="lt1"/>
+          </a:fontRef>
+        </p:style>
+        <p:txBody>
+          <a:bodyPr rtlCol="0" anchor="ctr" lIns="54864" rIns="54864"/>
+          <a:lstStyle/>
+          <a:p>
+            <a:pPr algn="ctr">
+              <a:defRPr sz="819">
+                <a:solidFill>
+                  <a:srgbClr val="000000"/>
+                </a:solidFill>
+                <a:latin typeface="Times New Roman"/>
+              </a:defRPr>
+            </a:pPr>
+            <a:r>
+              <a:t>2.2 Multi-UAV Task Allocation</a:t>
+            </a:r>
+          </a:p>
+        </p:txBody>
+      </p:sp>
+      <p:sp>
+        <p:nvSpPr>
+          <p:cNvPr id="9" name="Rectangle 8"/>
+          <p:cNvSpPr/>
+          <p:nvPr/>
+        </p:nvSpPr>
+        <p:spPr>
+          <a:xfrm>
+            <a:off x="736092" y="2651760"/>
+            <a:ext cx="73152" cy="7315"/>
+          </a:xfrm>
+          <a:prstGeom prst="rect">
+            <a:avLst/>
+          </a:prstGeom>
+          <a:solidFill>
+            <a:srgbClr val="282828"/>
+          </a:solidFill>
+          <a:ln>
+            <a:noFill/>
+          </a:ln>
+        </p:spPr>
+        <p:style>
+          <a:lnRef idx="1">
+            <a:schemeClr val="accent1"/>
+          </a:lnRef>
+          <a:fillRef idx="3">
+            <a:schemeClr val="accent1"/>
+          </a:fillRef>
+          <a:effectRef idx="2">
+            <a:schemeClr val="accent1"/>
+          </a:effectRef>
+          <a:fontRef idx="minor">
+            <a:schemeClr val="lt1"/>
+          </a:fontRef>
+        </p:style>
+        <p:txBody>
+          <a:bodyPr rtlCol="0" anchor="ctr"/>
+          <a:lstStyle/>
+          <a:p>
+            <a:pPr algn="ctr"/>
+          </a:p>
+        </p:txBody>
+      </p:sp>
+      <p:sp>
+        <p:nvSpPr>
+          <p:cNvPr id="10" name="Rounded Rectangle 9"/>
+          <p:cNvSpPr/>
+          <p:nvPr/>
+        </p:nvSpPr>
+        <p:spPr>
+          <a:xfrm>
+            <a:off x="827532" y="2560320"/>
+            <a:ext cx="2084831" cy="219456"/>
+          </a:xfrm>
+          <a:prstGeom prst="roundRect">
+            <a:avLst/>
+          </a:prstGeom>
+          <a:solidFill>
+            <a:srgbClr val="FFFFFF"/>
+          </a:solidFill>
+          <a:ln w="6350">
+            <a:solidFill>
+              <a:srgbClr val="282828"/>
+            </a:solidFill>
+          </a:ln>
+        </p:spPr>
+        <p:style>
+          <a:lnRef idx="1">
+            <a:schemeClr val="accent1"/>
+          </a:lnRef>
+          <a:fillRef idx="3">
+            <a:schemeClr val="accent1"/>
+          </a:fillRef>
+          <a:effectRef idx="2">
+            <a:schemeClr val="accent1"/>
+          </a:effectRef>
+          <a:fontRef idx="minor">
+            <a:schemeClr val="lt1"/>
+          </a:fontRef>
+        </p:style>
+        <p:txBody>
+          <a:bodyPr rtlCol="0" anchor="ctr" lIns="54864" rIns="54864"/>
+          <a:lstStyle/>
+          <a:p>
+            <a:pPr algn="ctr">
+              <a:defRPr sz="819">
+                <a:solidFill>
+                  <a:srgbClr val="000000"/>
+                </a:solidFill>
+                <a:latin typeface="Times New Roman"/>
+              </a:defRPr>
+            </a:pPr>
+            <a:r>
+              <a:t>2.4 Façade Coverage Path Planning</a:t>
+            </a:r>
+          </a:p>
+        </p:txBody>
+      </p:sp>
+      <p:sp>
+        <p:nvSpPr>
+          <p:cNvPr id="11" name="Rectangle 10"/>
+          <p:cNvSpPr/>
+          <p:nvPr/>
+        </p:nvSpPr>
+        <p:spPr>
+          <a:xfrm>
+            <a:off x="736092" y="2907792"/>
+            <a:ext cx="73152" cy="7315"/>
+          </a:xfrm>
+          <a:prstGeom prst="rect">
+            <a:avLst/>
+          </a:prstGeom>
+          <a:solidFill>
+            <a:srgbClr val="282828"/>
+          </a:solidFill>
+          <a:ln>
+            <a:noFill/>
+          </a:ln>
+        </p:spPr>
+        <p:style>
+          <a:lnRef idx="1">
+            <a:schemeClr val="accent1"/>
+          </a:lnRef>
+          <a:fillRef idx="3">
+            <a:schemeClr val="accent1"/>
+          </a:fillRef>
+          <a:effectRef idx="2">
+            <a:schemeClr val="accent1"/>
+          </a:effectRef>
+          <a:fontRef idx="minor">
+            <a:schemeClr val="lt1"/>
+          </a:fontRef>
+        </p:style>
+        <p:txBody>
+          <a:bodyPr rtlCol="0" anchor="ctr"/>
+          <a:lstStyle/>
+          <a:p>
+            <a:pPr algn="ctr"/>
+          </a:p>
+        </p:txBody>
+      </p:sp>
+      <p:sp>
+        <p:nvSpPr>
+          <p:cNvPr id="12" name="Rounded Rectangle 11"/>
+          <p:cNvSpPr/>
+          <p:nvPr/>
+        </p:nvSpPr>
+        <p:spPr>
+          <a:xfrm>
+            <a:off x="827532" y="2816352"/>
+            <a:ext cx="2084831" cy="219456"/>
+          </a:xfrm>
+          <a:prstGeom prst="roundRect">
+            <a:avLst/>
+          </a:prstGeom>
+          <a:solidFill>
+            <a:srgbClr val="FFFFFF"/>
+          </a:solidFill>
+          <a:ln w="6350">
+            <a:solidFill>
+              <a:srgbClr val="282828"/>
+            </a:solidFill>
+          </a:ln>
+        </p:spPr>
+        <p:style>
+          <a:lnRef idx="1">
+            <a:schemeClr val="accent1"/>
+          </a:lnRef>
+          <a:fillRef idx="3">
+            <a:schemeClr val="accent1"/>
+          </a:fillRef>
+          <a:effectRef idx="2">
+            <a:schemeClr val="accent1"/>
+          </a:effectRef>
+          <a:fontRef idx="minor">
+            <a:schemeClr val="lt1"/>
+          </a:fontRef>
+        </p:style>
+        <p:txBody>
+          <a:bodyPr rtlCol="0" anchor="ctr" lIns="54864" rIns="54864"/>
+          <a:lstStyle/>
+          <a:p>
+            <a:pPr algn="ctr">
+              <a:defRPr sz="819">
+                <a:solidFill>
+                  <a:srgbClr val="000000"/>
+                </a:solidFill>
+                <a:latin typeface="Times New Roman"/>
+              </a:defRPr>
+            </a:pPr>
+            <a:r>
+              <a:t>2.5 Energy-Aware Optimization</a:t>
+            </a:r>
+          </a:p>
+        </p:txBody>
+      </p:sp>
+      <p:sp>
+        <p:nvSpPr>
+          <p:cNvPr id="13" name="Rounded Rectangle 12"/>
+          <p:cNvSpPr/>
+          <p:nvPr/>
+        </p:nvSpPr>
+        <p:spPr>
+          <a:xfrm>
+            <a:off x="662940" y="4434840"/>
+            <a:ext cx="2331720" cy="329184"/>
+          </a:xfrm>
+          <a:prstGeom prst="roundRect">
+            <a:avLst/>
+          </a:prstGeom>
+          <a:solidFill>
+            <a:srgbClr val="FFFFFF"/>
+          </a:solidFill>
+          <a:ln w="12700">
+            <a:solidFill>
+              <a:srgbClr val="000000"/>
+            </a:solidFill>
+          </a:ln>
+        </p:spPr>
+        <p:style>
+          <a:lnRef idx="1">
+            <a:schemeClr val="accent1"/>
+          </a:lnRef>
+          <a:fillRef idx="3">
+            <a:schemeClr val="accent1"/>
+          </a:fillRef>
+          <a:effectRef idx="2">
+            <a:schemeClr val="accent1"/>
+          </a:effectRef>
+          <a:fontRef idx="minor">
+            <a:schemeClr val="lt1"/>
+          </a:fontRef>
+        </p:style>
+        <p:txBody>
+          <a:bodyPr rtlCol="0" anchor="ctr" lIns="73152" rIns="73152"/>
+          <a:lstStyle/>
+          <a:p>
+            <a:pPr algn="ctr">
+              <a:defRPr sz="919" b="1">
+                <a:solidFill>
+                  <a:srgbClr val="000000"/>
+                </a:solidFill>
+                <a:latin typeface="Times New Roman"/>
+              </a:defRPr>
+            </a:pPr>
+            <a:r>
+              <a:t>Chapter 3: Motion Planning (Chuanxiang Gao)</a:t>
+            </a:r>
+          </a:p>
+        </p:txBody>
+      </p:sp>
+      <p:sp>
+        <p:nvSpPr>
+          <p:cNvPr id="14" name="Rectangle 13"/>
+          <p:cNvSpPr/>
+          <p:nvPr/>
+        </p:nvSpPr>
+        <p:spPr>
+          <a:xfrm>
+            <a:off x="736092" y="4764024"/>
+            <a:ext cx="7315" cy="621792"/>
+          </a:xfrm>
+          <a:prstGeom prst="rect">
+            <a:avLst/>
+          </a:prstGeom>
+          <a:solidFill>
+            <a:srgbClr val="282828"/>
+          </a:solidFill>
+          <a:ln>
+            <a:noFill/>
+          </a:ln>
+        </p:spPr>
+        <p:style>
+          <a:lnRef idx="1">
+            <a:schemeClr val="accent1"/>
+          </a:lnRef>
+          <a:fillRef idx="3">
+            <a:schemeClr val="accent1"/>
+          </a:fillRef>
+          <a:effectRef idx="2">
+            <a:schemeClr val="accent1"/>
+          </a:effectRef>
+          <a:fontRef idx="minor">
+            <a:schemeClr val="lt1"/>
+          </a:fontRef>
+        </p:style>
+        <p:txBody>
+          <a:bodyPr rtlCol="0" anchor="ctr"/>
+          <a:lstStyle/>
+          <a:p>
+            <a:pPr algn="ctr"/>
+          </a:p>
+        </p:txBody>
+      </p:sp>
+      <p:sp>
+        <p:nvSpPr>
+          <p:cNvPr id="15" name="Rectangle 14"/>
+          <p:cNvSpPr/>
+          <p:nvPr/>
+        </p:nvSpPr>
+        <p:spPr>
+          <a:xfrm>
+            <a:off x="736092" y="4910328"/>
+            <a:ext cx="73152" cy="7315"/>
+          </a:xfrm>
+          <a:prstGeom prst="rect">
+            <a:avLst/>
+          </a:prstGeom>
+          <a:solidFill>
+            <a:srgbClr val="282828"/>
+          </a:solidFill>
+          <a:ln>
+            <a:noFill/>
+          </a:ln>
+        </p:spPr>
+        <p:style>
+          <a:lnRef idx="1">
+            <a:schemeClr val="accent1"/>
+          </a:lnRef>
+          <a:fillRef idx="3">
+            <a:schemeClr val="accent1"/>
+          </a:fillRef>
+          <a:effectRef idx="2">
+            <a:schemeClr val="accent1"/>
+          </a:effectRef>
+          <a:fontRef idx="minor">
+            <a:schemeClr val="lt1"/>
+          </a:fontRef>
+        </p:style>
+        <p:txBody>
+          <a:bodyPr rtlCol="0" anchor="ctr"/>
+          <a:lstStyle/>
+          <a:p>
+            <a:pPr algn="ctr"/>
+          </a:p>
+        </p:txBody>
+      </p:sp>
+      <p:sp>
+        <p:nvSpPr>
+          <p:cNvPr id="16" name="Rounded Rectangle 15"/>
+          <p:cNvSpPr/>
+          <p:nvPr/>
+        </p:nvSpPr>
+        <p:spPr>
+          <a:xfrm>
+            <a:off x="827532" y="4818888"/>
+            <a:ext cx="2084831" cy="219456"/>
+          </a:xfrm>
+          <a:prstGeom prst="roundRect">
+            <a:avLst/>
+          </a:prstGeom>
+          <a:solidFill>
+            <a:srgbClr val="FFFFFF"/>
+          </a:solidFill>
+          <a:ln w="6350">
+            <a:solidFill>
+              <a:srgbClr val="282828"/>
+            </a:solidFill>
+          </a:ln>
+        </p:spPr>
+        <p:style>
+          <a:lnRef idx="1">
+            <a:schemeClr val="accent1"/>
+          </a:lnRef>
+          <a:fillRef idx="3">
+            <a:schemeClr val="accent1"/>
+          </a:fillRef>
+          <a:effectRef idx="2">
+            <a:schemeClr val="accent1"/>
+          </a:effectRef>
+          <a:fontRef idx="minor">
+            <a:schemeClr val="lt1"/>
+          </a:fontRef>
+        </p:style>
+        <p:txBody>
+          <a:bodyPr rtlCol="0" anchor="ctr" lIns="54864" rIns="54864"/>
+          <a:lstStyle/>
+          <a:p>
+            <a:pPr algn="ctr">
+              <a:defRPr sz="819">
+                <a:solidFill>
+                  <a:srgbClr val="000000"/>
+                </a:solidFill>
+                <a:latin typeface="Times New Roman"/>
+              </a:defRPr>
+            </a:pPr>
+            <a:r>
+              <a:t>3.2 Real-time Mapping &amp; Localiz.</a:t>
+            </a:r>
+          </a:p>
+        </p:txBody>
+      </p:sp>
+      <p:sp>
+        <p:nvSpPr>
+          <p:cNvPr id="17" name="Rectangle 16"/>
+          <p:cNvSpPr/>
+          <p:nvPr/>
+        </p:nvSpPr>
+        <p:spPr>
+          <a:xfrm>
+            <a:off x="736092" y="5166360"/>
+            <a:ext cx="73152" cy="7315"/>
+          </a:xfrm>
+          <a:prstGeom prst="rect">
+            <a:avLst/>
+          </a:prstGeom>
+          <a:solidFill>
+            <a:srgbClr val="282828"/>
+          </a:solidFill>
+          <a:ln>
+            <a:noFill/>
+          </a:ln>
+        </p:spPr>
+        <p:style>
+          <a:lnRef idx="1">
+            <a:schemeClr val="accent1"/>
+          </a:lnRef>
+          <a:fillRef idx="3">
+            <a:schemeClr val="accent1"/>
+          </a:fillRef>
+          <a:effectRef idx="2">
+            <a:schemeClr val="accent1"/>
+          </a:effectRef>
+          <a:fontRef idx="minor">
+            <a:schemeClr val="lt1"/>
+          </a:fontRef>
+        </p:style>
+        <p:txBody>
+          <a:bodyPr rtlCol="0" anchor="ctr"/>
+          <a:lstStyle/>
+          <a:p>
+            <a:pPr algn="ctr"/>
+          </a:p>
+        </p:txBody>
+      </p:sp>
+      <p:sp>
+        <p:nvSpPr>
+          <p:cNvPr id="18" name="Rounded Rectangle 17"/>
+          <p:cNvSpPr/>
+          <p:nvPr/>
+        </p:nvSpPr>
+        <p:spPr>
+          <a:xfrm>
+            <a:off x="827532" y="5074920"/>
+            <a:ext cx="2084831" cy="219456"/>
+          </a:xfrm>
+          <a:prstGeom prst="roundRect">
+            <a:avLst/>
+          </a:prstGeom>
+          <a:solidFill>
+            <a:srgbClr val="FFFFFF"/>
+          </a:solidFill>
+          <a:ln w="6350">
+            <a:solidFill>
+              <a:srgbClr val="282828"/>
+            </a:solidFill>
+          </a:ln>
+        </p:spPr>
+        <p:style>
+          <a:lnRef idx="1">
+            <a:schemeClr val="accent1"/>
+          </a:lnRef>
+          <a:fillRef idx="3">
+            <a:schemeClr val="accent1"/>
+          </a:fillRef>
+          <a:effectRef idx="2">
+            <a:schemeClr val="accent1"/>
+          </a:effectRef>
+          <a:fontRef idx="minor">
+            <a:schemeClr val="lt1"/>
+          </a:fontRef>
+        </p:style>
+        <p:txBody>
+          <a:bodyPr rtlCol="0" anchor="ctr" lIns="54864" rIns="54864"/>
+          <a:lstStyle/>
+          <a:p>
+            <a:pPr algn="ctr">
+              <a:defRPr sz="819">
+                <a:solidFill>
+                  <a:srgbClr val="000000"/>
+                </a:solidFill>
+                <a:latin typeface="Times New Roman"/>
+              </a:defRPr>
+            </a:pPr>
+            <a:r>
+              <a:t>3.3 Obstacle Trajectory Generation</a:t>
+            </a:r>
+          </a:p>
+        </p:txBody>
+      </p:sp>
+      <p:sp>
+        <p:nvSpPr>
+          <p:cNvPr id="19" name="Rectangle 18"/>
+          <p:cNvSpPr/>
+          <p:nvPr/>
+        </p:nvSpPr>
+        <p:spPr>
+          <a:xfrm>
+            <a:off x="736092" y="5422392"/>
+            <a:ext cx="73152" cy="7315"/>
+          </a:xfrm>
+          <a:prstGeom prst="rect">
+            <a:avLst/>
+          </a:prstGeom>
+          <a:solidFill>
+            <a:srgbClr val="282828"/>
+          </a:solidFill>
+          <a:ln>
+            <a:noFill/>
+          </a:ln>
+        </p:spPr>
+        <p:style>
+          <a:lnRef idx="1">
+            <a:schemeClr val="accent1"/>
+          </a:lnRef>
+          <a:fillRef idx="3">
+            <a:schemeClr val="accent1"/>
+          </a:fillRef>
+          <a:effectRef idx="2">
+            <a:schemeClr val="accent1"/>
+          </a:effectRef>
+          <a:fontRef idx="minor">
+            <a:schemeClr val="lt1"/>
+          </a:fontRef>
+        </p:style>
+        <p:txBody>
+          <a:bodyPr rtlCol="0" anchor="ctr"/>
+          <a:lstStyle/>
+          <a:p>
+            <a:pPr algn="ctr"/>
+          </a:p>
+        </p:txBody>
+      </p:sp>
+      <p:sp>
+        <p:nvSpPr>
+          <p:cNvPr id="20" name="Rounded Rectangle 19"/>
+          <p:cNvSpPr/>
+          <p:nvPr/>
+        </p:nvSpPr>
+        <p:spPr>
+          <a:xfrm>
+            <a:off x="827532" y="5330952"/>
+            <a:ext cx="2084831" cy="219456"/>
+          </a:xfrm>
+          <a:prstGeom prst="roundRect">
+            <a:avLst/>
+          </a:prstGeom>
+          <a:solidFill>
+            <a:srgbClr val="FFFFFF"/>
+          </a:solidFill>
+          <a:ln w="6350">
+            <a:solidFill>
+              <a:srgbClr val="282828"/>
+            </a:solidFill>
+          </a:ln>
+        </p:spPr>
+        <p:style>
+          <a:lnRef idx="1">
+            <a:schemeClr val="accent1"/>
+          </a:lnRef>
+          <a:fillRef idx="3">
+            <a:schemeClr val="accent1"/>
+          </a:fillRef>
+          <a:effectRef idx="2">
+            <a:schemeClr val="accent1"/>
+          </a:effectRef>
+          <a:fontRef idx="minor">
+            <a:schemeClr val="lt1"/>
+          </a:fontRef>
+        </p:style>
+        <p:txBody>
+          <a:bodyPr rtlCol="0" anchor="ctr" lIns="54864" rIns="54864"/>
+          <a:lstStyle/>
+          <a:p>
+            <a:pPr algn="ctr">
+              <a:defRPr sz="819">
+                <a:solidFill>
+                  <a:srgbClr val="000000"/>
+                </a:solidFill>
+                <a:latin typeface="Times New Roman"/>
+              </a:defRPr>
+            </a:pPr>
+            <a:r>
+              <a:t>3.4 Wind Disturbance Control</a:t>
+            </a:r>
+          </a:p>
+        </p:txBody>
+      </p:sp>
+      <p:sp>
+        <p:nvSpPr>
+          <p:cNvPr id="21" name="Right Arrow 20"/>
+          <p:cNvSpPr/>
+          <p:nvPr/>
+        </p:nvSpPr>
+        <p:spPr>
+          <a:xfrm>
+            <a:off x="3127248" y="1307592"/>
+            <a:ext cx="182880" cy="201168"/>
+          </a:xfrm>
+          <a:prstGeom prst="rightArrow">
+            <a:avLst/>
+          </a:prstGeom>
+          <a:solidFill>
+            <a:srgbClr val="000000"/>
+          </a:solidFill>
+          <a:ln>
+            <a:noFill/>
+          </a:ln>
+        </p:spPr>
+        <p:style>
+          <a:lnRef idx="1">
+            <a:schemeClr val="accent1"/>
+          </a:lnRef>
+          <a:fillRef idx="3">
+            <a:schemeClr val="accent1"/>
+          </a:fillRef>
+          <a:effectRef idx="2">
+            <a:schemeClr val="accent1"/>
+          </a:effectRef>
+          <a:fontRef idx="minor">
+            <a:schemeClr val="lt1"/>
+          </a:fontRef>
+        </p:style>
+        <p:txBody>
+          <a:bodyPr rtlCol="0" anchor="ctr"/>
+          <a:lstStyle/>
+          <a:p>
+            <a:pPr algn="ctr"/>
+          </a:p>
+        </p:txBody>
+      </p:sp>
+      <p:sp>
+        <p:nvSpPr>
+          <p:cNvPr id="22" name="Rounded Rectangle 21"/>
+          <p:cNvSpPr/>
+          <p:nvPr/>
+        </p:nvSpPr>
+        <p:spPr>
+          <a:xfrm>
+            <a:off x="3328416" y="1234440"/>
+            <a:ext cx="2560320" cy="347472"/>
+          </a:xfrm>
+          <a:prstGeom prst="roundRect">
+            <a:avLst/>
+          </a:prstGeom>
+          <a:solidFill>
+            <a:srgbClr val="FFFFFF"/>
+          </a:solidFill>
+          <a:ln w="15875">
+            <a:solidFill>
+              <a:srgbClr val="000000"/>
+            </a:solidFill>
+          </a:ln>
+        </p:spPr>
+        <p:style>
+          <a:lnRef idx="1">
+            <a:schemeClr val="accent1"/>
+          </a:lnRef>
+          <a:fillRef idx="3">
+            <a:schemeClr val="accent1"/>
+          </a:fillRef>
+          <a:effectRef idx="2">
+            <a:schemeClr val="accent1"/>
+          </a:effectRef>
+          <a:fontRef idx="minor">
+            <a:schemeClr val="lt1"/>
+          </a:fontRef>
+        </p:style>
+        <p:txBody>
+          <a:bodyPr rtlCol="0" anchor="ctr" lIns="45720" rIns="45720"/>
+          <a:lstStyle/>
+          <a:p>
+            <a:pPr algn="ctr">
+              <a:defRPr sz="1000" b="1">
+                <a:solidFill>
+                  <a:srgbClr val="000000"/>
+                </a:solidFill>
+                <a:latin typeface="Times New Roman"/>
+              </a:defRPr>
+            </a:pPr>
+            <a:r>
+              <a:t>Phase II: 3D Recon. &amp; Datasets</a:t>
+            </a:r>
+          </a:p>
+        </p:txBody>
+      </p:sp>
+      <p:sp>
+        <p:nvSpPr>
+          <p:cNvPr id="23" name="Rectangle 22"/>
+          <p:cNvSpPr/>
+          <p:nvPr/>
+        </p:nvSpPr>
+        <p:spPr>
+          <a:xfrm>
+            <a:off x="4604004" y="1581912"/>
+            <a:ext cx="9144" cy="2852928"/>
+          </a:xfrm>
+          <a:prstGeom prst="rect">
+            <a:avLst/>
+          </a:prstGeom>
+          <a:solidFill>
+            <a:srgbClr val="282828"/>
+          </a:solidFill>
+          <a:ln>
+            <a:noFill/>
+          </a:ln>
+        </p:spPr>
+        <p:style>
+          <a:lnRef idx="1">
+            <a:schemeClr val="accent1"/>
+          </a:lnRef>
+          <a:fillRef idx="3">
+            <a:schemeClr val="accent1"/>
+          </a:fillRef>
+          <a:effectRef idx="2">
+            <a:schemeClr val="accent1"/>
+          </a:effectRef>
+          <a:fontRef idx="minor">
+            <a:schemeClr val="lt1"/>
+          </a:fontRef>
+        </p:style>
+        <p:txBody>
+          <a:bodyPr rtlCol="0" anchor="ctr"/>
+          <a:lstStyle/>
+          <a:p>
+            <a:pPr algn="ctr"/>
+          </a:p>
+        </p:txBody>
+      </p:sp>
+      <p:sp>
+        <p:nvSpPr>
+          <p:cNvPr id="24" name="Rounded Rectangle 23"/>
+          <p:cNvSpPr/>
+          <p:nvPr/>
+        </p:nvSpPr>
+        <p:spPr>
+          <a:xfrm>
+            <a:off x="3442716" y="1920240"/>
+            <a:ext cx="2331720" cy="329184"/>
+          </a:xfrm>
+          <a:prstGeom prst="roundRect">
+            <a:avLst/>
+          </a:prstGeom>
+          <a:solidFill>
+            <a:srgbClr val="FFFFFF"/>
+          </a:solidFill>
+          <a:ln w="12700">
+            <a:solidFill>
+              <a:srgbClr val="000000"/>
+            </a:solidFill>
+          </a:ln>
+        </p:spPr>
+        <p:style>
+          <a:lnRef idx="1">
+            <a:schemeClr val="accent1"/>
+          </a:lnRef>
+          <a:fillRef idx="3">
+            <a:schemeClr val="accent1"/>
+          </a:fillRef>
+          <a:effectRef idx="2">
+            <a:schemeClr val="accent1"/>
+          </a:effectRef>
+          <a:fontRef idx="minor">
+            <a:schemeClr val="lt1"/>
+          </a:fontRef>
+        </p:style>
+        <p:txBody>
+          <a:bodyPr rtlCol="0" anchor="ctr" lIns="73152" rIns="73152"/>
+          <a:lstStyle/>
+          <a:p>
+            <a:pPr algn="ctr">
+              <a:defRPr sz="919" b="1">
+                <a:solidFill>
+                  <a:srgbClr val="000000"/>
+                </a:solidFill>
+                <a:latin typeface="Times New Roman"/>
+              </a:defRPr>
+            </a:pPr>
+            <a:r>
+              <a:t>Chapter 4: 3D Reconstruction (Guidong Yang)</a:t>
+            </a:r>
+          </a:p>
+        </p:txBody>
+      </p:sp>
+      <p:sp>
+        <p:nvSpPr>
+          <p:cNvPr id="25" name="Rectangle 24"/>
+          <p:cNvSpPr/>
+          <p:nvPr/>
+        </p:nvSpPr>
+        <p:spPr>
+          <a:xfrm>
+            <a:off x="3515868" y="2249424"/>
+            <a:ext cx="7315" cy="621792"/>
+          </a:xfrm>
+          <a:prstGeom prst="rect">
+            <a:avLst/>
+          </a:prstGeom>
+          <a:solidFill>
+            <a:srgbClr val="282828"/>
+          </a:solidFill>
+          <a:ln>
+            <a:noFill/>
+          </a:ln>
+        </p:spPr>
+        <p:style>
+          <a:lnRef idx="1">
+            <a:schemeClr val="accent1"/>
+          </a:lnRef>
+          <a:fillRef idx="3">
+            <a:schemeClr val="accent1"/>
+          </a:fillRef>
+          <a:effectRef idx="2">
+            <a:schemeClr val="accent1"/>
+          </a:effectRef>
+          <a:fontRef idx="minor">
+            <a:schemeClr val="lt1"/>
+          </a:fontRef>
+        </p:style>
+        <p:txBody>
+          <a:bodyPr rtlCol="0" anchor="ctr"/>
+          <a:lstStyle/>
+          <a:p>
+            <a:pPr algn="ctr"/>
+          </a:p>
+        </p:txBody>
+      </p:sp>
+      <p:sp>
+        <p:nvSpPr>
+          <p:cNvPr id="26" name="Rectangle 25"/>
+          <p:cNvSpPr/>
+          <p:nvPr/>
+        </p:nvSpPr>
+        <p:spPr>
+          <a:xfrm>
+            <a:off x="3515868" y="2395728"/>
+            <a:ext cx="73152" cy="7315"/>
+          </a:xfrm>
+          <a:prstGeom prst="rect">
+            <a:avLst/>
+          </a:prstGeom>
+          <a:solidFill>
+            <a:srgbClr val="282828"/>
+          </a:solidFill>
+          <a:ln>
+            <a:noFill/>
+          </a:ln>
+        </p:spPr>
+        <p:style>
+          <a:lnRef idx="1">
+            <a:schemeClr val="accent1"/>
+          </a:lnRef>
+          <a:fillRef idx="3">
+            <a:schemeClr val="accent1"/>
+          </a:fillRef>
+          <a:effectRef idx="2">
+            <a:schemeClr val="accent1"/>
+          </a:effectRef>
+          <a:fontRef idx="minor">
+            <a:schemeClr val="lt1"/>
+          </a:fontRef>
+        </p:style>
+        <p:txBody>
+          <a:bodyPr rtlCol="0" anchor="ctr"/>
+          <a:lstStyle/>
+          <a:p>
+            <a:pPr algn="ctr"/>
+          </a:p>
+        </p:txBody>
+      </p:sp>
+      <p:sp>
+        <p:nvSpPr>
+          <p:cNvPr id="27" name="Rounded Rectangle 26"/>
+          <p:cNvSpPr/>
+          <p:nvPr/>
+        </p:nvSpPr>
+        <p:spPr>
+          <a:xfrm>
+            <a:off x="3607308" y="2304288"/>
+            <a:ext cx="2084831" cy="219456"/>
+          </a:xfrm>
+          <a:prstGeom prst="roundRect">
+            <a:avLst/>
+          </a:prstGeom>
+          <a:solidFill>
+            <a:srgbClr val="FFFFFF"/>
+          </a:solidFill>
+          <a:ln w="6350">
+            <a:solidFill>
+              <a:srgbClr val="282828"/>
+            </a:solidFill>
+          </a:ln>
+        </p:spPr>
+        <p:style>
+          <a:lnRef idx="1">
+            <a:schemeClr val="accent1"/>
+          </a:lnRef>
+          <a:fillRef idx="3">
+            <a:schemeClr val="accent1"/>
+          </a:fillRef>
+          <a:effectRef idx="2">
+            <a:schemeClr val="accent1"/>
+          </a:effectRef>
+          <a:fontRef idx="minor">
+            <a:schemeClr val="lt1"/>
+          </a:fontRef>
+        </p:style>
+        <p:txBody>
+          <a:bodyPr rtlCol="0" anchor="ctr" lIns="54864" rIns="54864"/>
+          <a:lstStyle/>
+          <a:p>
+            <a:pPr algn="ctr">
+              <a:defRPr sz="819">
+                <a:solidFill>
+                  <a:srgbClr val="000000"/>
+                </a:solidFill>
+                <a:latin typeface="Times New Roman"/>
+              </a:defRPr>
+            </a:pPr>
+            <a:r>
+              <a:t>4.2 SfM Sparse &amp; Dense Recon.</a:t>
+            </a:r>
+          </a:p>
+        </p:txBody>
+      </p:sp>
+      <p:sp>
+        <p:nvSpPr>
+          <p:cNvPr id="28" name="Rectangle 27"/>
+          <p:cNvSpPr/>
+          <p:nvPr/>
+        </p:nvSpPr>
+        <p:spPr>
+          <a:xfrm>
+            <a:off x="3515868" y="2651760"/>
+            <a:ext cx="73152" cy="7315"/>
+          </a:xfrm>
+          <a:prstGeom prst="rect">
+            <a:avLst/>
+          </a:prstGeom>
+          <a:solidFill>
+            <a:srgbClr val="282828"/>
+          </a:solidFill>
+          <a:ln>
+            <a:noFill/>
+          </a:ln>
+        </p:spPr>
+        <p:style>
+          <a:lnRef idx="1">
+            <a:schemeClr val="accent1"/>
+          </a:lnRef>
+          <a:fillRef idx="3">
+            <a:schemeClr val="accent1"/>
+          </a:fillRef>
+          <a:effectRef idx="2">
+            <a:schemeClr val="accent1"/>
+          </a:effectRef>
+          <a:fontRef idx="minor">
+            <a:schemeClr val="lt1"/>
+          </a:fontRef>
+        </p:style>
+        <p:txBody>
+          <a:bodyPr rtlCol="0" anchor="ctr"/>
+          <a:lstStyle/>
+          <a:p>
+            <a:pPr algn="ctr"/>
+          </a:p>
+        </p:txBody>
+      </p:sp>
+      <p:sp>
+        <p:nvSpPr>
+          <p:cNvPr id="29" name="Rounded Rectangle 28"/>
+          <p:cNvSpPr/>
+          <p:nvPr/>
+        </p:nvSpPr>
+        <p:spPr>
+          <a:xfrm>
+            <a:off x="3607308" y="2560320"/>
+            <a:ext cx="2084831" cy="219456"/>
+          </a:xfrm>
+          <a:prstGeom prst="roundRect">
+            <a:avLst/>
+          </a:prstGeom>
+          <a:solidFill>
+            <a:srgbClr val="FFFFFF"/>
+          </a:solidFill>
+          <a:ln w="6350">
+            <a:solidFill>
+              <a:srgbClr val="282828"/>
+            </a:solidFill>
+          </a:ln>
+        </p:spPr>
+        <p:style>
+          <a:lnRef idx="1">
+            <a:schemeClr val="accent1"/>
+          </a:lnRef>
+          <a:fillRef idx="3">
+            <a:schemeClr val="accent1"/>
+          </a:fillRef>
+          <a:effectRef idx="2">
+            <a:schemeClr val="accent1"/>
+          </a:effectRef>
+          <a:fontRef idx="minor">
+            <a:schemeClr val="lt1"/>
+          </a:fontRef>
+        </p:style>
+        <p:txBody>
+          <a:bodyPr rtlCol="0" anchor="ctr" lIns="54864" rIns="54864"/>
+          <a:lstStyle/>
+          <a:p>
+            <a:pPr algn="ctr">
+              <a:defRPr sz="819">
+                <a:solidFill>
+                  <a:srgbClr val="000000"/>
+                </a:solidFill>
+                <a:latin typeface="Times New Roman"/>
+              </a:defRPr>
+            </a:pPr>
+            <a:r>
+              <a:t>4.4 Neural Rendering &amp; Mesh</a:t>
+            </a:r>
+          </a:p>
+        </p:txBody>
+      </p:sp>
+      <p:sp>
+        <p:nvSpPr>
+          <p:cNvPr id="30" name="Rectangle 29"/>
+          <p:cNvSpPr/>
+          <p:nvPr/>
+        </p:nvSpPr>
+        <p:spPr>
+          <a:xfrm>
+            <a:off x="3515868" y="2907792"/>
+            <a:ext cx="73152" cy="7315"/>
+          </a:xfrm>
+          <a:prstGeom prst="rect">
+            <a:avLst/>
+          </a:prstGeom>
+          <a:solidFill>
+            <a:srgbClr val="282828"/>
+          </a:solidFill>
+          <a:ln>
+            <a:noFill/>
+          </a:ln>
+        </p:spPr>
+        <p:style>
+          <a:lnRef idx="1">
+            <a:schemeClr val="accent1"/>
+          </a:lnRef>
+          <a:fillRef idx="3">
+            <a:schemeClr val="accent1"/>
+          </a:fillRef>
+          <a:effectRef idx="2">
+            <a:schemeClr val="accent1"/>
+          </a:effectRef>
+          <a:fontRef idx="minor">
+            <a:schemeClr val="lt1"/>
+          </a:fontRef>
+        </p:style>
+        <p:txBody>
+          <a:bodyPr rtlCol="0" anchor="ctr"/>
+          <a:lstStyle/>
+          <a:p>
+            <a:pPr algn="ctr"/>
+          </a:p>
+        </p:txBody>
+      </p:sp>
+      <p:sp>
+        <p:nvSpPr>
+          <p:cNvPr id="31" name="Rounded Rectangle 30"/>
+          <p:cNvSpPr/>
+          <p:nvPr/>
+        </p:nvSpPr>
+        <p:spPr>
+          <a:xfrm>
+            <a:off x="3607308" y="2816352"/>
+            <a:ext cx="2084831" cy="219456"/>
+          </a:xfrm>
+          <a:prstGeom prst="roundRect">
+            <a:avLst/>
+          </a:prstGeom>
+          <a:solidFill>
+            <a:srgbClr val="FFFFFF"/>
+          </a:solidFill>
+          <a:ln w="6350">
+            <a:solidFill>
+              <a:srgbClr val="282828"/>
+            </a:solidFill>
+          </a:ln>
+        </p:spPr>
+        <p:style>
+          <a:lnRef idx="1">
+            <a:schemeClr val="accent1"/>
+          </a:lnRef>
+          <a:fillRef idx="3">
+            <a:schemeClr val="accent1"/>
+          </a:fillRef>
+          <a:effectRef idx="2">
+            <a:schemeClr val="accent1"/>
+          </a:effectRef>
+          <a:fontRef idx="minor">
+            <a:schemeClr val="lt1"/>
+          </a:fontRef>
+        </p:style>
+        <p:txBody>
+          <a:bodyPr rtlCol="0" anchor="ctr" lIns="54864" rIns="54864"/>
+          <a:lstStyle/>
+          <a:p>
+            <a:pPr algn="ctr">
+              <a:defRPr sz="819">
+                <a:solidFill>
+                  <a:srgbClr val="000000"/>
+                </a:solidFill>
+                <a:latin typeface="Times New Roman"/>
+              </a:defRPr>
+            </a:pPr>
+            <a:r>
+              <a:t>4.5 Point Cloud &amp; BIM Alignment</a:t>
+            </a:r>
+          </a:p>
+        </p:txBody>
+      </p:sp>
+      <p:sp>
+        <p:nvSpPr>
+          <p:cNvPr id="32" name="Rounded Rectangle 31"/>
+          <p:cNvSpPr/>
+          <p:nvPr/>
+        </p:nvSpPr>
+        <p:spPr>
+          <a:xfrm>
+            <a:off x="3442716" y="4434840"/>
+            <a:ext cx="2331720" cy="329184"/>
+          </a:xfrm>
+          <a:prstGeom prst="roundRect">
+            <a:avLst/>
+          </a:prstGeom>
+          <a:solidFill>
+            <a:srgbClr val="FFFFFF"/>
+          </a:solidFill>
+          <a:ln w="12700">
+            <a:solidFill>
+              <a:srgbClr val="000000"/>
+            </a:solidFill>
+          </a:ln>
+        </p:spPr>
+        <p:style>
+          <a:lnRef idx="1">
+            <a:schemeClr val="accent1"/>
+          </a:lnRef>
+          <a:fillRef idx="3">
+            <a:schemeClr val="accent1"/>
+          </a:fillRef>
+          <a:effectRef idx="2">
+            <a:schemeClr val="accent1"/>
+          </a:effectRef>
+          <a:fontRef idx="minor">
+            <a:schemeClr val="lt1"/>
+          </a:fontRef>
+        </p:style>
+        <p:txBody>
+          <a:bodyPr rtlCol="0" anchor="ctr" lIns="73152" rIns="73152"/>
+          <a:lstStyle/>
+          <a:p>
+            <a:pPr algn="ctr">
+              <a:defRPr sz="919" b="1">
+                <a:solidFill>
+                  <a:srgbClr val="000000"/>
+                </a:solidFill>
+                <a:latin typeface="Times New Roman"/>
+              </a:defRPr>
+            </a:pPr>
+            <a:r>
+              <a:t>Chapter 5: Inspection Datasets (Benyun Zhao)</a:t>
+            </a:r>
+          </a:p>
+        </p:txBody>
+      </p:sp>
+      <p:sp>
+        <p:nvSpPr>
+          <p:cNvPr id="33" name="Rectangle 32"/>
+          <p:cNvSpPr/>
+          <p:nvPr/>
+        </p:nvSpPr>
+        <p:spPr>
+          <a:xfrm>
+            <a:off x="3515868" y="4764024"/>
+            <a:ext cx="7315" cy="621792"/>
+          </a:xfrm>
+          <a:prstGeom prst="rect">
+            <a:avLst/>
+          </a:prstGeom>
+          <a:solidFill>
+            <a:srgbClr val="282828"/>
+          </a:solidFill>
+          <a:ln>
+            <a:noFill/>
+          </a:ln>
+        </p:spPr>
+        <p:style>
+          <a:lnRef idx="1">
+            <a:schemeClr val="accent1"/>
+          </a:lnRef>
+          <a:fillRef idx="3">
+            <a:schemeClr val="accent1"/>
+          </a:fillRef>
+          <a:effectRef idx="2">
+            <a:schemeClr val="accent1"/>
+          </a:effectRef>
+          <a:fontRef idx="minor">
+            <a:schemeClr val="lt1"/>
+          </a:fontRef>
+        </p:style>
+        <p:txBody>
+          <a:bodyPr rtlCol="0" anchor="ctr"/>
+          <a:lstStyle/>
+          <a:p>
+            <a:pPr algn="ctr"/>
+          </a:p>
+        </p:txBody>
+      </p:sp>
+      <p:sp>
+        <p:nvSpPr>
+          <p:cNvPr id="34" name="Rectangle 33"/>
+          <p:cNvSpPr/>
+          <p:nvPr/>
+        </p:nvSpPr>
+        <p:spPr>
+          <a:xfrm>
+            <a:off x="3515868" y="4910328"/>
+            <a:ext cx="73152" cy="7315"/>
+          </a:xfrm>
+          <a:prstGeom prst="rect">
+            <a:avLst/>
+          </a:prstGeom>
+          <a:solidFill>
+            <a:srgbClr val="282828"/>
+          </a:solidFill>
+          <a:ln>
+            <a:noFill/>
+          </a:ln>
+        </p:spPr>
+        <p:style>
+          <a:lnRef idx="1">
+            <a:schemeClr val="accent1"/>
+          </a:lnRef>
+          <a:fillRef idx="3">
+            <a:schemeClr val="accent1"/>
+          </a:fillRef>
+          <a:effectRef idx="2">
+            <a:schemeClr val="accent1"/>
+          </a:effectRef>
+          <a:fontRef idx="minor">
+            <a:schemeClr val="lt1"/>
+          </a:fontRef>
+        </p:style>
+        <p:txBody>
+          <a:bodyPr rtlCol="0" anchor="ctr"/>
+          <a:lstStyle/>
+          <a:p>
+            <a:pPr algn="ctr"/>
+          </a:p>
+        </p:txBody>
+      </p:sp>
+      <p:sp>
+        <p:nvSpPr>
+          <p:cNvPr id="35" name="Rounded Rectangle 34"/>
+          <p:cNvSpPr/>
+          <p:nvPr/>
+        </p:nvSpPr>
+        <p:spPr>
+          <a:xfrm>
+            <a:off x="3607308" y="4818888"/>
+            <a:ext cx="2084831" cy="219456"/>
+          </a:xfrm>
+          <a:prstGeom prst="roundRect">
+            <a:avLst/>
+          </a:prstGeom>
+          <a:solidFill>
+            <a:srgbClr val="FFFFFF"/>
+          </a:solidFill>
+          <a:ln w="6350">
+            <a:solidFill>
+              <a:srgbClr val="282828"/>
+            </a:solidFill>
+          </a:ln>
+        </p:spPr>
+        <p:style>
+          <a:lnRef idx="1">
+            <a:schemeClr val="accent1"/>
+          </a:lnRef>
+          <a:fillRef idx="3">
+            <a:schemeClr val="accent1"/>
+          </a:fillRef>
+          <a:effectRef idx="2">
+            <a:schemeClr val="accent1"/>
+          </a:effectRef>
+          <a:fontRef idx="minor">
+            <a:schemeClr val="lt1"/>
+          </a:fontRef>
+        </p:style>
+        <p:txBody>
+          <a:bodyPr rtlCol="0" anchor="ctr" lIns="54864" rIns="54864"/>
+          <a:lstStyle/>
+          <a:p>
+            <a:pPr algn="ctr">
+              <a:defRPr sz="819">
+                <a:solidFill>
+                  <a:srgbClr val="000000"/>
+                </a:solidFill>
+                <a:latin typeface="Times New Roman"/>
+              </a:defRPr>
+            </a:pPr>
+            <a:r>
+              <a:t>5.2 Multimodal Preproc. &amp; Annot.</a:t>
+            </a:r>
+          </a:p>
+        </p:txBody>
+      </p:sp>
+      <p:sp>
+        <p:nvSpPr>
+          <p:cNvPr id="36" name="Rectangle 35"/>
+          <p:cNvSpPr/>
+          <p:nvPr/>
+        </p:nvSpPr>
+        <p:spPr>
+          <a:xfrm>
+            <a:off x="3515868" y="5166360"/>
+            <a:ext cx="73152" cy="7315"/>
+          </a:xfrm>
+          <a:prstGeom prst="rect">
+            <a:avLst/>
+          </a:prstGeom>
+          <a:solidFill>
+            <a:srgbClr val="282828"/>
+          </a:solidFill>
+          <a:ln>
+            <a:noFill/>
+          </a:ln>
+        </p:spPr>
+        <p:style>
+          <a:lnRef idx="1">
+            <a:schemeClr val="accent1"/>
+          </a:lnRef>
+          <a:fillRef idx="3">
+            <a:schemeClr val="accent1"/>
+          </a:fillRef>
+          <a:effectRef idx="2">
+            <a:schemeClr val="accent1"/>
+          </a:effectRef>
+          <a:fontRef idx="minor">
+            <a:schemeClr val="lt1"/>
+          </a:fontRef>
+        </p:style>
+        <p:txBody>
+          <a:bodyPr rtlCol="0" anchor="ctr"/>
+          <a:lstStyle/>
+          <a:p>
+            <a:pPr algn="ctr"/>
+          </a:p>
+        </p:txBody>
+      </p:sp>
+      <p:sp>
+        <p:nvSpPr>
+          <p:cNvPr id="37" name="Rounded Rectangle 36"/>
+          <p:cNvSpPr/>
+          <p:nvPr/>
+        </p:nvSpPr>
+        <p:spPr>
+          <a:xfrm>
+            <a:off x="3607308" y="5074920"/>
+            <a:ext cx="2084831" cy="219456"/>
+          </a:xfrm>
+          <a:prstGeom prst="roundRect">
+            <a:avLst/>
+          </a:prstGeom>
+          <a:solidFill>
+            <a:srgbClr val="FFFFFF"/>
+          </a:solidFill>
+          <a:ln w="6350">
+            <a:solidFill>
+              <a:srgbClr val="282828"/>
+            </a:solidFill>
+          </a:ln>
+        </p:spPr>
+        <p:style>
+          <a:lnRef idx="1">
+            <a:schemeClr val="accent1"/>
+          </a:lnRef>
+          <a:fillRef idx="3">
+            <a:schemeClr val="accent1"/>
+          </a:fillRef>
+          <a:effectRef idx="2">
+            <a:schemeClr val="accent1"/>
+          </a:effectRef>
+          <a:fontRef idx="minor">
+            <a:schemeClr val="lt1"/>
+          </a:fontRef>
+        </p:style>
+        <p:txBody>
+          <a:bodyPr rtlCol="0" anchor="ctr" lIns="54864" rIns="54864"/>
+          <a:lstStyle/>
+          <a:p>
+            <a:pPr algn="ctr">
+              <a:defRPr sz="819">
+                <a:solidFill>
+                  <a:srgbClr val="000000"/>
+                </a:solidFill>
+                <a:latin typeface="Times New Roman"/>
+              </a:defRPr>
+            </a:pPr>
+            <a:r>
+              <a:t>5.3 Façade Defect Detection</a:t>
+            </a:r>
+          </a:p>
+        </p:txBody>
+      </p:sp>
+      <p:sp>
+        <p:nvSpPr>
+          <p:cNvPr id="38" name="Rectangle 37"/>
+          <p:cNvSpPr/>
+          <p:nvPr/>
+        </p:nvSpPr>
+        <p:spPr>
+          <a:xfrm>
+            <a:off x="3515868" y="5422392"/>
+            <a:ext cx="73152" cy="7315"/>
+          </a:xfrm>
+          <a:prstGeom prst="rect">
+            <a:avLst/>
+          </a:prstGeom>
+          <a:solidFill>
+            <a:srgbClr val="282828"/>
+          </a:solidFill>
+          <a:ln>
+            <a:noFill/>
+          </a:ln>
+        </p:spPr>
+        <p:style>
+          <a:lnRef idx="1">
+            <a:schemeClr val="accent1"/>
+          </a:lnRef>
+          <a:fillRef idx="3">
+            <a:schemeClr val="accent1"/>
+          </a:fillRef>
+          <a:effectRef idx="2">
+            <a:schemeClr val="accent1"/>
+          </a:effectRef>
+          <a:fontRef idx="minor">
+            <a:schemeClr val="lt1"/>
+          </a:fontRef>
+        </p:style>
+        <p:txBody>
+          <a:bodyPr rtlCol="0" anchor="ctr"/>
+          <a:lstStyle/>
+          <a:p>
+            <a:pPr algn="ctr"/>
+          </a:p>
+        </p:txBody>
+      </p:sp>
+      <p:sp>
+        <p:nvSpPr>
+          <p:cNvPr id="39" name="Rounded Rectangle 38"/>
+          <p:cNvSpPr/>
+          <p:nvPr/>
+        </p:nvSpPr>
+        <p:spPr>
+          <a:xfrm>
+            <a:off x="3607308" y="5330952"/>
+            <a:ext cx="2084831" cy="219456"/>
+          </a:xfrm>
+          <a:prstGeom prst="roundRect">
+            <a:avLst/>
+          </a:prstGeom>
+          <a:solidFill>
+            <a:srgbClr val="FFFFFF"/>
+          </a:solidFill>
+          <a:ln w="6350">
+            <a:solidFill>
+              <a:srgbClr val="282828"/>
+            </a:solidFill>
+          </a:ln>
+        </p:spPr>
+        <p:style>
+          <a:lnRef idx="1">
+            <a:schemeClr val="accent1"/>
+          </a:lnRef>
+          <a:fillRef idx="3">
+            <a:schemeClr val="accent1"/>
+          </a:fillRef>
+          <a:effectRef idx="2">
+            <a:schemeClr val="accent1"/>
+          </a:effectRef>
+          <a:fontRef idx="minor">
+            <a:schemeClr val="lt1"/>
+          </a:fontRef>
+        </p:style>
+        <p:txBody>
+          <a:bodyPr rtlCol="0" anchor="ctr" lIns="54864" rIns="54864"/>
+          <a:lstStyle/>
+          <a:p>
+            <a:pPr algn="ctr">
+              <a:defRPr sz="819">
+                <a:solidFill>
+                  <a:srgbClr val="000000"/>
+                </a:solidFill>
+                <a:latin typeface="Times New Roman"/>
+              </a:defRPr>
+            </a:pPr>
+            <a:r>
+              <a:t>5.4 Instance Segmentation</a:t>
+            </a:r>
+          </a:p>
+        </p:txBody>
+      </p:sp>
+      <p:sp>
+        <p:nvSpPr>
+          <p:cNvPr id="40" name="Right Arrow 39"/>
+          <p:cNvSpPr/>
+          <p:nvPr/>
+        </p:nvSpPr>
+        <p:spPr>
+          <a:xfrm>
+            <a:off x="5907024" y="1307592"/>
+            <a:ext cx="182880" cy="201168"/>
+          </a:xfrm>
+          <a:prstGeom prst="rightArrow">
+            <a:avLst/>
+          </a:prstGeom>
+          <a:solidFill>
+            <a:srgbClr val="000000"/>
+          </a:solidFill>
+          <a:ln>
+            <a:noFill/>
+          </a:ln>
+        </p:spPr>
+        <p:style>
+          <a:lnRef idx="1">
+            <a:schemeClr val="accent1"/>
+          </a:lnRef>
+          <a:fillRef idx="3">
+            <a:schemeClr val="accent1"/>
+          </a:fillRef>
+          <a:effectRef idx="2">
+            <a:schemeClr val="accent1"/>
+          </a:effectRef>
+          <a:fontRef idx="minor">
+            <a:schemeClr val="lt1"/>
+          </a:fontRef>
+        </p:style>
+        <p:txBody>
+          <a:bodyPr rtlCol="0" anchor="ctr"/>
+          <a:lstStyle/>
+          <a:p>
+            <a:pPr algn="ctr"/>
+          </a:p>
+        </p:txBody>
+      </p:sp>
+      <p:sp>
+        <p:nvSpPr>
+          <p:cNvPr id="41" name="Rounded Rectangle 40"/>
+          <p:cNvSpPr/>
+          <p:nvPr/>
+        </p:nvSpPr>
+        <p:spPr>
+          <a:xfrm>
+            <a:off x="6108192" y="1234440"/>
+            <a:ext cx="2560320" cy="347472"/>
+          </a:xfrm>
+          <a:prstGeom prst="roundRect">
+            <a:avLst/>
+          </a:prstGeom>
+          <a:solidFill>
+            <a:srgbClr val="FFFFFF"/>
+          </a:solidFill>
+          <a:ln w="15875">
+            <a:solidFill>
+              <a:srgbClr val="000000"/>
+            </a:solidFill>
+          </a:ln>
+        </p:spPr>
+        <p:style>
+          <a:lnRef idx="1">
+            <a:schemeClr val="accent1"/>
+          </a:lnRef>
+          <a:fillRef idx="3">
+            <a:schemeClr val="accent1"/>
+          </a:fillRef>
+          <a:effectRef idx="2">
+            <a:schemeClr val="accent1"/>
+          </a:effectRef>
+          <a:fontRef idx="minor">
+            <a:schemeClr val="lt1"/>
+          </a:fontRef>
+        </p:style>
+        <p:txBody>
+          <a:bodyPr rtlCol="0" anchor="ctr" lIns="45720" rIns="45720"/>
+          <a:lstStyle/>
+          <a:p>
+            <a:pPr algn="ctr">
+              <a:defRPr sz="1000" b="1">
+                <a:solidFill>
+                  <a:srgbClr val="000000"/>
+                </a:solidFill>
+                <a:latin typeface="Times New Roman"/>
+              </a:defRPr>
+            </a:pPr>
+            <a:r>
+              <a:t>Phase III: AI Defect Perception</a:t>
+            </a:r>
+          </a:p>
+        </p:txBody>
+      </p:sp>
+      <p:sp>
+        <p:nvSpPr>
+          <p:cNvPr id="42" name="Rectangle 41"/>
+          <p:cNvSpPr/>
+          <p:nvPr/>
+        </p:nvSpPr>
+        <p:spPr>
+          <a:xfrm>
+            <a:off x="7383780" y="1581912"/>
+            <a:ext cx="9144" cy="338328"/>
+          </a:xfrm>
+          <a:prstGeom prst="rect">
+            <a:avLst/>
+          </a:prstGeom>
+          <a:solidFill>
+            <a:srgbClr val="282828"/>
+          </a:solidFill>
+          <a:ln>
+            <a:noFill/>
+          </a:ln>
+        </p:spPr>
+        <p:style>
+          <a:lnRef idx="1">
+            <a:schemeClr val="accent1"/>
+          </a:lnRef>
+          <a:fillRef idx="3">
+            <a:schemeClr val="accent1"/>
+          </a:fillRef>
+          <a:effectRef idx="2">
+            <a:schemeClr val="accent1"/>
+          </a:effectRef>
+          <a:fontRef idx="minor">
+            <a:schemeClr val="lt1"/>
+          </a:fontRef>
+        </p:style>
+        <p:txBody>
+          <a:bodyPr rtlCol="0" anchor="ctr"/>
+          <a:lstStyle/>
+          <a:p>
+            <a:pPr algn="ctr"/>
+          </a:p>
+        </p:txBody>
+      </p:sp>
+      <p:sp>
+        <p:nvSpPr>
+          <p:cNvPr id="43" name="Rounded Rectangle 42"/>
+          <p:cNvSpPr/>
+          <p:nvPr/>
+        </p:nvSpPr>
+        <p:spPr>
+          <a:xfrm>
+            <a:off x="6222492" y="1920240"/>
+            <a:ext cx="2331720" cy="329184"/>
+          </a:xfrm>
+          <a:prstGeom prst="roundRect">
+            <a:avLst/>
+          </a:prstGeom>
+          <a:solidFill>
+            <a:srgbClr val="FFFFFF"/>
+          </a:solidFill>
+          <a:ln w="12700">
+            <a:solidFill>
+              <a:srgbClr val="000000"/>
+            </a:solidFill>
+          </a:ln>
+        </p:spPr>
+        <p:style>
+          <a:lnRef idx="1">
+            <a:schemeClr val="accent1"/>
+          </a:lnRef>
+          <a:fillRef idx="3">
+            <a:schemeClr val="accent1"/>
+          </a:fillRef>
+          <a:effectRef idx="2">
+            <a:schemeClr val="accent1"/>
+          </a:effectRef>
+          <a:fontRef idx="minor">
+            <a:schemeClr val="lt1"/>
+          </a:fontRef>
+        </p:style>
+        <p:txBody>
+          <a:bodyPr rtlCol="0" anchor="ctr" lIns="73152" rIns="73152"/>
+          <a:lstStyle/>
+          <a:p>
+            <a:pPr algn="ctr">
+              <a:defRPr sz="919" b="1">
+                <a:solidFill>
+                  <a:srgbClr val="000000"/>
+                </a:solidFill>
+                <a:latin typeface="Times New Roman"/>
+              </a:defRPr>
+            </a:pPr>
+            <a:r>
+              <a:t>Chapter 6: AI Defect Models (Benyun Zhao)</a:t>
+            </a:r>
+          </a:p>
+        </p:txBody>
+      </p:sp>
+      <p:sp>
+        <p:nvSpPr>
+          <p:cNvPr id="44" name="Rectangle 43"/>
+          <p:cNvSpPr/>
+          <p:nvPr/>
+        </p:nvSpPr>
+        <p:spPr>
+          <a:xfrm>
+            <a:off x="6295644" y="2249424"/>
+            <a:ext cx="7315" cy="877824"/>
+          </a:xfrm>
+          <a:prstGeom prst="rect">
+            <a:avLst/>
+          </a:prstGeom>
+          <a:solidFill>
+            <a:srgbClr val="282828"/>
+          </a:solidFill>
+          <a:ln>
+            <a:noFill/>
+          </a:ln>
+        </p:spPr>
+        <p:style>
+          <a:lnRef idx="1">
+            <a:schemeClr val="accent1"/>
+          </a:lnRef>
+          <a:fillRef idx="3">
+            <a:schemeClr val="accent1"/>
+          </a:fillRef>
+          <a:effectRef idx="2">
+            <a:schemeClr val="accent1"/>
+          </a:effectRef>
+          <a:fontRef idx="minor">
+            <a:schemeClr val="lt1"/>
+          </a:fontRef>
+        </p:style>
+        <p:txBody>
+          <a:bodyPr rtlCol="0" anchor="ctr"/>
+          <a:lstStyle/>
+          <a:p>
+            <a:pPr algn="ctr"/>
+          </a:p>
+        </p:txBody>
+      </p:sp>
+      <p:sp>
+        <p:nvSpPr>
+          <p:cNvPr id="45" name="Rectangle 44"/>
+          <p:cNvSpPr/>
+          <p:nvPr/>
+        </p:nvSpPr>
+        <p:spPr>
+          <a:xfrm>
+            <a:off x="6295644" y="2395728"/>
+            <a:ext cx="73152" cy="7315"/>
+          </a:xfrm>
+          <a:prstGeom prst="rect">
+            <a:avLst/>
+          </a:prstGeom>
+          <a:solidFill>
+            <a:srgbClr val="282828"/>
+          </a:solidFill>
+          <a:ln>
+            <a:noFill/>
+          </a:ln>
+        </p:spPr>
+        <p:style>
+          <a:lnRef idx="1">
+            <a:schemeClr val="accent1"/>
+          </a:lnRef>
+          <a:fillRef idx="3">
+            <a:schemeClr val="accent1"/>
+          </a:fillRef>
+          <a:effectRef idx="2">
+            <a:schemeClr val="accent1"/>
+          </a:effectRef>
+          <a:fontRef idx="minor">
+            <a:schemeClr val="lt1"/>
+          </a:fontRef>
+        </p:style>
+        <p:txBody>
+          <a:bodyPr rtlCol="0" anchor="ctr"/>
+          <a:lstStyle/>
+          <a:p>
+            <a:pPr algn="ctr"/>
+          </a:p>
+        </p:txBody>
+      </p:sp>
+      <p:sp>
+        <p:nvSpPr>
+          <p:cNvPr id="46" name="Rounded Rectangle 45"/>
+          <p:cNvSpPr/>
+          <p:nvPr/>
+        </p:nvSpPr>
+        <p:spPr>
+          <a:xfrm>
+            <a:off x="6387084" y="2304288"/>
+            <a:ext cx="2084831" cy="219456"/>
+          </a:xfrm>
+          <a:prstGeom prst="roundRect">
+            <a:avLst/>
+          </a:prstGeom>
+          <a:solidFill>
+            <a:srgbClr val="FFFFFF"/>
+          </a:solidFill>
+          <a:ln w="6350">
+            <a:solidFill>
+              <a:srgbClr val="282828"/>
+            </a:solidFill>
+          </a:ln>
+        </p:spPr>
+        <p:style>
+          <a:lnRef idx="1">
+            <a:schemeClr val="accent1"/>
+          </a:lnRef>
+          <a:fillRef idx="3">
+            <a:schemeClr val="accent1"/>
+          </a:fillRef>
+          <a:effectRef idx="2">
+            <a:schemeClr val="accent1"/>
+          </a:effectRef>
+          <a:fontRef idx="minor">
+            <a:schemeClr val="lt1"/>
+          </a:fontRef>
+        </p:style>
+        <p:txBody>
+          <a:bodyPr rtlCol="0" anchor="ctr" lIns="54864" rIns="54864"/>
+          <a:lstStyle/>
+          <a:p>
+            <a:pPr algn="ctr">
+              <a:defRPr sz="819">
+                <a:solidFill>
+                  <a:srgbClr val="000000"/>
+                </a:solidFill>
+                <a:latin typeface="Times New Roman"/>
+              </a:defRPr>
+            </a:pPr>
+            <a:r>
+              <a:t>6.1 On-board Compute &amp; Latency</a:t>
+            </a:r>
+          </a:p>
+        </p:txBody>
+      </p:sp>
+      <p:sp>
+        <p:nvSpPr>
+          <p:cNvPr id="47" name="Rectangle 46"/>
+          <p:cNvSpPr/>
+          <p:nvPr/>
+        </p:nvSpPr>
+        <p:spPr>
+          <a:xfrm>
+            <a:off x="6295644" y="2651760"/>
+            <a:ext cx="73152" cy="7315"/>
+          </a:xfrm>
+          <a:prstGeom prst="rect">
+            <a:avLst/>
+          </a:prstGeom>
+          <a:solidFill>
+            <a:srgbClr val="282828"/>
+          </a:solidFill>
+          <a:ln>
+            <a:noFill/>
+          </a:ln>
+        </p:spPr>
+        <p:style>
+          <a:lnRef idx="1">
+            <a:schemeClr val="accent1"/>
+          </a:lnRef>
+          <a:fillRef idx="3">
+            <a:schemeClr val="accent1"/>
+          </a:fillRef>
+          <a:effectRef idx="2">
+            <a:schemeClr val="accent1"/>
+          </a:effectRef>
+          <a:fontRef idx="minor">
+            <a:schemeClr val="lt1"/>
+          </a:fontRef>
+        </p:style>
+        <p:txBody>
+          <a:bodyPr rtlCol="0" anchor="ctr"/>
+          <a:lstStyle/>
+          <a:p>
+            <a:pPr algn="ctr"/>
+          </a:p>
+        </p:txBody>
+      </p:sp>
+      <p:sp>
+        <p:nvSpPr>
+          <p:cNvPr id="48" name="Rounded Rectangle 47"/>
+          <p:cNvSpPr/>
+          <p:nvPr/>
+        </p:nvSpPr>
+        <p:spPr>
+          <a:xfrm>
+            <a:off x="6387084" y="2560320"/>
+            <a:ext cx="2084831" cy="219456"/>
+          </a:xfrm>
+          <a:prstGeom prst="roundRect">
+            <a:avLst/>
+          </a:prstGeom>
+          <a:solidFill>
+            <a:srgbClr val="FFFFFF"/>
+          </a:solidFill>
+          <a:ln w="6350">
+            <a:solidFill>
+              <a:srgbClr val="282828"/>
+            </a:solidFill>
+          </a:ln>
+        </p:spPr>
+        <p:style>
+          <a:lnRef idx="1">
+            <a:schemeClr val="accent1"/>
+          </a:lnRef>
+          <a:fillRef idx="3">
+            <a:schemeClr val="accent1"/>
+          </a:fillRef>
+          <a:effectRef idx="2">
+            <a:schemeClr val="accent1"/>
+          </a:effectRef>
+          <a:fontRef idx="minor">
+            <a:schemeClr val="lt1"/>
+          </a:fontRef>
+        </p:style>
+        <p:txBody>
+          <a:bodyPr rtlCol="0" anchor="ctr" lIns="54864" rIns="54864"/>
+          <a:lstStyle/>
+          <a:p>
+            <a:pPr algn="ctr">
+              <a:defRPr sz="819">
+                <a:solidFill>
+                  <a:srgbClr val="000000"/>
+                </a:solidFill>
+                <a:latin typeface="Times New Roman"/>
+              </a:defRPr>
+            </a:pPr>
+            <a:r>
+              <a:t>6.3 Defect Detection Architectures</a:t>
+            </a:r>
+          </a:p>
+        </p:txBody>
+      </p:sp>
+      <p:sp>
+        <p:nvSpPr>
+          <p:cNvPr id="49" name="Rectangle 48"/>
+          <p:cNvSpPr/>
+          <p:nvPr/>
+        </p:nvSpPr>
+        <p:spPr>
+          <a:xfrm>
+            <a:off x="6295644" y="2907792"/>
+            <a:ext cx="73152" cy="7315"/>
+          </a:xfrm>
+          <a:prstGeom prst="rect">
+            <a:avLst/>
+          </a:prstGeom>
+          <a:solidFill>
+            <a:srgbClr val="282828"/>
+          </a:solidFill>
+          <a:ln>
+            <a:noFill/>
+          </a:ln>
+        </p:spPr>
+        <p:style>
+          <a:lnRef idx="1">
+            <a:schemeClr val="accent1"/>
+          </a:lnRef>
+          <a:fillRef idx="3">
+            <a:schemeClr val="accent1"/>
+          </a:fillRef>
+          <a:effectRef idx="2">
+            <a:schemeClr val="accent1"/>
+          </a:effectRef>
+          <a:fontRef idx="minor">
+            <a:schemeClr val="lt1"/>
+          </a:fontRef>
+        </p:style>
+        <p:txBody>
+          <a:bodyPr rtlCol="0" anchor="ctr"/>
+          <a:lstStyle/>
+          <a:p>
+            <a:pPr algn="ctr"/>
+          </a:p>
+        </p:txBody>
+      </p:sp>
+      <p:sp>
+        <p:nvSpPr>
+          <p:cNvPr id="50" name="Rounded Rectangle 49"/>
+          <p:cNvSpPr/>
+          <p:nvPr/>
+        </p:nvSpPr>
+        <p:spPr>
+          <a:xfrm>
+            <a:off x="6387084" y="2816352"/>
+            <a:ext cx="2084831" cy="219456"/>
+          </a:xfrm>
+          <a:prstGeom prst="roundRect">
+            <a:avLst/>
+          </a:prstGeom>
+          <a:solidFill>
+            <a:srgbClr val="FFFFFF"/>
+          </a:solidFill>
+          <a:ln w="6350">
+            <a:solidFill>
+              <a:srgbClr val="282828"/>
+            </a:solidFill>
+          </a:ln>
+        </p:spPr>
+        <p:style>
+          <a:lnRef idx="1">
+            <a:schemeClr val="accent1"/>
+          </a:lnRef>
+          <a:fillRef idx="3">
+            <a:schemeClr val="accent1"/>
+          </a:fillRef>
+          <a:effectRef idx="2">
+            <a:schemeClr val="accent1"/>
+          </a:effectRef>
+          <a:fontRef idx="minor">
+            <a:schemeClr val="lt1"/>
+          </a:fontRef>
+        </p:style>
+        <p:txBody>
+          <a:bodyPr rtlCol="0" anchor="ctr" lIns="54864" rIns="54864"/>
+          <a:lstStyle/>
+          <a:p>
+            <a:pPr algn="ctr">
+              <a:defRPr sz="819">
+                <a:solidFill>
+                  <a:srgbClr val="000000"/>
+                </a:solidFill>
+                <a:latin typeface="Times New Roman"/>
+              </a:defRPr>
+            </a:pPr>
+            <a:r>
+              <a:t>6.4 Instance Seg. &amp; Metrics</a:t>
+            </a:r>
+          </a:p>
+        </p:txBody>
+      </p:sp>
+      <p:sp>
+        <p:nvSpPr>
+          <p:cNvPr id="51" name="Rectangle 50"/>
+          <p:cNvSpPr/>
+          <p:nvPr/>
+        </p:nvSpPr>
+        <p:spPr>
+          <a:xfrm>
+            <a:off x="6295644" y="3163824"/>
+            <a:ext cx="73152" cy="7315"/>
+          </a:xfrm>
+          <a:prstGeom prst="rect">
+            <a:avLst/>
+          </a:prstGeom>
+          <a:solidFill>
+            <a:srgbClr val="282828"/>
+          </a:solidFill>
+          <a:ln>
+            <a:noFill/>
+          </a:ln>
+        </p:spPr>
+        <p:style>
+          <a:lnRef idx="1">
+            <a:schemeClr val="accent1"/>
+          </a:lnRef>
+          <a:fillRef idx="3">
+            <a:schemeClr val="accent1"/>
+          </a:fillRef>
+          <a:effectRef idx="2">
+            <a:schemeClr val="accent1"/>
+          </a:effectRef>
+          <a:fontRef idx="minor">
+            <a:schemeClr val="lt1"/>
+          </a:fontRef>
+        </p:style>
+        <p:txBody>
+          <a:bodyPr rtlCol="0" anchor="ctr"/>
+          <a:lstStyle/>
+          <a:p>
+            <a:pPr algn="ctr"/>
+          </a:p>
+        </p:txBody>
+      </p:sp>
+      <p:sp>
+        <p:nvSpPr>
+          <p:cNvPr id="52" name="Rounded Rectangle 51"/>
+          <p:cNvSpPr/>
+          <p:nvPr/>
+        </p:nvSpPr>
+        <p:spPr>
+          <a:xfrm>
+            <a:off x="6387084" y="3072384"/>
+            <a:ext cx="2084831" cy="219456"/>
+          </a:xfrm>
+          <a:prstGeom prst="roundRect">
+            <a:avLst/>
+          </a:prstGeom>
+          <a:solidFill>
+            <a:srgbClr val="FFFFFF"/>
+          </a:solidFill>
+          <a:ln w="6350">
+            <a:solidFill>
+              <a:srgbClr val="282828"/>
+            </a:solidFill>
+          </a:ln>
+        </p:spPr>
+        <p:style>
+          <a:lnRef idx="1">
+            <a:schemeClr val="accent1"/>
+          </a:lnRef>
+          <a:fillRef idx="3">
+            <a:schemeClr val="accent1"/>
+          </a:fillRef>
+          <a:effectRef idx="2">
+            <a:schemeClr val="accent1"/>
+          </a:effectRef>
+          <a:fontRef idx="minor">
+            <a:schemeClr val="lt1"/>
+          </a:fontRef>
+        </p:style>
+        <p:txBody>
+          <a:bodyPr rtlCol="0" anchor="ctr" lIns="54864" rIns="54864"/>
+          <a:lstStyle/>
+          <a:p>
+            <a:pPr algn="ctr">
+              <a:defRPr sz="819">
+                <a:solidFill>
+                  <a:srgbClr val="000000"/>
+                </a:solidFill>
+                <a:latin typeface="Times New Roman"/>
+              </a:defRPr>
+            </a:pPr>
+            <a:r>
+              <a:t>6.6 Edge Deployment Validation</a:t>
+            </a:r>
+          </a:p>
+        </p:txBody>
+      </p:sp>
+      <p:sp>
+        <p:nvSpPr>
+          <p:cNvPr id="53" name="Right Arrow 52"/>
+          <p:cNvSpPr/>
+          <p:nvPr/>
+        </p:nvSpPr>
+        <p:spPr>
+          <a:xfrm>
+            <a:off x="8686800" y="1307592"/>
+            <a:ext cx="182880" cy="201168"/>
+          </a:xfrm>
+          <a:prstGeom prst="rightArrow">
+            <a:avLst/>
+          </a:prstGeom>
+          <a:solidFill>
+            <a:srgbClr val="000000"/>
+          </a:solidFill>
+          <a:ln>
+            <a:noFill/>
+          </a:ln>
+        </p:spPr>
+        <p:style>
+          <a:lnRef idx="1">
+            <a:schemeClr val="accent1"/>
+          </a:lnRef>
+          <a:fillRef idx="3">
+            <a:schemeClr val="accent1"/>
+          </a:fillRef>
+          <a:effectRef idx="2">
+            <a:schemeClr val="accent1"/>
+          </a:effectRef>
+          <a:fontRef idx="minor">
+            <a:schemeClr val="lt1"/>
+          </a:fontRef>
+        </p:style>
+        <p:txBody>
+          <a:bodyPr rtlCol="0" anchor="ctr"/>
+          <a:lstStyle/>
+          <a:p>
+            <a:pPr algn="ctr"/>
+          </a:p>
+        </p:txBody>
+      </p:sp>
+      <p:sp>
+        <p:nvSpPr>
+          <p:cNvPr id="54" name="Rounded Rectangle 53"/>
+          <p:cNvSpPr/>
+          <p:nvPr/>
+        </p:nvSpPr>
+        <p:spPr>
+          <a:xfrm>
+            <a:off x="8887968" y="1234440"/>
+            <a:ext cx="2560320" cy="347472"/>
+          </a:xfrm>
+          <a:prstGeom prst="roundRect">
+            <a:avLst/>
+          </a:prstGeom>
+          <a:solidFill>
+            <a:srgbClr val="FFFFFF"/>
+          </a:solidFill>
+          <a:ln w="15875">
+            <a:solidFill>
+              <a:srgbClr val="000000"/>
+            </a:solidFill>
+          </a:ln>
+        </p:spPr>
+        <p:style>
+          <a:lnRef idx="1">
+            <a:schemeClr val="accent1"/>
+          </a:lnRef>
+          <a:fillRef idx="3">
+            <a:schemeClr val="accent1"/>
+          </a:fillRef>
+          <a:effectRef idx="2">
+            <a:schemeClr val="accent1"/>
+          </a:effectRef>
+          <a:fontRef idx="minor">
+            <a:schemeClr val="lt1"/>
+          </a:fontRef>
+        </p:style>
+        <p:txBody>
+          <a:bodyPr rtlCol="0" anchor="ctr" lIns="45720" rIns="45720"/>
+          <a:lstStyle/>
+          <a:p>
+            <a:pPr algn="ctr">
+              <a:defRPr sz="1000" b="1">
+                <a:solidFill>
+                  <a:srgbClr val="000000"/>
+                </a:solidFill>
+                <a:latin typeface="Times New Roman"/>
+              </a:defRPr>
+            </a:pPr>
+            <a:r>
+              <a:t>Phase IV: Digital Twin &amp; LLM</a:t>
+            </a:r>
+          </a:p>
+        </p:txBody>
+      </p:sp>
+      <p:sp>
+        <p:nvSpPr>
+          <p:cNvPr id="55" name="Rectangle 54"/>
+          <p:cNvSpPr/>
+          <p:nvPr/>
+        </p:nvSpPr>
+        <p:spPr>
+          <a:xfrm>
+            <a:off x="10163556" y="1581912"/>
+            <a:ext cx="9144" cy="3813048"/>
+          </a:xfrm>
+          <a:prstGeom prst="rect">
+            <a:avLst/>
+          </a:prstGeom>
+          <a:solidFill>
+            <a:srgbClr val="282828"/>
+          </a:solidFill>
+          <a:ln>
+            <a:noFill/>
+          </a:ln>
+        </p:spPr>
+        <p:style>
+          <a:lnRef idx="1">
+            <a:schemeClr val="accent1"/>
+          </a:lnRef>
+          <a:fillRef idx="3">
+            <a:schemeClr val="accent1"/>
+          </a:fillRef>
+          <a:effectRef idx="2">
+            <a:schemeClr val="accent1"/>
+          </a:effectRef>
+          <a:fontRef idx="minor">
+            <a:schemeClr val="lt1"/>
+          </a:fontRef>
+        </p:style>
+        <p:txBody>
+          <a:bodyPr rtlCol="0" anchor="ctr"/>
+          <a:lstStyle/>
+          <a:p>
+            <a:pPr algn="ctr"/>
+          </a:p>
+        </p:txBody>
+      </p:sp>
+      <p:sp>
+        <p:nvSpPr>
+          <p:cNvPr id="56" name="Rounded Rectangle 55"/>
+          <p:cNvSpPr/>
+          <p:nvPr/>
+        </p:nvSpPr>
+        <p:spPr>
+          <a:xfrm>
+            <a:off x="9002268" y="1920240"/>
+            <a:ext cx="2331720" cy="329184"/>
+          </a:xfrm>
+          <a:prstGeom prst="roundRect">
+            <a:avLst/>
+          </a:prstGeom>
+          <a:solidFill>
+            <a:srgbClr val="FFFFFF"/>
+          </a:solidFill>
+          <a:ln w="12700">
+            <a:solidFill>
+              <a:srgbClr val="000000"/>
+            </a:solidFill>
+          </a:ln>
+        </p:spPr>
+        <p:style>
+          <a:lnRef idx="1">
+            <a:schemeClr val="accent1"/>
+          </a:lnRef>
+          <a:fillRef idx="3">
+            <a:schemeClr val="accent1"/>
+          </a:fillRef>
+          <a:effectRef idx="2">
+            <a:schemeClr val="accent1"/>
+          </a:effectRef>
+          <a:fontRef idx="minor">
+            <a:schemeClr val="lt1"/>
+          </a:fontRef>
+        </p:style>
+        <p:txBody>
+          <a:bodyPr rtlCol="0" anchor="ctr" lIns="73152" rIns="73152"/>
+          <a:lstStyle/>
+          <a:p>
+            <a:pPr algn="ctr">
+              <a:defRPr sz="919" b="1">
+                <a:solidFill>
+                  <a:srgbClr val="000000"/>
+                </a:solidFill>
+                <a:latin typeface="Times New Roman"/>
+              </a:defRPr>
+            </a:pPr>
+            <a:r>
+              <a:t>Chapter 7: GIS &amp; GeoBIM (Jihan Zhang)</a:t>
+            </a:r>
+          </a:p>
+        </p:txBody>
+      </p:sp>
+      <p:sp>
+        <p:nvSpPr>
+          <p:cNvPr id="57" name="Rectangle 56"/>
+          <p:cNvSpPr/>
+          <p:nvPr/>
+        </p:nvSpPr>
+        <p:spPr>
+          <a:xfrm>
+            <a:off x="9075420" y="2249424"/>
+            <a:ext cx="7315" cy="621792"/>
+          </a:xfrm>
+          <a:prstGeom prst="rect">
+            <a:avLst/>
+          </a:prstGeom>
+          <a:solidFill>
+            <a:srgbClr val="282828"/>
+          </a:solidFill>
+          <a:ln>
+            <a:noFill/>
+          </a:ln>
+        </p:spPr>
+        <p:style>
+          <a:lnRef idx="1">
+            <a:schemeClr val="accent1"/>
+          </a:lnRef>
+          <a:fillRef idx="3">
+            <a:schemeClr val="accent1"/>
+          </a:fillRef>
+          <a:effectRef idx="2">
+            <a:schemeClr val="accent1"/>
+          </a:effectRef>
+          <a:fontRef idx="minor">
+            <a:schemeClr val="lt1"/>
+          </a:fontRef>
+        </p:style>
+        <p:txBody>
+          <a:bodyPr rtlCol="0" anchor="ctr"/>
+          <a:lstStyle/>
+          <a:p>
+            <a:pPr algn="ctr"/>
+          </a:p>
+        </p:txBody>
+      </p:sp>
+      <p:sp>
+        <p:nvSpPr>
+          <p:cNvPr id="58" name="Rectangle 57"/>
+          <p:cNvSpPr/>
+          <p:nvPr/>
+        </p:nvSpPr>
+        <p:spPr>
+          <a:xfrm>
+            <a:off x="9075420" y="2395728"/>
+            <a:ext cx="73152" cy="7315"/>
+          </a:xfrm>
+          <a:prstGeom prst="rect">
+            <a:avLst/>
+          </a:prstGeom>
+          <a:solidFill>
+            <a:srgbClr val="282828"/>
+          </a:solidFill>
+          <a:ln>
+            <a:noFill/>
+          </a:ln>
+        </p:spPr>
+        <p:style>
+          <a:lnRef idx="1">
+            <a:schemeClr val="accent1"/>
+          </a:lnRef>
+          <a:fillRef idx="3">
+            <a:schemeClr val="accent1"/>
+          </a:fillRef>
+          <a:effectRef idx="2">
+            <a:schemeClr val="accent1"/>
+          </a:effectRef>
+          <a:fontRef idx="minor">
+            <a:schemeClr val="lt1"/>
+          </a:fontRef>
+        </p:style>
+        <p:txBody>
+          <a:bodyPr rtlCol="0" anchor="ctr"/>
+          <a:lstStyle/>
+          <a:p>
+            <a:pPr algn="ctr"/>
+          </a:p>
+        </p:txBody>
+      </p:sp>
+      <p:sp>
+        <p:nvSpPr>
+          <p:cNvPr id="59" name="Rounded Rectangle 58"/>
+          <p:cNvSpPr/>
+          <p:nvPr/>
+        </p:nvSpPr>
+        <p:spPr>
+          <a:xfrm>
+            <a:off x="9166860" y="2304288"/>
+            <a:ext cx="2084831" cy="219456"/>
+          </a:xfrm>
+          <a:prstGeom prst="roundRect">
+            <a:avLst/>
+          </a:prstGeom>
+          <a:solidFill>
+            <a:srgbClr val="FFFFFF"/>
+          </a:solidFill>
+          <a:ln w="6350">
+            <a:solidFill>
+              <a:srgbClr val="282828"/>
+            </a:solidFill>
+          </a:ln>
+        </p:spPr>
+        <p:style>
+          <a:lnRef idx="1">
+            <a:schemeClr val="accent1"/>
+          </a:lnRef>
+          <a:fillRef idx="3">
+            <a:schemeClr val="accent1"/>
+          </a:fillRef>
+          <a:effectRef idx="2">
+            <a:schemeClr val="accent1"/>
+          </a:effectRef>
+          <a:fontRef idx="minor">
+            <a:schemeClr val="lt1"/>
+          </a:fontRef>
+        </p:style>
+        <p:txBody>
+          <a:bodyPr rtlCol="0" anchor="ctr" lIns="54864" rIns="54864"/>
+          <a:lstStyle/>
+          <a:p>
+            <a:pPr algn="ctr">
+              <a:defRPr sz="819">
+                <a:solidFill>
+                  <a:srgbClr val="000000"/>
+                </a:solidFill>
+                <a:latin typeface="Times New Roman"/>
+              </a:defRPr>
+            </a:pPr>
+            <a:r>
+              <a:t>7.2 Mapping UAV/3D to GeoBIM</a:t>
+            </a:r>
+          </a:p>
+        </p:txBody>
+      </p:sp>
+      <p:sp>
+        <p:nvSpPr>
+          <p:cNvPr id="60" name="Rectangle 59"/>
+          <p:cNvSpPr/>
+          <p:nvPr/>
+        </p:nvSpPr>
+        <p:spPr>
+          <a:xfrm>
+            <a:off x="9075420" y="2651760"/>
+            <a:ext cx="73152" cy="7315"/>
+          </a:xfrm>
+          <a:prstGeom prst="rect">
+            <a:avLst/>
+          </a:prstGeom>
+          <a:solidFill>
+            <a:srgbClr val="282828"/>
+          </a:solidFill>
+          <a:ln>
+            <a:noFill/>
+          </a:ln>
+        </p:spPr>
+        <p:style>
+          <a:lnRef idx="1">
+            <a:schemeClr val="accent1"/>
+          </a:lnRef>
+          <a:fillRef idx="3">
+            <a:schemeClr val="accent1"/>
+          </a:fillRef>
+          <a:effectRef idx="2">
+            <a:schemeClr val="accent1"/>
+          </a:effectRef>
+          <a:fontRef idx="minor">
+            <a:schemeClr val="lt1"/>
+          </a:fontRef>
+        </p:style>
+        <p:txBody>
+          <a:bodyPr rtlCol="0" anchor="ctr"/>
+          <a:lstStyle/>
+          <a:p>
+            <a:pPr algn="ctr"/>
+          </a:p>
+        </p:txBody>
+      </p:sp>
+      <p:sp>
+        <p:nvSpPr>
+          <p:cNvPr id="61" name="Rounded Rectangle 60"/>
+          <p:cNvSpPr/>
+          <p:nvPr/>
+        </p:nvSpPr>
+        <p:spPr>
+          <a:xfrm>
+            <a:off x="9166860" y="2560320"/>
+            <a:ext cx="2084831" cy="219456"/>
+          </a:xfrm>
+          <a:prstGeom prst="roundRect">
+            <a:avLst/>
+          </a:prstGeom>
+          <a:solidFill>
+            <a:srgbClr val="FFFFFF"/>
+          </a:solidFill>
+          <a:ln w="6350">
+            <a:solidFill>
+              <a:srgbClr val="282828"/>
+            </a:solidFill>
+          </a:ln>
+        </p:spPr>
+        <p:style>
+          <a:lnRef idx="1">
+            <a:schemeClr val="accent1"/>
+          </a:lnRef>
+          <a:fillRef idx="3">
+            <a:schemeClr val="accent1"/>
+          </a:fillRef>
+          <a:effectRef idx="2">
+            <a:schemeClr val="accent1"/>
+          </a:effectRef>
+          <a:fontRef idx="minor">
+            <a:schemeClr val="lt1"/>
+          </a:fontRef>
+        </p:style>
+        <p:txBody>
+          <a:bodyPr rtlCol="0" anchor="ctr" lIns="54864" rIns="54864"/>
+          <a:lstStyle/>
+          <a:p>
+            <a:pPr algn="ctr">
+              <a:defRPr sz="819">
+                <a:solidFill>
+                  <a:srgbClr val="000000"/>
+                </a:solidFill>
+                <a:latin typeface="Times New Roman"/>
+              </a:defRPr>
+            </a:pPr>
+            <a:r>
+              <a:t>7.3 Spatiotemporal Degradation</a:t>
+            </a:r>
+          </a:p>
+        </p:txBody>
+      </p:sp>
+      <p:sp>
+        <p:nvSpPr>
+          <p:cNvPr id="62" name="Rectangle 61"/>
+          <p:cNvSpPr/>
+          <p:nvPr/>
+        </p:nvSpPr>
+        <p:spPr>
+          <a:xfrm>
+            <a:off x="9075420" y="2907792"/>
+            <a:ext cx="73152" cy="7315"/>
+          </a:xfrm>
+          <a:prstGeom prst="rect">
+            <a:avLst/>
+          </a:prstGeom>
+          <a:solidFill>
+            <a:srgbClr val="282828"/>
+          </a:solidFill>
+          <a:ln>
+            <a:noFill/>
+          </a:ln>
+        </p:spPr>
+        <p:style>
+          <a:lnRef idx="1">
+            <a:schemeClr val="accent1"/>
+          </a:lnRef>
+          <a:fillRef idx="3">
+            <a:schemeClr val="accent1"/>
+          </a:fillRef>
+          <a:effectRef idx="2">
+            <a:schemeClr val="accent1"/>
+          </a:effectRef>
+          <a:fontRef idx="minor">
+            <a:schemeClr val="lt1"/>
+          </a:fontRef>
+        </p:style>
+        <p:txBody>
+          <a:bodyPr rtlCol="0" anchor="ctr"/>
+          <a:lstStyle/>
+          <a:p>
+            <a:pPr algn="ctr"/>
+          </a:p>
+        </p:txBody>
+      </p:sp>
+      <p:sp>
+        <p:nvSpPr>
+          <p:cNvPr id="63" name="Rounded Rectangle 62"/>
+          <p:cNvSpPr/>
+          <p:nvPr/>
+        </p:nvSpPr>
+        <p:spPr>
+          <a:xfrm>
+            <a:off x="9166860" y="2816352"/>
+            <a:ext cx="2084831" cy="219456"/>
+          </a:xfrm>
+          <a:prstGeom prst="roundRect">
+            <a:avLst/>
+          </a:prstGeom>
+          <a:solidFill>
+            <a:srgbClr val="FFFFFF"/>
+          </a:solidFill>
+          <a:ln w="6350">
+            <a:solidFill>
+              <a:srgbClr val="282828"/>
+            </a:solidFill>
+          </a:ln>
+        </p:spPr>
+        <p:style>
+          <a:lnRef idx="1">
+            <a:schemeClr val="accent1"/>
+          </a:lnRef>
+          <a:fillRef idx="3">
+            <a:schemeClr val="accent1"/>
+          </a:fillRef>
+          <a:effectRef idx="2">
+            <a:schemeClr val="accent1"/>
+          </a:effectRef>
+          <a:fontRef idx="minor">
+            <a:schemeClr val="lt1"/>
+          </a:fontRef>
+        </p:style>
+        <p:txBody>
+          <a:bodyPr rtlCol="0" anchor="ctr" lIns="54864" rIns="54864"/>
+          <a:lstStyle/>
+          <a:p>
+            <a:pPr algn="ctr">
+              <a:defRPr sz="819">
+                <a:solidFill>
+                  <a:srgbClr val="000000"/>
+                </a:solidFill>
+                <a:latin typeface="Times New Roman"/>
+              </a:defRPr>
+            </a:pPr>
+            <a:r>
+              <a:t>7.5 City Asset Passport Mgmt</a:t>
+            </a:r>
+          </a:p>
+        </p:txBody>
+      </p:sp>
+      <p:sp>
+        <p:nvSpPr>
+          <p:cNvPr id="64" name="Rounded Rectangle 63"/>
+          <p:cNvSpPr/>
+          <p:nvPr/>
+        </p:nvSpPr>
+        <p:spPr>
+          <a:xfrm>
+            <a:off x="9002268" y="3657600"/>
+            <a:ext cx="2331720" cy="329184"/>
+          </a:xfrm>
+          <a:prstGeom prst="roundRect">
+            <a:avLst/>
+          </a:prstGeom>
+          <a:solidFill>
+            <a:srgbClr val="FFFFFF"/>
+          </a:solidFill>
+          <a:ln w="12700">
+            <a:solidFill>
+              <a:srgbClr val="000000"/>
+            </a:solidFill>
+          </a:ln>
+        </p:spPr>
+        <p:style>
+          <a:lnRef idx="1">
+            <a:schemeClr val="accent1"/>
+          </a:lnRef>
+          <a:fillRef idx="3">
+            <a:schemeClr val="accent1"/>
+          </a:fillRef>
+          <a:effectRef idx="2">
+            <a:schemeClr val="accent1"/>
+          </a:effectRef>
+          <a:fontRef idx="minor">
+            <a:schemeClr val="lt1"/>
+          </a:fontRef>
+        </p:style>
+        <p:txBody>
+          <a:bodyPr rtlCol="0" anchor="ctr" lIns="73152" rIns="73152"/>
+          <a:lstStyle/>
+          <a:p>
+            <a:pPr algn="ctr">
+              <a:defRPr sz="919" b="1">
+                <a:solidFill>
+                  <a:srgbClr val="000000"/>
+                </a:solidFill>
+                <a:latin typeface="Times New Roman"/>
+              </a:defRPr>
+            </a:pPr>
+            <a:r>
+              <a:t>Chapter 8: Digital Twin &amp; LLM (Yijun Huang)</a:t>
+            </a:r>
+          </a:p>
+        </p:txBody>
+      </p:sp>
+      <p:sp>
+        <p:nvSpPr>
+          <p:cNvPr id="65" name="Rectangle 64"/>
+          <p:cNvSpPr/>
+          <p:nvPr/>
+        </p:nvSpPr>
+        <p:spPr>
+          <a:xfrm>
+            <a:off x="9075420" y="3986784"/>
+            <a:ext cx="7315" cy="621792"/>
+          </a:xfrm>
+          <a:prstGeom prst="rect">
+            <a:avLst/>
+          </a:prstGeom>
+          <a:solidFill>
+            <a:srgbClr val="282828"/>
+          </a:solidFill>
+          <a:ln>
+            <a:noFill/>
+          </a:ln>
+        </p:spPr>
+        <p:style>
+          <a:lnRef idx="1">
+            <a:schemeClr val="accent1"/>
+          </a:lnRef>
+          <a:fillRef idx="3">
+            <a:schemeClr val="accent1"/>
+          </a:fillRef>
+          <a:effectRef idx="2">
+            <a:schemeClr val="accent1"/>
+          </a:effectRef>
+          <a:fontRef idx="minor">
+            <a:schemeClr val="lt1"/>
+          </a:fontRef>
+        </p:style>
+        <p:txBody>
+          <a:bodyPr rtlCol="0" anchor="ctr"/>
+          <a:lstStyle/>
+          <a:p>
+            <a:pPr algn="ctr"/>
+          </a:p>
+        </p:txBody>
+      </p:sp>
+      <p:sp>
+        <p:nvSpPr>
+          <p:cNvPr id="66" name="Rectangle 65"/>
+          <p:cNvSpPr/>
+          <p:nvPr/>
+        </p:nvSpPr>
+        <p:spPr>
+          <a:xfrm>
+            <a:off x="9075420" y="4133088"/>
+            <a:ext cx="73152" cy="7315"/>
+          </a:xfrm>
+          <a:prstGeom prst="rect">
+            <a:avLst/>
+          </a:prstGeom>
+          <a:solidFill>
+            <a:srgbClr val="282828"/>
+          </a:solidFill>
+          <a:ln>
+            <a:noFill/>
+          </a:ln>
+        </p:spPr>
+        <p:style>
+          <a:lnRef idx="1">
+            <a:schemeClr val="accent1"/>
+          </a:lnRef>
+          <a:fillRef idx="3">
+            <a:schemeClr val="accent1"/>
+          </a:fillRef>
+          <a:effectRef idx="2">
+            <a:schemeClr val="accent1"/>
+          </a:effectRef>
+          <a:fontRef idx="minor">
+            <a:schemeClr val="lt1"/>
+          </a:fontRef>
+        </p:style>
+        <p:txBody>
+          <a:bodyPr rtlCol="0" anchor="ctr"/>
+          <a:lstStyle/>
+          <a:p>
+            <a:pPr algn="ctr"/>
+          </a:p>
+        </p:txBody>
+      </p:sp>
+      <p:sp>
+        <p:nvSpPr>
+          <p:cNvPr id="67" name="Rounded Rectangle 66"/>
+          <p:cNvSpPr/>
+          <p:nvPr/>
+        </p:nvSpPr>
+        <p:spPr>
+          <a:xfrm>
+            <a:off x="9166860" y="4041648"/>
+            <a:ext cx="2084831" cy="219456"/>
+          </a:xfrm>
+          <a:prstGeom prst="roundRect">
+            <a:avLst/>
+          </a:prstGeom>
+          <a:solidFill>
+            <a:srgbClr val="FFFFFF"/>
+          </a:solidFill>
+          <a:ln w="6350">
+            <a:solidFill>
+              <a:srgbClr val="282828"/>
+            </a:solidFill>
+          </a:ln>
+        </p:spPr>
+        <p:style>
+          <a:lnRef idx="1">
+            <a:schemeClr val="accent1"/>
+          </a:lnRef>
+          <a:fillRef idx="3">
+            <a:schemeClr val="accent1"/>
+          </a:fillRef>
+          <a:effectRef idx="2">
+            <a:schemeClr val="accent1"/>
+          </a:effectRef>
+          <a:fontRef idx="minor">
+            <a:schemeClr val="lt1"/>
+          </a:fontRef>
+        </p:style>
+        <p:txBody>
+          <a:bodyPr rtlCol="0" anchor="ctr" lIns="54864" rIns="54864"/>
+          <a:lstStyle/>
+          <a:p>
+            <a:pPr algn="ctr">
+              <a:defRPr sz="819">
+                <a:solidFill>
+                  <a:srgbClr val="000000"/>
+                </a:solidFill>
+                <a:latin typeface="Times New Roman"/>
+              </a:defRPr>
+            </a:pPr>
+            <a:r>
+              <a:t>8.2 LLM / VLM Domain Reasoning</a:t>
+            </a:r>
+          </a:p>
+        </p:txBody>
+      </p:sp>
+      <p:sp>
+        <p:nvSpPr>
+          <p:cNvPr id="68" name="Rectangle 67"/>
+          <p:cNvSpPr/>
+          <p:nvPr/>
+        </p:nvSpPr>
+        <p:spPr>
+          <a:xfrm>
+            <a:off x="9075420" y="4389120"/>
+            <a:ext cx="73152" cy="7315"/>
+          </a:xfrm>
+          <a:prstGeom prst="rect">
+            <a:avLst/>
+          </a:prstGeom>
+          <a:solidFill>
+            <a:srgbClr val="282828"/>
+          </a:solidFill>
+          <a:ln>
+            <a:noFill/>
+          </a:ln>
+        </p:spPr>
+        <p:style>
+          <a:lnRef idx="1">
+            <a:schemeClr val="accent1"/>
+          </a:lnRef>
+          <a:fillRef idx="3">
+            <a:schemeClr val="accent1"/>
+          </a:fillRef>
+          <a:effectRef idx="2">
+            <a:schemeClr val="accent1"/>
+          </a:effectRef>
+          <a:fontRef idx="minor">
+            <a:schemeClr val="lt1"/>
+          </a:fontRef>
+        </p:style>
+        <p:txBody>
+          <a:bodyPr rtlCol="0" anchor="ctr"/>
+          <a:lstStyle/>
+          <a:p>
+            <a:pPr algn="ctr"/>
+          </a:p>
+        </p:txBody>
+      </p:sp>
+      <p:sp>
+        <p:nvSpPr>
+          <p:cNvPr id="69" name="Rounded Rectangle 68"/>
+          <p:cNvSpPr/>
+          <p:nvPr/>
+        </p:nvSpPr>
+        <p:spPr>
+          <a:xfrm>
+            <a:off x="9166860" y="4297680"/>
+            <a:ext cx="2084831" cy="219456"/>
+          </a:xfrm>
+          <a:prstGeom prst="roundRect">
+            <a:avLst/>
+          </a:prstGeom>
+          <a:solidFill>
+            <a:srgbClr val="FFFFFF"/>
+          </a:solidFill>
+          <a:ln w="6350">
+            <a:solidFill>
+              <a:srgbClr val="282828"/>
+            </a:solidFill>
+          </a:ln>
+        </p:spPr>
+        <p:style>
+          <a:lnRef idx="1">
+            <a:schemeClr val="accent1"/>
+          </a:lnRef>
+          <a:fillRef idx="3">
+            <a:schemeClr val="accent1"/>
+          </a:fillRef>
+          <a:effectRef idx="2">
+            <a:schemeClr val="accent1"/>
+          </a:effectRef>
+          <a:fontRef idx="minor">
+            <a:schemeClr val="lt1"/>
+          </a:fontRef>
+        </p:style>
+        <p:txBody>
+          <a:bodyPr rtlCol="0" anchor="ctr" lIns="54864" rIns="54864"/>
+          <a:lstStyle/>
+          <a:p>
+            <a:pPr algn="ctr">
+              <a:defRPr sz="819">
+                <a:solidFill>
+                  <a:srgbClr val="000000"/>
+                </a:solidFill>
+                <a:latin typeface="Times New Roman"/>
+              </a:defRPr>
+            </a:pPr>
+            <a:r>
+              <a:t>8.3 Twin Memory &amp; RAG Retrieval</a:t>
+            </a:r>
+          </a:p>
+        </p:txBody>
+      </p:sp>
+      <p:sp>
+        <p:nvSpPr>
+          <p:cNvPr id="70" name="Rectangle 69"/>
+          <p:cNvSpPr/>
+          <p:nvPr/>
+        </p:nvSpPr>
+        <p:spPr>
+          <a:xfrm>
+            <a:off x="9075420" y="4645152"/>
+            <a:ext cx="73152" cy="7315"/>
+          </a:xfrm>
+          <a:prstGeom prst="rect">
+            <a:avLst/>
+          </a:prstGeom>
+          <a:solidFill>
+            <a:srgbClr val="282828"/>
+          </a:solidFill>
+          <a:ln>
+            <a:noFill/>
+          </a:ln>
+        </p:spPr>
+        <p:style>
+          <a:lnRef idx="1">
+            <a:schemeClr val="accent1"/>
+          </a:lnRef>
+          <a:fillRef idx="3">
+            <a:schemeClr val="accent1"/>
+          </a:fillRef>
+          <a:effectRef idx="2">
+            <a:schemeClr val="accent1"/>
+          </a:effectRef>
+          <a:fontRef idx="minor">
+            <a:schemeClr val="lt1"/>
+          </a:fontRef>
+        </p:style>
+        <p:txBody>
+          <a:bodyPr rtlCol="0" anchor="ctr"/>
+          <a:lstStyle/>
+          <a:p>
+            <a:pPr algn="ctr"/>
+          </a:p>
+        </p:txBody>
+      </p:sp>
+      <p:sp>
+        <p:nvSpPr>
+          <p:cNvPr id="71" name="Rounded Rectangle 70"/>
+          <p:cNvSpPr/>
+          <p:nvPr/>
+        </p:nvSpPr>
+        <p:spPr>
+          <a:xfrm>
+            <a:off x="9166860" y="4553712"/>
+            <a:ext cx="2084831" cy="219456"/>
+          </a:xfrm>
+          <a:prstGeom prst="roundRect">
+            <a:avLst/>
+          </a:prstGeom>
+          <a:solidFill>
+            <a:srgbClr val="FFFFFF"/>
+          </a:solidFill>
+          <a:ln w="6350">
+            <a:solidFill>
+              <a:srgbClr val="282828"/>
+            </a:solidFill>
+          </a:ln>
+        </p:spPr>
+        <p:style>
+          <a:lnRef idx="1">
+            <a:schemeClr val="accent1"/>
+          </a:lnRef>
+          <a:fillRef idx="3">
+            <a:schemeClr val="accent1"/>
+          </a:fillRef>
+          <a:effectRef idx="2">
+            <a:schemeClr val="accent1"/>
+          </a:effectRef>
+          <a:fontRef idx="minor">
+            <a:schemeClr val="lt1"/>
+          </a:fontRef>
+        </p:style>
+        <p:txBody>
+          <a:bodyPr rtlCol="0" anchor="ctr" lIns="54864" rIns="54864"/>
+          <a:lstStyle/>
+          <a:p>
+            <a:pPr algn="ctr">
+              <a:defRPr sz="819">
+                <a:solidFill>
+                  <a:srgbClr val="000000"/>
+                </a:solidFill>
+                <a:latin typeface="Times New Roman"/>
+              </a:defRPr>
+            </a:pPr>
+            <a:r>
+              <a:t>8.5/8.6 Report &amp; Maintenance DSS</a:t>
+            </a:r>
+          </a:p>
+        </p:txBody>
+      </p:sp>
+      <p:sp>
+        <p:nvSpPr>
+          <p:cNvPr id="72" name="Rounded Rectangle 71"/>
+          <p:cNvSpPr/>
+          <p:nvPr/>
+        </p:nvSpPr>
+        <p:spPr>
+          <a:xfrm>
+            <a:off x="9002268" y="5394960"/>
+            <a:ext cx="2331720" cy="329184"/>
+          </a:xfrm>
+          <a:prstGeom prst="roundRect">
+            <a:avLst/>
+          </a:prstGeom>
+          <a:solidFill>
+            <a:srgbClr val="FFFFFF"/>
+          </a:solidFill>
+          <a:ln w="12700">
+            <a:solidFill>
+              <a:srgbClr val="000000"/>
+            </a:solidFill>
+          </a:ln>
+        </p:spPr>
+        <p:style>
+          <a:lnRef idx="1">
+            <a:schemeClr val="accent1"/>
+          </a:lnRef>
+          <a:fillRef idx="3">
+            <a:schemeClr val="accent1"/>
+          </a:fillRef>
+          <a:effectRef idx="2">
+            <a:schemeClr val="accent1"/>
+          </a:effectRef>
+          <a:fontRef idx="minor">
+            <a:schemeClr val="lt1"/>
+          </a:fontRef>
+        </p:style>
+        <p:txBody>
+          <a:bodyPr rtlCol="0" anchor="ctr" lIns="73152" rIns="73152"/>
+          <a:lstStyle/>
+          <a:p>
+            <a:pPr algn="ctr">
+              <a:defRPr sz="919" b="1">
+                <a:solidFill>
+                  <a:srgbClr val="000000"/>
+                </a:solidFill>
+                <a:latin typeface="Times New Roman"/>
+              </a:defRPr>
+            </a:pPr>
+            <a:r>
+              <a:t>Chapter 9: Conclusion &amp; Outlook (Ben M. Chen et al.)</a:t>
+            </a:r>
+          </a:p>
+        </p:txBody>
+      </p:sp>
+      <p:sp>
+        <p:nvSpPr>
+          <p:cNvPr id="73" name="Rectangle 72"/>
+          <p:cNvSpPr/>
+          <p:nvPr/>
+        </p:nvSpPr>
+        <p:spPr>
+          <a:xfrm>
+            <a:off x="9075420" y="5724144"/>
+            <a:ext cx="7315" cy="621792"/>
+          </a:xfrm>
+          <a:prstGeom prst="rect">
+            <a:avLst/>
+          </a:prstGeom>
+          <a:solidFill>
+            <a:srgbClr val="282828"/>
+          </a:solidFill>
+          <a:ln>
+            <a:noFill/>
+          </a:ln>
+        </p:spPr>
+        <p:style>
+          <a:lnRef idx="1">
+            <a:schemeClr val="accent1"/>
+          </a:lnRef>
+          <a:fillRef idx="3">
+            <a:schemeClr val="accent1"/>
+          </a:fillRef>
+          <a:effectRef idx="2">
+            <a:schemeClr val="accent1"/>
+          </a:effectRef>
+          <a:fontRef idx="minor">
+            <a:schemeClr val="lt1"/>
+          </a:fontRef>
+        </p:style>
+        <p:txBody>
+          <a:bodyPr rtlCol="0" anchor="ctr"/>
+          <a:lstStyle/>
+          <a:p>
+            <a:pPr algn="ctr"/>
+          </a:p>
+        </p:txBody>
+      </p:sp>
+      <p:sp>
+        <p:nvSpPr>
+          <p:cNvPr id="74" name="Rectangle 73"/>
+          <p:cNvSpPr/>
+          <p:nvPr/>
+        </p:nvSpPr>
+        <p:spPr>
+          <a:xfrm>
+            <a:off x="9075420" y="5870448"/>
+            <a:ext cx="73152" cy="7315"/>
+          </a:xfrm>
+          <a:prstGeom prst="rect">
+            <a:avLst/>
+          </a:prstGeom>
+          <a:solidFill>
+            <a:srgbClr val="282828"/>
+          </a:solidFill>
+          <a:ln>
+            <a:noFill/>
+          </a:ln>
+        </p:spPr>
+        <p:style>
+          <a:lnRef idx="1">
+            <a:schemeClr val="accent1"/>
+          </a:lnRef>
+          <a:fillRef idx="3">
+            <a:schemeClr val="accent1"/>
+          </a:fillRef>
+          <a:effectRef idx="2">
+            <a:schemeClr val="accent1"/>
+          </a:effectRef>
+          <a:fontRef idx="minor">
+            <a:schemeClr val="lt1"/>
+          </a:fontRef>
+        </p:style>
+        <p:txBody>
+          <a:bodyPr rtlCol="0" anchor="ctr"/>
+          <a:lstStyle/>
+          <a:p>
+            <a:pPr algn="ctr"/>
+          </a:p>
+        </p:txBody>
+      </p:sp>
+      <p:sp>
+        <p:nvSpPr>
+          <p:cNvPr id="75" name="Rounded Rectangle 74"/>
+          <p:cNvSpPr/>
+          <p:nvPr/>
+        </p:nvSpPr>
+        <p:spPr>
+          <a:xfrm>
+            <a:off x="9166860" y="5779008"/>
+            <a:ext cx="2084831" cy="219456"/>
+          </a:xfrm>
+          <a:prstGeom prst="roundRect">
+            <a:avLst/>
+          </a:prstGeom>
+          <a:solidFill>
+            <a:srgbClr val="FFFFFF"/>
+          </a:solidFill>
+          <a:ln w="6350">
+            <a:solidFill>
+              <a:srgbClr val="282828"/>
+            </a:solidFill>
+          </a:ln>
+        </p:spPr>
+        <p:style>
+          <a:lnRef idx="1">
+            <a:schemeClr val="accent1"/>
+          </a:lnRef>
+          <a:fillRef idx="3">
+            <a:schemeClr val="accent1"/>
+          </a:fillRef>
+          <a:effectRef idx="2">
+            <a:schemeClr val="accent1"/>
+          </a:effectRef>
+          <a:fontRef idx="minor">
+            <a:schemeClr val="lt1"/>
+          </a:fontRef>
+        </p:style>
+        <p:txBody>
+          <a:bodyPr rtlCol="0" anchor="ctr" lIns="54864" rIns="54864"/>
+          <a:lstStyle/>
+          <a:p>
+            <a:pPr algn="ctr">
+              <a:defRPr sz="819">
+                <a:solidFill>
+                  <a:srgbClr val="000000"/>
+                </a:solidFill>
+                <a:latin typeface="Times New Roman"/>
+              </a:defRPr>
+            </a:pPr>
+            <a:r>
+              <a:t>9.1 End-to-End System Summary</a:t>
+            </a:r>
+          </a:p>
+        </p:txBody>
+      </p:sp>
+      <p:sp>
+        <p:nvSpPr>
+          <p:cNvPr id="76" name="Rectangle 75"/>
+          <p:cNvSpPr/>
+          <p:nvPr/>
+        </p:nvSpPr>
+        <p:spPr>
+          <a:xfrm>
+            <a:off x="9075420" y="6126480"/>
+            <a:ext cx="73152" cy="7315"/>
+          </a:xfrm>
+          <a:prstGeom prst="rect">
+            <a:avLst/>
+          </a:prstGeom>
+          <a:solidFill>
+            <a:srgbClr val="282828"/>
+          </a:solidFill>
+          <a:ln>
+            <a:noFill/>
+          </a:ln>
+        </p:spPr>
+        <p:style>
+          <a:lnRef idx="1">
+            <a:schemeClr val="accent1"/>
+          </a:lnRef>
+          <a:fillRef idx="3">
+            <a:schemeClr val="accent1"/>
+          </a:fillRef>
+          <a:effectRef idx="2">
+            <a:schemeClr val="accent1"/>
+          </a:effectRef>
+          <a:fontRef idx="minor">
+            <a:schemeClr val="lt1"/>
+          </a:fontRef>
+        </p:style>
+        <p:txBody>
+          <a:bodyPr rtlCol="0" anchor="ctr"/>
+          <a:lstStyle/>
+          <a:p>
+            <a:pPr algn="ctr"/>
+          </a:p>
+        </p:txBody>
+      </p:sp>
+      <p:sp>
+        <p:nvSpPr>
+          <p:cNvPr id="77" name="Rounded Rectangle 76"/>
+          <p:cNvSpPr/>
+          <p:nvPr/>
+        </p:nvSpPr>
+        <p:spPr>
+          <a:xfrm>
+            <a:off x="9166860" y="6035040"/>
+            <a:ext cx="2084831" cy="219456"/>
+          </a:xfrm>
+          <a:prstGeom prst="roundRect">
+            <a:avLst/>
+          </a:prstGeom>
+          <a:solidFill>
+            <a:srgbClr val="FFFFFF"/>
+          </a:solidFill>
+          <a:ln w="6350">
+            <a:solidFill>
+              <a:srgbClr val="282828"/>
+            </a:solidFill>
+          </a:ln>
+        </p:spPr>
+        <p:style>
+          <a:lnRef idx="1">
+            <a:schemeClr val="accent1"/>
+          </a:lnRef>
+          <a:fillRef idx="3">
+            <a:schemeClr val="accent1"/>
+          </a:fillRef>
+          <a:effectRef idx="2">
+            <a:schemeClr val="accent1"/>
+          </a:effectRef>
+          <a:fontRef idx="minor">
+            <a:schemeClr val="lt1"/>
+          </a:fontRef>
+        </p:style>
+        <p:txBody>
+          <a:bodyPr rtlCol="0" anchor="ctr" lIns="54864" rIns="54864"/>
+          <a:lstStyle/>
+          <a:p>
+            <a:pPr algn="ctr">
+              <a:defRPr sz="819">
+                <a:solidFill>
+                  <a:srgbClr val="000000"/>
+                </a:solidFill>
+                <a:latin typeface="Times New Roman"/>
+              </a:defRPr>
+            </a:pPr>
+            <a:r>
+              <a:t>9.2 Regulatory &amp; Safety Bounds</a:t>
+            </a:r>
+          </a:p>
+        </p:txBody>
+      </p:sp>
+      <p:sp>
+        <p:nvSpPr>
+          <p:cNvPr id="78" name="Rectangle 77"/>
+          <p:cNvSpPr/>
+          <p:nvPr/>
+        </p:nvSpPr>
+        <p:spPr>
+          <a:xfrm>
+            <a:off x="9075420" y="6382512"/>
+            <a:ext cx="73152" cy="7315"/>
+          </a:xfrm>
+          <a:prstGeom prst="rect">
+            <a:avLst/>
+          </a:prstGeom>
+          <a:solidFill>
+            <a:srgbClr val="282828"/>
+          </a:solidFill>
+          <a:ln>
+            <a:noFill/>
+          </a:ln>
+        </p:spPr>
+        <p:style>
+          <a:lnRef idx="1">
+            <a:schemeClr val="accent1"/>
+          </a:lnRef>
+          <a:fillRef idx="3">
+            <a:schemeClr val="accent1"/>
+          </a:fillRef>
+          <a:effectRef idx="2">
+            <a:schemeClr val="accent1"/>
+          </a:effectRef>
+          <a:fontRef idx="minor">
+            <a:schemeClr val="lt1"/>
+          </a:fontRef>
+        </p:style>
+        <p:txBody>
+          <a:bodyPr rtlCol="0" anchor="ctr"/>
+          <a:lstStyle/>
+          <a:p>
+            <a:pPr algn="ctr"/>
+          </a:p>
+        </p:txBody>
+      </p:sp>
+      <p:sp>
+        <p:nvSpPr>
+          <p:cNvPr id="79" name="Rounded Rectangle 78"/>
+          <p:cNvSpPr/>
+          <p:nvPr/>
+        </p:nvSpPr>
+        <p:spPr>
+          <a:xfrm>
+            <a:off x="9166860" y="6291072"/>
+            <a:ext cx="2084831" cy="219456"/>
+          </a:xfrm>
+          <a:prstGeom prst="roundRect">
+            <a:avLst/>
+          </a:prstGeom>
+          <a:solidFill>
+            <a:srgbClr val="FFFFFF"/>
+          </a:solidFill>
+          <a:ln w="6350">
+            <a:solidFill>
+              <a:srgbClr val="282828"/>
+            </a:solidFill>
+          </a:ln>
+        </p:spPr>
+        <p:style>
+          <a:lnRef idx="1">
+            <a:schemeClr val="accent1"/>
+          </a:lnRef>
+          <a:fillRef idx="3">
+            <a:schemeClr val="accent1"/>
+          </a:fillRef>
+          <a:effectRef idx="2">
+            <a:schemeClr val="accent1"/>
+          </a:effectRef>
+          <a:fontRef idx="minor">
+            <a:schemeClr val="lt1"/>
+          </a:fontRef>
+        </p:style>
+        <p:txBody>
+          <a:bodyPr rtlCol="0" anchor="ctr" lIns="54864" rIns="54864"/>
+          <a:lstStyle/>
+          <a:p>
+            <a:pPr algn="ctr">
+              <a:defRPr sz="819">
+                <a:solidFill>
+                  <a:srgbClr val="000000"/>
+                </a:solidFill>
+                <a:latin typeface="Times New Roman"/>
+              </a:defRPr>
+            </a:pPr>
+            <a:r>
+              <a:t>9.3 Autonomous Swarms &amp; AI</a:t>
+            </a:r>
+          </a:p>
+        </p:txBody>
+      </p:sp>
+      <p:sp>
+        <p:nvSpPr>
+          <p:cNvPr id="80" name="TextBox 79"/>
+          <p:cNvSpPr txBox="1"/>
+          <p:nvPr/>
+        </p:nvSpPr>
+        <p:spPr>
+          <a:xfrm>
+            <a:off x="548640" y="6236208"/>
+            <a:ext cx="11094415" cy="365760"/>
+          </a:xfrm>
+          <a:prstGeom prst="rect">
+            <a:avLst/>
+          </a:prstGeom>
+          <a:noFill/>
+        </p:spPr>
+        <p:txBody>
+          <a:bodyPr wrap="none">
+            <a:spAutoFit/>
+          </a:bodyPr>
+          <a:lstStyle/>
+          <a:p>
+            <a:pPr>
+              <a:defRPr sz="950" b="1">
+                <a:solidFill>
+                  <a:srgbClr val="000000"/>
+                </a:solidFill>
+                <a:latin typeface="Times New Roman"/>
+              </a:defRPr>
+            </a:pPr>
+            <a:r>
+              <a:t>Figure 1.1: Four-phase end-to-end methodology and detailed chapter tree roadmap of the monograph (Chapters 1–9).</a:t>
             </a:r>
           </a:p>
         </p:txBody>

--- a/Chapter01_Overall_Pipeline.pptx
+++ b/Chapter01_Overall_Pipeline.pptx
@@ -3091,28 +3091,47 @@
       <p:grpSpPr/>
       <p:sp>
         <p:nvSpPr>
-          <p:cNvPr id="2" name="TextBox 1"/>
-          <p:cNvSpPr txBox="1"/>
-          <p:nvPr/>
-        </p:nvSpPr>
-        <p:spPr>
-          <a:xfrm>
-            <a:off x="548640" y="365760"/>
-            <a:ext cx="11094415" cy="777240"/>
-          </a:xfrm>
-          <a:prstGeom prst="rect">
-            <a:avLst/>
-          </a:prstGeom>
-          <a:noFill/>
-        </p:spPr>
-        <p:txBody>
-          <a:bodyPr wrap="square" lIns="0" tIns="0" rIns="0" bIns="0">
-            <a:spAutoFit/>
-          </a:bodyPr>
-          <a:lstStyle/>
-          <a:p>
-            <a:pPr>
-              <a:defRPr sz="2000" b="1">
+          <p:cNvPr id="2" name="Rounded Rectangle 1"/>
+          <p:cNvSpPr/>
+          <p:nvPr/>
+        </p:nvSpPr>
+        <p:spPr>
+          <a:xfrm>
+            <a:off x="548640" y="548640"/>
+            <a:ext cx="2560320" cy="438912"/>
+          </a:xfrm>
+          <a:prstGeom prst="roundRect">
+            <a:avLst/>
+          </a:prstGeom>
+          <a:solidFill>
+            <a:srgbClr val="FFFFFF"/>
+          </a:solidFill>
+          <a:ln w="19050">
+            <a:solidFill>
+              <a:srgbClr val="000000"/>
+            </a:solidFill>
+          </a:ln>
+        </p:spPr>
+        <p:style>
+          <a:lnRef idx="1">
+            <a:schemeClr val="accent1"/>
+          </a:lnRef>
+          <a:fillRef idx="3">
+            <a:schemeClr val="accent1"/>
+          </a:fillRef>
+          <a:effectRef idx="2">
+            <a:schemeClr val="accent1"/>
+          </a:effectRef>
+          <a:fontRef idx="minor">
+            <a:schemeClr val="lt1"/>
+          </a:fontRef>
+        </p:style>
+        <p:txBody>
+          <a:bodyPr rtlCol="0" anchor="ctr" lIns="45720" rIns="45720"/>
+          <a:lstStyle/>
+          <a:p>
+            <a:pPr algn="ctr">
+              <a:defRPr sz="1300" b="1">
                 <a:solidFill>
                   <a:srgbClr val="000000"/>
                 </a:solidFill>
@@ -3120,34 +3139,64 @@
               </a:defRPr>
             </a:pPr>
             <a:r>
-              <a:t>专著总体大纲与四阶段技术路线树状映射图</a:t>
-            </a:r>
-          </a:p>
-          <a:p>
-            <a:pPr>
-              <a:defRPr sz="1100">
-                <a:solidFill>
-                  <a:srgbClr val="5A5A5A"/>
-                </a:solidFill>
-                <a:latin typeface="Times New Roman"/>
-              </a:defRPr>
-            </a:pPr>
-            <a:r>
-              <a:t>AI-Driven UAV Building Inspection: An End-to-End Framework from Autonomous Flight to Digital Twins</a:t>
-            </a:r>
-          </a:p>
-        </p:txBody>
-      </p:sp>
-      <p:sp>
-        <p:nvSpPr>
-          <p:cNvPr id="3" name="Rounded Rectangle 2"/>
-          <p:cNvSpPr/>
-          <p:nvPr/>
-        </p:nvSpPr>
-        <p:spPr>
-          <a:xfrm>
-            <a:off x="548640" y="1234440"/>
-            <a:ext cx="2560320" cy="347472"/>
+              <a:t>阶段一：智能数据采集</a:t>
+            </a:r>
+          </a:p>
+        </p:txBody>
+      </p:sp>
+      <p:sp>
+        <p:nvSpPr>
+          <p:cNvPr id="3" name="Rectangle 2"/>
+          <p:cNvSpPr/>
+          <p:nvPr/>
+        </p:nvSpPr>
+        <p:spPr>
+          <a:xfrm>
+            <a:off x="1824228" y="987552"/>
+            <a:ext cx="9144" cy="3218688"/>
+          </a:xfrm>
+          <a:prstGeom prst="rect">
+            <a:avLst/>
+          </a:prstGeom>
+          <a:solidFill>
+            <a:srgbClr val="323232"/>
+          </a:solidFill>
+          <a:ln>
+            <a:noFill/>
+          </a:ln>
+        </p:spPr>
+        <p:style>
+          <a:lnRef idx="1">
+            <a:schemeClr val="accent1"/>
+          </a:lnRef>
+          <a:fillRef idx="3">
+            <a:schemeClr val="accent1"/>
+          </a:fillRef>
+          <a:effectRef idx="2">
+            <a:schemeClr val="accent1"/>
+          </a:effectRef>
+          <a:fontRef idx="minor">
+            <a:schemeClr val="lt1"/>
+          </a:fontRef>
+        </p:style>
+        <p:txBody>
+          <a:bodyPr rtlCol="0" anchor="ctr"/>
+          <a:lstStyle/>
+          <a:p>
+            <a:pPr algn="ctr"/>
+          </a:p>
+        </p:txBody>
+      </p:sp>
+      <p:sp>
+        <p:nvSpPr>
+          <p:cNvPr id="4" name="Rounded Rectangle 3"/>
+          <p:cNvSpPr/>
+          <p:nvPr/>
+        </p:nvSpPr>
+        <p:spPr>
+          <a:xfrm>
+            <a:off x="640080" y="1371600"/>
+            <a:ext cx="2377440" cy="384048"/>
           </a:xfrm>
           <a:prstGeom prst="roundRect">
             <a:avLst/>
@@ -3155,7 +3204,7 @@
           <a:solidFill>
             <a:srgbClr val="FFFFFF"/>
           </a:solidFill>
-          <a:ln w="15875">
+          <a:ln w="15240">
             <a:solidFill>
               <a:srgbClr val="000000"/>
             </a:solidFill>
@@ -3176,11 +3225,11 @@
           </a:fontRef>
         </p:style>
         <p:txBody>
-          <a:bodyPr rtlCol="0" anchor="ctr" lIns="45720" rIns="45720"/>
+          <a:bodyPr rtlCol="0" anchor="ctr" lIns="73152" rIns="73152"/>
           <a:lstStyle/>
           <a:p>
             <a:pPr algn="ctr">
-              <a:defRPr sz="1000" b="1">
+              <a:defRPr sz="1150" b="1">
                 <a:solidFill>
                   <a:srgbClr val="000000"/>
                 </a:solidFill>
@@ -3188,27 +3237,27 @@
               </a:defRPr>
             </a:pPr>
             <a:r>
-              <a:t>阶段一：智能数据采集</a:t>
-            </a:r>
-          </a:p>
-        </p:txBody>
-      </p:sp>
-      <p:sp>
-        <p:nvSpPr>
-          <p:cNvPr id="4" name="Rectangle 3"/>
-          <p:cNvSpPr/>
-          <p:nvPr/>
-        </p:nvSpPr>
-        <p:spPr>
-          <a:xfrm>
-            <a:off x="1824228" y="1581912"/>
-            <a:ext cx="9144" cy="2852928"/>
+              <a:t>第 2 章：任务规划</a:t>
+            </a:r>
+          </a:p>
+        </p:txBody>
+      </p:sp>
+      <p:sp>
+        <p:nvSpPr>
+          <p:cNvPr id="5" name="Rectangle 4"/>
+          <p:cNvSpPr/>
+          <p:nvPr/>
+        </p:nvSpPr>
+        <p:spPr>
+          <a:xfrm>
+            <a:off x="731520" y="1773936"/>
+            <a:ext cx="7315" cy="749808"/>
           </a:xfrm>
           <a:prstGeom prst="rect">
             <a:avLst/>
           </a:prstGeom>
           <a:solidFill>
-            <a:srgbClr val="282828"/>
+            <a:srgbClr val="323232"/>
           </a:solidFill>
           <a:ln>
             <a:noFill/>
@@ -3238,14 +3287,57 @@
       </p:sp>
       <p:sp>
         <p:nvSpPr>
-          <p:cNvPr id="5" name="Rounded Rectangle 4"/>
-          <p:cNvSpPr/>
-          <p:nvPr/>
-        </p:nvSpPr>
-        <p:spPr>
-          <a:xfrm>
-            <a:off x="662940" y="1920240"/>
-            <a:ext cx="2331720" cy="329184"/>
+          <p:cNvPr id="6" name="Rectangle 5"/>
+          <p:cNvSpPr/>
+          <p:nvPr/>
+        </p:nvSpPr>
+        <p:spPr>
+          <a:xfrm>
+            <a:off x="731520" y="1938528"/>
+            <a:ext cx="82296" cy="7315"/>
+          </a:xfrm>
+          <a:prstGeom prst="rect">
+            <a:avLst/>
+          </a:prstGeom>
+          <a:solidFill>
+            <a:srgbClr val="323232"/>
+          </a:solidFill>
+          <a:ln>
+            <a:noFill/>
+          </a:ln>
+        </p:spPr>
+        <p:style>
+          <a:lnRef idx="1">
+            <a:schemeClr val="accent1"/>
+          </a:lnRef>
+          <a:fillRef idx="3">
+            <a:schemeClr val="accent1"/>
+          </a:fillRef>
+          <a:effectRef idx="2">
+            <a:schemeClr val="accent1"/>
+          </a:effectRef>
+          <a:fontRef idx="minor">
+            <a:schemeClr val="lt1"/>
+          </a:fontRef>
+        </p:style>
+        <p:txBody>
+          <a:bodyPr rtlCol="0" anchor="ctr"/>
+          <a:lstStyle/>
+          <a:p>
+            <a:pPr algn="ctr"/>
+          </a:p>
+        </p:txBody>
+      </p:sp>
+      <p:sp>
+        <p:nvSpPr>
+          <p:cNvPr id="7" name="Rounded Rectangle 6"/>
+          <p:cNvSpPr/>
+          <p:nvPr/>
+        </p:nvSpPr>
+        <p:spPr>
+          <a:xfrm>
+            <a:off x="822960" y="1828800"/>
+            <a:ext cx="2084831" cy="256032"/>
           </a:xfrm>
           <a:prstGeom prst="roundRect">
             <a:avLst/>
@@ -3253,9 +3345,9 @@
           <a:solidFill>
             <a:srgbClr val="FFFFFF"/>
           </a:solidFill>
-          <a:ln w="12700">
+          <a:ln w="9525">
             <a:solidFill>
-              <a:srgbClr val="000000"/>
+              <a:srgbClr val="323232"/>
             </a:solidFill>
           </a:ln>
         </p:spPr>
@@ -3278,7 +3370,7 @@
           <a:lstStyle/>
           <a:p>
             <a:pPr algn="ctr">
-              <a:defRPr sz="919" b="1">
+              <a:defRPr sz="1050">
                 <a:solidFill>
                   <a:srgbClr val="000000"/>
                 </a:solidFill>
@@ -3286,27 +3378,27 @@
               </a:defRPr>
             </a:pPr>
             <a:r>
-              <a:t>第 2 章：无人机任务规划 （Xinyi Wang）</a:t>
-            </a:r>
-          </a:p>
-        </p:txBody>
-      </p:sp>
-      <p:sp>
-        <p:nvSpPr>
-          <p:cNvPr id="6" name="Rectangle 5"/>
-          <p:cNvSpPr/>
-          <p:nvPr/>
-        </p:nvSpPr>
-        <p:spPr>
-          <a:xfrm>
-            <a:off x="736092" y="2249424"/>
-            <a:ext cx="7315" cy="621792"/>
+              <a:t>• 多机协同分配</a:t>
+            </a:r>
+          </a:p>
+        </p:txBody>
+      </p:sp>
+      <p:sp>
+        <p:nvSpPr>
+          <p:cNvPr id="8" name="Rectangle 7"/>
+          <p:cNvSpPr/>
+          <p:nvPr/>
+        </p:nvSpPr>
+        <p:spPr>
+          <a:xfrm>
+            <a:off x="731520" y="2249424"/>
+            <a:ext cx="82296" cy="7315"/>
           </a:xfrm>
           <a:prstGeom prst="rect">
             <a:avLst/>
           </a:prstGeom>
           <a:solidFill>
-            <a:srgbClr val="282828"/>
+            <a:srgbClr val="323232"/>
           </a:solidFill>
           <a:ln>
             <a:noFill/>
@@ -3336,57 +3428,14 @@
       </p:sp>
       <p:sp>
         <p:nvSpPr>
-          <p:cNvPr id="7" name="Rectangle 6"/>
-          <p:cNvSpPr/>
-          <p:nvPr/>
-        </p:nvSpPr>
-        <p:spPr>
-          <a:xfrm>
-            <a:off x="736092" y="2395728"/>
-            <a:ext cx="73152" cy="7315"/>
-          </a:xfrm>
-          <a:prstGeom prst="rect">
-            <a:avLst/>
-          </a:prstGeom>
-          <a:solidFill>
-            <a:srgbClr val="282828"/>
-          </a:solidFill>
-          <a:ln>
-            <a:noFill/>
-          </a:ln>
-        </p:spPr>
-        <p:style>
-          <a:lnRef idx="1">
-            <a:schemeClr val="accent1"/>
-          </a:lnRef>
-          <a:fillRef idx="3">
-            <a:schemeClr val="accent1"/>
-          </a:fillRef>
-          <a:effectRef idx="2">
-            <a:schemeClr val="accent1"/>
-          </a:effectRef>
-          <a:fontRef idx="minor">
-            <a:schemeClr val="lt1"/>
-          </a:fontRef>
-        </p:style>
-        <p:txBody>
-          <a:bodyPr rtlCol="0" anchor="ctr"/>
-          <a:lstStyle/>
-          <a:p>
-            <a:pPr algn="ctr"/>
-          </a:p>
-        </p:txBody>
-      </p:sp>
-      <p:sp>
-        <p:nvSpPr>
-          <p:cNvPr id="8" name="Rounded Rectangle 7"/>
-          <p:cNvSpPr/>
-          <p:nvPr/>
-        </p:nvSpPr>
-        <p:spPr>
-          <a:xfrm>
-            <a:off x="827532" y="2304288"/>
-            <a:ext cx="2084831" cy="219456"/>
+          <p:cNvPr id="9" name="Rounded Rectangle 8"/>
+          <p:cNvSpPr/>
+          <p:nvPr/>
+        </p:nvSpPr>
+        <p:spPr>
+          <a:xfrm>
+            <a:off x="822960" y="2139696"/>
+            <a:ext cx="2084831" cy="256032"/>
           </a:xfrm>
           <a:prstGeom prst="roundRect">
             <a:avLst/>
@@ -3394,9 +3443,9 @@
           <a:solidFill>
             <a:srgbClr val="FFFFFF"/>
           </a:solidFill>
-          <a:ln w="6350">
+          <a:ln w="9525">
             <a:solidFill>
-              <a:srgbClr val="282828"/>
+              <a:srgbClr val="323232"/>
             </a:solidFill>
           </a:ln>
         </p:spPr>
@@ -3415,11 +3464,11 @@
           </a:fontRef>
         </p:style>
         <p:txBody>
-          <a:bodyPr rtlCol="0" anchor="ctr" lIns="54864" rIns="54864"/>
+          <a:bodyPr rtlCol="0" anchor="ctr" lIns="73152" rIns="73152"/>
           <a:lstStyle/>
           <a:p>
             <a:pPr algn="ctr">
-              <a:defRPr sz="819">
+              <a:defRPr sz="1050">
                 <a:solidFill>
                   <a:srgbClr val="000000"/>
                 </a:solidFill>
@@ -3427,27 +3476,27 @@
               </a:defRPr>
             </a:pPr>
             <a:r>
-              <a:t>2.2 多机协同与任务分配</a:t>
-            </a:r>
-          </a:p>
-        </p:txBody>
-      </p:sp>
-      <p:sp>
-        <p:nvSpPr>
-          <p:cNvPr id="9" name="Rectangle 8"/>
-          <p:cNvSpPr/>
-          <p:nvPr/>
-        </p:nvSpPr>
-        <p:spPr>
-          <a:xfrm>
-            <a:off x="736092" y="2651760"/>
-            <a:ext cx="73152" cy="7315"/>
+              <a:t>• 覆盖路径规划</a:t>
+            </a:r>
+          </a:p>
+        </p:txBody>
+      </p:sp>
+      <p:sp>
+        <p:nvSpPr>
+          <p:cNvPr id="10" name="Rectangle 9"/>
+          <p:cNvSpPr/>
+          <p:nvPr/>
+        </p:nvSpPr>
+        <p:spPr>
+          <a:xfrm>
+            <a:off x="731520" y="2560320"/>
+            <a:ext cx="82296" cy="7315"/>
           </a:xfrm>
           <a:prstGeom prst="rect">
             <a:avLst/>
           </a:prstGeom>
           <a:solidFill>
-            <a:srgbClr val="282828"/>
+            <a:srgbClr val="323232"/>
           </a:solidFill>
           <a:ln>
             <a:noFill/>
@@ -3477,14 +3526,14 @@
       </p:sp>
       <p:sp>
         <p:nvSpPr>
-          <p:cNvPr id="10" name="Rounded Rectangle 9"/>
-          <p:cNvSpPr/>
-          <p:nvPr/>
-        </p:nvSpPr>
-        <p:spPr>
-          <a:xfrm>
-            <a:off x="827532" y="2560320"/>
-            <a:ext cx="2084831" cy="219456"/>
+          <p:cNvPr id="11" name="Rounded Rectangle 10"/>
+          <p:cNvSpPr/>
+          <p:nvPr/>
+        </p:nvSpPr>
+        <p:spPr>
+          <a:xfrm>
+            <a:off x="822960" y="2450592"/>
+            <a:ext cx="2084831" cy="256032"/>
           </a:xfrm>
           <a:prstGeom prst="roundRect">
             <a:avLst/>
@@ -3492,9 +3541,9 @@
           <a:solidFill>
             <a:srgbClr val="FFFFFF"/>
           </a:solidFill>
-          <a:ln w="6350">
+          <a:ln w="9525">
             <a:solidFill>
-              <a:srgbClr val="282828"/>
+              <a:srgbClr val="323232"/>
             </a:solidFill>
           </a:ln>
         </p:spPr>
@@ -3513,11 +3562,11 @@
           </a:fontRef>
         </p:style>
         <p:txBody>
-          <a:bodyPr rtlCol="0" anchor="ctr" lIns="54864" rIns="54864"/>
+          <a:bodyPr rtlCol="0" anchor="ctr" lIns="73152" rIns="73152"/>
           <a:lstStyle/>
           <a:p>
             <a:pPr algn="ctr">
-              <a:defRPr sz="819">
+              <a:defRPr sz="1050">
                 <a:solidFill>
                   <a:srgbClr val="000000"/>
                 </a:solidFill>
@@ -3525,51 +3574,8 @@
               </a:defRPr>
             </a:pPr>
             <a:r>
-              <a:t>2.4 立面巡检覆盖路径规划</a:t>
-            </a:r>
-          </a:p>
-        </p:txBody>
-      </p:sp>
-      <p:sp>
-        <p:nvSpPr>
-          <p:cNvPr id="11" name="Rectangle 10"/>
-          <p:cNvSpPr/>
-          <p:nvPr/>
-        </p:nvSpPr>
-        <p:spPr>
-          <a:xfrm>
-            <a:off x="736092" y="2907792"/>
-            <a:ext cx="73152" cy="7315"/>
-          </a:xfrm>
-          <a:prstGeom prst="rect">
-            <a:avLst/>
-          </a:prstGeom>
-          <a:solidFill>
-            <a:srgbClr val="282828"/>
-          </a:solidFill>
-          <a:ln>
-            <a:noFill/>
-          </a:ln>
-        </p:spPr>
-        <p:style>
-          <a:lnRef idx="1">
-            <a:schemeClr val="accent1"/>
-          </a:lnRef>
-          <a:fillRef idx="3">
-            <a:schemeClr val="accent1"/>
-          </a:fillRef>
-          <a:effectRef idx="2">
-            <a:schemeClr val="accent1"/>
-          </a:effectRef>
-          <a:fontRef idx="minor">
-            <a:schemeClr val="lt1"/>
-          </a:fontRef>
-        </p:style>
-        <p:txBody>
-          <a:bodyPr rtlCol="0" anchor="ctr"/>
-          <a:lstStyle/>
-          <a:p>
-            <a:pPr algn="ctr"/>
+              <a:t>• 能耗感知优化</a:t>
+            </a:r>
           </a:p>
         </p:txBody>
       </p:sp>
@@ -3581,8 +3587,8 @@
         </p:nvSpPr>
         <p:spPr>
           <a:xfrm>
-            <a:off x="827532" y="2816352"/>
-            <a:ext cx="2084831" cy="219456"/>
+            <a:off x="640080" y="4206240"/>
+            <a:ext cx="2377440" cy="384048"/>
           </a:xfrm>
           <a:prstGeom prst="roundRect">
             <a:avLst/>
@@ -3590,9 +3596,9 @@
           <a:solidFill>
             <a:srgbClr val="FFFFFF"/>
           </a:solidFill>
-          <a:ln w="6350">
+          <a:ln w="15240">
             <a:solidFill>
-              <a:srgbClr val="282828"/>
+              <a:srgbClr val="000000"/>
             </a:solidFill>
           </a:ln>
         </p:spPr>
@@ -3611,11 +3617,11 @@
           </a:fontRef>
         </p:style>
         <p:txBody>
-          <a:bodyPr rtlCol="0" anchor="ctr" lIns="54864" rIns="54864"/>
+          <a:bodyPr rtlCol="0" anchor="ctr" lIns="73152" rIns="73152"/>
           <a:lstStyle/>
           <a:p>
             <a:pPr algn="ctr">
-              <a:defRPr sz="819">
+              <a:defRPr sz="1150" b="1">
                 <a:solidFill>
                   <a:srgbClr val="000000"/>
                 </a:solidFill>
@@ -3623,21 +3629,107 @@
               </a:defRPr>
             </a:pPr>
             <a:r>
-              <a:t>2.5 能耗感知优化控制</a:t>
-            </a:r>
-          </a:p>
-        </p:txBody>
-      </p:sp>
-      <p:sp>
-        <p:nvSpPr>
-          <p:cNvPr id="13" name="Rounded Rectangle 12"/>
-          <p:cNvSpPr/>
-          <p:nvPr/>
-        </p:nvSpPr>
-        <p:spPr>
-          <a:xfrm>
-            <a:off x="662940" y="4434840"/>
-            <a:ext cx="2331720" cy="329184"/>
+              <a:t>第 3 章：运动规划</a:t>
+            </a:r>
+          </a:p>
+        </p:txBody>
+      </p:sp>
+      <p:sp>
+        <p:nvSpPr>
+          <p:cNvPr id="13" name="Rectangle 12"/>
+          <p:cNvSpPr/>
+          <p:nvPr/>
+        </p:nvSpPr>
+        <p:spPr>
+          <a:xfrm>
+            <a:off x="731520" y="4608576"/>
+            <a:ext cx="7315" cy="749808"/>
+          </a:xfrm>
+          <a:prstGeom prst="rect">
+            <a:avLst/>
+          </a:prstGeom>
+          <a:solidFill>
+            <a:srgbClr val="323232"/>
+          </a:solidFill>
+          <a:ln>
+            <a:noFill/>
+          </a:ln>
+        </p:spPr>
+        <p:style>
+          <a:lnRef idx="1">
+            <a:schemeClr val="accent1"/>
+          </a:lnRef>
+          <a:fillRef idx="3">
+            <a:schemeClr val="accent1"/>
+          </a:fillRef>
+          <a:effectRef idx="2">
+            <a:schemeClr val="accent1"/>
+          </a:effectRef>
+          <a:fontRef idx="minor">
+            <a:schemeClr val="lt1"/>
+          </a:fontRef>
+        </p:style>
+        <p:txBody>
+          <a:bodyPr rtlCol="0" anchor="ctr"/>
+          <a:lstStyle/>
+          <a:p>
+            <a:pPr algn="ctr"/>
+          </a:p>
+        </p:txBody>
+      </p:sp>
+      <p:sp>
+        <p:nvSpPr>
+          <p:cNvPr id="14" name="Rectangle 13"/>
+          <p:cNvSpPr/>
+          <p:nvPr/>
+        </p:nvSpPr>
+        <p:spPr>
+          <a:xfrm>
+            <a:off x="731520" y="4773168"/>
+            <a:ext cx="82296" cy="7315"/>
+          </a:xfrm>
+          <a:prstGeom prst="rect">
+            <a:avLst/>
+          </a:prstGeom>
+          <a:solidFill>
+            <a:srgbClr val="323232"/>
+          </a:solidFill>
+          <a:ln>
+            <a:noFill/>
+          </a:ln>
+        </p:spPr>
+        <p:style>
+          <a:lnRef idx="1">
+            <a:schemeClr val="accent1"/>
+          </a:lnRef>
+          <a:fillRef idx="3">
+            <a:schemeClr val="accent1"/>
+          </a:fillRef>
+          <a:effectRef idx="2">
+            <a:schemeClr val="accent1"/>
+          </a:effectRef>
+          <a:fontRef idx="minor">
+            <a:schemeClr val="lt1"/>
+          </a:fontRef>
+        </p:style>
+        <p:txBody>
+          <a:bodyPr rtlCol="0" anchor="ctr"/>
+          <a:lstStyle/>
+          <a:p>
+            <a:pPr algn="ctr"/>
+          </a:p>
+        </p:txBody>
+      </p:sp>
+      <p:sp>
+        <p:nvSpPr>
+          <p:cNvPr id="15" name="Rounded Rectangle 14"/>
+          <p:cNvSpPr/>
+          <p:nvPr/>
+        </p:nvSpPr>
+        <p:spPr>
+          <a:xfrm>
+            <a:off x="822960" y="4663440"/>
+            <a:ext cx="2084831" cy="256032"/>
           </a:xfrm>
           <a:prstGeom prst="roundRect">
             <a:avLst/>
@@ -3645,9 +3737,9 @@
           <a:solidFill>
             <a:srgbClr val="FFFFFF"/>
           </a:solidFill>
-          <a:ln w="12700">
+          <a:ln w="9525">
             <a:solidFill>
-              <a:srgbClr val="000000"/>
+              <a:srgbClr val="323232"/>
             </a:solidFill>
           </a:ln>
         </p:spPr>
@@ -3670,7 +3762,7 @@
           <a:lstStyle/>
           <a:p>
             <a:pPr algn="ctr">
-              <a:defRPr sz="919" b="1">
+              <a:defRPr sz="1050">
                 <a:solidFill>
                   <a:srgbClr val="000000"/>
                 </a:solidFill>
@@ -3678,27 +3770,27 @@
               </a:defRPr>
             </a:pPr>
             <a:r>
-              <a:t>第 3 章：环境运动规划 （Chuanxiang Gao）</a:t>
-            </a:r>
-          </a:p>
-        </p:txBody>
-      </p:sp>
-      <p:sp>
-        <p:nvSpPr>
-          <p:cNvPr id="14" name="Rectangle 13"/>
-          <p:cNvSpPr/>
-          <p:nvPr/>
-        </p:nvSpPr>
-        <p:spPr>
-          <a:xfrm>
-            <a:off x="736092" y="4764024"/>
-            <a:ext cx="7315" cy="621792"/>
+              <a:t>• 实时建图定位</a:t>
+            </a:r>
+          </a:p>
+        </p:txBody>
+      </p:sp>
+      <p:sp>
+        <p:nvSpPr>
+          <p:cNvPr id="16" name="Rectangle 15"/>
+          <p:cNvSpPr/>
+          <p:nvPr/>
+        </p:nvSpPr>
+        <p:spPr>
+          <a:xfrm>
+            <a:off x="731520" y="5084064"/>
+            <a:ext cx="82296" cy="7315"/>
           </a:xfrm>
           <a:prstGeom prst="rect">
             <a:avLst/>
           </a:prstGeom>
           <a:solidFill>
-            <a:srgbClr val="282828"/>
+            <a:srgbClr val="323232"/>
           </a:solidFill>
           <a:ln>
             <a:noFill/>
@@ -3728,57 +3820,14 @@
       </p:sp>
       <p:sp>
         <p:nvSpPr>
-          <p:cNvPr id="15" name="Rectangle 14"/>
-          <p:cNvSpPr/>
-          <p:nvPr/>
-        </p:nvSpPr>
-        <p:spPr>
-          <a:xfrm>
-            <a:off x="736092" y="4910328"/>
-            <a:ext cx="73152" cy="7315"/>
-          </a:xfrm>
-          <a:prstGeom prst="rect">
-            <a:avLst/>
-          </a:prstGeom>
-          <a:solidFill>
-            <a:srgbClr val="282828"/>
-          </a:solidFill>
-          <a:ln>
-            <a:noFill/>
-          </a:ln>
-        </p:spPr>
-        <p:style>
-          <a:lnRef idx="1">
-            <a:schemeClr val="accent1"/>
-          </a:lnRef>
-          <a:fillRef idx="3">
-            <a:schemeClr val="accent1"/>
-          </a:fillRef>
-          <a:effectRef idx="2">
-            <a:schemeClr val="accent1"/>
-          </a:effectRef>
-          <a:fontRef idx="minor">
-            <a:schemeClr val="lt1"/>
-          </a:fontRef>
-        </p:style>
-        <p:txBody>
-          <a:bodyPr rtlCol="0" anchor="ctr"/>
-          <a:lstStyle/>
-          <a:p>
-            <a:pPr algn="ctr"/>
-          </a:p>
-        </p:txBody>
-      </p:sp>
-      <p:sp>
-        <p:nvSpPr>
-          <p:cNvPr id="16" name="Rounded Rectangle 15"/>
-          <p:cNvSpPr/>
-          <p:nvPr/>
-        </p:nvSpPr>
-        <p:spPr>
-          <a:xfrm>
-            <a:off x="827532" y="4818888"/>
-            <a:ext cx="2084831" cy="219456"/>
+          <p:cNvPr id="17" name="Rounded Rectangle 16"/>
+          <p:cNvSpPr/>
+          <p:nvPr/>
+        </p:nvSpPr>
+        <p:spPr>
+          <a:xfrm>
+            <a:off x="822960" y="4974336"/>
+            <a:ext cx="2084831" cy="256032"/>
           </a:xfrm>
           <a:prstGeom prst="roundRect">
             <a:avLst/>
@@ -3786,9 +3835,9 @@
           <a:solidFill>
             <a:srgbClr val="FFFFFF"/>
           </a:solidFill>
-          <a:ln w="6350">
+          <a:ln w="9525">
             <a:solidFill>
-              <a:srgbClr val="282828"/>
+              <a:srgbClr val="323232"/>
             </a:solidFill>
           </a:ln>
         </p:spPr>
@@ -3807,11 +3856,11 @@
           </a:fontRef>
         </p:style>
         <p:txBody>
-          <a:bodyPr rtlCol="0" anchor="ctr" lIns="54864" rIns="54864"/>
+          <a:bodyPr rtlCol="0" anchor="ctr" lIns="73152" rIns="73152"/>
           <a:lstStyle/>
           <a:p>
             <a:pPr algn="ctr">
-              <a:defRPr sz="819">
+              <a:defRPr sz="1050">
                 <a:solidFill>
                   <a:srgbClr val="000000"/>
                 </a:solidFill>
@@ -3819,27 +3868,27 @@
               </a:defRPr>
             </a:pPr>
             <a:r>
-              <a:t>3.2 实时建图与定位</a:t>
-            </a:r>
-          </a:p>
-        </p:txBody>
-      </p:sp>
-      <p:sp>
-        <p:nvSpPr>
-          <p:cNvPr id="17" name="Rectangle 16"/>
-          <p:cNvSpPr/>
-          <p:nvPr/>
-        </p:nvSpPr>
-        <p:spPr>
-          <a:xfrm>
-            <a:off x="736092" y="5166360"/>
-            <a:ext cx="73152" cy="7315"/>
+              <a:t>• 避障轨迹生成</a:t>
+            </a:r>
+          </a:p>
+        </p:txBody>
+      </p:sp>
+      <p:sp>
+        <p:nvSpPr>
+          <p:cNvPr id="18" name="Rectangle 17"/>
+          <p:cNvSpPr/>
+          <p:nvPr/>
+        </p:nvSpPr>
+        <p:spPr>
+          <a:xfrm>
+            <a:off x="731520" y="5394960"/>
+            <a:ext cx="82296" cy="7315"/>
           </a:xfrm>
           <a:prstGeom prst="rect">
             <a:avLst/>
           </a:prstGeom>
           <a:solidFill>
-            <a:srgbClr val="282828"/>
+            <a:srgbClr val="323232"/>
           </a:solidFill>
           <a:ln>
             <a:noFill/>
@@ -3869,14 +3918,14 @@
       </p:sp>
       <p:sp>
         <p:nvSpPr>
-          <p:cNvPr id="18" name="Rounded Rectangle 17"/>
-          <p:cNvSpPr/>
-          <p:nvPr/>
-        </p:nvSpPr>
-        <p:spPr>
-          <a:xfrm>
-            <a:off x="827532" y="5074920"/>
-            <a:ext cx="2084831" cy="219456"/>
+          <p:cNvPr id="19" name="Rounded Rectangle 18"/>
+          <p:cNvSpPr/>
+          <p:nvPr/>
+        </p:nvSpPr>
+        <p:spPr>
+          <a:xfrm>
+            <a:off x="822960" y="5285232"/>
+            <a:ext cx="2084831" cy="256032"/>
           </a:xfrm>
           <a:prstGeom prst="roundRect">
             <a:avLst/>
@@ -3884,9 +3933,9 @@
           <a:solidFill>
             <a:srgbClr val="FFFFFF"/>
           </a:solidFill>
-          <a:ln w="6350">
+          <a:ln w="9525">
             <a:solidFill>
-              <a:srgbClr val="282828"/>
+              <a:srgbClr val="323232"/>
             </a:solidFill>
           </a:ln>
         </p:spPr>
@@ -3905,11 +3954,11 @@
           </a:fontRef>
         </p:style>
         <p:txBody>
-          <a:bodyPr rtlCol="0" anchor="ctr" lIns="54864" rIns="54864"/>
+          <a:bodyPr rtlCol="0" anchor="ctr" lIns="73152" rIns="73152"/>
           <a:lstStyle/>
           <a:p>
             <a:pPr algn="ctr">
-              <a:defRPr sz="819">
+              <a:defRPr sz="1050">
                 <a:solidFill>
                   <a:srgbClr val="000000"/>
                 </a:solidFill>
@@ -3917,27 +3966,27 @@
               </a:defRPr>
             </a:pPr>
             <a:r>
-              <a:t>3.3 复杂环境避障轨迹生成</a:t>
-            </a:r>
-          </a:p>
-        </p:txBody>
-      </p:sp>
-      <p:sp>
-        <p:nvSpPr>
-          <p:cNvPr id="19" name="Rectangle 18"/>
-          <p:cNvSpPr/>
-          <p:nvPr/>
-        </p:nvSpPr>
-        <p:spPr>
-          <a:xfrm>
-            <a:off x="736092" y="5422392"/>
-            <a:ext cx="73152" cy="7315"/>
-          </a:xfrm>
-          <a:prstGeom prst="rect">
-            <a:avLst/>
-          </a:prstGeom>
-          <a:solidFill>
-            <a:srgbClr val="282828"/>
+              <a:t>• 风场扰动控制</a:t>
+            </a:r>
+          </a:p>
+        </p:txBody>
+      </p:sp>
+      <p:sp>
+        <p:nvSpPr>
+          <p:cNvPr id="20" name="Right Arrow 19"/>
+          <p:cNvSpPr/>
+          <p:nvPr/>
+        </p:nvSpPr>
+        <p:spPr>
+          <a:xfrm>
+            <a:off x="3127248" y="658368"/>
+            <a:ext cx="182880" cy="219456"/>
+          </a:xfrm>
+          <a:prstGeom prst="rightArrow">
+            <a:avLst/>
+          </a:prstGeom>
+          <a:solidFill>
+            <a:srgbClr val="000000"/>
           </a:solidFill>
           <a:ln>
             <a:noFill/>
@@ -3967,14 +4016,14 @@
       </p:sp>
       <p:sp>
         <p:nvSpPr>
-          <p:cNvPr id="20" name="Rounded Rectangle 19"/>
-          <p:cNvSpPr/>
-          <p:nvPr/>
-        </p:nvSpPr>
-        <p:spPr>
-          <a:xfrm>
-            <a:off x="827532" y="5330952"/>
-            <a:ext cx="2084831" cy="219456"/>
+          <p:cNvPr id="21" name="Rounded Rectangle 20"/>
+          <p:cNvSpPr/>
+          <p:nvPr/>
+        </p:nvSpPr>
+        <p:spPr>
+          <a:xfrm>
+            <a:off x="3328416" y="548640"/>
+            <a:ext cx="2560320" cy="438912"/>
           </a:xfrm>
           <a:prstGeom prst="roundRect">
             <a:avLst/>
@@ -3982,9 +4031,9 @@
           <a:solidFill>
             <a:srgbClr val="FFFFFF"/>
           </a:solidFill>
-          <a:ln w="6350">
+          <a:ln w="19050">
             <a:solidFill>
-              <a:srgbClr val="282828"/>
+              <a:srgbClr val="000000"/>
             </a:solidFill>
           </a:ln>
         </p:spPr>
@@ -4003,11 +4052,11 @@
           </a:fontRef>
         </p:style>
         <p:txBody>
-          <a:bodyPr rtlCol="0" anchor="ctr" lIns="54864" rIns="54864"/>
+          <a:bodyPr rtlCol="0" anchor="ctr" lIns="45720" rIns="45720"/>
           <a:lstStyle/>
           <a:p>
             <a:pPr algn="ctr">
-              <a:defRPr sz="819">
+              <a:defRPr sz="1300" b="1">
                 <a:solidFill>
                   <a:srgbClr val="000000"/>
                 </a:solidFill>
@@ -4015,27 +4064,27 @@
               </a:defRPr>
             </a:pPr>
             <a:r>
-              <a:t>3.4 风场扰动下自主控制</a:t>
-            </a:r>
-          </a:p>
-        </p:txBody>
-      </p:sp>
-      <p:sp>
-        <p:nvSpPr>
-          <p:cNvPr id="21" name="Right Arrow 20"/>
-          <p:cNvSpPr/>
-          <p:nvPr/>
-        </p:nvSpPr>
-        <p:spPr>
-          <a:xfrm>
-            <a:off x="3127248" y="1307592"/>
-            <a:ext cx="182880" cy="201168"/>
-          </a:xfrm>
-          <a:prstGeom prst="rightArrow">
-            <a:avLst/>
-          </a:prstGeom>
-          <a:solidFill>
-            <a:srgbClr val="000000"/>
+              <a:t>阶段二：三维表达与数据基准</a:t>
+            </a:r>
+          </a:p>
+        </p:txBody>
+      </p:sp>
+      <p:sp>
+        <p:nvSpPr>
+          <p:cNvPr id="22" name="Rectangle 21"/>
+          <p:cNvSpPr/>
+          <p:nvPr/>
+        </p:nvSpPr>
+        <p:spPr>
+          <a:xfrm>
+            <a:off x="4604004" y="987552"/>
+            <a:ext cx="9144" cy="3218688"/>
+          </a:xfrm>
+          <a:prstGeom prst="rect">
+            <a:avLst/>
+          </a:prstGeom>
+          <a:solidFill>
+            <a:srgbClr val="323232"/>
           </a:solidFill>
           <a:ln>
             <a:noFill/>
@@ -4065,14 +4114,14 @@
       </p:sp>
       <p:sp>
         <p:nvSpPr>
-          <p:cNvPr id="22" name="Rounded Rectangle 21"/>
-          <p:cNvSpPr/>
-          <p:nvPr/>
-        </p:nvSpPr>
-        <p:spPr>
-          <a:xfrm>
-            <a:off x="3328416" y="1234440"/>
-            <a:ext cx="2560320" cy="347472"/>
+          <p:cNvPr id="23" name="Rounded Rectangle 22"/>
+          <p:cNvSpPr/>
+          <p:nvPr/>
+        </p:nvSpPr>
+        <p:spPr>
+          <a:xfrm>
+            <a:off x="3419856" y="1371600"/>
+            <a:ext cx="2377440" cy="384048"/>
           </a:xfrm>
           <a:prstGeom prst="roundRect">
             <a:avLst/>
@@ -4080,7 +4129,7 @@
           <a:solidFill>
             <a:srgbClr val="FFFFFF"/>
           </a:solidFill>
-          <a:ln w="15875">
+          <a:ln w="15240">
             <a:solidFill>
               <a:srgbClr val="000000"/>
             </a:solidFill>
@@ -4101,11 +4150,11 @@
           </a:fontRef>
         </p:style>
         <p:txBody>
-          <a:bodyPr rtlCol="0" anchor="ctr" lIns="45720" rIns="45720"/>
+          <a:bodyPr rtlCol="0" anchor="ctr" lIns="73152" rIns="73152"/>
           <a:lstStyle/>
           <a:p>
             <a:pPr algn="ctr">
-              <a:defRPr sz="1000" b="1">
+              <a:defRPr sz="1150" b="1">
                 <a:solidFill>
                   <a:srgbClr val="000000"/>
                 </a:solidFill>
@@ -4113,27 +4162,27 @@
               </a:defRPr>
             </a:pPr>
             <a:r>
-              <a:t>阶段二：三维表达与数据基准</a:t>
-            </a:r>
-          </a:p>
-        </p:txBody>
-      </p:sp>
-      <p:sp>
-        <p:nvSpPr>
-          <p:cNvPr id="23" name="Rectangle 22"/>
-          <p:cNvSpPr/>
-          <p:nvPr/>
-        </p:nvSpPr>
-        <p:spPr>
-          <a:xfrm>
-            <a:off x="4604004" y="1581912"/>
-            <a:ext cx="9144" cy="2852928"/>
+              <a:t>第 4 章：三维重建</a:t>
+            </a:r>
+          </a:p>
+        </p:txBody>
+      </p:sp>
+      <p:sp>
+        <p:nvSpPr>
+          <p:cNvPr id="24" name="Rectangle 23"/>
+          <p:cNvSpPr/>
+          <p:nvPr/>
+        </p:nvSpPr>
+        <p:spPr>
+          <a:xfrm>
+            <a:off x="3511296" y="1773936"/>
+            <a:ext cx="7315" cy="749808"/>
           </a:xfrm>
           <a:prstGeom prst="rect">
             <a:avLst/>
           </a:prstGeom>
           <a:solidFill>
-            <a:srgbClr val="282828"/>
+            <a:srgbClr val="323232"/>
           </a:solidFill>
           <a:ln>
             <a:noFill/>
@@ -4163,14 +4212,57 @@
       </p:sp>
       <p:sp>
         <p:nvSpPr>
-          <p:cNvPr id="24" name="Rounded Rectangle 23"/>
-          <p:cNvSpPr/>
-          <p:nvPr/>
-        </p:nvSpPr>
-        <p:spPr>
-          <a:xfrm>
-            <a:off x="3442716" y="1920240"/>
-            <a:ext cx="2331720" cy="329184"/>
+          <p:cNvPr id="25" name="Rectangle 24"/>
+          <p:cNvSpPr/>
+          <p:nvPr/>
+        </p:nvSpPr>
+        <p:spPr>
+          <a:xfrm>
+            <a:off x="3511296" y="1938528"/>
+            <a:ext cx="82296" cy="7315"/>
+          </a:xfrm>
+          <a:prstGeom prst="rect">
+            <a:avLst/>
+          </a:prstGeom>
+          <a:solidFill>
+            <a:srgbClr val="323232"/>
+          </a:solidFill>
+          <a:ln>
+            <a:noFill/>
+          </a:ln>
+        </p:spPr>
+        <p:style>
+          <a:lnRef idx="1">
+            <a:schemeClr val="accent1"/>
+          </a:lnRef>
+          <a:fillRef idx="3">
+            <a:schemeClr val="accent1"/>
+          </a:fillRef>
+          <a:effectRef idx="2">
+            <a:schemeClr val="accent1"/>
+          </a:effectRef>
+          <a:fontRef idx="minor">
+            <a:schemeClr val="lt1"/>
+          </a:fontRef>
+        </p:style>
+        <p:txBody>
+          <a:bodyPr rtlCol="0" anchor="ctr"/>
+          <a:lstStyle/>
+          <a:p>
+            <a:pPr algn="ctr"/>
+          </a:p>
+        </p:txBody>
+      </p:sp>
+      <p:sp>
+        <p:nvSpPr>
+          <p:cNvPr id="26" name="Rounded Rectangle 25"/>
+          <p:cNvSpPr/>
+          <p:nvPr/>
+        </p:nvSpPr>
+        <p:spPr>
+          <a:xfrm>
+            <a:off x="3602736" y="1828800"/>
+            <a:ext cx="2084831" cy="256032"/>
           </a:xfrm>
           <a:prstGeom prst="roundRect">
             <a:avLst/>
@@ -4178,9 +4270,9 @@
           <a:solidFill>
             <a:srgbClr val="FFFFFF"/>
           </a:solidFill>
-          <a:ln w="12700">
+          <a:ln w="9525">
             <a:solidFill>
-              <a:srgbClr val="000000"/>
+              <a:srgbClr val="323232"/>
             </a:solidFill>
           </a:ln>
         </p:spPr>
@@ -4203,7 +4295,7 @@
           <a:lstStyle/>
           <a:p>
             <a:pPr algn="ctr">
-              <a:defRPr sz="919" b="1">
+              <a:defRPr sz="1050">
                 <a:solidFill>
                   <a:srgbClr val="000000"/>
                 </a:solidFill>
@@ -4211,27 +4303,27 @@
               </a:defRPr>
             </a:pPr>
             <a:r>
-              <a:t>第 4 章：三维重建与映射 （Guidong Yang）</a:t>
-            </a:r>
-          </a:p>
-        </p:txBody>
-      </p:sp>
-      <p:sp>
-        <p:nvSpPr>
-          <p:cNvPr id="25" name="Rectangle 24"/>
-          <p:cNvSpPr/>
-          <p:nvPr/>
-        </p:nvSpPr>
-        <p:spPr>
-          <a:xfrm>
-            <a:off x="3515868" y="2249424"/>
-            <a:ext cx="7315" cy="621792"/>
+              <a:t>• SfM 密集重建</a:t>
+            </a:r>
+          </a:p>
+        </p:txBody>
+      </p:sp>
+      <p:sp>
+        <p:nvSpPr>
+          <p:cNvPr id="27" name="Rectangle 26"/>
+          <p:cNvSpPr/>
+          <p:nvPr/>
+        </p:nvSpPr>
+        <p:spPr>
+          <a:xfrm>
+            <a:off x="3511296" y="2249424"/>
+            <a:ext cx="82296" cy="7315"/>
           </a:xfrm>
           <a:prstGeom prst="rect">
             <a:avLst/>
           </a:prstGeom>
           <a:solidFill>
-            <a:srgbClr val="282828"/>
+            <a:srgbClr val="323232"/>
           </a:solidFill>
           <a:ln>
             <a:noFill/>
@@ -4261,57 +4353,14 @@
       </p:sp>
       <p:sp>
         <p:nvSpPr>
-          <p:cNvPr id="26" name="Rectangle 25"/>
-          <p:cNvSpPr/>
-          <p:nvPr/>
-        </p:nvSpPr>
-        <p:spPr>
-          <a:xfrm>
-            <a:off x="3515868" y="2395728"/>
-            <a:ext cx="73152" cy="7315"/>
-          </a:xfrm>
-          <a:prstGeom prst="rect">
-            <a:avLst/>
-          </a:prstGeom>
-          <a:solidFill>
-            <a:srgbClr val="282828"/>
-          </a:solidFill>
-          <a:ln>
-            <a:noFill/>
-          </a:ln>
-        </p:spPr>
-        <p:style>
-          <a:lnRef idx="1">
-            <a:schemeClr val="accent1"/>
-          </a:lnRef>
-          <a:fillRef idx="3">
-            <a:schemeClr val="accent1"/>
-          </a:fillRef>
-          <a:effectRef idx="2">
-            <a:schemeClr val="accent1"/>
-          </a:effectRef>
-          <a:fontRef idx="minor">
-            <a:schemeClr val="lt1"/>
-          </a:fontRef>
-        </p:style>
-        <p:txBody>
-          <a:bodyPr rtlCol="0" anchor="ctr"/>
-          <a:lstStyle/>
-          <a:p>
-            <a:pPr algn="ctr"/>
-          </a:p>
-        </p:txBody>
-      </p:sp>
-      <p:sp>
-        <p:nvSpPr>
-          <p:cNvPr id="27" name="Rounded Rectangle 26"/>
-          <p:cNvSpPr/>
-          <p:nvPr/>
-        </p:nvSpPr>
-        <p:spPr>
-          <a:xfrm>
-            <a:off x="3607308" y="2304288"/>
-            <a:ext cx="2084831" cy="219456"/>
+          <p:cNvPr id="28" name="Rounded Rectangle 27"/>
+          <p:cNvSpPr/>
+          <p:nvPr/>
+        </p:nvSpPr>
+        <p:spPr>
+          <a:xfrm>
+            <a:off x="3602736" y="2139696"/>
+            <a:ext cx="2084831" cy="256032"/>
           </a:xfrm>
           <a:prstGeom prst="roundRect">
             <a:avLst/>
@@ -4319,9 +4368,9 @@
           <a:solidFill>
             <a:srgbClr val="FFFFFF"/>
           </a:solidFill>
-          <a:ln w="6350">
+          <a:ln w="9525">
             <a:solidFill>
-              <a:srgbClr val="282828"/>
+              <a:srgbClr val="323232"/>
             </a:solidFill>
           </a:ln>
         </p:spPr>
@@ -4340,11 +4389,11 @@
           </a:fontRef>
         </p:style>
         <p:txBody>
-          <a:bodyPr rtlCol="0" anchor="ctr" lIns="54864" rIns="54864"/>
+          <a:bodyPr rtlCol="0" anchor="ctr" lIns="73152" rIns="73152"/>
           <a:lstStyle/>
           <a:p>
             <a:pPr algn="ctr">
-              <a:defRPr sz="819">
+              <a:defRPr sz="1050">
                 <a:solidFill>
                   <a:srgbClr val="000000"/>
                 </a:solidFill>
@@ -4352,27 +4401,27 @@
               </a:defRPr>
             </a:pPr>
             <a:r>
-              <a:t>4.2 SfM 稀疏与密集重建</a:t>
-            </a:r>
-          </a:p>
-        </p:txBody>
-      </p:sp>
-      <p:sp>
-        <p:nvSpPr>
-          <p:cNvPr id="28" name="Rectangle 27"/>
-          <p:cNvSpPr/>
-          <p:nvPr/>
-        </p:nvSpPr>
-        <p:spPr>
-          <a:xfrm>
-            <a:off x="3515868" y="2651760"/>
-            <a:ext cx="73152" cy="7315"/>
+              <a:t>• Mesh 神经渲染</a:t>
+            </a:r>
+          </a:p>
+        </p:txBody>
+      </p:sp>
+      <p:sp>
+        <p:nvSpPr>
+          <p:cNvPr id="29" name="Rectangle 28"/>
+          <p:cNvSpPr/>
+          <p:nvPr/>
+        </p:nvSpPr>
+        <p:spPr>
+          <a:xfrm>
+            <a:off x="3511296" y="2560320"/>
+            <a:ext cx="82296" cy="7315"/>
           </a:xfrm>
           <a:prstGeom prst="rect">
             <a:avLst/>
           </a:prstGeom>
           <a:solidFill>
-            <a:srgbClr val="282828"/>
+            <a:srgbClr val="323232"/>
           </a:solidFill>
           <a:ln>
             <a:noFill/>
@@ -4402,14 +4451,14 @@
       </p:sp>
       <p:sp>
         <p:nvSpPr>
-          <p:cNvPr id="29" name="Rounded Rectangle 28"/>
-          <p:cNvSpPr/>
-          <p:nvPr/>
-        </p:nvSpPr>
-        <p:spPr>
-          <a:xfrm>
-            <a:off x="3607308" y="2560320"/>
-            <a:ext cx="2084831" cy="219456"/>
+          <p:cNvPr id="30" name="Rounded Rectangle 29"/>
+          <p:cNvSpPr/>
+          <p:nvPr/>
+        </p:nvSpPr>
+        <p:spPr>
+          <a:xfrm>
+            <a:off x="3602736" y="2450592"/>
+            <a:ext cx="2084831" cy="256032"/>
           </a:xfrm>
           <a:prstGeom prst="roundRect">
             <a:avLst/>
@@ -4417,9 +4466,9 @@
           <a:solidFill>
             <a:srgbClr val="FFFFFF"/>
           </a:solidFill>
-          <a:ln w="6350">
+          <a:ln w="9525">
             <a:solidFill>
-              <a:srgbClr val="282828"/>
+              <a:srgbClr val="323232"/>
             </a:solidFill>
           </a:ln>
         </p:spPr>
@@ -4438,11 +4487,11 @@
           </a:fontRef>
         </p:style>
         <p:txBody>
-          <a:bodyPr rtlCol="0" anchor="ctr" lIns="54864" rIns="54864"/>
+          <a:bodyPr rtlCol="0" anchor="ctr" lIns="73152" rIns="73152"/>
           <a:lstStyle/>
           <a:p>
             <a:pPr algn="ctr">
-              <a:defRPr sz="819">
+              <a:defRPr sz="1050">
                 <a:solidFill>
                   <a:srgbClr val="000000"/>
                 </a:solidFill>
@@ -4450,51 +4499,8 @@
               </a:defRPr>
             </a:pPr>
             <a:r>
-              <a:t>4.4 神经渲染与 Mesh 构网</a:t>
-            </a:r>
-          </a:p>
-        </p:txBody>
-      </p:sp>
-      <p:sp>
-        <p:nvSpPr>
-          <p:cNvPr id="30" name="Rectangle 29"/>
-          <p:cNvSpPr/>
-          <p:nvPr/>
-        </p:nvSpPr>
-        <p:spPr>
-          <a:xfrm>
-            <a:off x="3515868" y="2907792"/>
-            <a:ext cx="73152" cy="7315"/>
-          </a:xfrm>
-          <a:prstGeom prst="rect">
-            <a:avLst/>
-          </a:prstGeom>
-          <a:solidFill>
-            <a:srgbClr val="282828"/>
-          </a:solidFill>
-          <a:ln>
-            <a:noFill/>
-          </a:ln>
-        </p:spPr>
-        <p:style>
-          <a:lnRef idx="1">
-            <a:schemeClr val="accent1"/>
-          </a:lnRef>
-          <a:fillRef idx="3">
-            <a:schemeClr val="accent1"/>
-          </a:fillRef>
-          <a:effectRef idx="2">
-            <a:schemeClr val="accent1"/>
-          </a:effectRef>
-          <a:fontRef idx="minor">
-            <a:schemeClr val="lt1"/>
-          </a:fontRef>
-        </p:style>
-        <p:txBody>
-          <a:bodyPr rtlCol="0" anchor="ctr"/>
-          <a:lstStyle/>
-          <a:p>
-            <a:pPr algn="ctr"/>
+              <a:t>• 点云 BIM 对齐</a:t>
+            </a:r>
           </a:p>
         </p:txBody>
       </p:sp>
@@ -4506,8 +4512,8 @@
         </p:nvSpPr>
         <p:spPr>
           <a:xfrm>
-            <a:off x="3607308" y="2816352"/>
-            <a:ext cx="2084831" cy="219456"/>
+            <a:off x="3419856" y="4206240"/>
+            <a:ext cx="2377440" cy="384048"/>
           </a:xfrm>
           <a:prstGeom prst="roundRect">
             <a:avLst/>
@@ -4515,9 +4521,9 @@
           <a:solidFill>
             <a:srgbClr val="FFFFFF"/>
           </a:solidFill>
-          <a:ln w="6350">
+          <a:ln w="15240">
             <a:solidFill>
-              <a:srgbClr val="282828"/>
+              <a:srgbClr val="000000"/>
             </a:solidFill>
           </a:ln>
         </p:spPr>
@@ -4536,11 +4542,11 @@
           </a:fontRef>
         </p:style>
         <p:txBody>
-          <a:bodyPr rtlCol="0" anchor="ctr" lIns="54864" rIns="54864"/>
+          <a:bodyPr rtlCol="0" anchor="ctr" lIns="73152" rIns="73152"/>
           <a:lstStyle/>
           <a:p>
             <a:pPr algn="ctr">
-              <a:defRPr sz="819">
+              <a:defRPr sz="1150" b="1">
                 <a:solidFill>
                   <a:srgbClr val="000000"/>
                 </a:solidFill>
@@ -4548,21 +4554,107 @@
               </a:defRPr>
             </a:pPr>
             <a:r>
-              <a:t>4.5 点云配准与 BIM 对齐</a:t>
-            </a:r>
-          </a:p>
-        </p:txBody>
-      </p:sp>
-      <p:sp>
-        <p:nvSpPr>
-          <p:cNvPr id="32" name="Rounded Rectangle 31"/>
-          <p:cNvSpPr/>
-          <p:nvPr/>
-        </p:nvSpPr>
-        <p:spPr>
-          <a:xfrm>
-            <a:off x="3442716" y="4434840"/>
-            <a:ext cx="2331720" cy="329184"/>
+              <a:t>第 5 章：巡检数据集</a:t>
+            </a:r>
+          </a:p>
+        </p:txBody>
+      </p:sp>
+      <p:sp>
+        <p:nvSpPr>
+          <p:cNvPr id="32" name="Rectangle 31"/>
+          <p:cNvSpPr/>
+          <p:nvPr/>
+        </p:nvSpPr>
+        <p:spPr>
+          <a:xfrm>
+            <a:off x="3511296" y="4608576"/>
+            <a:ext cx="7315" cy="749808"/>
+          </a:xfrm>
+          <a:prstGeom prst="rect">
+            <a:avLst/>
+          </a:prstGeom>
+          <a:solidFill>
+            <a:srgbClr val="323232"/>
+          </a:solidFill>
+          <a:ln>
+            <a:noFill/>
+          </a:ln>
+        </p:spPr>
+        <p:style>
+          <a:lnRef idx="1">
+            <a:schemeClr val="accent1"/>
+          </a:lnRef>
+          <a:fillRef idx="3">
+            <a:schemeClr val="accent1"/>
+          </a:fillRef>
+          <a:effectRef idx="2">
+            <a:schemeClr val="accent1"/>
+          </a:effectRef>
+          <a:fontRef idx="minor">
+            <a:schemeClr val="lt1"/>
+          </a:fontRef>
+        </p:style>
+        <p:txBody>
+          <a:bodyPr rtlCol="0" anchor="ctr"/>
+          <a:lstStyle/>
+          <a:p>
+            <a:pPr algn="ctr"/>
+          </a:p>
+        </p:txBody>
+      </p:sp>
+      <p:sp>
+        <p:nvSpPr>
+          <p:cNvPr id="33" name="Rectangle 32"/>
+          <p:cNvSpPr/>
+          <p:nvPr/>
+        </p:nvSpPr>
+        <p:spPr>
+          <a:xfrm>
+            <a:off x="3511296" y="4773168"/>
+            <a:ext cx="82296" cy="7315"/>
+          </a:xfrm>
+          <a:prstGeom prst="rect">
+            <a:avLst/>
+          </a:prstGeom>
+          <a:solidFill>
+            <a:srgbClr val="323232"/>
+          </a:solidFill>
+          <a:ln>
+            <a:noFill/>
+          </a:ln>
+        </p:spPr>
+        <p:style>
+          <a:lnRef idx="1">
+            <a:schemeClr val="accent1"/>
+          </a:lnRef>
+          <a:fillRef idx="3">
+            <a:schemeClr val="accent1"/>
+          </a:fillRef>
+          <a:effectRef idx="2">
+            <a:schemeClr val="accent1"/>
+          </a:effectRef>
+          <a:fontRef idx="minor">
+            <a:schemeClr val="lt1"/>
+          </a:fontRef>
+        </p:style>
+        <p:txBody>
+          <a:bodyPr rtlCol="0" anchor="ctr"/>
+          <a:lstStyle/>
+          <a:p>
+            <a:pPr algn="ctr"/>
+          </a:p>
+        </p:txBody>
+      </p:sp>
+      <p:sp>
+        <p:nvSpPr>
+          <p:cNvPr id="34" name="Rounded Rectangle 33"/>
+          <p:cNvSpPr/>
+          <p:nvPr/>
+        </p:nvSpPr>
+        <p:spPr>
+          <a:xfrm>
+            <a:off x="3602736" y="4663440"/>
+            <a:ext cx="2084831" cy="256032"/>
           </a:xfrm>
           <a:prstGeom prst="roundRect">
             <a:avLst/>
@@ -4570,9 +4662,9 @@
           <a:solidFill>
             <a:srgbClr val="FFFFFF"/>
           </a:solidFill>
-          <a:ln w="12700">
+          <a:ln w="9525">
             <a:solidFill>
-              <a:srgbClr val="000000"/>
+              <a:srgbClr val="323232"/>
             </a:solidFill>
           </a:ln>
         </p:spPr>
@@ -4595,7 +4687,7 @@
           <a:lstStyle/>
           <a:p>
             <a:pPr algn="ctr">
-              <a:defRPr sz="919" b="1">
+              <a:defRPr sz="1050">
                 <a:solidFill>
                   <a:srgbClr val="000000"/>
                 </a:solidFill>
@@ -4603,27 +4695,27 @@
               </a:defRPr>
             </a:pPr>
             <a:r>
-              <a:t>第 5 章：数据集与基准 （Benyun Zhao）</a:t>
-            </a:r>
-          </a:p>
-        </p:txBody>
-      </p:sp>
-      <p:sp>
-        <p:nvSpPr>
-          <p:cNvPr id="33" name="Rectangle 32"/>
-          <p:cNvSpPr/>
-          <p:nvPr/>
-        </p:nvSpPr>
-        <p:spPr>
-          <a:xfrm>
-            <a:off x="3515868" y="4764024"/>
-            <a:ext cx="7315" cy="621792"/>
+              <a:t>• 多模态采集 (RGB/红外)</a:t>
+            </a:r>
+          </a:p>
+        </p:txBody>
+      </p:sp>
+      <p:sp>
+        <p:nvSpPr>
+          <p:cNvPr id="35" name="Rectangle 34"/>
+          <p:cNvSpPr/>
+          <p:nvPr/>
+        </p:nvSpPr>
+        <p:spPr>
+          <a:xfrm>
+            <a:off x="3511296" y="5084064"/>
+            <a:ext cx="82296" cy="7315"/>
           </a:xfrm>
           <a:prstGeom prst="rect">
             <a:avLst/>
           </a:prstGeom>
           <a:solidFill>
-            <a:srgbClr val="282828"/>
+            <a:srgbClr val="323232"/>
           </a:solidFill>
           <a:ln>
             <a:noFill/>
@@ -4653,57 +4745,14 @@
       </p:sp>
       <p:sp>
         <p:nvSpPr>
-          <p:cNvPr id="34" name="Rectangle 33"/>
-          <p:cNvSpPr/>
-          <p:nvPr/>
-        </p:nvSpPr>
-        <p:spPr>
-          <a:xfrm>
-            <a:off x="3515868" y="4910328"/>
-            <a:ext cx="73152" cy="7315"/>
-          </a:xfrm>
-          <a:prstGeom prst="rect">
-            <a:avLst/>
-          </a:prstGeom>
-          <a:solidFill>
-            <a:srgbClr val="282828"/>
-          </a:solidFill>
-          <a:ln>
-            <a:noFill/>
-          </a:ln>
-        </p:spPr>
-        <p:style>
-          <a:lnRef idx="1">
-            <a:schemeClr val="accent1"/>
-          </a:lnRef>
-          <a:fillRef idx="3">
-            <a:schemeClr val="accent1"/>
-          </a:fillRef>
-          <a:effectRef idx="2">
-            <a:schemeClr val="accent1"/>
-          </a:effectRef>
-          <a:fontRef idx="minor">
-            <a:schemeClr val="lt1"/>
-          </a:fontRef>
-        </p:style>
-        <p:txBody>
-          <a:bodyPr rtlCol="0" anchor="ctr"/>
-          <a:lstStyle/>
-          <a:p>
-            <a:pPr algn="ctr"/>
-          </a:p>
-        </p:txBody>
-      </p:sp>
-      <p:sp>
-        <p:nvSpPr>
-          <p:cNvPr id="35" name="Rounded Rectangle 34"/>
-          <p:cNvSpPr/>
-          <p:nvPr/>
-        </p:nvSpPr>
-        <p:spPr>
-          <a:xfrm>
-            <a:off x="3607308" y="4818888"/>
-            <a:ext cx="2084831" cy="219456"/>
+          <p:cNvPr id="36" name="Rounded Rectangle 35"/>
+          <p:cNvSpPr/>
+          <p:nvPr/>
+        </p:nvSpPr>
+        <p:spPr>
+          <a:xfrm>
+            <a:off x="3602736" y="4974336"/>
+            <a:ext cx="2084831" cy="256032"/>
           </a:xfrm>
           <a:prstGeom prst="roundRect">
             <a:avLst/>
@@ -4711,9 +4760,9 @@
           <a:solidFill>
             <a:srgbClr val="FFFFFF"/>
           </a:solidFill>
-          <a:ln w="6350">
+          <a:ln w="9525">
             <a:solidFill>
-              <a:srgbClr val="282828"/>
+              <a:srgbClr val="323232"/>
             </a:solidFill>
           </a:ln>
         </p:spPr>
@@ -4732,11 +4781,11 @@
           </a:fontRef>
         </p:style>
         <p:txBody>
-          <a:bodyPr rtlCol="0" anchor="ctr" lIns="54864" rIns="54864"/>
+          <a:bodyPr rtlCol="0" anchor="ctr" lIns="73152" rIns="73152"/>
           <a:lstStyle/>
           <a:p>
             <a:pPr algn="ctr">
-              <a:defRPr sz="819">
+              <a:defRPr sz="1050">
                 <a:solidFill>
                   <a:srgbClr val="000000"/>
                 </a:solidFill>
@@ -4744,27 +4793,27 @@
               </a:defRPr>
             </a:pPr>
             <a:r>
-              <a:t>5.2 多模态图像预处理与标注</a:t>
-            </a:r>
-          </a:p>
-        </p:txBody>
-      </p:sp>
-      <p:sp>
-        <p:nvSpPr>
-          <p:cNvPr id="36" name="Rectangle 35"/>
-          <p:cNvSpPr/>
-          <p:nvPr/>
-        </p:nvSpPr>
-        <p:spPr>
-          <a:xfrm>
-            <a:off x="3515868" y="5166360"/>
-            <a:ext cx="73152" cy="7315"/>
+              <a:t>• 缺陷标注规范</a:t>
+            </a:r>
+          </a:p>
+        </p:txBody>
+      </p:sp>
+      <p:sp>
+        <p:nvSpPr>
+          <p:cNvPr id="37" name="Rectangle 36"/>
+          <p:cNvSpPr/>
+          <p:nvPr/>
+        </p:nvSpPr>
+        <p:spPr>
+          <a:xfrm>
+            <a:off x="3511296" y="5394960"/>
+            <a:ext cx="82296" cy="7315"/>
           </a:xfrm>
           <a:prstGeom prst="rect">
             <a:avLst/>
           </a:prstGeom>
           <a:solidFill>
-            <a:srgbClr val="282828"/>
+            <a:srgbClr val="323232"/>
           </a:solidFill>
           <a:ln>
             <a:noFill/>
@@ -4794,14 +4843,14 @@
       </p:sp>
       <p:sp>
         <p:nvSpPr>
-          <p:cNvPr id="37" name="Rounded Rectangle 36"/>
-          <p:cNvSpPr/>
-          <p:nvPr/>
-        </p:nvSpPr>
-        <p:spPr>
-          <a:xfrm>
-            <a:off x="3607308" y="5074920"/>
-            <a:ext cx="2084831" cy="219456"/>
+          <p:cNvPr id="38" name="Rounded Rectangle 37"/>
+          <p:cNvSpPr/>
+          <p:nvPr/>
+        </p:nvSpPr>
+        <p:spPr>
+          <a:xfrm>
+            <a:off x="3602736" y="5285232"/>
+            <a:ext cx="2084831" cy="256032"/>
           </a:xfrm>
           <a:prstGeom prst="roundRect">
             <a:avLst/>
@@ -4809,9 +4858,9 @@
           <a:solidFill>
             <a:srgbClr val="FFFFFF"/>
           </a:solidFill>
-          <a:ln w="6350">
+          <a:ln w="9525">
             <a:solidFill>
-              <a:srgbClr val="282828"/>
+              <a:srgbClr val="323232"/>
             </a:solidFill>
           </a:ln>
         </p:spPr>
@@ -4830,11 +4879,11 @@
           </a:fontRef>
         </p:style>
         <p:txBody>
-          <a:bodyPr rtlCol="0" anchor="ctr" lIns="54864" rIns="54864"/>
+          <a:bodyPr rtlCol="0" anchor="ctr" lIns="73152" rIns="73152"/>
           <a:lstStyle/>
           <a:p>
             <a:pPr algn="ctr">
-              <a:defRPr sz="819">
+              <a:defRPr sz="1050">
                 <a:solidFill>
                   <a:srgbClr val="000000"/>
                 </a:solidFill>
@@ -4842,27 +4891,27 @@
               </a:defRPr>
             </a:pPr>
             <a:r>
-              <a:t>5.3 建筑立面缺陷 Detection</a:t>
-            </a:r>
-          </a:p>
-        </p:txBody>
-      </p:sp>
-      <p:sp>
-        <p:nvSpPr>
-          <p:cNvPr id="38" name="Rectangle 37"/>
-          <p:cNvSpPr/>
-          <p:nvPr/>
-        </p:nvSpPr>
-        <p:spPr>
-          <a:xfrm>
-            <a:off x="3515868" y="5422392"/>
-            <a:ext cx="73152" cy="7315"/>
-          </a:xfrm>
-          <a:prstGeom prst="rect">
-            <a:avLst/>
-          </a:prstGeom>
-          <a:solidFill>
-            <a:srgbClr val="282828"/>
+              <a:t>• 语义分割基准</a:t>
+            </a:r>
+          </a:p>
+        </p:txBody>
+      </p:sp>
+      <p:sp>
+        <p:nvSpPr>
+          <p:cNvPr id="39" name="Right Arrow 38"/>
+          <p:cNvSpPr/>
+          <p:nvPr/>
+        </p:nvSpPr>
+        <p:spPr>
+          <a:xfrm>
+            <a:off x="5907024" y="658368"/>
+            <a:ext cx="182880" cy="219456"/>
+          </a:xfrm>
+          <a:prstGeom prst="rightArrow">
+            <a:avLst/>
+          </a:prstGeom>
+          <a:solidFill>
+            <a:srgbClr val="000000"/>
           </a:solidFill>
           <a:ln>
             <a:noFill/>
@@ -4892,14 +4941,14 @@
       </p:sp>
       <p:sp>
         <p:nvSpPr>
-          <p:cNvPr id="39" name="Rounded Rectangle 38"/>
-          <p:cNvSpPr/>
-          <p:nvPr/>
-        </p:nvSpPr>
-        <p:spPr>
-          <a:xfrm>
-            <a:off x="3607308" y="5330952"/>
-            <a:ext cx="2084831" cy="219456"/>
+          <p:cNvPr id="40" name="Rounded Rectangle 39"/>
+          <p:cNvSpPr/>
+          <p:nvPr/>
+        </p:nvSpPr>
+        <p:spPr>
+          <a:xfrm>
+            <a:off x="6108192" y="548640"/>
+            <a:ext cx="2560320" cy="438912"/>
           </a:xfrm>
           <a:prstGeom prst="roundRect">
             <a:avLst/>
@@ -4907,9 +4956,9 @@
           <a:solidFill>
             <a:srgbClr val="FFFFFF"/>
           </a:solidFill>
-          <a:ln w="6350">
+          <a:ln w="19050">
             <a:solidFill>
-              <a:srgbClr val="282828"/>
+              <a:srgbClr val="000000"/>
             </a:solidFill>
           </a:ln>
         </p:spPr>
@@ -4928,11 +4977,11 @@
           </a:fontRef>
         </p:style>
         <p:txBody>
-          <a:bodyPr rtlCol="0" anchor="ctr" lIns="54864" rIns="54864"/>
+          <a:bodyPr rtlCol="0" anchor="ctr" lIns="45720" rIns="45720"/>
           <a:lstStyle/>
           <a:p>
             <a:pPr algn="ctr">
-              <a:defRPr sz="819">
+              <a:defRPr sz="1300" b="1">
                 <a:solidFill>
                   <a:srgbClr val="000000"/>
                 </a:solidFill>
@@ -4940,27 +4989,27 @@
               </a:defRPr>
             </a:pPr>
             <a:r>
-              <a:t>5.4 缺陷 Instance Segmentation</a:t>
-            </a:r>
-          </a:p>
-        </p:txBody>
-      </p:sp>
-      <p:sp>
-        <p:nvSpPr>
-          <p:cNvPr id="40" name="Right Arrow 39"/>
-          <p:cNvSpPr/>
-          <p:nvPr/>
-        </p:nvSpPr>
-        <p:spPr>
-          <a:xfrm>
-            <a:off x="5907024" y="1307592"/>
-            <a:ext cx="182880" cy="201168"/>
-          </a:xfrm>
-          <a:prstGeom prst="rightArrow">
-            <a:avLst/>
-          </a:prstGeom>
-          <a:solidFill>
-            <a:srgbClr val="000000"/>
+              <a:t>阶段三：AI 缺陷感知</a:t>
+            </a:r>
+          </a:p>
+        </p:txBody>
+      </p:sp>
+      <p:sp>
+        <p:nvSpPr>
+          <p:cNvPr id="41" name="Rectangle 40"/>
+          <p:cNvSpPr/>
+          <p:nvPr/>
+        </p:nvSpPr>
+        <p:spPr>
+          <a:xfrm>
+            <a:off x="7383780" y="987552"/>
+            <a:ext cx="9144" cy="384048"/>
+          </a:xfrm>
+          <a:prstGeom prst="rect">
+            <a:avLst/>
+          </a:prstGeom>
+          <a:solidFill>
+            <a:srgbClr val="323232"/>
           </a:solidFill>
           <a:ln>
             <a:noFill/>
@@ -4990,14 +5039,14 @@
       </p:sp>
       <p:sp>
         <p:nvSpPr>
-          <p:cNvPr id="41" name="Rounded Rectangle 40"/>
-          <p:cNvSpPr/>
-          <p:nvPr/>
-        </p:nvSpPr>
-        <p:spPr>
-          <a:xfrm>
-            <a:off x="6108192" y="1234440"/>
-            <a:ext cx="2560320" cy="347472"/>
+          <p:cNvPr id="42" name="Rounded Rectangle 41"/>
+          <p:cNvSpPr/>
+          <p:nvPr/>
+        </p:nvSpPr>
+        <p:spPr>
+          <a:xfrm>
+            <a:off x="6199632" y="1371600"/>
+            <a:ext cx="2377440" cy="384048"/>
           </a:xfrm>
           <a:prstGeom prst="roundRect">
             <a:avLst/>
@@ -5005,7 +5054,7 @@
           <a:solidFill>
             <a:srgbClr val="FFFFFF"/>
           </a:solidFill>
-          <a:ln w="15875">
+          <a:ln w="15240">
             <a:solidFill>
               <a:srgbClr val="000000"/>
             </a:solidFill>
@@ -5026,11 +5075,11 @@
           </a:fontRef>
         </p:style>
         <p:txBody>
-          <a:bodyPr rtlCol="0" anchor="ctr" lIns="45720" rIns="45720"/>
+          <a:bodyPr rtlCol="0" anchor="ctr" lIns="73152" rIns="73152"/>
           <a:lstStyle/>
           <a:p>
             <a:pPr algn="ctr">
-              <a:defRPr sz="1000" b="1">
+              <a:defRPr sz="1150" b="1">
                 <a:solidFill>
                   <a:srgbClr val="000000"/>
                 </a:solidFill>
@@ -5038,27 +5087,27 @@
               </a:defRPr>
             </a:pPr>
             <a:r>
-              <a:t>阶段三：AI 缺陷感知分析</a:t>
-            </a:r>
-          </a:p>
-        </p:txBody>
-      </p:sp>
-      <p:sp>
-        <p:nvSpPr>
-          <p:cNvPr id="42" name="Rectangle 41"/>
-          <p:cNvSpPr/>
-          <p:nvPr/>
-        </p:nvSpPr>
-        <p:spPr>
-          <a:xfrm>
-            <a:off x="7383780" y="1581912"/>
-            <a:ext cx="9144" cy="338328"/>
+              <a:t>第 6 章：AI 检测模型</a:t>
+            </a:r>
+          </a:p>
+        </p:txBody>
+      </p:sp>
+      <p:sp>
+        <p:nvSpPr>
+          <p:cNvPr id="43" name="Rectangle 42"/>
+          <p:cNvSpPr/>
+          <p:nvPr/>
+        </p:nvSpPr>
+        <p:spPr>
+          <a:xfrm>
+            <a:off x="6291072" y="1773936"/>
+            <a:ext cx="7315" cy="1060704"/>
           </a:xfrm>
           <a:prstGeom prst="rect">
             <a:avLst/>
           </a:prstGeom>
           <a:solidFill>
-            <a:srgbClr val="282828"/>
+            <a:srgbClr val="323232"/>
           </a:solidFill>
           <a:ln>
             <a:noFill/>
@@ -5088,14 +5137,57 @@
       </p:sp>
       <p:sp>
         <p:nvSpPr>
-          <p:cNvPr id="43" name="Rounded Rectangle 42"/>
-          <p:cNvSpPr/>
-          <p:nvPr/>
-        </p:nvSpPr>
-        <p:spPr>
-          <a:xfrm>
-            <a:off x="6222492" y="1920240"/>
-            <a:ext cx="2331720" cy="329184"/>
+          <p:cNvPr id="44" name="Rectangle 43"/>
+          <p:cNvSpPr/>
+          <p:nvPr/>
+        </p:nvSpPr>
+        <p:spPr>
+          <a:xfrm>
+            <a:off x="6291072" y="1938528"/>
+            <a:ext cx="82296" cy="7315"/>
+          </a:xfrm>
+          <a:prstGeom prst="rect">
+            <a:avLst/>
+          </a:prstGeom>
+          <a:solidFill>
+            <a:srgbClr val="323232"/>
+          </a:solidFill>
+          <a:ln>
+            <a:noFill/>
+          </a:ln>
+        </p:spPr>
+        <p:style>
+          <a:lnRef idx="1">
+            <a:schemeClr val="accent1"/>
+          </a:lnRef>
+          <a:fillRef idx="3">
+            <a:schemeClr val="accent1"/>
+          </a:fillRef>
+          <a:effectRef idx="2">
+            <a:schemeClr val="accent1"/>
+          </a:effectRef>
+          <a:fontRef idx="minor">
+            <a:schemeClr val="lt1"/>
+          </a:fontRef>
+        </p:style>
+        <p:txBody>
+          <a:bodyPr rtlCol="0" anchor="ctr"/>
+          <a:lstStyle/>
+          <a:p>
+            <a:pPr algn="ctr"/>
+          </a:p>
+        </p:txBody>
+      </p:sp>
+      <p:sp>
+        <p:nvSpPr>
+          <p:cNvPr id="45" name="Rounded Rectangle 44"/>
+          <p:cNvSpPr/>
+          <p:nvPr/>
+        </p:nvSpPr>
+        <p:spPr>
+          <a:xfrm>
+            <a:off x="6382512" y="1828800"/>
+            <a:ext cx="2084831" cy="256032"/>
           </a:xfrm>
           <a:prstGeom prst="roundRect">
             <a:avLst/>
@@ -5103,9 +5195,9 @@
           <a:solidFill>
             <a:srgbClr val="FFFFFF"/>
           </a:solidFill>
-          <a:ln w="12700">
+          <a:ln w="9525">
             <a:solidFill>
-              <a:srgbClr val="000000"/>
+              <a:srgbClr val="323232"/>
             </a:solidFill>
           </a:ln>
         </p:spPr>
@@ -5128,7 +5220,7 @@
           <a:lstStyle/>
           <a:p>
             <a:pPr algn="ctr">
-              <a:defRPr sz="919" b="1">
+              <a:defRPr sz="1050">
                 <a:solidFill>
                   <a:srgbClr val="000000"/>
                 </a:solidFill>
@@ -5136,27 +5228,27 @@
               </a:defRPr>
             </a:pPr>
             <a:r>
-              <a:t>第 6 章：巡检 AI 检测模型 （Benyun Zhao）</a:t>
-            </a:r>
-          </a:p>
-        </p:txBody>
-      </p:sp>
-      <p:sp>
-        <p:nvSpPr>
-          <p:cNvPr id="44" name="Rectangle 43"/>
-          <p:cNvSpPr/>
-          <p:nvPr/>
-        </p:nvSpPr>
-        <p:spPr>
-          <a:xfrm>
-            <a:off x="6295644" y="2249424"/>
-            <a:ext cx="7315" cy="877824"/>
+              <a:t>• 机载低时延约束</a:t>
+            </a:r>
+          </a:p>
+        </p:txBody>
+      </p:sp>
+      <p:sp>
+        <p:nvSpPr>
+          <p:cNvPr id="46" name="Rectangle 45"/>
+          <p:cNvSpPr/>
+          <p:nvPr/>
+        </p:nvSpPr>
+        <p:spPr>
+          <a:xfrm>
+            <a:off x="6291072" y="2249424"/>
+            <a:ext cx="82296" cy="7315"/>
           </a:xfrm>
           <a:prstGeom prst="rect">
             <a:avLst/>
           </a:prstGeom>
           <a:solidFill>
-            <a:srgbClr val="282828"/>
+            <a:srgbClr val="323232"/>
           </a:solidFill>
           <a:ln>
             <a:noFill/>
@@ -5186,57 +5278,14 @@
       </p:sp>
       <p:sp>
         <p:nvSpPr>
-          <p:cNvPr id="45" name="Rectangle 44"/>
-          <p:cNvSpPr/>
-          <p:nvPr/>
-        </p:nvSpPr>
-        <p:spPr>
-          <a:xfrm>
-            <a:off x="6295644" y="2395728"/>
-            <a:ext cx="73152" cy="7315"/>
-          </a:xfrm>
-          <a:prstGeom prst="rect">
-            <a:avLst/>
-          </a:prstGeom>
-          <a:solidFill>
-            <a:srgbClr val="282828"/>
-          </a:solidFill>
-          <a:ln>
-            <a:noFill/>
-          </a:ln>
-        </p:spPr>
-        <p:style>
-          <a:lnRef idx="1">
-            <a:schemeClr val="accent1"/>
-          </a:lnRef>
-          <a:fillRef idx="3">
-            <a:schemeClr val="accent1"/>
-          </a:fillRef>
-          <a:effectRef idx="2">
-            <a:schemeClr val="accent1"/>
-          </a:effectRef>
-          <a:fontRef idx="minor">
-            <a:schemeClr val="lt1"/>
-          </a:fontRef>
-        </p:style>
-        <p:txBody>
-          <a:bodyPr rtlCol="0" anchor="ctr"/>
-          <a:lstStyle/>
-          <a:p>
-            <a:pPr algn="ctr"/>
-          </a:p>
-        </p:txBody>
-      </p:sp>
-      <p:sp>
-        <p:nvSpPr>
-          <p:cNvPr id="46" name="Rounded Rectangle 45"/>
-          <p:cNvSpPr/>
-          <p:nvPr/>
-        </p:nvSpPr>
-        <p:spPr>
-          <a:xfrm>
-            <a:off x="6387084" y="2304288"/>
-            <a:ext cx="2084831" cy="219456"/>
+          <p:cNvPr id="47" name="Rounded Rectangle 46"/>
+          <p:cNvSpPr/>
+          <p:nvPr/>
+        </p:nvSpPr>
+        <p:spPr>
+          <a:xfrm>
+            <a:off x="6382512" y="2139696"/>
+            <a:ext cx="2084831" cy="256032"/>
           </a:xfrm>
           <a:prstGeom prst="roundRect">
             <a:avLst/>
@@ -5244,9 +5293,9 @@
           <a:solidFill>
             <a:srgbClr val="FFFFFF"/>
           </a:solidFill>
-          <a:ln w="6350">
+          <a:ln w="9525">
             <a:solidFill>
-              <a:srgbClr val="282828"/>
+              <a:srgbClr val="323232"/>
             </a:solidFill>
           </a:ln>
         </p:spPr>
@@ -5265,11 +5314,11 @@
           </a:fontRef>
         </p:style>
         <p:txBody>
-          <a:bodyPr rtlCol="0" anchor="ctr" lIns="54864" rIns="54864"/>
+          <a:bodyPr rtlCol="0" anchor="ctr" lIns="73152" rIns="73152"/>
           <a:lstStyle/>
           <a:p>
             <a:pPr algn="ctr">
-              <a:defRPr sz="819">
+              <a:defRPr sz="1050">
                 <a:solidFill>
                   <a:srgbClr val="000000"/>
                 </a:solidFill>
@@ -5277,27 +5326,27 @@
               </a:defRPr>
             </a:pPr>
             <a:r>
-              <a:t>6.1 机载算力与低时延约束</a:t>
-            </a:r>
-          </a:p>
-        </p:txBody>
-      </p:sp>
-      <p:sp>
-        <p:nvSpPr>
-          <p:cNvPr id="47" name="Rectangle 46"/>
-          <p:cNvSpPr/>
-          <p:nvPr/>
-        </p:nvSpPr>
-        <p:spPr>
-          <a:xfrm>
-            <a:off x="6295644" y="2651760"/>
-            <a:ext cx="73152" cy="7315"/>
+              <a:t>• 缺陷检测与分割</a:t>
+            </a:r>
+          </a:p>
+        </p:txBody>
+      </p:sp>
+      <p:sp>
+        <p:nvSpPr>
+          <p:cNvPr id="48" name="Rectangle 47"/>
+          <p:cNvSpPr/>
+          <p:nvPr/>
+        </p:nvSpPr>
+        <p:spPr>
+          <a:xfrm>
+            <a:off x="6291072" y="2560320"/>
+            <a:ext cx="82296" cy="7315"/>
           </a:xfrm>
           <a:prstGeom prst="rect">
             <a:avLst/>
           </a:prstGeom>
           <a:solidFill>
-            <a:srgbClr val="282828"/>
+            <a:srgbClr val="323232"/>
           </a:solidFill>
           <a:ln>
             <a:noFill/>
@@ -5327,14 +5376,14 @@
       </p:sp>
       <p:sp>
         <p:nvSpPr>
-          <p:cNvPr id="48" name="Rounded Rectangle 47"/>
-          <p:cNvSpPr/>
-          <p:nvPr/>
-        </p:nvSpPr>
-        <p:spPr>
-          <a:xfrm>
-            <a:off x="6387084" y="2560320"/>
-            <a:ext cx="2084831" cy="219456"/>
+          <p:cNvPr id="49" name="Rounded Rectangle 48"/>
+          <p:cNvSpPr/>
+          <p:nvPr/>
+        </p:nvSpPr>
+        <p:spPr>
+          <a:xfrm>
+            <a:off x="6382512" y="2450592"/>
+            <a:ext cx="2084831" cy="256032"/>
           </a:xfrm>
           <a:prstGeom prst="roundRect">
             <a:avLst/>
@@ -5342,9 +5391,9 @@
           <a:solidFill>
             <a:srgbClr val="FFFFFF"/>
           </a:solidFill>
-          <a:ln w="6350">
+          <a:ln w="9525">
             <a:solidFill>
-              <a:srgbClr val="282828"/>
+              <a:srgbClr val="323232"/>
             </a:solidFill>
           </a:ln>
         </p:spPr>
@@ -5363,11 +5412,11 @@
           </a:fontRef>
         </p:style>
         <p:txBody>
-          <a:bodyPr rtlCol="0" anchor="ctr" lIns="54864" rIns="54864"/>
+          <a:bodyPr rtlCol="0" anchor="ctr" lIns="73152" rIns="73152"/>
           <a:lstStyle/>
           <a:p>
             <a:pPr algn="ctr">
-              <a:defRPr sz="819">
+              <a:defRPr sz="1050">
                 <a:solidFill>
                   <a:srgbClr val="000000"/>
                 </a:solidFill>
@@ -5375,27 +5424,27 @@
               </a:defRPr>
             </a:pPr>
             <a:r>
-              <a:t>6.3 缺陷检测深度学习架构</a:t>
-            </a:r>
-          </a:p>
-        </p:txBody>
-      </p:sp>
-      <p:sp>
-        <p:nvSpPr>
-          <p:cNvPr id="49" name="Rectangle 48"/>
-          <p:cNvSpPr/>
-          <p:nvPr/>
-        </p:nvSpPr>
-        <p:spPr>
-          <a:xfrm>
-            <a:off x="6295644" y="2907792"/>
-            <a:ext cx="73152" cy="7315"/>
+              <a:t>• 严重程度量化</a:t>
+            </a:r>
+          </a:p>
+        </p:txBody>
+      </p:sp>
+      <p:sp>
+        <p:nvSpPr>
+          <p:cNvPr id="50" name="Rectangle 49"/>
+          <p:cNvSpPr/>
+          <p:nvPr/>
+        </p:nvSpPr>
+        <p:spPr>
+          <a:xfrm>
+            <a:off x="6291072" y="2871216"/>
+            <a:ext cx="82296" cy="7315"/>
           </a:xfrm>
           <a:prstGeom prst="rect">
             <a:avLst/>
           </a:prstGeom>
           <a:solidFill>
-            <a:srgbClr val="282828"/>
+            <a:srgbClr val="323232"/>
           </a:solidFill>
           <a:ln>
             <a:noFill/>
@@ -5425,14 +5474,14 @@
       </p:sp>
       <p:sp>
         <p:nvSpPr>
-          <p:cNvPr id="50" name="Rounded Rectangle 49"/>
-          <p:cNvSpPr/>
-          <p:nvPr/>
-        </p:nvSpPr>
-        <p:spPr>
-          <a:xfrm>
-            <a:off x="6387084" y="2816352"/>
-            <a:ext cx="2084831" cy="219456"/>
+          <p:cNvPr id="51" name="Rounded Rectangle 50"/>
+          <p:cNvSpPr/>
+          <p:nvPr/>
+        </p:nvSpPr>
+        <p:spPr>
+          <a:xfrm>
+            <a:off x="6382512" y="2761488"/>
+            <a:ext cx="2084831" cy="256032"/>
           </a:xfrm>
           <a:prstGeom prst="roundRect">
             <a:avLst/>
@@ -5440,9 +5489,9 @@
           <a:solidFill>
             <a:srgbClr val="FFFFFF"/>
           </a:solidFill>
-          <a:ln w="6350">
+          <a:ln w="9525">
             <a:solidFill>
-              <a:srgbClr val="282828"/>
+              <a:srgbClr val="323232"/>
             </a:solidFill>
           </a:ln>
         </p:spPr>
@@ -5461,11 +5510,11 @@
           </a:fontRef>
         </p:style>
         <p:txBody>
-          <a:bodyPr rtlCol="0" anchor="ctr" lIns="54864" rIns="54864"/>
+          <a:bodyPr rtlCol="0" anchor="ctr" lIns="73152" rIns="73152"/>
           <a:lstStyle/>
           <a:p>
             <a:pPr algn="ctr">
-              <a:defRPr sz="819">
+              <a:defRPr sz="1050">
                 <a:solidFill>
                   <a:srgbClr val="000000"/>
                 </a:solidFill>
@@ -5473,27 +5522,27 @@
               </a:defRPr>
             </a:pPr>
             <a:r>
-              <a:t>6.4 实例分割与定量评估</a:t>
-            </a:r>
-          </a:p>
-        </p:txBody>
-      </p:sp>
-      <p:sp>
-        <p:nvSpPr>
-          <p:cNvPr id="51" name="Rectangle 50"/>
-          <p:cNvSpPr/>
-          <p:nvPr/>
-        </p:nvSpPr>
-        <p:spPr>
-          <a:xfrm>
-            <a:off x="6295644" y="3163824"/>
-            <a:ext cx="73152" cy="7315"/>
-          </a:xfrm>
-          <a:prstGeom prst="rect">
-            <a:avLst/>
-          </a:prstGeom>
-          <a:solidFill>
-            <a:srgbClr val="282828"/>
+              <a:t>• 边缘机载部署</a:t>
+            </a:r>
+          </a:p>
+        </p:txBody>
+      </p:sp>
+      <p:sp>
+        <p:nvSpPr>
+          <p:cNvPr id="52" name="Right Arrow 51"/>
+          <p:cNvSpPr/>
+          <p:nvPr/>
+        </p:nvSpPr>
+        <p:spPr>
+          <a:xfrm>
+            <a:off x="8686800" y="658368"/>
+            <a:ext cx="182880" cy="219456"/>
+          </a:xfrm>
+          <a:prstGeom prst="rightArrow">
+            <a:avLst/>
+          </a:prstGeom>
+          <a:solidFill>
+            <a:srgbClr val="000000"/>
           </a:solidFill>
           <a:ln>
             <a:noFill/>
@@ -5523,14 +5572,14 @@
       </p:sp>
       <p:sp>
         <p:nvSpPr>
-          <p:cNvPr id="52" name="Rounded Rectangle 51"/>
-          <p:cNvSpPr/>
-          <p:nvPr/>
-        </p:nvSpPr>
-        <p:spPr>
-          <a:xfrm>
-            <a:off x="6387084" y="3072384"/>
-            <a:ext cx="2084831" cy="219456"/>
+          <p:cNvPr id="53" name="Rounded Rectangle 52"/>
+          <p:cNvSpPr/>
+          <p:nvPr/>
+        </p:nvSpPr>
+        <p:spPr>
+          <a:xfrm>
+            <a:off x="8887968" y="548640"/>
+            <a:ext cx="2560320" cy="438912"/>
           </a:xfrm>
           <a:prstGeom prst="roundRect">
             <a:avLst/>
@@ -5538,9 +5587,9 @@
           <a:solidFill>
             <a:srgbClr val="FFFFFF"/>
           </a:solidFill>
-          <a:ln w="6350">
+          <a:ln w="19050">
             <a:solidFill>
-              <a:srgbClr val="282828"/>
+              <a:srgbClr val="000000"/>
             </a:solidFill>
           </a:ln>
         </p:spPr>
@@ -5559,11 +5608,11 @@
           </a:fontRef>
         </p:style>
         <p:txBody>
-          <a:bodyPr rtlCol="0" anchor="ctr" lIns="54864" rIns="54864"/>
+          <a:bodyPr rtlCol="0" anchor="ctr" lIns="45720" rIns="45720"/>
           <a:lstStyle/>
           <a:p>
             <a:pPr algn="ctr">
-              <a:defRPr sz="819">
+              <a:defRPr sz="1300" b="1">
                 <a:solidFill>
                   <a:srgbClr val="000000"/>
                 </a:solidFill>
@@ -5571,27 +5620,27 @@
               </a:defRPr>
             </a:pPr>
             <a:r>
-              <a:t>6.6 边缘部署与机载实测校验</a:t>
-            </a:r>
-          </a:p>
-        </p:txBody>
-      </p:sp>
-      <p:sp>
-        <p:nvSpPr>
-          <p:cNvPr id="53" name="Right Arrow 52"/>
-          <p:cNvSpPr/>
-          <p:nvPr/>
-        </p:nvSpPr>
-        <p:spPr>
-          <a:xfrm>
-            <a:off x="8686800" y="1307592"/>
-            <a:ext cx="182880" cy="201168"/>
-          </a:xfrm>
-          <a:prstGeom prst="rightArrow">
-            <a:avLst/>
-          </a:prstGeom>
-          <a:solidFill>
-            <a:srgbClr val="000000"/>
+              <a:t>阶段四：数字孪生与 LLM 决策</a:t>
+            </a:r>
+          </a:p>
+        </p:txBody>
+      </p:sp>
+      <p:sp>
+        <p:nvSpPr>
+          <p:cNvPr id="54" name="Rectangle 53"/>
+          <p:cNvSpPr/>
+          <p:nvPr/>
+        </p:nvSpPr>
+        <p:spPr>
+          <a:xfrm>
+            <a:off x="10163556" y="987552"/>
+            <a:ext cx="9144" cy="4133088"/>
+          </a:xfrm>
+          <a:prstGeom prst="rect">
+            <a:avLst/>
+          </a:prstGeom>
+          <a:solidFill>
+            <a:srgbClr val="323232"/>
           </a:solidFill>
           <a:ln>
             <a:noFill/>
@@ -5621,14 +5670,14 @@
       </p:sp>
       <p:sp>
         <p:nvSpPr>
-          <p:cNvPr id="54" name="Rounded Rectangle 53"/>
-          <p:cNvSpPr/>
-          <p:nvPr/>
-        </p:nvSpPr>
-        <p:spPr>
-          <a:xfrm>
-            <a:off x="8887968" y="1234440"/>
-            <a:ext cx="2560320" cy="347472"/>
+          <p:cNvPr id="55" name="Rounded Rectangle 54"/>
+          <p:cNvSpPr/>
+          <p:nvPr/>
+        </p:nvSpPr>
+        <p:spPr>
+          <a:xfrm>
+            <a:off x="8979408" y="1371600"/>
+            <a:ext cx="2377440" cy="384048"/>
           </a:xfrm>
           <a:prstGeom prst="roundRect">
             <a:avLst/>
@@ -5636,7 +5685,7 @@
           <a:solidFill>
             <a:srgbClr val="FFFFFF"/>
           </a:solidFill>
-          <a:ln w="15875">
+          <a:ln w="15240">
             <a:solidFill>
               <a:srgbClr val="000000"/>
             </a:solidFill>
@@ -5657,11 +5706,11 @@
           </a:fontRef>
         </p:style>
         <p:txBody>
-          <a:bodyPr rtlCol="0" anchor="ctr" lIns="45720" rIns="45720"/>
+          <a:bodyPr rtlCol="0" anchor="ctr" lIns="73152" rIns="73152"/>
           <a:lstStyle/>
           <a:p>
             <a:pPr algn="ctr">
-              <a:defRPr sz="1000" b="1">
+              <a:defRPr sz="1150" b="1">
                 <a:solidFill>
                   <a:srgbClr val="000000"/>
                 </a:solidFill>
@@ -5669,27 +5718,27 @@
               </a:defRPr>
             </a:pPr>
             <a:r>
-              <a:t>阶段四：数字孪生与大模型</a:t>
-            </a:r>
-          </a:p>
-        </p:txBody>
-      </p:sp>
-      <p:sp>
-        <p:nvSpPr>
-          <p:cNvPr id="55" name="Rectangle 54"/>
-          <p:cNvSpPr/>
-          <p:nvPr/>
-        </p:nvSpPr>
-        <p:spPr>
-          <a:xfrm>
-            <a:off x="10163556" y="1581912"/>
-            <a:ext cx="9144" cy="3813048"/>
+              <a:t>第 7 章：GIS 与 GeoBIM</a:t>
+            </a:r>
+          </a:p>
+        </p:txBody>
+      </p:sp>
+      <p:sp>
+        <p:nvSpPr>
+          <p:cNvPr id="56" name="Rectangle 55"/>
+          <p:cNvSpPr/>
+          <p:nvPr/>
+        </p:nvSpPr>
+        <p:spPr>
+          <a:xfrm>
+            <a:off x="9070848" y="1773936"/>
+            <a:ext cx="7315" cy="749808"/>
           </a:xfrm>
           <a:prstGeom prst="rect">
             <a:avLst/>
           </a:prstGeom>
           <a:solidFill>
-            <a:srgbClr val="282828"/>
+            <a:srgbClr val="323232"/>
           </a:solidFill>
           <a:ln>
             <a:noFill/>
@@ -5719,14 +5768,57 @@
       </p:sp>
       <p:sp>
         <p:nvSpPr>
-          <p:cNvPr id="56" name="Rounded Rectangle 55"/>
-          <p:cNvSpPr/>
-          <p:nvPr/>
-        </p:nvSpPr>
-        <p:spPr>
-          <a:xfrm>
-            <a:off x="9002268" y="1920240"/>
-            <a:ext cx="2331720" cy="329184"/>
+          <p:cNvPr id="57" name="Rectangle 56"/>
+          <p:cNvSpPr/>
+          <p:nvPr/>
+        </p:nvSpPr>
+        <p:spPr>
+          <a:xfrm>
+            <a:off x="9070848" y="1938528"/>
+            <a:ext cx="82296" cy="7315"/>
+          </a:xfrm>
+          <a:prstGeom prst="rect">
+            <a:avLst/>
+          </a:prstGeom>
+          <a:solidFill>
+            <a:srgbClr val="323232"/>
+          </a:solidFill>
+          <a:ln>
+            <a:noFill/>
+          </a:ln>
+        </p:spPr>
+        <p:style>
+          <a:lnRef idx="1">
+            <a:schemeClr val="accent1"/>
+          </a:lnRef>
+          <a:fillRef idx="3">
+            <a:schemeClr val="accent1"/>
+          </a:fillRef>
+          <a:effectRef idx="2">
+            <a:schemeClr val="accent1"/>
+          </a:effectRef>
+          <a:fontRef idx="minor">
+            <a:schemeClr val="lt1"/>
+          </a:fontRef>
+        </p:style>
+        <p:txBody>
+          <a:bodyPr rtlCol="0" anchor="ctr"/>
+          <a:lstStyle/>
+          <a:p>
+            <a:pPr algn="ctr"/>
+          </a:p>
+        </p:txBody>
+      </p:sp>
+      <p:sp>
+        <p:nvSpPr>
+          <p:cNvPr id="58" name="Rounded Rectangle 57"/>
+          <p:cNvSpPr/>
+          <p:nvPr/>
+        </p:nvSpPr>
+        <p:spPr>
+          <a:xfrm>
+            <a:off x="9162288" y="1828800"/>
+            <a:ext cx="2084831" cy="256032"/>
           </a:xfrm>
           <a:prstGeom prst="roundRect">
             <a:avLst/>
@@ -5734,9 +5826,9 @@
           <a:solidFill>
             <a:srgbClr val="FFFFFF"/>
           </a:solidFill>
-          <a:ln w="12700">
+          <a:ln w="9525">
             <a:solidFill>
-              <a:srgbClr val="000000"/>
+              <a:srgbClr val="323232"/>
             </a:solidFill>
           </a:ln>
         </p:spPr>
@@ -5759,7 +5851,7 @@
           <a:lstStyle/>
           <a:p>
             <a:pPr algn="ctr">
-              <a:defRPr sz="919" b="1">
+              <a:defRPr sz="1050">
                 <a:solidFill>
                   <a:srgbClr val="000000"/>
                 </a:solidFill>
@@ -5767,27 +5859,27 @@
               </a:defRPr>
             </a:pPr>
             <a:r>
-              <a:t>第 7 章：GIS 与 GeoBIM 集成 （Jihan Zhang）</a:t>
-            </a:r>
-          </a:p>
-        </p:txBody>
-      </p:sp>
-      <p:sp>
-        <p:nvSpPr>
-          <p:cNvPr id="57" name="Rectangle 56"/>
-          <p:cNvSpPr/>
-          <p:nvPr/>
-        </p:nvSpPr>
-        <p:spPr>
-          <a:xfrm>
-            <a:off x="9075420" y="2249424"/>
-            <a:ext cx="7315" cy="621792"/>
+              <a:t>• GeoBIM 空间映射</a:t>
+            </a:r>
+          </a:p>
+        </p:txBody>
+      </p:sp>
+      <p:sp>
+        <p:nvSpPr>
+          <p:cNvPr id="59" name="Rectangle 58"/>
+          <p:cNvSpPr/>
+          <p:nvPr/>
+        </p:nvSpPr>
+        <p:spPr>
+          <a:xfrm>
+            <a:off x="9070848" y="2249424"/>
+            <a:ext cx="82296" cy="7315"/>
           </a:xfrm>
           <a:prstGeom prst="rect">
             <a:avLst/>
           </a:prstGeom>
           <a:solidFill>
-            <a:srgbClr val="282828"/>
+            <a:srgbClr val="323232"/>
           </a:solidFill>
           <a:ln>
             <a:noFill/>
@@ -5817,57 +5909,14 @@
       </p:sp>
       <p:sp>
         <p:nvSpPr>
-          <p:cNvPr id="58" name="Rectangle 57"/>
-          <p:cNvSpPr/>
-          <p:nvPr/>
-        </p:nvSpPr>
-        <p:spPr>
-          <a:xfrm>
-            <a:off x="9075420" y="2395728"/>
-            <a:ext cx="73152" cy="7315"/>
-          </a:xfrm>
-          <a:prstGeom prst="rect">
-            <a:avLst/>
-          </a:prstGeom>
-          <a:solidFill>
-            <a:srgbClr val="282828"/>
-          </a:solidFill>
-          <a:ln>
-            <a:noFill/>
-          </a:ln>
-        </p:spPr>
-        <p:style>
-          <a:lnRef idx="1">
-            <a:schemeClr val="accent1"/>
-          </a:lnRef>
-          <a:fillRef idx="3">
-            <a:schemeClr val="accent1"/>
-          </a:fillRef>
-          <a:effectRef idx="2">
-            <a:schemeClr val="accent1"/>
-          </a:effectRef>
-          <a:fontRef idx="minor">
-            <a:schemeClr val="lt1"/>
-          </a:fontRef>
-        </p:style>
-        <p:txBody>
-          <a:bodyPr rtlCol="0" anchor="ctr"/>
-          <a:lstStyle/>
-          <a:p>
-            <a:pPr algn="ctr"/>
-          </a:p>
-        </p:txBody>
-      </p:sp>
-      <p:sp>
-        <p:nvSpPr>
-          <p:cNvPr id="59" name="Rounded Rectangle 58"/>
-          <p:cNvSpPr/>
-          <p:nvPr/>
-        </p:nvSpPr>
-        <p:spPr>
-          <a:xfrm>
-            <a:off x="9166860" y="2304288"/>
-            <a:ext cx="2084831" cy="219456"/>
+          <p:cNvPr id="60" name="Rounded Rectangle 59"/>
+          <p:cNvSpPr/>
+          <p:nvPr/>
+        </p:nvSpPr>
+        <p:spPr>
+          <a:xfrm>
+            <a:off x="9162288" y="2139696"/>
+            <a:ext cx="2084831" cy="256032"/>
           </a:xfrm>
           <a:prstGeom prst="roundRect">
             <a:avLst/>
@@ -5875,9 +5924,9 @@
           <a:solidFill>
             <a:srgbClr val="FFFFFF"/>
           </a:solidFill>
-          <a:ln w="6350">
+          <a:ln w="9525">
             <a:solidFill>
-              <a:srgbClr val="282828"/>
+              <a:srgbClr val="323232"/>
             </a:solidFill>
           </a:ln>
         </p:spPr>
@@ -5896,11 +5945,11 @@
           </a:fontRef>
         </p:style>
         <p:txBody>
-          <a:bodyPr rtlCol="0" anchor="ctr" lIns="54864" rIns="54864"/>
+          <a:bodyPr rtlCol="0" anchor="ctr" lIns="73152" rIns="73152"/>
           <a:lstStyle/>
           <a:p>
             <a:pPr algn="ctr">
-              <a:defRPr sz="819">
+              <a:defRPr sz="1050">
                 <a:solidFill>
                   <a:srgbClr val="000000"/>
                 </a:solidFill>
@@ -5908,27 +5957,27 @@
               </a:defRPr>
             </a:pPr>
             <a:r>
-              <a:t>7.2 UAV 数据映射 GeoBIM</a:t>
-            </a:r>
-          </a:p>
-        </p:txBody>
-      </p:sp>
-      <p:sp>
-        <p:nvSpPr>
-          <p:cNvPr id="60" name="Rectangle 59"/>
-          <p:cNvSpPr/>
-          <p:nvPr/>
-        </p:nvSpPr>
-        <p:spPr>
-          <a:xfrm>
-            <a:off x="9075420" y="2651760"/>
-            <a:ext cx="73152" cy="7315"/>
+              <a:t>• 退化时空分析</a:t>
+            </a:r>
+          </a:p>
+        </p:txBody>
+      </p:sp>
+      <p:sp>
+        <p:nvSpPr>
+          <p:cNvPr id="61" name="Rectangle 60"/>
+          <p:cNvSpPr/>
+          <p:nvPr/>
+        </p:nvSpPr>
+        <p:spPr>
+          <a:xfrm>
+            <a:off x="9070848" y="2560320"/>
+            <a:ext cx="82296" cy="7315"/>
           </a:xfrm>
           <a:prstGeom prst="rect">
             <a:avLst/>
           </a:prstGeom>
           <a:solidFill>
-            <a:srgbClr val="282828"/>
+            <a:srgbClr val="323232"/>
           </a:solidFill>
           <a:ln>
             <a:noFill/>
@@ -5958,14 +6007,14 @@
       </p:sp>
       <p:sp>
         <p:nvSpPr>
-          <p:cNvPr id="61" name="Rounded Rectangle 60"/>
-          <p:cNvSpPr/>
-          <p:nvPr/>
-        </p:nvSpPr>
-        <p:spPr>
-          <a:xfrm>
-            <a:off x="9166860" y="2560320"/>
-            <a:ext cx="2084831" cy="219456"/>
+          <p:cNvPr id="62" name="Rounded Rectangle 61"/>
+          <p:cNvSpPr/>
+          <p:nvPr/>
+        </p:nvSpPr>
+        <p:spPr>
+          <a:xfrm>
+            <a:off x="9162288" y="2450592"/>
+            <a:ext cx="2084831" cy="256032"/>
           </a:xfrm>
           <a:prstGeom prst="roundRect">
             <a:avLst/>
@@ -5973,9 +6022,9 @@
           <a:solidFill>
             <a:srgbClr val="FFFFFF"/>
           </a:solidFill>
-          <a:ln w="6350">
+          <a:ln w="9525">
             <a:solidFill>
-              <a:srgbClr val="282828"/>
+              <a:srgbClr val="323232"/>
             </a:solidFill>
           </a:ln>
         </p:spPr>
@@ -5994,11 +6043,11 @@
           </a:fontRef>
         </p:style>
         <p:txBody>
-          <a:bodyPr rtlCol="0" anchor="ctr" lIns="54864" rIns="54864"/>
+          <a:bodyPr rtlCol="0" anchor="ctr" lIns="73152" rIns="73152"/>
           <a:lstStyle/>
           <a:p>
             <a:pPr algn="ctr">
-              <a:defRPr sz="819">
+              <a:defRPr sz="1050">
                 <a:solidFill>
                   <a:srgbClr val="000000"/>
                 </a:solidFill>
@@ -6006,51 +6055,8 @@
               </a:defRPr>
             </a:pPr>
             <a:r>
-              <a:t>7.3 结构退化时空分析</a:t>
-            </a:r>
-          </a:p>
-        </p:txBody>
-      </p:sp>
-      <p:sp>
-        <p:nvSpPr>
-          <p:cNvPr id="62" name="Rectangle 61"/>
-          <p:cNvSpPr/>
-          <p:nvPr/>
-        </p:nvSpPr>
-        <p:spPr>
-          <a:xfrm>
-            <a:off x="9075420" y="2907792"/>
-            <a:ext cx="73152" cy="7315"/>
-          </a:xfrm>
-          <a:prstGeom prst="rect">
-            <a:avLst/>
-          </a:prstGeom>
-          <a:solidFill>
-            <a:srgbClr val="282828"/>
-          </a:solidFill>
-          <a:ln>
-            <a:noFill/>
-          </a:ln>
-        </p:spPr>
-        <p:style>
-          <a:lnRef idx="1">
-            <a:schemeClr val="accent1"/>
-          </a:lnRef>
-          <a:fillRef idx="3">
-            <a:schemeClr val="accent1"/>
-          </a:fillRef>
-          <a:effectRef idx="2">
-            <a:schemeClr val="accent1"/>
-          </a:effectRef>
-          <a:fontRef idx="minor">
-            <a:schemeClr val="lt1"/>
-          </a:fontRef>
-        </p:style>
-        <p:txBody>
-          <a:bodyPr rtlCol="0" anchor="ctr"/>
-          <a:lstStyle/>
-          <a:p>
-            <a:pPr algn="ctr"/>
+              <a:t>• 资产护照挂载</a:t>
+            </a:r>
           </a:p>
         </p:txBody>
       </p:sp>
@@ -6062,8 +6068,8 @@
         </p:nvSpPr>
         <p:spPr>
           <a:xfrm>
-            <a:off x="9166860" y="2816352"/>
-            <a:ext cx="2084831" cy="219456"/>
+            <a:off x="8979408" y="3291840"/>
+            <a:ext cx="2377440" cy="384048"/>
           </a:xfrm>
           <a:prstGeom prst="roundRect">
             <a:avLst/>
@@ -6071,9 +6077,9 @@
           <a:solidFill>
             <a:srgbClr val="FFFFFF"/>
           </a:solidFill>
-          <a:ln w="6350">
+          <a:ln w="15240">
             <a:solidFill>
-              <a:srgbClr val="282828"/>
+              <a:srgbClr val="000000"/>
             </a:solidFill>
           </a:ln>
         </p:spPr>
@@ -6092,11 +6098,11 @@
           </a:fontRef>
         </p:style>
         <p:txBody>
-          <a:bodyPr rtlCol="0" anchor="ctr" lIns="54864" rIns="54864"/>
+          <a:bodyPr rtlCol="0" anchor="ctr" lIns="73152" rIns="73152"/>
           <a:lstStyle/>
           <a:p>
             <a:pPr algn="ctr">
-              <a:defRPr sz="819">
+              <a:defRPr sz="1150" b="1">
                 <a:solidFill>
                   <a:srgbClr val="000000"/>
                 </a:solidFill>
@@ -6104,21 +6110,107 @@
               </a:defRPr>
             </a:pPr>
             <a:r>
-              <a:t>7.5 城市级资产护照挂载</a:t>
-            </a:r>
-          </a:p>
-        </p:txBody>
-      </p:sp>
-      <p:sp>
-        <p:nvSpPr>
-          <p:cNvPr id="64" name="Rounded Rectangle 63"/>
-          <p:cNvSpPr/>
-          <p:nvPr/>
-        </p:nvSpPr>
-        <p:spPr>
-          <a:xfrm>
-            <a:off x="9002268" y="3657600"/>
-            <a:ext cx="2331720" cy="329184"/>
+              <a:t>第 8 章：数字孪生与大模型</a:t>
+            </a:r>
+          </a:p>
+        </p:txBody>
+      </p:sp>
+      <p:sp>
+        <p:nvSpPr>
+          <p:cNvPr id="64" name="Rectangle 63"/>
+          <p:cNvSpPr/>
+          <p:nvPr/>
+        </p:nvSpPr>
+        <p:spPr>
+          <a:xfrm>
+            <a:off x="9070848" y="3694176"/>
+            <a:ext cx="7315" cy="749808"/>
+          </a:xfrm>
+          <a:prstGeom prst="rect">
+            <a:avLst/>
+          </a:prstGeom>
+          <a:solidFill>
+            <a:srgbClr val="323232"/>
+          </a:solidFill>
+          <a:ln>
+            <a:noFill/>
+          </a:ln>
+        </p:spPr>
+        <p:style>
+          <a:lnRef idx="1">
+            <a:schemeClr val="accent1"/>
+          </a:lnRef>
+          <a:fillRef idx="3">
+            <a:schemeClr val="accent1"/>
+          </a:fillRef>
+          <a:effectRef idx="2">
+            <a:schemeClr val="accent1"/>
+          </a:effectRef>
+          <a:fontRef idx="minor">
+            <a:schemeClr val="lt1"/>
+          </a:fontRef>
+        </p:style>
+        <p:txBody>
+          <a:bodyPr rtlCol="0" anchor="ctr"/>
+          <a:lstStyle/>
+          <a:p>
+            <a:pPr algn="ctr"/>
+          </a:p>
+        </p:txBody>
+      </p:sp>
+      <p:sp>
+        <p:nvSpPr>
+          <p:cNvPr id="65" name="Rectangle 64"/>
+          <p:cNvSpPr/>
+          <p:nvPr/>
+        </p:nvSpPr>
+        <p:spPr>
+          <a:xfrm>
+            <a:off x="9070848" y="3858768"/>
+            <a:ext cx="82296" cy="7315"/>
+          </a:xfrm>
+          <a:prstGeom prst="rect">
+            <a:avLst/>
+          </a:prstGeom>
+          <a:solidFill>
+            <a:srgbClr val="323232"/>
+          </a:solidFill>
+          <a:ln>
+            <a:noFill/>
+          </a:ln>
+        </p:spPr>
+        <p:style>
+          <a:lnRef idx="1">
+            <a:schemeClr val="accent1"/>
+          </a:lnRef>
+          <a:fillRef idx="3">
+            <a:schemeClr val="accent1"/>
+          </a:fillRef>
+          <a:effectRef idx="2">
+            <a:schemeClr val="accent1"/>
+          </a:effectRef>
+          <a:fontRef idx="minor">
+            <a:schemeClr val="lt1"/>
+          </a:fontRef>
+        </p:style>
+        <p:txBody>
+          <a:bodyPr rtlCol="0" anchor="ctr"/>
+          <a:lstStyle/>
+          <a:p>
+            <a:pPr algn="ctr"/>
+          </a:p>
+        </p:txBody>
+      </p:sp>
+      <p:sp>
+        <p:nvSpPr>
+          <p:cNvPr id="66" name="Rounded Rectangle 65"/>
+          <p:cNvSpPr/>
+          <p:nvPr/>
+        </p:nvSpPr>
+        <p:spPr>
+          <a:xfrm>
+            <a:off x="9162288" y="3749040"/>
+            <a:ext cx="2084831" cy="256032"/>
           </a:xfrm>
           <a:prstGeom prst="roundRect">
             <a:avLst/>
@@ -6126,9 +6218,9 @@
           <a:solidFill>
             <a:srgbClr val="FFFFFF"/>
           </a:solidFill>
-          <a:ln w="12700">
+          <a:ln w="9525">
             <a:solidFill>
-              <a:srgbClr val="000000"/>
+              <a:srgbClr val="323232"/>
             </a:solidFill>
           </a:ln>
         </p:spPr>
@@ -6151,7 +6243,7 @@
           <a:lstStyle/>
           <a:p>
             <a:pPr algn="ctr">
-              <a:defRPr sz="919" b="1">
+              <a:defRPr sz="1050">
                 <a:solidFill>
                   <a:srgbClr val="000000"/>
                 </a:solidFill>
@@ -6159,27 +6251,27 @@
               </a:defRPr>
             </a:pPr>
             <a:r>
-              <a:t>第 8 章：数字孪生与大模型 （Yijun Huang）</a:t>
-            </a:r>
-          </a:p>
-        </p:txBody>
-      </p:sp>
-      <p:sp>
-        <p:nvSpPr>
-          <p:cNvPr id="65" name="Rectangle 64"/>
-          <p:cNvSpPr/>
-          <p:nvPr/>
-        </p:nvSpPr>
-        <p:spPr>
-          <a:xfrm>
-            <a:off x="9075420" y="3986784"/>
-            <a:ext cx="7315" cy="621792"/>
+              <a:t>• LLM/VLM 推理底座</a:t>
+            </a:r>
+          </a:p>
+        </p:txBody>
+      </p:sp>
+      <p:sp>
+        <p:nvSpPr>
+          <p:cNvPr id="67" name="Rectangle 66"/>
+          <p:cNvSpPr/>
+          <p:nvPr/>
+        </p:nvSpPr>
+        <p:spPr>
+          <a:xfrm>
+            <a:off x="9070848" y="4169664"/>
+            <a:ext cx="82296" cy="7315"/>
           </a:xfrm>
           <a:prstGeom prst="rect">
             <a:avLst/>
           </a:prstGeom>
           <a:solidFill>
-            <a:srgbClr val="282828"/>
+            <a:srgbClr val="323232"/>
           </a:solidFill>
           <a:ln>
             <a:noFill/>
@@ -6209,57 +6301,14 @@
       </p:sp>
       <p:sp>
         <p:nvSpPr>
-          <p:cNvPr id="66" name="Rectangle 65"/>
-          <p:cNvSpPr/>
-          <p:nvPr/>
-        </p:nvSpPr>
-        <p:spPr>
-          <a:xfrm>
-            <a:off x="9075420" y="4133088"/>
-            <a:ext cx="73152" cy="7315"/>
-          </a:xfrm>
-          <a:prstGeom prst="rect">
-            <a:avLst/>
-          </a:prstGeom>
-          <a:solidFill>
-            <a:srgbClr val="282828"/>
-          </a:solidFill>
-          <a:ln>
-            <a:noFill/>
-          </a:ln>
-        </p:spPr>
-        <p:style>
-          <a:lnRef idx="1">
-            <a:schemeClr val="accent1"/>
-          </a:lnRef>
-          <a:fillRef idx="3">
-            <a:schemeClr val="accent1"/>
-          </a:fillRef>
-          <a:effectRef idx="2">
-            <a:schemeClr val="accent1"/>
-          </a:effectRef>
-          <a:fontRef idx="minor">
-            <a:schemeClr val="lt1"/>
-          </a:fontRef>
-        </p:style>
-        <p:txBody>
-          <a:bodyPr rtlCol="0" anchor="ctr"/>
-          <a:lstStyle/>
-          <a:p>
-            <a:pPr algn="ctr"/>
-          </a:p>
-        </p:txBody>
-      </p:sp>
-      <p:sp>
-        <p:nvSpPr>
-          <p:cNvPr id="67" name="Rounded Rectangle 66"/>
-          <p:cNvSpPr/>
-          <p:nvPr/>
-        </p:nvSpPr>
-        <p:spPr>
-          <a:xfrm>
-            <a:off x="9166860" y="4041648"/>
-            <a:ext cx="2084831" cy="219456"/>
+          <p:cNvPr id="68" name="Rounded Rectangle 67"/>
+          <p:cNvSpPr/>
+          <p:nvPr/>
+        </p:nvSpPr>
+        <p:spPr>
+          <a:xfrm>
+            <a:off x="9162288" y="4059936"/>
+            <a:ext cx="2084831" cy="256032"/>
           </a:xfrm>
           <a:prstGeom prst="roundRect">
             <a:avLst/>
@@ -6267,9 +6316,9 @@
           <a:solidFill>
             <a:srgbClr val="FFFFFF"/>
           </a:solidFill>
-          <a:ln w="6350">
+          <a:ln w="9525">
             <a:solidFill>
-              <a:srgbClr val="282828"/>
+              <a:srgbClr val="323232"/>
             </a:solidFill>
           </a:ln>
         </p:spPr>
@@ -6288,11 +6337,11 @@
           </a:fontRef>
         </p:style>
         <p:txBody>
-          <a:bodyPr rtlCol="0" anchor="ctr" lIns="54864" rIns="54864"/>
+          <a:bodyPr rtlCol="0" anchor="ctr" lIns="73152" rIns="73152"/>
           <a:lstStyle/>
           <a:p>
             <a:pPr algn="ctr">
-              <a:defRPr sz="819">
+              <a:defRPr sz="1050">
                 <a:solidFill>
                   <a:srgbClr val="000000"/>
                 </a:solidFill>
@@ -6300,27 +6349,27 @@
               </a:defRPr>
             </a:pPr>
             <a:r>
-              <a:t>8.2 LLM / VLM 领域推理底座</a:t>
-            </a:r>
-          </a:p>
-        </p:txBody>
-      </p:sp>
-      <p:sp>
-        <p:nvSpPr>
-          <p:cNvPr id="68" name="Rectangle 67"/>
-          <p:cNvSpPr/>
-          <p:nvPr/>
-        </p:nvSpPr>
-        <p:spPr>
-          <a:xfrm>
-            <a:off x="9075420" y="4389120"/>
-            <a:ext cx="73152" cy="7315"/>
+              <a:t>• 孪生记忆与 RAG</a:t>
+            </a:r>
+          </a:p>
+        </p:txBody>
+      </p:sp>
+      <p:sp>
+        <p:nvSpPr>
+          <p:cNvPr id="69" name="Rectangle 68"/>
+          <p:cNvSpPr/>
+          <p:nvPr/>
+        </p:nvSpPr>
+        <p:spPr>
+          <a:xfrm>
+            <a:off x="9070848" y="4480560"/>
+            <a:ext cx="82296" cy="7315"/>
           </a:xfrm>
           <a:prstGeom prst="rect">
             <a:avLst/>
           </a:prstGeom>
           <a:solidFill>
-            <a:srgbClr val="282828"/>
+            <a:srgbClr val="323232"/>
           </a:solidFill>
           <a:ln>
             <a:noFill/>
@@ -6350,14 +6399,14 @@
       </p:sp>
       <p:sp>
         <p:nvSpPr>
-          <p:cNvPr id="69" name="Rounded Rectangle 68"/>
-          <p:cNvSpPr/>
-          <p:nvPr/>
-        </p:nvSpPr>
-        <p:spPr>
-          <a:xfrm>
-            <a:off x="9166860" y="4297680"/>
-            <a:ext cx="2084831" cy="219456"/>
+          <p:cNvPr id="70" name="Rounded Rectangle 69"/>
+          <p:cNvSpPr/>
+          <p:nvPr/>
+        </p:nvSpPr>
+        <p:spPr>
+          <a:xfrm>
+            <a:off x="9162288" y="4370832"/>
+            <a:ext cx="2084831" cy="256032"/>
           </a:xfrm>
           <a:prstGeom prst="roundRect">
             <a:avLst/>
@@ -6365,9 +6414,9 @@
           <a:solidFill>
             <a:srgbClr val="FFFFFF"/>
           </a:solidFill>
-          <a:ln w="6350">
+          <a:ln w="9525">
             <a:solidFill>
-              <a:srgbClr val="282828"/>
+              <a:srgbClr val="323232"/>
             </a:solidFill>
           </a:ln>
         </p:spPr>
@@ -6386,11 +6435,11 @@
           </a:fontRef>
         </p:style>
         <p:txBody>
-          <a:bodyPr rtlCol="0" anchor="ctr" lIns="54864" rIns="54864"/>
+          <a:bodyPr rtlCol="0" anchor="ctr" lIns="73152" rIns="73152"/>
           <a:lstStyle/>
           <a:p>
             <a:pPr algn="ctr">
-              <a:defRPr sz="819">
+              <a:defRPr sz="1050">
                 <a:solidFill>
                   <a:srgbClr val="000000"/>
                 </a:solidFill>
@@ -6398,51 +6447,8 @@
               </a:defRPr>
             </a:pPr>
             <a:r>
-              <a:t>8.3 孪生记忆与 RAG 检索</a:t>
-            </a:r>
-          </a:p>
-        </p:txBody>
-      </p:sp>
-      <p:sp>
-        <p:nvSpPr>
-          <p:cNvPr id="70" name="Rectangle 69"/>
-          <p:cNvSpPr/>
-          <p:nvPr/>
-        </p:nvSpPr>
-        <p:spPr>
-          <a:xfrm>
-            <a:off x="9075420" y="4645152"/>
-            <a:ext cx="73152" cy="7315"/>
-          </a:xfrm>
-          <a:prstGeom prst="rect">
-            <a:avLst/>
-          </a:prstGeom>
-          <a:solidFill>
-            <a:srgbClr val="282828"/>
-          </a:solidFill>
-          <a:ln>
-            <a:noFill/>
-          </a:ln>
-        </p:spPr>
-        <p:style>
-          <a:lnRef idx="1">
-            <a:schemeClr val="accent1"/>
-          </a:lnRef>
-          <a:fillRef idx="3">
-            <a:schemeClr val="accent1"/>
-          </a:fillRef>
-          <a:effectRef idx="2">
-            <a:schemeClr val="accent1"/>
-          </a:effectRef>
-          <a:fontRef idx="minor">
-            <a:schemeClr val="lt1"/>
-          </a:fontRef>
-        </p:style>
-        <p:txBody>
-          <a:bodyPr rtlCol="0" anchor="ctr"/>
-          <a:lstStyle/>
-          <a:p>
-            <a:pPr algn="ctr"/>
+              <a:t>• 维保决策与报告</a:t>
+            </a:r>
           </a:p>
         </p:txBody>
       </p:sp>
@@ -6454,8 +6460,8 @@
         </p:nvSpPr>
         <p:spPr>
           <a:xfrm>
-            <a:off x="9166860" y="4553712"/>
-            <a:ext cx="2084831" cy="219456"/>
+            <a:off x="8979408" y="5120640"/>
+            <a:ext cx="2377440" cy="384048"/>
           </a:xfrm>
           <a:prstGeom prst="roundRect">
             <a:avLst/>
@@ -6463,9 +6469,9 @@
           <a:solidFill>
             <a:srgbClr val="FFFFFF"/>
           </a:solidFill>
-          <a:ln w="6350">
+          <a:ln w="15240">
             <a:solidFill>
-              <a:srgbClr val="282828"/>
+              <a:srgbClr val="000000"/>
             </a:solidFill>
           </a:ln>
         </p:spPr>
@@ -6484,11 +6490,11 @@
           </a:fontRef>
         </p:style>
         <p:txBody>
-          <a:bodyPr rtlCol="0" anchor="ctr" lIns="54864" rIns="54864"/>
+          <a:bodyPr rtlCol="0" anchor="ctr" lIns="73152" rIns="73152"/>
           <a:lstStyle/>
           <a:p>
             <a:pPr algn="ctr">
-              <a:defRPr sz="819">
+              <a:defRPr sz="1150" b="1">
                 <a:solidFill>
                   <a:srgbClr val="000000"/>
                 </a:solidFill>
@@ -6496,21 +6502,107 @@
               </a:defRPr>
             </a:pPr>
             <a:r>
-              <a:t>8.5/8.6 报告生成与预测维护</a:t>
-            </a:r>
-          </a:p>
-        </p:txBody>
-      </p:sp>
-      <p:sp>
-        <p:nvSpPr>
-          <p:cNvPr id="72" name="Rounded Rectangle 71"/>
-          <p:cNvSpPr/>
-          <p:nvPr/>
-        </p:nvSpPr>
-        <p:spPr>
-          <a:xfrm>
-            <a:off x="9002268" y="5394960"/>
-            <a:ext cx="2331720" cy="329184"/>
+              <a:t>第 9 章：总结与展望</a:t>
+            </a:r>
+          </a:p>
+        </p:txBody>
+      </p:sp>
+      <p:sp>
+        <p:nvSpPr>
+          <p:cNvPr id="72" name="Rectangle 71"/>
+          <p:cNvSpPr/>
+          <p:nvPr/>
+        </p:nvSpPr>
+        <p:spPr>
+          <a:xfrm>
+            <a:off x="9070848" y="5522976"/>
+            <a:ext cx="7315" cy="749808"/>
+          </a:xfrm>
+          <a:prstGeom prst="rect">
+            <a:avLst/>
+          </a:prstGeom>
+          <a:solidFill>
+            <a:srgbClr val="323232"/>
+          </a:solidFill>
+          <a:ln>
+            <a:noFill/>
+          </a:ln>
+        </p:spPr>
+        <p:style>
+          <a:lnRef idx="1">
+            <a:schemeClr val="accent1"/>
+          </a:lnRef>
+          <a:fillRef idx="3">
+            <a:schemeClr val="accent1"/>
+          </a:fillRef>
+          <a:effectRef idx="2">
+            <a:schemeClr val="accent1"/>
+          </a:effectRef>
+          <a:fontRef idx="minor">
+            <a:schemeClr val="lt1"/>
+          </a:fontRef>
+        </p:style>
+        <p:txBody>
+          <a:bodyPr rtlCol="0" anchor="ctr"/>
+          <a:lstStyle/>
+          <a:p>
+            <a:pPr algn="ctr"/>
+          </a:p>
+        </p:txBody>
+      </p:sp>
+      <p:sp>
+        <p:nvSpPr>
+          <p:cNvPr id="73" name="Rectangle 72"/>
+          <p:cNvSpPr/>
+          <p:nvPr/>
+        </p:nvSpPr>
+        <p:spPr>
+          <a:xfrm>
+            <a:off x="9070848" y="5687568"/>
+            <a:ext cx="82296" cy="7315"/>
+          </a:xfrm>
+          <a:prstGeom prst="rect">
+            <a:avLst/>
+          </a:prstGeom>
+          <a:solidFill>
+            <a:srgbClr val="323232"/>
+          </a:solidFill>
+          <a:ln>
+            <a:noFill/>
+          </a:ln>
+        </p:spPr>
+        <p:style>
+          <a:lnRef idx="1">
+            <a:schemeClr val="accent1"/>
+          </a:lnRef>
+          <a:fillRef idx="3">
+            <a:schemeClr val="accent1"/>
+          </a:fillRef>
+          <a:effectRef idx="2">
+            <a:schemeClr val="accent1"/>
+          </a:effectRef>
+          <a:fontRef idx="minor">
+            <a:schemeClr val="lt1"/>
+          </a:fontRef>
+        </p:style>
+        <p:txBody>
+          <a:bodyPr rtlCol="0" anchor="ctr"/>
+          <a:lstStyle/>
+          <a:p>
+            <a:pPr algn="ctr"/>
+          </a:p>
+        </p:txBody>
+      </p:sp>
+      <p:sp>
+        <p:nvSpPr>
+          <p:cNvPr id="74" name="Rounded Rectangle 73"/>
+          <p:cNvSpPr/>
+          <p:nvPr/>
+        </p:nvSpPr>
+        <p:spPr>
+          <a:xfrm>
+            <a:off x="9162288" y="5577840"/>
+            <a:ext cx="2084831" cy="256032"/>
           </a:xfrm>
           <a:prstGeom prst="roundRect">
             <a:avLst/>
@@ -6518,9 +6610,9 @@
           <a:solidFill>
             <a:srgbClr val="FFFFFF"/>
           </a:solidFill>
-          <a:ln w="12700">
+          <a:ln w="9525">
             <a:solidFill>
-              <a:srgbClr val="000000"/>
+              <a:srgbClr val="323232"/>
             </a:solidFill>
           </a:ln>
         </p:spPr>
@@ -6543,7 +6635,7 @@
           <a:lstStyle/>
           <a:p>
             <a:pPr algn="ctr">
-              <a:defRPr sz="919" b="1">
+              <a:defRPr sz="1050">
                 <a:solidFill>
                   <a:srgbClr val="000000"/>
                 </a:solidFill>
@@ -6551,27 +6643,27 @@
               </a:defRPr>
             </a:pPr>
             <a:r>
-              <a:t>第 9 章：总结与展望 （Ben M. Chen et al.）</a:t>
-            </a:r>
-          </a:p>
-        </p:txBody>
-      </p:sp>
-      <p:sp>
-        <p:nvSpPr>
-          <p:cNvPr id="73" name="Rectangle 72"/>
-          <p:cNvSpPr/>
-          <p:nvPr/>
-        </p:nvSpPr>
-        <p:spPr>
-          <a:xfrm>
-            <a:off x="9075420" y="5724144"/>
-            <a:ext cx="7315" cy="621792"/>
+              <a:t>• 端到端系统闭环总结</a:t>
+            </a:r>
+          </a:p>
+        </p:txBody>
+      </p:sp>
+      <p:sp>
+        <p:nvSpPr>
+          <p:cNvPr id="75" name="Rectangle 74"/>
+          <p:cNvSpPr/>
+          <p:nvPr/>
+        </p:nvSpPr>
+        <p:spPr>
+          <a:xfrm>
+            <a:off x="9070848" y="5998464"/>
+            <a:ext cx="82296" cy="7315"/>
           </a:xfrm>
           <a:prstGeom prst="rect">
             <a:avLst/>
           </a:prstGeom>
           <a:solidFill>
-            <a:srgbClr val="282828"/>
+            <a:srgbClr val="323232"/>
           </a:solidFill>
           <a:ln>
             <a:noFill/>
@@ -6601,57 +6693,14 @@
       </p:sp>
       <p:sp>
         <p:nvSpPr>
-          <p:cNvPr id="74" name="Rectangle 73"/>
-          <p:cNvSpPr/>
-          <p:nvPr/>
-        </p:nvSpPr>
-        <p:spPr>
-          <a:xfrm>
-            <a:off x="9075420" y="5870448"/>
-            <a:ext cx="73152" cy="7315"/>
-          </a:xfrm>
-          <a:prstGeom prst="rect">
-            <a:avLst/>
-          </a:prstGeom>
-          <a:solidFill>
-            <a:srgbClr val="282828"/>
-          </a:solidFill>
-          <a:ln>
-            <a:noFill/>
-          </a:ln>
-        </p:spPr>
-        <p:style>
-          <a:lnRef idx="1">
-            <a:schemeClr val="accent1"/>
-          </a:lnRef>
-          <a:fillRef idx="3">
-            <a:schemeClr val="accent1"/>
-          </a:fillRef>
-          <a:effectRef idx="2">
-            <a:schemeClr val="accent1"/>
-          </a:effectRef>
-          <a:fontRef idx="minor">
-            <a:schemeClr val="lt1"/>
-          </a:fontRef>
-        </p:style>
-        <p:txBody>
-          <a:bodyPr rtlCol="0" anchor="ctr"/>
-          <a:lstStyle/>
-          <a:p>
-            <a:pPr algn="ctr"/>
-          </a:p>
-        </p:txBody>
-      </p:sp>
-      <p:sp>
-        <p:nvSpPr>
-          <p:cNvPr id="75" name="Rounded Rectangle 74"/>
-          <p:cNvSpPr/>
-          <p:nvPr/>
-        </p:nvSpPr>
-        <p:spPr>
-          <a:xfrm>
-            <a:off x="9166860" y="5779008"/>
-            <a:ext cx="2084831" cy="219456"/>
+          <p:cNvPr id="76" name="Rounded Rectangle 75"/>
+          <p:cNvSpPr/>
+          <p:nvPr/>
+        </p:nvSpPr>
+        <p:spPr>
+          <a:xfrm>
+            <a:off x="9162288" y="5888736"/>
+            <a:ext cx="2084831" cy="256032"/>
           </a:xfrm>
           <a:prstGeom prst="roundRect">
             <a:avLst/>
@@ -6659,9 +6708,9 @@
           <a:solidFill>
             <a:srgbClr val="FFFFFF"/>
           </a:solidFill>
-          <a:ln w="6350">
+          <a:ln w="9525">
             <a:solidFill>
-              <a:srgbClr val="282828"/>
+              <a:srgbClr val="323232"/>
             </a:solidFill>
           </a:ln>
         </p:spPr>
@@ -6680,11 +6729,11 @@
           </a:fontRef>
         </p:style>
         <p:txBody>
-          <a:bodyPr rtlCol="0" anchor="ctr" lIns="54864" rIns="54864"/>
+          <a:bodyPr rtlCol="0" anchor="ctr" lIns="73152" rIns="73152"/>
           <a:lstStyle/>
           <a:p>
             <a:pPr algn="ctr">
-              <a:defRPr sz="819">
+              <a:defRPr sz="1050">
                 <a:solidFill>
                   <a:srgbClr val="000000"/>
                 </a:solidFill>
@@ -6692,27 +6741,27 @@
               </a:defRPr>
             </a:pPr>
             <a:r>
-              <a:t>9.1 端到端系统闭环总结</a:t>
-            </a:r>
-          </a:p>
-        </p:txBody>
-      </p:sp>
-      <p:sp>
-        <p:nvSpPr>
-          <p:cNvPr id="76" name="Rectangle 75"/>
-          <p:cNvSpPr/>
-          <p:nvPr/>
-        </p:nvSpPr>
-        <p:spPr>
-          <a:xfrm>
-            <a:off x="9075420" y="6126480"/>
-            <a:ext cx="73152" cy="7315"/>
+              <a:t>• 法规与安全约束</a:t>
+            </a:r>
+          </a:p>
+        </p:txBody>
+      </p:sp>
+      <p:sp>
+        <p:nvSpPr>
+          <p:cNvPr id="77" name="Rectangle 76"/>
+          <p:cNvSpPr/>
+          <p:nvPr/>
+        </p:nvSpPr>
+        <p:spPr>
+          <a:xfrm>
+            <a:off x="9070848" y="6309360"/>
+            <a:ext cx="82296" cy="7315"/>
           </a:xfrm>
           <a:prstGeom prst="rect">
             <a:avLst/>
           </a:prstGeom>
           <a:solidFill>
-            <a:srgbClr val="282828"/>
+            <a:srgbClr val="323232"/>
           </a:solidFill>
           <a:ln>
             <a:noFill/>
@@ -6742,14 +6791,14 @@
       </p:sp>
       <p:sp>
         <p:nvSpPr>
-          <p:cNvPr id="77" name="Rounded Rectangle 76"/>
-          <p:cNvSpPr/>
-          <p:nvPr/>
-        </p:nvSpPr>
-        <p:spPr>
-          <a:xfrm>
-            <a:off x="9166860" y="6035040"/>
-            <a:ext cx="2084831" cy="219456"/>
+          <p:cNvPr id="78" name="Rounded Rectangle 77"/>
+          <p:cNvSpPr/>
+          <p:nvPr/>
+        </p:nvSpPr>
+        <p:spPr>
+          <a:xfrm>
+            <a:off x="9162288" y="6199632"/>
+            <a:ext cx="2084831" cy="256032"/>
           </a:xfrm>
           <a:prstGeom prst="roundRect">
             <a:avLst/>
@@ -6757,9 +6806,9 @@
           <a:solidFill>
             <a:srgbClr val="FFFFFF"/>
           </a:solidFill>
-          <a:ln w="6350">
+          <a:ln w="9525">
             <a:solidFill>
-              <a:srgbClr val="282828"/>
+              <a:srgbClr val="323232"/>
             </a:solidFill>
           </a:ln>
         </p:spPr>
@@ -6778,11 +6827,11 @@
           </a:fontRef>
         </p:style>
         <p:txBody>
-          <a:bodyPr rtlCol="0" anchor="ctr" lIns="54864" rIns="54864"/>
+          <a:bodyPr rtlCol="0" anchor="ctr" lIns="73152" rIns="73152"/>
           <a:lstStyle/>
           <a:p>
             <a:pPr algn="ctr">
-              <a:defRPr sz="819">
+              <a:defRPr sz="1050">
                 <a:solidFill>
                   <a:srgbClr val="000000"/>
                 </a:solidFill>
@@ -6790,141 +6839,7 @@
               </a:defRPr>
             </a:pPr>
             <a:r>
-              <a:t>9.2 法规、安全与隐私约束</a:t>
-            </a:r>
-          </a:p>
-        </p:txBody>
-      </p:sp>
-      <p:sp>
-        <p:nvSpPr>
-          <p:cNvPr id="78" name="Rectangle 77"/>
-          <p:cNvSpPr/>
-          <p:nvPr/>
-        </p:nvSpPr>
-        <p:spPr>
-          <a:xfrm>
-            <a:off x="9075420" y="6382512"/>
-            <a:ext cx="73152" cy="7315"/>
-          </a:xfrm>
-          <a:prstGeom prst="rect">
-            <a:avLst/>
-          </a:prstGeom>
-          <a:solidFill>
-            <a:srgbClr val="282828"/>
-          </a:solidFill>
-          <a:ln>
-            <a:noFill/>
-          </a:ln>
-        </p:spPr>
-        <p:style>
-          <a:lnRef idx="1">
-            <a:schemeClr val="accent1"/>
-          </a:lnRef>
-          <a:fillRef idx="3">
-            <a:schemeClr val="accent1"/>
-          </a:fillRef>
-          <a:effectRef idx="2">
-            <a:schemeClr val="accent1"/>
-          </a:effectRef>
-          <a:fontRef idx="minor">
-            <a:schemeClr val="lt1"/>
-          </a:fontRef>
-        </p:style>
-        <p:txBody>
-          <a:bodyPr rtlCol="0" anchor="ctr"/>
-          <a:lstStyle/>
-          <a:p>
-            <a:pPr algn="ctr"/>
-          </a:p>
-        </p:txBody>
-      </p:sp>
-      <p:sp>
-        <p:nvSpPr>
-          <p:cNvPr id="79" name="Rounded Rectangle 78"/>
-          <p:cNvSpPr/>
-          <p:nvPr/>
-        </p:nvSpPr>
-        <p:spPr>
-          <a:xfrm>
-            <a:off x="9166860" y="6291072"/>
-            <a:ext cx="2084831" cy="219456"/>
-          </a:xfrm>
-          <a:prstGeom prst="roundRect">
-            <a:avLst/>
-          </a:prstGeom>
-          <a:solidFill>
-            <a:srgbClr val="FFFFFF"/>
-          </a:solidFill>
-          <a:ln w="6350">
-            <a:solidFill>
-              <a:srgbClr val="282828"/>
-            </a:solidFill>
-          </a:ln>
-        </p:spPr>
-        <p:style>
-          <a:lnRef idx="1">
-            <a:schemeClr val="accent1"/>
-          </a:lnRef>
-          <a:fillRef idx="3">
-            <a:schemeClr val="accent1"/>
-          </a:fillRef>
-          <a:effectRef idx="2">
-            <a:schemeClr val="accent1"/>
-          </a:effectRef>
-          <a:fontRef idx="minor">
-            <a:schemeClr val="lt1"/>
-          </a:fontRef>
-        </p:style>
-        <p:txBody>
-          <a:bodyPr rtlCol="0" anchor="ctr" lIns="54864" rIns="54864"/>
-          <a:lstStyle/>
-          <a:p>
-            <a:pPr algn="ctr">
-              <a:defRPr sz="819">
-                <a:solidFill>
-                  <a:srgbClr val="000000"/>
-                </a:solidFill>
-                <a:latin typeface="Times New Roman"/>
-              </a:defRPr>
-            </a:pPr>
-            <a:r>
-              <a:t>9.3 自主集群与下一代 AI</a:t>
-            </a:r>
-          </a:p>
-        </p:txBody>
-      </p:sp>
-      <p:sp>
-        <p:nvSpPr>
-          <p:cNvPr id="80" name="TextBox 79"/>
-          <p:cNvSpPr txBox="1"/>
-          <p:nvPr/>
-        </p:nvSpPr>
-        <p:spPr>
-          <a:xfrm>
-            <a:off x="548640" y="6236208"/>
-            <a:ext cx="11094415" cy="365760"/>
-          </a:xfrm>
-          <a:prstGeom prst="rect">
-            <a:avLst/>
-          </a:prstGeom>
-          <a:noFill/>
-        </p:spPr>
-        <p:txBody>
-          <a:bodyPr wrap="none">
-            <a:spAutoFit/>
-          </a:bodyPr>
-          <a:lstStyle/>
-          <a:p>
-            <a:pPr>
-              <a:defRPr sz="950" b="1">
-                <a:solidFill>
-                  <a:srgbClr val="000000"/>
-                </a:solidFill>
-                <a:latin typeface="Times New Roman"/>
-              </a:defRPr>
-            </a:pPr>
-            <a:r>
-              <a:t>图 1.1：专著四阶段端到端技术路线树状映射图（全书 9 章从物理采集、三维重建、AI 感知到数字孪生大模型决策）</a:t>
+              <a:t>• 自主集群展望</a:t>
             </a:r>
           </a:p>
         </p:txBody>
@@ -6949,28 +6864,47 @@
       <p:grpSpPr/>
       <p:sp>
         <p:nvSpPr>
-          <p:cNvPr id="2" name="TextBox 1"/>
-          <p:cNvSpPr txBox="1"/>
-          <p:nvPr/>
-        </p:nvSpPr>
-        <p:spPr>
-          <a:xfrm>
-            <a:off x="548640" y="365760"/>
-            <a:ext cx="11094415" cy="777240"/>
-          </a:xfrm>
-          <a:prstGeom prst="rect">
-            <a:avLst/>
-          </a:prstGeom>
-          <a:noFill/>
-        </p:spPr>
-        <p:txBody>
-          <a:bodyPr wrap="square" lIns="0" tIns="0" rIns="0" bIns="0">
-            <a:spAutoFit/>
-          </a:bodyPr>
-          <a:lstStyle/>
-          <a:p>
-            <a:pPr>
-              <a:defRPr sz="2000" b="1">
+          <p:cNvPr id="2" name="Rounded Rectangle 1"/>
+          <p:cNvSpPr/>
+          <p:nvPr/>
+        </p:nvSpPr>
+        <p:spPr>
+          <a:xfrm>
+            <a:off x="548640" y="548640"/>
+            <a:ext cx="2560320" cy="438912"/>
+          </a:xfrm>
+          <a:prstGeom prst="roundRect">
+            <a:avLst/>
+          </a:prstGeom>
+          <a:solidFill>
+            <a:srgbClr val="FFFFFF"/>
+          </a:solidFill>
+          <a:ln w="19050">
+            <a:solidFill>
+              <a:srgbClr val="000000"/>
+            </a:solidFill>
+          </a:ln>
+        </p:spPr>
+        <p:style>
+          <a:lnRef idx="1">
+            <a:schemeClr val="accent1"/>
+          </a:lnRef>
+          <a:fillRef idx="3">
+            <a:schemeClr val="accent1"/>
+          </a:fillRef>
+          <a:effectRef idx="2">
+            <a:schemeClr val="accent1"/>
+          </a:effectRef>
+          <a:fontRef idx="minor">
+            <a:schemeClr val="lt1"/>
+          </a:fontRef>
+        </p:style>
+        <p:txBody>
+          <a:bodyPr rtlCol="0" anchor="ctr" lIns="45720" rIns="45720"/>
+          <a:lstStyle/>
+          <a:p>
+            <a:pPr algn="ctr">
+              <a:defRPr sz="1300" b="1">
                 <a:solidFill>
                   <a:srgbClr val="000000"/>
                 </a:solidFill>
@@ -6978,34 +6912,64 @@
               </a:defRPr>
             </a:pPr>
             <a:r>
-              <a:t>Monograph Overall Structure and Four-Phase Chapter Tree Roadmap</a:t>
-            </a:r>
-          </a:p>
-          <a:p>
-            <a:pPr>
-              <a:defRPr sz="1100">
-                <a:solidFill>
-                  <a:srgbClr val="5A5A5A"/>
-                </a:solidFill>
-                <a:latin typeface="Times New Roman"/>
-              </a:defRPr>
-            </a:pPr>
-            <a:r>
-              <a:t>AI-Driven UAV Building Inspection: An End-to-End Framework from Autonomous Flight to Digital Twins</a:t>
-            </a:r>
-          </a:p>
-        </p:txBody>
-      </p:sp>
-      <p:sp>
-        <p:nvSpPr>
-          <p:cNvPr id="3" name="Rounded Rectangle 2"/>
-          <p:cNvSpPr/>
-          <p:nvPr/>
-        </p:nvSpPr>
-        <p:spPr>
-          <a:xfrm>
-            <a:off x="548640" y="1234440"/>
-            <a:ext cx="2560320" cy="347472"/>
+              <a:t>Phase I: Data Acquisition</a:t>
+            </a:r>
+          </a:p>
+        </p:txBody>
+      </p:sp>
+      <p:sp>
+        <p:nvSpPr>
+          <p:cNvPr id="3" name="Rectangle 2"/>
+          <p:cNvSpPr/>
+          <p:nvPr/>
+        </p:nvSpPr>
+        <p:spPr>
+          <a:xfrm>
+            <a:off x="1824228" y="987552"/>
+            <a:ext cx="9144" cy="3218688"/>
+          </a:xfrm>
+          <a:prstGeom prst="rect">
+            <a:avLst/>
+          </a:prstGeom>
+          <a:solidFill>
+            <a:srgbClr val="323232"/>
+          </a:solidFill>
+          <a:ln>
+            <a:noFill/>
+          </a:ln>
+        </p:spPr>
+        <p:style>
+          <a:lnRef idx="1">
+            <a:schemeClr val="accent1"/>
+          </a:lnRef>
+          <a:fillRef idx="3">
+            <a:schemeClr val="accent1"/>
+          </a:fillRef>
+          <a:effectRef idx="2">
+            <a:schemeClr val="accent1"/>
+          </a:effectRef>
+          <a:fontRef idx="minor">
+            <a:schemeClr val="lt1"/>
+          </a:fontRef>
+        </p:style>
+        <p:txBody>
+          <a:bodyPr rtlCol="0" anchor="ctr"/>
+          <a:lstStyle/>
+          <a:p>
+            <a:pPr algn="ctr"/>
+          </a:p>
+        </p:txBody>
+      </p:sp>
+      <p:sp>
+        <p:nvSpPr>
+          <p:cNvPr id="4" name="Rounded Rectangle 3"/>
+          <p:cNvSpPr/>
+          <p:nvPr/>
+        </p:nvSpPr>
+        <p:spPr>
+          <a:xfrm>
+            <a:off x="640080" y="1371600"/>
+            <a:ext cx="2377440" cy="384048"/>
           </a:xfrm>
           <a:prstGeom prst="roundRect">
             <a:avLst/>
@@ -7013,7 +6977,7 @@
           <a:solidFill>
             <a:srgbClr val="FFFFFF"/>
           </a:solidFill>
-          <a:ln w="15875">
+          <a:ln w="15240">
             <a:solidFill>
               <a:srgbClr val="000000"/>
             </a:solidFill>
@@ -7034,11 +6998,11 @@
           </a:fontRef>
         </p:style>
         <p:txBody>
-          <a:bodyPr rtlCol="0" anchor="ctr" lIns="45720" rIns="45720"/>
+          <a:bodyPr rtlCol="0" anchor="ctr" lIns="73152" rIns="73152"/>
           <a:lstStyle/>
           <a:p>
             <a:pPr algn="ctr">
-              <a:defRPr sz="1000" b="1">
+              <a:defRPr sz="1150" b="1">
                 <a:solidFill>
                   <a:srgbClr val="000000"/>
                 </a:solidFill>
@@ -7046,27 +7010,27 @@
               </a:defRPr>
             </a:pPr>
             <a:r>
-              <a:t>Phase I: Data Acquisition</a:t>
-            </a:r>
-          </a:p>
-        </p:txBody>
-      </p:sp>
-      <p:sp>
-        <p:nvSpPr>
-          <p:cNvPr id="4" name="Rectangle 3"/>
-          <p:cNvSpPr/>
-          <p:nvPr/>
-        </p:nvSpPr>
-        <p:spPr>
-          <a:xfrm>
-            <a:off x="1824228" y="1581912"/>
-            <a:ext cx="9144" cy="2852928"/>
+              <a:t>Chapter 2: Task Planning</a:t>
+            </a:r>
+          </a:p>
+        </p:txBody>
+      </p:sp>
+      <p:sp>
+        <p:nvSpPr>
+          <p:cNvPr id="5" name="Rectangle 4"/>
+          <p:cNvSpPr/>
+          <p:nvPr/>
+        </p:nvSpPr>
+        <p:spPr>
+          <a:xfrm>
+            <a:off x="731520" y="1773936"/>
+            <a:ext cx="7315" cy="749808"/>
           </a:xfrm>
           <a:prstGeom prst="rect">
             <a:avLst/>
           </a:prstGeom>
           <a:solidFill>
-            <a:srgbClr val="282828"/>
+            <a:srgbClr val="323232"/>
           </a:solidFill>
           <a:ln>
             <a:noFill/>
@@ -7096,14 +7060,57 @@
       </p:sp>
       <p:sp>
         <p:nvSpPr>
-          <p:cNvPr id="5" name="Rounded Rectangle 4"/>
-          <p:cNvSpPr/>
-          <p:nvPr/>
-        </p:nvSpPr>
-        <p:spPr>
-          <a:xfrm>
-            <a:off x="662940" y="1920240"/>
-            <a:ext cx="2331720" cy="329184"/>
+          <p:cNvPr id="6" name="Rectangle 5"/>
+          <p:cNvSpPr/>
+          <p:nvPr/>
+        </p:nvSpPr>
+        <p:spPr>
+          <a:xfrm>
+            <a:off x="731520" y="1938528"/>
+            <a:ext cx="82296" cy="7315"/>
+          </a:xfrm>
+          <a:prstGeom prst="rect">
+            <a:avLst/>
+          </a:prstGeom>
+          <a:solidFill>
+            <a:srgbClr val="323232"/>
+          </a:solidFill>
+          <a:ln>
+            <a:noFill/>
+          </a:ln>
+        </p:spPr>
+        <p:style>
+          <a:lnRef idx="1">
+            <a:schemeClr val="accent1"/>
+          </a:lnRef>
+          <a:fillRef idx="3">
+            <a:schemeClr val="accent1"/>
+          </a:fillRef>
+          <a:effectRef idx="2">
+            <a:schemeClr val="accent1"/>
+          </a:effectRef>
+          <a:fontRef idx="minor">
+            <a:schemeClr val="lt1"/>
+          </a:fontRef>
+        </p:style>
+        <p:txBody>
+          <a:bodyPr rtlCol="0" anchor="ctr"/>
+          <a:lstStyle/>
+          <a:p>
+            <a:pPr algn="ctr"/>
+          </a:p>
+        </p:txBody>
+      </p:sp>
+      <p:sp>
+        <p:nvSpPr>
+          <p:cNvPr id="7" name="Rounded Rectangle 6"/>
+          <p:cNvSpPr/>
+          <p:nvPr/>
+        </p:nvSpPr>
+        <p:spPr>
+          <a:xfrm>
+            <a:off x="822960" y="1828800"/>
+            <a:ext cx="2084831" cy="256032"/>
           </a:xfrm>
           <a:prstGeom prst="roundRect">
             <a:avLst/>
@@ -7111,9 +7118,9 @@
           <a:solidFill>
             <a:srgbClr val="FFFFFF"/>
           </a:solidFill>
-          <a:ln w="12700">
+          <a:ln w="9525">
             <a:solidFill>
-              <a:srgbClr val="000000"/>
+              <a:srgbClr val="323232"/>
             </a:solidFill>
           </a:ln>
         </p:spPr>
@@ -7136,7 +7143,7 @@
           <a:lstStyle/>
           <a:p>
             <a:pPr algn="ctr">
-              <a:defRPr sz="919" b="1">
+              <a:defRPr sz="1050">
                 <a:solidFill>
                   <a:srgbClr val="000000"/>
                 </a:solidFill>
@@ -7144,27 +7151,27 @@
               </a:defRPr>
             </a:pPr>
             <a:r>
-              <a:t>Chapter 2: Task Planning (Xinyi Wang)</a:t>
-            </a:r>
-          </a:p>
-        </p:txBody>
-      </p:sp>
-      <p:sp>
-        <p:nvSpPr>
-          <p:cNvPr id="6" name="Rectangle 5"/>
-          <p:cNvSpPr/>
-          <p:nvPr/>
-        </p:nvSpPr>
-        <p:spPr>
-          <a:xfrm>
-            <a:off x="736092" y="2249424"/>
-            <a:ext cx="7315" cy="621792"/>
+              <a:t>• Multi-UAV Routing</a:t>
+            </a:r>
+          </a:p>
+        </p:txBody>
+      </p:sp>
+      <p:sp>
+        <p:nvSpPr>
+          <p:cNvPr id="8" name="Rectangle 7"/>
+          <p:cNvSpPr/>
+          <p:nvPr/>
+        </p:nvSpPr>
+        <p:spPr>
+          <a:xfrm>
+            <a:off x="731520" y="2249424"/>
+            <a:ext cx="82296" cy="7315"/>
           </a:xfrm>
           <a:prstGeom prst="rect">
             <a:avLst/>
           </a:prstGeom>
           <a:solidFill>
-            <a:srgbClr val="282828"/>
+            <a:srgbClr val="323232"/>
           </a:solidFill>
           <a:ln>
             <a:noFill/>
@@ -7194,57 +7201,14 @@
       </p:sp>
       <p:sp>
         <p:nvSpPr>
-          <p:cNvPr id="7" name="Rectangle 6"/>
-          <p:cNvSpPr/>
-          <p:nvPr/>
-        </p:nvSpPr>
-        <p:spPr>
-          <a:xfrm>
-            <a:off x="736092" y="2395728"/>
-            <a:ext cx="73152" cy="7315"/>
-          </a:xfrm>
-          <a:prstGeom prst="rect">
-            <a:avLst/>
-          </a:prstGeom>
-          <a:solidFill>
-            <a:srgbClr val="282828"/>
-          </a:solidFill>
-          <a:ln>
-            <a:noFill/>
-          </a:ln>
-        </p:spPr>
-        <p:style>
-          <a:lnRef idx="1">
-            <a:schemeClr val="accent1"/>
-          </a:lnRef>
-          <a:fillRef idx="3">
-            <a:schemeClr val="accent1"/>
-          </a:fillRef>
-          <a:effectRef idx="2">
-            <a:schemeClr val="accent1"/>
-          </a:effectRef>
-          <a:fontRef idx="minor">
-            <a:schemeClr val="lt1"/>
-          </a:fontRef>
-        </p:style>
-        <p:txBody>
-          <a:bodyPr rtlCol="0" anchor="ctr"/>
-          <a:lstStyle/>
-          <a:p>
-            <a:pPr algn="ctr"/>
-          </a:p>
-        </p:txBody>
-      </p:sp>
-      <p:sp>
-        <p:nvSpPr>
-          <p:cNvPr id="8" name="Rounded Rectangle 7"/>
-          <p:cNvSpPr/>
-          <p:nvPr/>
-        </p:nvSpPr>
-        <p:spPr>
-          <a:xfrm>
-            <a:off x="827532" y="2304288"/>
-            <a:ext cx="2084831" cy="219456"/>
+          <p:cNvPr id="9" name="Rounded Rectangle 8"/>
+          <p:cNvSpPr/>
+          <p:nvPr/>
+        </p:nvSpPr>
+        <p:spPr>
+          <a:xfrm>
+            <a:off x="822960" y="2139696"/>
+            <a:ext cx="2084831" cy="256032"/>
           </a:xfrm>
           <a:prstGeom prst="roundRect">
             <a:avLst/>
@@ -7252,9 +7216,9 @@
           <a:solidFill>
             <a:srgbClr val="FFFFFF"/>
           </a:solidFill>
-          <a:ln w="6350">
+          <a:ln w="9525">
             <a:solidFill>
-              <a:srgbClr val="282828"/>
+              <a:srgbClr val="323232"/>
             </a:solidFill>
           </a:ln>
         </p:spPr>
@@ -7273,11 +7237,11 @@
           </a:fontRef>
         </p:style>
         <p:txBody>
-          <a:bodyPr rtlCol="0" anchor="ctr" lIns="54864" rIns="54864"/>
+          <a:bodyPr rtlCol="0" anchor="ctr" lIns="73152" rIns="73152"/>
           <a:lstStyle/>
           <a:p>
             <a:pPr algn="ctr">
-              <a:defRPr sz="819">
+              <a:defRPr sz="1050">
                 <a:solidFill>
                   <a:srgbClr val="000000"/>
                 </a:solidFill>
@@ -7285,27 +7249,27 @@
               </a:defRPr>
             </a:pPr>
             <a:r>
-              <a:t>2.2 Multi-UAV Task Allocation</a:t>
-            </a:r>
-          </a:p>
-        </p:txBody>
-      </p:sp>
-      <p:sp>
-        <p:nvSpPr>
-          <p:cNvPr id="9" name="Rectangle 8"/>
-          <p:cNvSpPr/>
-          <p:nvPr/>
-        </p:nvSpPr>
-        <p:spPr>
-          <a:xfrm>
-            <a:off x="736092" y="2651760"/>
-            <a:ext cx="73152" cy="7315"/>
+              <a:t>• Coverage Path Opt.</a:t>
+            </a:r>
+          </a:p>
+        </p:txBody>
+      </p:sp>
+      <p:sp>
+        <p:nvSpPr>
+          <p:cNvPr id="10" name="Rectangle 9"/>
+          <p:cNvSpPr/>
+          <p:nvPr/>
+        </p:nvSpPr>
+        <p:spPr>
+          <a:xfrm>
+            <a:off x="731520" y="2560320"/>
+            <a:ext cx="82296" cy="7315"/>
           </a:xfrm>
           <a:prstGeom prst="rect">
             <a:avLst/>
           </a:prstGeom>
           <a:solidFill>
-            <a:srgbClr val="282828"/>
+            <a:srgbClr val="323232"/>
           </a:solidFill>
           <a:ln>
             <a:noFill/>
@@ -7335,14 +7299,14 @@
       </p:sp>
       <p:sp>
         <p:nvSpPr>
-          <p:cNvPr id="10" name="Rounded Rectangle 9"/>
-          <p:cNvSpPr/>
-          <p:nvPr/>
-        </p:nvSpPr>
-        <p:spPr>
-          <a:xfrm>
-            <a:off x="827532" y="2560320"/>
-            <a:ext cx="2084831" cy="219456"/>
+          <p:cNvPr id="11" name="Rounded Rectangle 10"/>
+          <p:cNvSpPr/>
+          <p:nvPr/>
+        </p:nvSpPr>
+        <p:spPr>
+          <a:xfrm>
+            <a:off x="822960" y="2450592"/>
+            <a:ext cx="2084831" cy="256032"/>
           </a:xfrm>
           <a:prstGeom prst="roundRect">
             <a:avLst/>
@@ -7350,9 +7314,9 @@
           <a:solidFill>
             <a:srgbClr val="FFFFFF"/>
           </a:solidFill>
-          <a:ln w="6350">
+          <a:ln w="9525">
             <a:solidFill>
-              <a:srgbClr val="282828"/>
+              <a:srgbClr val="323232"/>
             </a:solidFill>
           </a:ln>
         </p:spPr>
@@ -7371,11 +7335,11 @@
           </a:fontRef>
         </p:style>
         <p:txBody>
-          <a:bodyPr rtlCol="0" anchor="ctr" lIns="54864" rIns="54864"/>
+          <a:bodyPr rtlCol="0" anchor="ctr" lIns="73152" rIns="73152"/>
           <a:lstStyle/>
           <a:p>
             <a:pPr algn="ctr">
-              <a:defRPr sz="819">
+              <a:defRPr sz="1050">
                 <a:solidFill>
                   <a:srgbClr val="000000"/>
                 </a:solidFill>
@@ -7383,51 +7347,8 @@
               </a:defRPr>
             </a:pPr>
             <a:r>
-              <a:t>2.4 Façade Coverage Path Planning</a:t>
-            </a:r>
-          </a:p>
-        </p:txBody>
-      </p:sp>
-      <p:sp>
-        <p:nvSpPr>
-          <p:cNvPr id="11" name="Rectangle 10"/>
-          <p:cNvSpPr/>
-          <p:nvPr/>
-        </p:nvSpPr>
-        <p:spPr>
-          <a:xfrm>
-            <a:off x="736092" y="2907792"/>
-            <a:ext cx="73152" cy="7315"/>
-          </a:xfrm>
-          <a:prstGeom prst="rect">
-            <a:avLst/>
-          </a:prstGeom>
-          <a:solidFill>
-            <a:srgbClr val="282828"/>
-          </a:solidFill>
-          <a:ln>
-            <a:noFill/>
-          </a:ln>
-        </p:spPr>
-        <p:style>
-          <a:lnRef idx="1">
-            <a:schemeClr val="accent1"/>
-          </a:lnRef>
-          <a:fillRef idx="3">
-            <a:schemeClr val="accent1"/>
-          </a:fillRef>
-          <a:effectRef idx="2">
-            <a:schemeClr val="accent1"/>
-          </a:effectRef>
-          <a:fontRef idx="minor">
-            <a:schemeClr val="lt1"/>
-          </a:fontRef>
-        </p:style>
-        <p:txBody>
-          <a:bodyPr rtlCol="0" anchor="ctr"/>
-          <a:lstStyle/>
-          <a:p>
-            <a:pPr algn="ctr"/>
+              <a:t>• Energy Management</a:t>
+            </a:r>
           </a:p>
         </p:txBody>
       </p:sp>
@@ -7439,8 +7360,8 @@
         </p:nvSpPr>
         <p:spPr>
           <a:xfrm>
-            <a:off x="827532" y="2816352"/>
-            <a:ext cx="2084831" cy="219456"/>
+            <a:off x="640080" y="4206240"/>
+            <a:ext cx="2377440" cy="384048"/>
           </a:xfrm>
           <a:prstGeom prst="roundRect">
             <a:avLst/>
@@ -7448,9 +7369,9 @@
           <a:solidFill>
             <a:srgbClr val="FFFFFF"/>
           </a:solidFill>
-          <a:ln w="6350">
+          <a:ln w="15240">
             <a:solidFill>
-              <a:srgbClr val="282828"/>
+              <a:srgbClr val="000000"/>
             </a:solidFill>
           </a:ln>
         </p:spPr>
@@ -7469,11 +7390,11 @@
           </a:fontRef>
         </p:style>
         <p:txBody>
-          <a:bodyPr rtlCol="0" anchor="ctr" lIns="54864" rIns="54864"/>
+          <a:bodyPr rtlCol="0" anchor="ctr" lIns="73152" rIns="73152"/>
           <a:lstStyle/>
           <a:p>
             <a:pPr algn="ctr">
-              <a:defRPr sz="819">
+              <a:defRPr sz="1150" b="1">
                 <a:solidFill>
                   <a:srgbClr val="000000"/>
                 </a:solidFill>
@@ -7481,21 +7402,107 @@
               </a:defRPr>
             </a:pPr>
             <a:r>
-              <a:t>2.5 Energy-Aware Optimization</a:t>
-            </a:r>
-          </a:p>
-        </p:txBody>
-      </p:sp>
-      <p:sp>
-        <p:nvSpPr>
-          <p:cNvPr id="13" name="Rounded Rectangle 12"/>
-          <p:cNvSpPr/>
-          <p:nvPr/>
-        </p:nvSpPr>
-        <p:spPr>
-          <a:xfrm>
-            <a:off x="662940" y="4434840"/>
-            <a:ext cx="2331720" cy="329184"/>
+              <a:t>Chapter 3: Motion Planning</a:t>
+            </a:r>
+          </a:p>
+        </p:txBody>
+      </p:sp>
+      <p:sp>
+        <p:nvSpPr>
+          <p:cNvPr id="13" name="Rectangle 12"/>
+          <p:cNvSpPr/>
+          <p:nvPr/>
+        </p:nvSpPr>
+        <p:spPr>
+          <a:xfrm>
+            <a:off x="731520" y="4608576"/>
+            <a:ext cx="7315" cy="749808"/>
+          </a:xfrm>
+          <a:prstGeom prst="rect">
+            <a:avLst/>
+          </a:prstGeom>
+          <a:solidFill>
+            <a:srgbClr val="323232"/>
+          </a:solidFill>
+          <a:ln>
+            <a:noFill/>
+          </a:ln>
+        </p:spPr>
+        <p:style>
+          <a:lnRef idx="1">
+            <a:schemeClr val="accent1"/>
+          </a:lnRef>
+          <a:fillRef idx="3">
+            <a:schemeClr val="accent1"/>
+          </a:fillRef>
+          <a:effectRef idx="2">
+            <a:schemeClr val="accent1"/>
+          </a:effectRef>
+          <a:fontRef idx="minor">
+            <a:schemeClr val="lt1"/>
+          </a:fontRef>
+        </p:style>
+        <p:txBody>
+          <a:bodyPr rtlCol="0" anchor="ctr"/>
+          <a:lstStyle/>
+          <a:p>
+            <a:pPr algn="ctr"/>
+          </a:p>
+        </p:txBody>
+      </p:sp>
+      <p:sp>
+        <p:nvSpPr>
+          <p:cNvPr id="14" name="Rectangle 13"/>
+          <p:cNvSpPr/>
+          <p:nvPr/>
+        </p:nvSpPr>
+        <p:spPr>
+          <a:xfrm>
+            <a:off x="731520" y="4773168"/>
+            <a:ext cx="82296" cy="7315"/>
+          </a:xfrm>
+          <a:prstGeom prst="rect">
+            <a:avLst/>
+          </a:prstGeom>
+          <a:solidFill>
+            <a:srgbClr val="323232"/>
+          </a:solidFill>
+          <a:ln>
+            <a:noFill/>
+          </a:ln>
+        </p:spPr>
+        <p:style>
+          <a:lnRef idx="1">
+            <a:schemeClr val="accent1"/>
+          </a:lnRef>
+          <a:fillRef idx="3">
+            <a:schemeClr val="accent1"/>
+          </a:fillRef>
+          <a:effectRef idx="2">
+            <a:schemeClr val="accent1"/>
+          </a:effectRef>
+          <a:fontRef idx="minor">
+            <a:schemeClr val="lt1"/>
+          </a:fontRef>
+        </p:style>
+        <p:txBody>
+          <a:bodyPr rtlCol="0" anchor="ctr"/>
+          <a:lstStyle/>
+          <a:p>
+            <a:pPr algn="ctr"/>
+          </a:p>
+        </p:txBody>
+      </p:sp>
+      <p:sp>
+        <p:nvSpPr>
+          <p:cNvPr id="15" name="Rounded Rectangle 14"/>
+          <p:cNvSpPr/>
+          <p:nvPr/>
+        </p:nvSpPr>
+        <p:spPr>
+          <a:xfrm>
+            <a:off x="822960" y="4663440"/>
+            <a:ext cx="2084831" cy="256032"/>
           </a:xfrm>
           <a:prstGeom prst="roundRect">
             <a:avLst/>
@@ -7503,9 +7510,9 @@
           <a:solidFill>
             <a:srgbClr val="FFFFFF"/>
           </a:solidFill>
-          <a:ln w="12700">
+          <a:ln w="9525">
             <a:solidFill>
-              <a:srgbClr val="000000"/>
+              <a:srgbClr val="323232"/>
             </a:solidFill>
           </a:ln>
         </p:spPr>
@@ -7528,7 +7535,7 @@
           <a:lstStyle/>
           <a:p>
             <a:pPr algn="ctr">
-              <a:defRPr sz="919" b="1">
+              <a:defRPr sz="1050">
                 <a:solidFill>
                   <a:srgbClr val="000000"/>
                 </a:solidFill>
@@ -7536,27 +7543,27 @@
               </a:defRPr>
             </a:pPr>
             <a:r>
-              <a:t>Chapter 3: Motion Planning (Chuanxiang Gao)</a:t>
-            </a:r>
-          </a:p>
-        </p:txBody>
-      </p:sp>
-      <p:sp>
-        <p:nvSpPr>
-          <p:cNvPr id="14" name="Rectangle 13"/>
-          <p:cNvSpPr/>
-          <p:nvPr/>
-        </p:nvSpPr>
-        <p:spPr>
-          <a:xfrm>
-            <a:off x="736092" y="4764024"/>
-            <a:ext cx="7315" cy="621792"/>
+              <a:t>• Mapping &amp; Localiz.</a:t>
+            </a:r>
+          </a:p>
+        </p:txBody>
+      </p:sp>
+      <p:sp>
+        <p:nvSpPr>
+          <p:cNvPr id="16" name="Rectangle 15"/>
+          <p:cNvSpPr/>
+          <p:nvPr/>
+        </p:nvSpPr>
+        <p:spPr>
+          <a:xfrm>
+            <a:off x="731520" y="5084064"/>
+            <a:ext cx="82296" cy="7315"/>
           </a:xfrm>
           <a:prstGeom prst="rect">
             <a:avLst/>
           </a:prstGeom>
           <a:solidFill>
-            <a:srgbClr val="282828"/>
+            <a:srgbClr val="323232"/>
           </a:solidFill>
           <a:ln>
             <a:noFill/>
@@ -7586,57 +7593,14 @@
       </p:sp>
       <p:sp>
         <p:nvSpPr>
-          <p:cNvPr id="15" name="Rectangle 14"/>
-          <p:cNvSpPr/>
-          <p:nvPr/>
-        </p:nvSpPr>
-        <p:spPr>
-          <a:xfrm>
-            <a:off x="736092" y="4910328"/>
-            <a:ext cx="73152" cy="7315"/>
-          </a:xfrm>
-          <a:prstGeom prst="rect">
-            <a:avLst/>
-          </a:prstGeom>
-          <a:solidFill>
-            <a:srgbClr val="282828"/>
-          </a:solidFill>
-          <a:ln>
-            <a:noFill/>
-          </a:ln>
-        </p:spPr>
-        <p:style>
-          <a:lnRef idx="1">
-            <a:schemeClr val="accent1"/>
-          </a:lnRef>
-          <a:fillRef idx="3">
-            <a:schemeClr val="accent1"/>
-          </a:fillRef>
-          <a:effectRef idx="2">
-            <a:schemeClr val="accent1"/>
-          </a:effectRef>
-          <a:fontRef idx="minor">
-            <a:schemeClr val="lt1"/>
-          </a:fontRef>
-        </p:style>
-        <p:txBody>
-          <a:bodyPr rtlCol="0" anchor="ctr"/>
-          <a:lstStyle/>
-          <a:p>
-            <a:pPr algn="ctr"/>
-          </a:p>
-        </p:txBody>
-      </p:sp>
-      <p:sp>
-        <p:nvSpPr>
-          <p:cNvPr id="16" name="Rounded Rectangle 15"/>
-          <p:cNvSpPr/>
-          <p:nvPr/>
-        </p:nvSpPr>
-        <p:spPr>
-          <a:xfrm>
-            <a:off x="827532" y="4818888"/>
-            <a:ext cx="2084831" cy="219456"/>
+          <p:cNvPr id="17" name="Rounded Rectangle 16"/>
+          <p:cNvSpPr/>
+          <p:nvPr/>
+        </p:nvSpPr>
+        <p:spPr>
+          <a:xfrm>
+            <a:off x="822960" y="4974336"/>
+            <a:ext cx="2084831" cy="256032"/>
           </a:xfrm>
           <a:prstGeom prst="roundRect">
             <a:avLst/>
@@ -7644,9 +7608,9 @@
           <a:solidFill>
             <a:srgbClr val="FFFFFF"/>
           </a:solidFill>
-          <a:ln w="6350">
+          <a:ln w="9525">
             <a:solidFill>
-              <a:srgbClr val="282828"/>
+              <a:srgbClr val="323232"/>
             </a:solidFill>
           </a:ln>
         </p:spPr>
@@ -7665,11 +7629,11 @@
           </a:fontRef>
         </p:style>
         <p:txBody>
-          <a:bodyPr rtlCol="0" anchor="ctr" lIns="54864" rIns="54864"/>
+          <a:bodyPr rtlCol="0" anchor="ctr" lIns="73152" rIns="73152"/>
           <a:lstStyle/>
           <a:p>
             <a:pPr algn="ctr">
-              <a:defRPr sz="819">
+              <a:defRPr sz="1050">
                 <a:solidFill>
                   <a:srgbClr val="000000"/>
                 </a:solidFill>
@@ -7677,27 +7641,27 @@
               </a:defRPr>
             </a:pPr>
             <a:r>
-              <a:t>3.2 Real-time Mapping &amp; Localiz.</a:t>
-            </a:r>
-          </a:p>
-        </p:txBody>
-      </p:sp>
-      <p:sp>
-        <p:nvSpPr>
-          <p:cNvPr id="17" name="Rectangle 16"/>
-          <p:cNvSpPr/>
-          <p:nvPr/>
-        </p:nvSpPr>
-        <p:spPr>
-          <a:xfrm>
-            <a:off x="736092" y="5166360"/>
-            <a:ext cx="73152" cy="7315"/>
+              <a:t>• Obstacle Avoidance</a:t>
+            </a:r>
+          </a:p>
+        </p:txBody>
+      </p:sp>
+      <p:sp>
+        <p:nvSpPr>
+          <p:cNvPr id="18" name="Rectangle 17"/>
+          <p:cNvSpPr/>
+          <p:nvPr/>
+        </p:nvSpPr>
+        <p:spPr>
+          <a:xfrm>
+            <a:off x="731520" y="5394960"/>
+            <a:ext cx="82296" cy="7315"/>
           </a:xfrm>
           <a:prstGeom prst="rect">
             <a:avLst/>
           </a:prstGeom>
           <a:solidFill>
-            <a:srgbClr val="282828"/>
+            <a:srgbClr val="323232"/>
           </a:solidFill>
           <a:ln>
             <a:noFill/>
@@ -7727,14 +7691,14 @@
       </p:sp>
       <p:sp>
         <p:nvSpPr>
-          <p:cNvPr id="18" name="Rounded Rectangle 17"/>
-          <p:cNvSpPr/>
-          <p:nvPr/>
-        </p:nvSpPr>
-        <p:spPr>
-          <a:xfrm>
-            <a:off x="827532" y="5074920"/>
-            <a:ext cx="2084831" cy="219456"/>
+          <p:cNvPr id="19" name="Rounded Rectangle 18"/>
+          <p:cNvSpPr/>
+          <p:nvPr/>
+        </p:nvSpPr>
+        <p:spPr>
+          <a:xfrm>
+            <a:off x="822960" y="5285232"/>
+            <a:ext cx="2084831" cy="256032"/>
           </a:xfrm>
           <a:prstGeom prst="roundRect">
             <a:avLst/>
@@ -7742,9 +7706,9 @@
           <a:solidFill>
             <a:srgbClr val="FFFFFF"/>
           </a:solidFill>
-          <a:ln w="6350">
+          <a:ln w="9525">
             <a:solidFill>
-              <a:srgbClr val="282828"/>
+              <a:srgbClr val="323232"/>
             </a:solidFill>
           </a:ln>
         </p:spPr>
@@ -7763,11 +7727,11 @@
           </a:fontRef>
         </p:style>
         <p:txBody>
-          <a:bodyPr rtlCol="0" anchor="ctr" lIns="54864" rIns="54864"/>
+          <a:bodyPr rtlCol="0" anchor="ctr" lIns="73152" rIns="73152"/>
           <a:lstStyle/>
           <a:p>
             <a:pPr algn="ctr">
-              <a:defRPr sz="819">
+              <a:defRPr sz="1050">
                 <a:solidFill>
                   <a:srgbClr val="000000"/>
                 </a:solidFill>
@@ -7775,27 +7739,27 @@
               </a:defRPr>
             </a:pPr>
             <a:r>
-              <a:t>3.3 Obstacle Trajectory Generation</a:t>
-            </a:r>
-          </a:p>
-        </p:txBody>
-      </p:sp>
-      <p:sp>
-        <p:nvSpPr>
-          <p:cNvPr id="19" name="Rectangle 18"/>
-          <p:cNvSpPr/>
-          <p:nvPr/>
-        </p:nvSpPr>
-        <p:spPr>
-          <a:xfrm>
-            <a:off x="736092" y="5422392"/>
-            <a:ext cx="73152" cy="7315"/>
-          </a:xfrm>
-          <a:prstGeom prst="rect">
-            <a:avLst/>
-          </a:prstGeom>
-          <a:solidFill>
-            <a:srgbClr val="282828"/>
+              <a:t>• Wind Control</a:t>
+            </a:r>
+          </a:p>
+        </p:txBody>
+      </p:sp>
+      <p:sp>
+        <p:nvSpPr>
+          <p:cNvPr id="20" name="Right Arrow 19"/>
+          <p:cNvSpPr/>
+          <p:nvPr/>
+        </p:nvSpPr>
+        <p:spPr>
+          <a:xfrm>
+            <a:off x="3127248" y="658368"/>
+            <a:ext cx="182880" cy="219456"/>
+          </a:xfrm>
+          <a:prstGeom prst="rightArrow">
+            <a:avLst/>
+          </a:prstGeom>
+          <a:solidFill>
+            <a:srgbClr val="000000"/>
           </a:solidFill>
           <a:ln>
             <a:noFill/>
@@ -7825,14 +7789,14 @@
       </p:sp>
       <p:sp>
         <p:nvSpPr>
-          <p:cNvPr id="20" name="Rounded Rectangle 19"/>
-          <p:cNvSpPr/>
-          <p:nvPr/>
-        </p:nvSpPr>
-        <p:spPr>
-          <a:xfrm>
-            <a:off x="827532" y="5330952"/>
-            <a:ext cx="2084831" cy="219456"/>
+          <p:cNvPr id="21" name="Rounded Rectangle 20"/>
+          <p:cNvSpPr/>
+          <p:nvPr/>
+        </p:nvSpPr>
+        <p:spPr>
+          <a:xfrm>
+            <a:off x="3328416" y="548640"/>
+            <a:ext cx="2560320" cy="438912"/>
           </a:xfrm>
           <a:prstGeom prst="roundRect">
             <a:avLst/>
@@ -7840,9 +7804,9 @@
           <a:solidFill>
             <a:srgbClr val="FFFFFF"/>
           </a:solidFill>
-          <a:ln w="6350">
+          <a:ln w="19050">
             <a:solidFill>
-              <a:srgbClr val="282828"/>
+              <a:srgbClr val="000000"/>
             </a:solidFill>
           </a:ln>
         </p:spPr>
@@ -7861,11 +7825,11 @@
           </a:fontRef>
         </p:style>
         <p:txBody>
-          <a:bodyPr rtlCol="0" anchor="ctr" lIns="54864" rIns="54864"/>
+          <a:bodyPr rtlCol="0" anchor="ctr" lIns="45720" rIns="45720"/>
           <a:lstStyle/>
           <a:p>
             <a:pPr algn="ctr">
-              <a:defRPr sz="819">
+              <a:defRPr sz="1300" b="1">
                 <a:solidFill>
                   <a:srgbClr val="000000"/>
                 </a:solidFill>
@@ -7873,27 +7837,27 @@
               </a:defRPr>
             </a:pPr>
             <a:r>
-              <a:t>3.4 Wind Disturbance Control</a:t>
-            </a:r>
-          </a:p>
-        </p:txBody>
-      </p:sp>
-      <p:sp>
-        <p:nvSpPr>
-          <p:cNvPr id="21" name="Right Arrow 20"/>
-          <p:cNvSpPr/>
-          <p:nvPr/>
-        </p:nvSpPr>
-        <p:spPr>
-          <a:xfrm>
-            <a:off x="3127248" y="1307592"/>
-            <a:ext cx="182880" cy="201168"/>
-          </a:xfrm>
-          <a:prstGeom prst="rightArrow">
-            <a:avLst/>
-          </a:prstGeom>
-          <a:solidFill>
-            <a:srgbClr val="000000"/>
+              <a:t>Phase II: 3D Recon &amp; Datasets</a:t>
+            </a:r>
+          </a:p>
+        </p:txBody>
+      </p:sp>
+      <p:sp>
+        <p:nvSpPr>
+          <p:cNvPr id="22" name="Rectangle 21"/>
+          <p:cNvSpPr/>
+          <p:nvPr/>
+        </p:nvSpPr>
+        <p:spPr>
+          <a:xfrm>
+            <a:off x="4604004" y="987552"/>
+            <a:ext cx="9144" cy="3218688"/>
+          </a:xfrm>
+          <a:prstGeom prst="rect">
+            <a:avLst/>
+          </a:prstGeom>
+          <a:solidFill>
+            <a:srgbClr val="323232"/>
           </a:solidFill>
           <a:ln>
             <a:noFill/>
@@ -7923,14 +7887,14 @@
       </p:sp>
       <p:sp>
         <p:nvSpPr>
-          <p:cNvPr id="22" name="Rounded Rectangle 21"/>
-          <p:cNvSpPr/>
-          <p:nvPr/>
-        </p:nvSpPr>
-        <p:spPr>
-          <a:xfrm>
-            <a:off x="3328416" y="1234440"/>
-            <a:ext cx="2560320" cy="347472"/>
+          <p:cNvPr id="23" name="Rounded Rectangle 22"/>
+          <p:cNvSpPr/>
+          <p:nvPr/>
+        </p:nvSpPr>
+        <p:spPr>
+          <a:xfrm>
+            <a:off x="3419856" y="1371600"/>
+            <a:ext cx="2377440" cy="384048"/>
           </a:xfrm>
           <a:prstGeom prst="roundRect">
             <a:avLst/>
@@ -7938,7 +7902,7 @@
           <a:solidFill>
             <a:srgbClr val="FFFFFF"/>
           </a:solidFill>
-          <a:ln w="15875">
+          <a:ln w="15240">
             <a:solidFill>
               <a:srgbClr val="000000"/>
             </a:solidFill>
@@ -7959,11 +7923,11 @@
           </a:fontRef>
         </p:style>
         <p:txBody>
-          <a:bodyPr rtlCol="0" anchor="ctr" lIns="45720" rIns="45720"/>
+          <a:bodyPr rtlCol="0" anchor="ctr" lIns="73152" rIns="73152"/>
           <a:lstStyle/>
           <a:p>
             <a:pPr algn="ctr">
-              <a:defRPr sz="1000" b="1">
+              <a:defRPr sz="1150" b="1">
                 <a:solidFill>
                   <a:srgbClr val="000000"/>
                 </a:solidFill>
@@ -7971,27 +7935,27 @@
               </a:defRPr>
             </a:pPr>
             <a:r>
-              <a:t>Phase II: 3D Recon. &amp; Datasets</a:t>
-            </a:r>
-          </a:p>
-        </p:txBody>
-      </p:sp>
-      <p:sp>
-        <p:nvSpPr>
-          <p:cNvPr id="23" name="Rectangle 22"/>
-          <p:cNvSpPr/>
-          <p:nvPr/>
-        </p:nvSpPr>
-        <p:spPr>
-          <a:xfrm>
-            <a:off x="4604004" y="1581912"/>
-            <a:ext cx="9144" cy="2852928"/>
+              <a:t>Chapter 4: 3D Reconstruction</a:t>
+            </a:r>
+          </a:p>
+        </p:txBody>
+      </p:sp>
+      <p:sp>
+        <p:nvSpPr>
+          <p:cNvPr id="24" name="Rectangle 23"/>
+          <p:cNvSpPr/>
+          <p:nvPr/>
+        </p:nvSpPr>
+        <p:spPr>
+          <a:xfrm>
+            <a:off x="3511296" y="1773936"/>
+            <a:ext cx="7315" cy="749808"/>
           </a:xfrm>
           <a:prstGeom prst="rect">
             <a:avLst/>
           </a:prstGeom>
           <a:solidFill>
-            <a:srgbClr val="282828"/>
+            <a:srgbClr val="323232"/>
           </a:solidFill>
           <a:ln>
             <a:noFill/>
@@ -8021,14 +7985,57 @@
       </p:sp>
       <p:sp>
         <p:nvSpPr>
-          <p:cNvPr id="24" name="Rounded Rectangle 23"/>
-          <p:cNvSpPr/>
-          <p:nvPr/>
-        </p:nvSpPr>
-        <p:spPr>
-          <a:xfrm>
-            <a:off x="3442716" y="1920240"/>
-            <a:ext cx="2331720" cy="329184"/>
+          <p:cNvPr id="25" name="Rectangle 24"/>
+          <p:cNvSpPr/>
+          <p:nvPr/>
+        </p:nvSpPr>
+        <p:spPr>
+          <a:xfrm>
+            <a:off x="3511296" y="1938528"/>
+            <a:ext cx="82296" cy="7315"/>
+          </a:xfrm>
+          <a:prstGeom prst="rect">
+            <a:avLst/>
+          </a:prstGeom>
+          <a:solidFill>
+            <a:srgbClr val="323232"/>
+          </a:solidFill>
+          <a:ln>
+            <a:noFill/>
+          </a:ln>
+        </p:spPr>
+        <p:style>
+          <a:lnRef idx="1">
+            <a:schemeClr val="accent1"/>
+          </a:lnRef>
+          <a:fillRef idx="3">
+            <a:schemeClr val="accent1"/>
+          </a:fillRef>
+          <a:effectRef idx="2">
+            <a:schemeClr val="accent1"/>
+          </a:effectRef>
+          <a:fontRef idx="minor">
+            <a:schemeClr val="lt1"/>
+          </a:fontRef>
+        </p:style>
+        <p:txBody>
+          <a:bodyPr rtlCol="0" anchor="ctr"/>
+          <a:lstStyle/>
+          <a:p>
+            <a:pPr algn="ctr"/>
+          </a:p>
+        </p:txBody>
+      </p:sp>
+      <p:sp>
+        <p:nvSpPr>
+          <p:cNvPr id="26" name="Rounded Rectangle 25"/>
+          <p:cNvSpPr/>
+          <p:nvPr/>
+        </p:nvSpPr>
+        <p:spPr>
+          <a:xfrm>
+            <a:off x="3602736" y="1828800"/>
+            <a:ext cx="2084831" cy="256032"/>
           </a:xfrm>
           <a:prstGeom prst="roundRect">
             <a:avLst/>
@@ -8036,9 +8043,9 @@
           <a:solidFill>
             <a:srgbClr val="FFFFFF"/>
           </a:solidFill>
-          <a:ln w="12700">
+          <a:ln w="9525">
             <a:solidFill>
-              <a:srgbClr val="000000"/>
+              <a:srgbClr val="323232"/>
             </a:solidFill>
           </a:ln>
         </p:spPr>
@@ -8061,7 +8068,7 @@
           <a:lstStyle/>
           <a:p>
             <a:pPr algn="ctr">
-              <a:defRPr sz="919" b="1">
+              <a:defRPr sz="1050">
                 <a:solidFill>
                   <a:srgbClr val="000000"/>
                 </a:solidFill>
@@ -8069,27 +8076,27 @@
               </a:defRPr>
             </a:pPr>
             <a:r>
-              <a:t>Chapter 4: 3D Reconstruction (Guidong Yang)</a:t>
-            </a:r>
-          </a:p>
-        </p:txBody>
-      </p:sp>
-      <p:sp>
-        <p:nvSpPr>
-          <p:cNvPr id="25" name="Rectangle 24"/>
-          <p:cNvSpPr/>
-          <p:nvPr/>
-        </p:nvSpPr>
-        <p:spPr>
-          <a:xfrm>
-            <a:off x="3515868" y="2249424"/>
-            <a:ext cx="7315" cy="621792"/>
+              <a:t>• SfM &amp; Point Clouds</a:t>
+            </a:r>
+          </a:p>
+        </p:txBody>
+      </p:sp>
+      <p:sp>
+        <p:nvSpPr>
+          <p:cNvPr id="27" name="Rectangle 26"/>
+          <p:cNvSpPr/>
+          <p:nvPr/>
+        </p:nvSpPr>
+        <p:spPr>
+          <a:xfrm>
+            <a:off x="3511296" y="2249424"/>
+            <a:ext cx="82296" cy="7315"/>
           </a:xfrm>
           <a:prstGeom prst="rect">
             <a:avLst/>
           </a:prstGeom>
           <a:solidFill>
-            <a:srgbClr val="282828"/>
+            <a:srgbClr val="323232"/>
           </a:solidFill>
           <a:ln>
             <a:noFill/>
@@ -8119,57 +8126,14 @@
       </p:sp>
       <p:sp>
         <p:nvSpPr>
-          <p:cNvPr id="26" name="Rectangle 25"/>
-          <p:cNvSpPr/>
-          <p:nvPr/>
-        </p:nvSpPr>
-        <p:spPr>
-          <a:xfrm>
-            <a:off x="3515868" y="2395728"/>
-            <a:ext cx="73152" cy="7315"/>
-          </a:xfrm>
-          <a:prstGeom prst="rect">
-            <a:avLst/>
-          </a:prstGeom>
-          <a:solidFill>
-            <a:srgbClr val="282828"/>
-          </a:solidFill>
-          <a:ln>
-            <a:noFill/>
-          </a:ln>
-        </p:spPr>
-        <p:style>
-          <a:lnRef idx="1">
-            <a:schemeClr val="accent1"/>
-          </a:lnRef>
-          <a:fillRef idx="3">
-            <a:schemeClr val="accent1"/>
-          </a:fillRef>
-          <a:effectRef idx="2">
-            <a:schemeClr val="accent1"/>
-          </a:effectRef>
-          <a:fontRef idx="minor">
-            <a:schemeClr val="lt1"/>
-          </a:fontRef>
-        </p:style>
-        <p:txBody>
-          <a:bodyPr rtlCol="0" anchor="ctr"/>
-          <a:lstStyle/>
-          <a:p>
-            <a:pPr algn="ctr"/>
-          </a:p>
-        </p:txBody>
-      </p:sp>
-      <p:sp>
-        <p:nvSpPr>
-          <p:cNvPr id="27" name="Rounded Rectangle 26"/>
-          <p:cNvSpPr/>
-          <p:nvPr/>
-        </p:nvSpPr>
-        <p:spPr>
-          <a:xfrm>
-            <a:off x="3607308" y="2304288"/>
-            <a:ext cx="2084831" cy="219456"/>
+          <p:cNvPr id="28" name="Rounded Rectangle 27"/>
+          <p:cNvSpPr/>
+          <p:nvPr/>
+        </p:nvSpPr>
+        <p:spPr>
+          <a:xfrm>
+            <a:off x="3602736" y="2139696"/>
+            <a:ext cx="2084831" cy="256032"/>
           </a:xfrm>
           <a:prstGeom prst="roundRect">
             <a:avLst/>
@@ -8177,9 +8141,9 @@
           <a:solidFill>
             <a:srgbClr val="FFFFFF"/>
           </a:solidFill>
-          <a:ln w="6350">
+          <a:ln w="9525">
             <a:solidFill>
-              <a:srgbClr val="282828"/>
+              <a:srgbClr val="323232"/>
             </a:solidFill>
           </a:ln>
         </p:spPr>
@@ -8198,11 +8162,11 @@
           </a:fontRef>
         </p:style>
         <p:txBody>
-          <a:bodyPr rtlCol="0" anchor="ctr" lIns="54864" rIns="54864"/>
+          <a:bodyPr rtlCol="0" anchor="ctr" lIns="73152" rIns="73152"/>
           <a:lstStyle/>
           <a:p>
             <a:pPr algn="ctr">
-              <a:defRPr sz="819">
+              <a:defRPr sz="1050">
                 <a:solidFill>
                   <a:srgbClr val="000000"/>
                 </a:solidFill>
@@ -8210,27 +8174,27 @@
               </a:defRPr>
             </a:pPr>
             <a:r>
-              <a:t>4.2 SfM Sparse &amp; Dense Recon.</a:t>
-            </a:r>
-          </a:p>
-        </p:txBody>
-      </p:sp>
-      <p:sp>
-        <p:nvSpPr>
-          <p:cNvPr id="28" name="Rectangle 27"/>
-          <p:cNvSpPr/>
-          <p:nvPr/>
-        </p:nvSpPr>
-        <p:spPr>
-          <a:xfrm>
-            <a:off x="3515868" y="2651760"/>
-            <a:ext cx="73152" cy="7315"/>
+              <a:t>• Mesh &amp; Rendering</a:t>
+            </a:r>
+          </a:p>
+        </p:txBody>
+      </p:sp>
+      <p:sp>
+        <p:nvSpPr>
+          <p:cNvPr id="29" name="Rectangle 28"/>
+          <p:cNvSpPr/>
+          <p:nvPr/>
+        </p:nvSpPr>
+        <p:spPr>
+          <a:xfrm>
+            <a:off x="3511296" y="2560320"/>
+            <a:ext cx="82296" cy="7315"/>
           </a:xfrm>
           <a:prstGeom prst="rect">
             <a:avLst/>
           </a:prstGeom>
           <a:solidFill>
-            <a:srgbClr val="282828"/>
+            <a:srgbClr val="323232"/>
           </a:solidFill>
           <a:ln>
             <a:noFill/>
@@ -8260,14 +8224,14 @@
       </p:sp>
       <p:sp>
         <p:nvSpPr>
-          <p:cNvPr id="29" name="Rounded Rectangle 28"/>
-          <p:cNvSpPr/>
-          <p:nvPr/>
-        </p:nvSpPr>
-        <p:spPr>
-          <a:xfrm>
-            <a:off x="3607308" y="2560320"/>
-            <a:ext cx="2084831" cy="219456"/>
+          <p:cNvPr id="30" name="Rounded Rectangle 29"/>
+          <p:cNvSpPr/>
+          <p:nvPr/>
+        </p:nvSpPr>
+        <p:spPr>
+          <a:xfrm>
+            <a:off x="3602736" y="2450592"/>
+            <a:ext cx="2084831" cy="256032"/>
           </a:xfrm>
           <a:prstGeom prst="roundRect">
             <a:avLst/>
@@ -8275,9 +8239,9 @@
           <a:solidFill>
             <a:srgbClr val="FFFFFF"/>
           </a:solidFill>
-          <a:ln w="6350">
+          <a:ln w="9525">
             <a:solidFill>
-              <a:srgbClr val="282828"/>
+              <a:srgbClr val="323232"/>
             </a:solidFill>
           </a:ln>
         </p:spPr>
@@ -8296,11 +8260,11 @@
           </a:fontRef>
         </p:style>
         <p:txBody>
-          <a:bodyPr rtlCol="0" anchor="ctr" lIns="54864" rIns="54864"/>
+          <a:bodyPr rtlCol="0" anchor="ctr" lIns="73152" rIns="73152"/>
           <a:lstStyle/>
           <a:p>
             <a:pPr algn="ctr">
-              <a:defRPr sz="819">
+              <a:defRPr sz="1050">
                 <a:solidFill>
                   <a:srgbClr val="000000"/>
                 </a:solidFill>
@@ -8308,51 +8272,8 @@
               </a:defRPr>
             </a:pPr>
             <a:r>
-              <a:t>4.4 Neural Rendering &amp; Mesh</a:t>
-            </a:r>
-          </a:p>
-        </p:txBody>
-      </p:sp>
-      <p:sp>
-        <p:nvSpPr>
-          <p:cNvPr id="30" name="Rectangle 29"/>
-          <p:cNvSpPr/>
-          <p:nvPr/>
-        </p:nvSpPr>
-        <p:spPr>
-          <a:xfrm>
-            <a:off x="3515868" y="2907792"/>
-            <a:ext cx="73152" cy="7315"/>
-          </a:xfrm>
-          <a:prstGeom prst="rect">
-            <a:avLst/>
-          </a:prstGeom>
-          <a:solidFill>
-            <a:srgbClr val="282828"/>
-          </a:solidFill>
-          <a:ln>
-            <a:noFill/>
-          </a:ln>
-        </p:spPr>
-        <p:style>
-          <a:lnRef idx="1">
-            <a:schemeClr val="accent1"/>
-          </a:lnRef>
-          <a:fillRef idx="3">
-            <a:schemeClr val="accent1"/>
-          </a:fillRef>
-          <a:effectRef idx="2">
-            <a:schemeClr val="accent1"/>
-          </a:effectRef>
-          <a:fontRef idx="minor">
-            <a:schemeClr val="lt1"/>
-          </a:fontRef>
-        </p:style>
-        <p:txBody>
-          <a:bodyPr rtlCol="0" anchor="ctr"/>
-          <a:lstStyle/>
-          <a:p>
-            <a:pPr algn="ctr"/>
+              <a:t>• BIM Alignment</a:t>
+            </a:r>
           </a:p>
         </p:txBody>
       </p:sp>
@@ -8364,8 +8285,8 @@
         </p:nvSpPr>
         <p:spPr>
           <a:xfrm>
-            <a:off x="3607308" y="2816352"/>
-            <a:ext cx="2084831" cy="219456"/>
+            <a:off x="3419856" y="4206240"/>
+            <a:ext cx="2377440" cy="384048"/>
           </a:xfrm>
           <a:prstGeom prst="roundRect">
             <a:avLst/>
@@ -8373,9 +8294,9 @@
           <a:solidFill>
             <a:srgbClr val="FFFFFF"/>
           </a:solidFill>
-          <a:ln w="6350">
+          <a:ln w="15240">
             <a:solidFill>
-              <a:srgbClr val="282828"/>
+              <a:srgbClr val="000000"/>
             </a:solidFill>
           </a:ln>
         </p:spPr>
@@ -8394,11 +8315,11 @@
           </a:fontRef>
         </p:style>
         <p:txBody>
-          <a:bodyPr rtlCol="0" anchor="ctr" lIns="54864" rIns="54864"/>
+          <a:bodyPr rtlCol="0" anchor="ctr" lIns="73152" rIns="73152"/>
           <a:lstStyle/>
           <a:p>
             <a:pPr algn="ctr">
-              <a:defRPr sz="819">
+              <a:defRPr sz="1150" b="1">
                 <a:solidFill>
                   <a:srgbClr val="000000"/>
                 </a:solidFill>
@@ -8406,21 +8327,107 @@
               </a:defRPr>
             </a:pPr>
             <a:r>
-              <a:t>4.5 Point Cloud &amp; BIM Alignment</a:t>
-            </a:r>
-          </a:p>
-        </p:txBody>
-      </p:sp>
-      <p:sp>
-        <p:nvSpPr>
-          <p:cNvPr id="32" name="Rounded Rectangle 31"/>
-          <p:cNvSpPr/>
-          <p:nvPr/>
-        </p:nvSpPr>
-        <p:spPr>
-          <a:xfrm>
-            <a:off x="3442716" y="4434840"/>
-            <a:ext cx="2331720" cy="329184"/>
+              <a:t>Chapter 5: Datasets</a:t>
+            </a:r>
+          </a:p>
+        </p:txBody>
+      </p:sp>
+      <p:sp>
+        <p:nvSpPr>
+          <p:cNvPr id="32" name="Rectangle 31"/>
+          <p:cNvSpPr/>
+          <p:nvPr/>
+        </p:nvSpPr>
+        <p:spPr>
+          <a:xfrm>
+            <a:off x="3511296" y="4608576"/>
+            <a:ext cx="7315" cy="749808"/>
+          </a:xfrm>
+          <a:prstGeom prst="rect">
+            <a:avLst/>
+          </a:prstGeom>
+          <a:solidFill>
+            <a:srgbClr val="323232"/>
+          </a:solidFill>
+          <a:ln>
+            <a:noFill/>
+          </a:ln>
+        </p:spPr>
+        <p:style>
+          <a:lnRef idx="1">
+            <a:schemeClr val="accent1"/>
+          </a:lnRef>
+          <a:fillRef idx="3">
+            <a:schemeClr val="accent1"/>
+          </a:fillRef>
+          <a:effectRef idx="2">
+            <a:schemeClr val="accent1"/>
+          </a:effectRef>
+          <a:fontRef idx="minor">
+            <a:schemeClr val="lt1"/>
+          </a:fontRef>
+        </p:style>
+        <p:txBody>
+          <a:bodyPr rtlCol="0" anchor="ctr"/>
+          <a:lstStyle/>
+          <a:p>
+            <a:pPr algn="ctr"/>
+          </a:p>
+        </p:txBody>
+      </p:sp>
+      <p:sp>
+        <p:nvSpPr>
+          <p:cNvPr id="33" name="Rectangle 32"/>
+          <p:cNvSpPr/>
+          <p:nvPr/>
+        </p:nvSpPr>
+        <p:spPr>
+          <a:xfrm>
+            <a:off x="3511296" y="4773168"/>
+            <a:ext cx="82296" cy="7315"/>
+          </a:xfrm>
+          <a:prstGeom prst="rect">
+            <a:avLst/>
+          </a:prstGeom>
+          <a:solidFill>
+            <a:srgbClr val="323232"/>
+          </a:solidFill>
+          <a:ln>
+            <a:noFill/>
+          </a:ln>
+        </p:spPr>
+        <p:style>
+          <a:lnRef idx="1">
+            <a:schemeClr val="accent1"/>
+          </a:lnRef>
+          <a:fillRef idx="3">
+            <a:schemeClr val="accent1"/>
+          </a:fillRef>
+          <a:effectRef idx="2">
+            <a:schemeClr val="accent1"/>
+          </a:effectRef>
+          <a:fontRef idx="minor">
+            <a:schemeClr val="lt1"/>
+          </a:fontRef>
+        </p:style>
+        <p:txBody>
+          <a:bodyPr rtlCol="0" anchor="ctr"/>
+          <a:lstStyle/>
+          <a:p>
+            <a:pPr algn="ctr"/>
+          </a:p>
+        </p:txBody>
+      </p:sp>
+      <p:sp>
+        <p:nvSpPr>
+          <p:cNvPr id="34" name="Rounded Rectangle 33"/>
+          <p:cNvSpPr/>
+          <p:nvPr/>
+        </p:nvSpPr>
+        <p:spPr>
+          <a:xfrm>
+            <a:off x="3602736" y="4663440"/>
+            <a:ext cx="2084831" cy="256032"/>
           </a:xfrm>
           <a:prstGeom prst="roundRect">
             <a:avLst/>
@@ -8428,9 +8435,9 @@
           <a:solidFill>
             <a:srgbClr val="FFFFFF"/>
           </a:solidFill>
-          <a:ln w="12700">
+          <a:ln w="9525">
             <a:solidFill>
-              <a:srgbClr val="000000"/>
+              <a:srgbClr val="323232"/>
             </a:solidFill>
           </a:ln>
         </p:spPr>
@@ -8453,7 +8460,7 @@
           <a:lstStyle/>
           <a:p>
             <a:pPr algn="ctr">
-              <a:defRPr sz="919" b="1">
+              <a:defRPr sz="1050">
                 <a:solidFill>
                   <a:srgbClr val="000000"/>
                 </a:solidFill>
@@ -8461,27 +8468,27 @@
               </a:defRPr>
             </a:pPr>
             <a:r>
-              <a:t>Chapter 5: Inspection Datasets (Benyun Zhao)</a:t>
-            </a:r>
-          </a:p>
-        </p:txBody>
-      </p:sp>
-      <p:sp>
-        <p:nvSpPr>
-          <p:cNvPr id="33" name="Rectangle 32"/>
-          <p:cNvSpPr/>
-          <p:nvPr/>
-        </p:nvSpPr>
-        <p:spPr>
-          <a:xfrm>
-            <a:off x="3515868" y="4764024"/>
-            <a:ext cx="7315" cy="621792"/>
+              <a:t>• Multimodal Capture</a:t>
+            </a:r>
+          </a:p>
+        </p:txBody>
+      </p:sp>
+      <p:sp>
+        <p:nvSpPr>
+          <p:cNvPr id="35" name="Rectangle 34"/>
+          <p:cNvSpPr/>
+          <p:nvPr/>
+        </p:nvSpPr>
+        <p:spPr>
+          <a:xfrm>
+            <a:off x="3511296" y="5084064"/>
+            <a:ext cx="82296" cy="7315"/>
           </a:xfrm>
           <a:prstGeom prst="rect">
             <a:avLst/>
           </a:prstGeom>
           <a:solidFill>
-            <a:srgbClr val="282828"/>
+            <a:srgbClr val="323232"/>
           </a:solidFill>
           <a:ln>
             <a:noFill/>
@@ -8511,57 +8518,14 @@
       </p:sp>
       <p:sp>
         <p:nvSpPr>
-          <p:cNvPr id="34" name="Rectangle 33"/>
-          <p:cNvSpPr/>
-          <p:nvPr/>
-        </p:nvSpPr>
-        <p:spPr>
-          <a:xfrm>
-            <a:off x="3515868" y="4910328"/>
-            <a:ext cx="73152" cy="7315"/>
-          </a:xfrm>
-          <a:prstGeom prst="rect">
-            <a:avLst/>
-          </a:prstGeom>
-          <a:solidFill>
-            <a:srgbClr val="282828"/>
-          </a:solidFill>
-          <a:ln>
-            <a:noFill/>
-          </a:ln>
-        </p:spPr>
-        <p:style>
-          <a:lnRef idx="1">
-            <a:schemeClr val="accent1"/>
-          </a:lnRef>
-          <a:fillRef idx="3">
-            <a:schemeClr val="accent1"/>
-          </a:fillRef>
-          <a:effectRef idx="2">
-            <a:schemeClr val="accent1"/>
-          </a:effectRef>
-          <a:fontRef idx="minor">
-            <a:schemeClr val="lt1"/>
-          </a:fontRef>
-        </p:style>
-        <p:txBody>
-          <a:bodyPr rtlCol="0" anchor="ctr"/>
-          <a:lstStyle/>
-          <a:p>
-            <a:pPr algn="ctr"/>
-          </a:p>
-        </p:txBody>
-      </p:sp>
-      <p:sp>
-        <p:nvSpPr>
-          <p:cNvPr id="35" name="Rounded Rectangle 34"/>
-          <p:cNvSpPr/>
-          <p:nvPr/>
-        </p:nvSpPr>
-        <p:spPr>
-          <a:xfrm>
-            <a:off x="3607308" y="4818888"/>
-            <a:ext cx="2084831" cy="219456"/>
+          <p:cNvPr id="36" name="Rounded Rectangle 35"/>
+          <p:cNvSpPr/>
+          <p:nvPr/>
+        </p:nvSpPr>
+        <p:spPr>
+          <a:xfrm>
+            <a:off x="3602736" y="4974336"/>
+            <a:ext cx="2084831" cy="256032"/>
           </a:xfrm>
           <a:prstGeom prst="roundRect">
             <a:avLst/>
@@ -8569,9 +8533,9 @@
           <a:solidFill>
             <a:srgbClr val="FFFFFF"/>
           </a:solidFill>
-          <a:ln w="6350">
+          <a:ln w="9525">
             <a:solidFill>
-              <a:srgbClr val="282828"/>
+              <a:srgbClr val="323232"/>
             </a:solidFill>
           </a:ln>
         </p:spPr>
@@ -8590,11 +8554,11 @@
           </a:fontRef>
         </p:style>
         <p:txBody>
-          <a:bodyPr rtlCol="0" anchor="ctr" lIns="54864" rIns="54864"/>
+          <a:bodyPr rtlCol="0" anchor="ctr" lIns="73152" rIns="73152"/>
           <a:lstStyle/>
           <a:p>
             <a:pPr algn="ctr">
-              <a:defRPr sz="819">
+              <a:defRPr sz="1050">
                 <a:solidFill>
                   <a:srgbClr val="000000"/>
                 </a:solidFill>
@@ -8602,27 +8566,27 @@
               </a:defRPr>
             </a:pPr>
             <a:r>
-              <a:t>5.2 Multimodal Preproc. &amp; Annot.</a:t>
-            </a:r>
-          </a:p>
-        </p:txBody>
-      </p:sp>
-      <p:sp>
-        <p:nvSpPr>
-          <p:cNvPr id="36" name="Rectangle 35"/>
-          <p:cNvSpPr/>
-          <p:nvPr/>
-        </p:nvSpPr>
-        <p:spPr>
-          <a:xfrm>
-            <a:off x="3515868" y="5166360"/>
-            <a:ext cx="73152" cy="7315"/>
+              <a:t>• Defect Annotation</a:t>
+            </a:r>
+          </a:p>
+        </p:txBody>
+      </p:sp>
+      <p:sp>
+        <p:nvSpPr>
+          <p:cNvPr id="37" name="Rectangle 36"/>
+          <p:cNvSpPr/>
+          <p:nvPr/>
+        </p:nvSpPr>
+        <p:spPr>
+          <a:xfrm>
+            <a:off x="3511296" y="5394960"/>
+            <a:ext cx="82296" cy="7315"/>
           </a:xfrm>
           <a:prstGeom prst="rect">
             <a:avLst/>
           </a:prstGeom>
           <a:solidFill>
-            <a:srgbClr val="282828"/>
+            <a:srgbClr val="323232"/>
           </a:solidFill>
           <a:ln>
             <a:noFill/>
@@ -8652,14 +8616,14 @@
       </p:sp>
       <p:sp>
         <p:nvSpPr>
-          <p:cNvPr id="37" name="Rounded Rectangle 36"/>
-          <p:cNvSpPr/>
-          <p:nvPr/>
-        </p:nvSpPr>
-        <p:spPr>
-          <a:xfrm>
-            <a:off x="3607308" y="5074920"/>
-            <a:ext cx="2084831" cy="219456"/>
+          <p:cNvPr id="38" name="Rounded Rectangle 37"/>
+          <p:cNvSpPr/>
+          <p:nvPr/>
+        </p:nvSpPr>
+        <p:spPr>
+          <a:xfrm>
+            <a:off x="3602736" y="5285232"/>
+            <a:ext cx="2084831" cy="256032"/>
           </a:xfrm>
           <a:prstGeom prst="roundRect">
             <a:avLst/>
@@ -8667,9 +8631,9 @@
           <a:solidFill>
             <a:srgbClr val="FFFFFF"/>
           </a:solidFill>
-          <a:ln w="6350">
+          <a:ln w="9525">
             <a:solidFill>
-              <a:srgbClr val="282828"/>
+              <a:srgbClr val="323232"/>
             </a:solidFill>
           </a:ln>
         </p:spPr>
@@ -8688,11 +8652,11 @@
           </a:fontRef>
         </p:style>
         <p:txBody>
-          <a:bodyPr rtlCol="0" anchor="ctr" lIns="54864" rIns="54864"/>
+          <a:bodyPr rtlCol="0" anchor="ctr" lIns="73152" rIns="73152"/>
           <a:lstStyle/>
           <a:p>
             <a:pPr algn="ctr">
-              <a:defRPr sz="819">
+              <a:defRPr sz="1050">
                 <a:solidFill>
                   <a:srgbClr val="000000"/>
                 </a:solidFill>
@@ -8700,27 +8664,27 @@
               </a:defRPr>
             </a:pPr>
             <a:r>
-              <a:t>5.3 Façade Defect Detection</a:t>
-            </a:r>
-          </a:p>
-        </p:txBody>
-      </p:sp>
-      <p:sp>
-        <p:nvSpPr>
-          <p:cNvPr id="38" name="Rectangle 37"/>
-          <p:cNvSpPr/>
-          <p:nvPr/>
-        </p:nvSpPr>
-        <p:spPr>
-          <a:xfrm>
-            <a:off x="3515868" y="5422392"/>
-            <a:ext cx="73152" cy="7315"/>
-          </a:xfrm>
-          <a:prstGeom prst="rect">
-            <a:avLst/>
-          </a:prstGeom>
-          <a:solidFill>
-            <a:srgbClr val="282828"/>
+              <a:t>• Benchmark Splits</a:t>
+            </a:r>
+          </a:p>
+        </p:txBody>
+      </p:sp>
+      <p:sp>
+        <p:nvSpPr>
+          <p:cNvPr id="39" name="Right Arrow 38"/>
+          <p:cNvSpPr/>
+          <p:nvPr/>
+        </p:nvSpPr>
+        <p:spPr>
+          <a:xfrm>
+            <a:off x="5907024" y="658368"/>
+            <a:ext cx="182880" cy="219456"/>
+          </a:xfrm>
+          <a:prstGeom prst="rightArrow">
+            <a:avLst/>
+          </a:prstGeom>
+          <a:solidFill>
+            <a:srgbClr val="000000"/>
           </a:solidFill>
           <a:ln>
             <a:noFill/>
@@ -8750,14 +8714,14 @@
       </p:sp>
       <p:sp>
         <p:nvSpPr>
-          <p:cNvPr id="39" name="Rounded Rectangle 38"/>
-          <p:cNvSpPr/>
-          <p:nvPr/>
-        </p:nvSpPr>
-        <p:spPr>
-          <a:xfrm>
-            <a:off x="3607308" y="5330952"/>
-            <a:ext cx="2084831" cy="219456"/>
+          <p:cNvPr id="40" name="Rounded Rectangle 39"/>
+          <p:cNvSpPr/>
+          <p:nvPr/>
+        </p:nvSpPr>
+        <p:spPr>
+          <a:xfrm>
+            <a:off x="6108192" y="548640"/>
+            <a:ext cx="2560320" cy="438912"/>
           </a:xfrm>
           <a:prstGeom prst="roundRect">
             <a:avLst/>
@@ -8765,9 +8729,9 @@
           <a:solidFill>
             <a:srgbClr val="FFFFFF"/>
           </a:solidFill>
-          <a:ln w="6350">
+          <a:ln w="19050">
             <a:solidFill>
-              <a:srgbClr val="282828"/>
+              <a:srgbClr val="000000"/>
             </a:solidFill>
           </a:ln>
         </p:spPr>
@@ -8786,11 +8750,11 @@
           </a:fontRef>
         </p:style>
         <p:txBody>
-          <a:bodyPr rtlCol="0" anchor="ctr" lIns="54864" rIns="54864"/>
+          <a:bodyPr rtlCol="0" anchor="ctr" lIns="45720" rIns="45720"/>
           <a:lstStyle/>
           <a:p>
             <a:pPr algn="ctr">
-              <a:defRPr sz="819">
+              <a:defRPr sz="1300" b="1">
                 <a:solidFill>
                   <a:srgbClr val="000000"/>
                 </a:solidFill>
@@ -8798,27 +8762,27 @@
               </a:defRPr>
             </a:pPr>
             <a:r>
-              <a:t>5.4 Instance Segmentation</a:t>
-            </a:r>
-          </a:p>
-        </p:txBody>
-      </p:sp>
-      <p:sp>
-        <p:nvSpPr>
-          <p:cNvPr id="40" name="Right Arrow 39"/>
-          <p:cNvSpPr/>
-          <p:nvPr/>
-        </p:nvSpPr>
-        <p:spPr>
-          <a:xfrm>
-            <a:off x="5907024" y="1307592"/>
-            <a:ext cx="182880" cy="201168"/>
-          </a:xfrm>
-          <a:prstGeom prst="rightArrow">
-            <a:avLst/>
-          </a:prstGeom>
-          <a:solidFill>
-            <a:srgbClr val="000000"/>
+              <a:t>Phase III: AI Defect Perception</a:t>
+            </a:r>
+          </a:p>
+        </p:txBody>
+      </p:sp>
+      <p:sp>
+        <p:nvSpPr>
+          <p:cNvPr id="41" name="Rectangle 40"/>
+          <p:cNvSpPr/>
+          <p:nvPr/>
+        </p:nvSpPr>
+        <p:spPr>
+          <a:xfrm>
+            <a:off x="7383780" y="987552"/>
+            <a:ext cx="9144" cy="384048"/>
+          </a:xfrm>
+          <a:prstGeom prst="rect">
+            <a:avLst/>
+          </a:prstGeom>
+          <a:solidFill>
+            <a:srgbClr val="323232"/>
           </a:solidFill>
           <a:ln>
             <a:noFill/>
@@ -8848,14 +8812,14 @@
       </p:sp>
       <p:sp>
         <p:nvSpPr>
-          <p:cNvPr id="41" name="Rounded Rectangle 40"/>
-          <p:cNvSpPr/>
-          <p:nvPr/>
-        </p:nvSpPr>
-        <p:spPr>
-          <a:xfrm>
-            <a:off x="6108192" y="1234440"/>
-            <a:ext cx="2560320" cy="347472"/>
+          <p:cNvPr id="42" name="Rounded Rectangle 41"/>
+          <p:cNvSpPr/>
+          <p:nvPr/>
+        </p:nvSpPr>
+        <p:spPr>
+          <a:xfrm>
+            <a:off x="6199632" y="1371600"/>
+            <a:ext cx="2377440" cy="384048"/>
           </a:xfrm>
           <a:prstGeom prst="roundRect">
             <a:avLst/>
@@ -8863,7 +8827,7 @@
           <a:solidFill>
             <a:srgbClr val="FFFFFF"/>
           </a:solidFill>
-          <a:ln w="15875">
+          <a:ln w="15240">
             <a:solidFill>
               <a:srgbClr val="000000"/>
             </a:solidFill>
@@ -8884,11 +8848,11 @@
           </a:fontRef>
         </p:style>
         <p:txBody>
-          <a:bodyPr rtlCol="0" anchor="ctr" lIns="45720" rIns="45720"/>
+          <a:bodyPr rtlCol="0" anchor="ctr" lIns="73152" rIns="73152"/>
           <a:lstStyle/>
           <a:p>
             <a:pPr algn="ctr">
-              <a:defRPr sz="1000" b="1">
+              <a:defRPr sz="1150" b="1">
                 <a:solidFill>
                   <a:srgbClr val="000000"/>
                 </a:solidFill>
@@ -8896,27 +8860,27 @@
               </a:defRPr>
             </a:pPr>
             <a:r>
-              <a:t>Phase III: AI Defect Perception</a:t>
-            </a:r>
-          </a:p>
-        </p:txBody>
-      </p:sp>
-      <p:sp>
-        <p:nvSpPr>
-          <p:cNvPr id="42" name="Rectangle 41"/>
-          <p:cNvSpPr/>
-          <p:nvPr/>
-        </p:nvSpPr>
-        <p:spPr>
-          <a:xfrm>
-            <a:off x="7383780" y="1581912"/>
-            <a:ext cx="9144" cy="338328"/>
+              <a:t>Chapter 6: AI Defect Models</a:t>
+            </a:r>
+          </a:p>
+        </p:txBody>
+      </p:sp>
+      <p:sp>
+        <p:nvSpPr>
+          <p:cNvPr id="43" name="Rectangle 42"/>
+          <p:cNvSpPr/>
+          <p:nvPr/>
+        </p:nvSpPr>
+        <p:spPr>
+          <a:xfrm>
+            <a:off x="6291072" y="1773936"/>
+            <a:ext cx="7315" cy="1060704"/>
           </a:xfrm>
           <a:prstGeom prst="rect">
             <a:avLst/>
           </a:prstGeom>
           <a:solidFill>
-            <a:srgbClr val="282828"/>
+            <a:srgbClr val="323232"/>
           </a:solidFill>
           <a:ln>
             <a:noFill/>
@@ -8946,14 +8910,57 @@
       </p:sp>
       <p:sp>
         <p:nvSpPr>
-          <p:cNvPr id="43" name="Rounded Rectangle 42"/>
-          <p:cNvSpPr/>
-          <p:nvPr/>
-        </p:nvSpPr>
-        <p:spPr>
-          <a:xfrm>
-            <a:off x="6222492" y="1920240"/>
-            <a:ext cx="2331720" cy="329184"/>
+          <p:cNvPr id="44" name="Rectangle 43"/>
+          <p:cNvSpPr/>
+          <p:nvPr/>
+        </p:nvSpPr>
+        <p:spPr>
+          <a:xfrm>
+            <a:off x="6291072" y="1938528"/>
+            <a:ext cx="82296" cy="7315"/>
+          </a:xfrm>
+          <a:prstGeom prst="rect">
+            <a:avLst/>
+          </a:prstGeom>
+          <a:solidFill>
+            <a:srgbClr val="323232"/>
+          </a:solidFill>
+          <a:ln>
+            <a:noFill/>
+          </a:ln>
+        </p:spPr>
+        <p:style>
+          <a:lnRef idx="1">
+            <a:schemeClr val="accent1"/>
+          </a:lnRef>
+          <a:fillRef idx="3">
+            <a:schemeClr val="accent1"/>
+          </a:fillRef>
+          <a:effectRef idx="2">
+            <a:schemeClr val="accent1"/>
+          </a:effectRef>
+          <a:fontRef idx="minor">
+            <a:schemeClr val="lt1"/>
+          </a:fontRef>
+        </p:style>
+        <p:txBody>
+          <a:bodyPr rtlCol="0" anchor="ctr"/>
+          <a:lstStyle/>
+          <a:p>
+            <a:pPr algn="ctr"/>
+          </a:p>
+        </p:txBody>
+      </p:sp>
+      <p:sp>
+        <p:nvSpPr>
+          <p:cNvPr id="45" name="Rounded Rectangle 44"/>
+          <p:cNvSpPr/>
+          <p:nvPr/>
+        </p:nvSpPr>
+        <p:spPr>
+          <a:xfrm>
+            <a:off x="6382512" y="1828800"/>
+            <a:ext cx="2084831" cy="256032"/>
           </a:xfrm>
           <a:prstGeom prst="roundRect">
             <a:avLst/>
@@ -8961,9 +8968,9 @@
           <a:solidFill>
             <a:srgbClr val="FFFFFF"/>
           </a:solidFill>
-          <a:ln w="12700">
+          <a:ln w="9525">
             <a:solidFill>
-              <a:srgbClr val="000000"/>
+              <a:srgbClr val="323232"/>
             </a:solidFill>
           </a:ln>
         </p:spPr>
@@ -8986,7 +8993,7 @@
           <a:lstStyle/>
           <a:p>
             <a:pPr algn="ctr">
-              <a:defRPr sz="919" b="1">
+              <a:defRPr sz="1050">
                 <a:solidFill>
                   <a:srgbClr val="000000"/>
                 </a:solidFill>
@@ -8994,27 +9001,27 @@
               </a:defRPr>
             </a:pPr>
             <a:r>
-              <a:t>Chapter 6: AI Defect Models (Benyun Zhao)</a:t>
-            </a:r>
-          </a:p>
-        </p:txBody>
-      </p:sp>
-      <p:sp>
-        <p:nvSpPr>
-          <p:cNvPr id="44" name="Rectangle 43"/>
-          <p:cNvSpPr/>
-          <p:nvPr/>
-        </p:nvSpPr>
-        <p:spPr>
-          <a:xfrm>
-            <a:off x="6295644" y="2249424"/>
-            <a:ext cx="7315" cy="877824"/>
+              <a:t>• On-board Latency</a:t>
+            </a:r>
+          </a:p>
+        </p:txBody>
+      </p:sp>
+      <p:sp>
+        <p:nvSpPr>
+          <p:cNvPr id="46" name="Rectangle 45"/>
+          <p:cNvSpPr/>
+          <p:nvPr/>
+        </p:nvSpPr>
+        <p:spPr>
+          <a:xfrm>
+            <a:off x="6291072" y="2249424"/>
+            <a:ext cx="82296" cy="7315"/>
           </a:xfrm>
           <a:prstGeom prst="rect">
             <a:avLst/>
           </a:prstGeom>
           <a:solidFill>
-            <a:srgbClr val="282828"/>
+            <a:srgbClr val="323232"/>
           </a:solidFill>
           <a:ln>
             <a:noFill/>
@@ -9044,57 +9051,14 @@
       </p:sp>
       <p:sp>
         <p:nvSpPr>
-          <p:cNvPr id="45" name="Rectangle 44"/>
-          <p:cNvSpPr/>
-          <p:nvPr/>
-        </p:nvSpPr>
-        <p:spPr>
-          <a:xfrm>
-            <a:off x="6295644" y="2395728"/>
-            <a:ext cx="73152" cy="7315"/>
-          </a:xfrm>
-          <a:prstGeom prst="rect">
-            <a:avLst/>
-          </a:prstGeom>
-          <a:solidFill>
-            <a:srgbClr val="282828"/>
-          </a:solidFill>
-          <a:ln>
-            <a:noFill/>
-          </a:ln>
-        </p:spPr>
-        <p:style>
-          <a:lnRef idx="1">
-            <a:schemeClr val="accent1"/>
-          </a:lnRef>
-          <a:fillRef idx="3">
-            <a:schemeClr val="accent1"/>
-          </a:fillRef>
-          <a:effectRef idx="2">
-            <a:schemeClr val="accent1"/>
-          </a:effectRef>
-          <a:fontRef idx="minor">
-            <a:schemeClr val="lt1"/>
-          </a:fontRef>
-        </p:style>
-        <p:txBody>
-          <a:bodyPr rtlCol="0" anchor="ctr"/>
-          <a:lstStyle/>
-          <a:p>
-            <a:pPr algn="ctr"/>
-          </a:p>
-        </p:txBody>
-      </p:sp>
-      <p:sp>
-        <p:nvSpPr>
-          <p:cNvPr id="46" name="Rounded Rectangle 45"/>
-          <p:cNvSpPr/>
-          <p:nvPr/>
-        </p:nvSpPr>
-        <p:spPr>
-          <a:xfrm>
-            <a:off x="6387084" y="2304288"/>
-            <a:ext cx="2084831" cy="219456"/>
+          <p:cNvPr id="47" name="Rounded Rectangle 46"/>
+          <p:cNvSpPr/>
+          <p:nvPr/>
+        </p:nvSpPr>
+        <p:spPr>
+          <a:xfrm>
+            <a:off x="6382512" y="2139696"/>
+            <a:ext cx="2084831" cy="256032"/>
           </a:xfrm>
           <a:prstGeom prst="roundRect">
             <a:avLst/>
@@ -9102,9 +9066,9 @@
           <a:solidFill>
             <a:srgbClr val="FFFFFF"/>
           </a:solidFill>
-          <a:ln w="6350">
+          <a:ln w="9525">
             <a:solidFill>
-              <a:srgbClr val="282828"/>
+              <a:srgbClr val="323232"/>
             </a:solidFill>
           </a:ln>
         </p:spPr>
@@ -9123,11 +9087,11 @@
           </a:fontRef>
         </p:style>
         <p:txBody>
-          <a:bodyPr rtlCol="0" anchor="ctr" lIns="54864" rIns="54864"/>
+          <a:bodyPr rtlCol="0" anchor="ctr" lIns="73152" rIns="73152"/>
           <a:lstStyle/>
           <a:p>
             <a:pPr algn="ctr">
-              <a:defRPr sz="819">
+              <a:defRPr sz="1050">
                 <a:solidFill>
                   <a:srgbClr val="000000"/>
                 </a:solidFill>
@@ -9135,27 +9099,27 @@
               </a:defRPr>
             </a:pPr>
             <a:r>
-              <a:t>6.1 On-board Compute &amp; Latency</a:t>
-            </a:r>
-          </a:p>
-        </p:txBody>
-      </p:sp>
-      <p:sp>
-        <p:nvSpPr>
-          <p:cNvPr id="47" name="Rectangle 46"/>
-          <p:cNvSpPr/>
-          <p:nvPr/>
-        </p:nvSpPr>
-        <p:spPr>
-          <a:xfrm>
-            <a:off x="6295644" y="2651760"/>
-            <a:ext cx="73152" cy="7315"/>
+              <a:t>• Defect Detection</a:t>
+            </a:r>
+          </a:p>
+        </p:txBody>
+      </p:sp>
+      <p:sp>
+        <p:nvSpPr>
+          <p:cNvPr id="48" name="Rectangle 47"/>
+          <p:cNvSpPr/>
+          <p:nvPr/>
+        </p:nvSpPr>
+        <p:spPr>
+          <a:xfrm>
+            <a:off x="6291072" y="2560320"/>
+            <a:ext cx="82296" cy="7315"/>
           </a:xfrm>
           <a:prstGeom prst="rect">
             <a:avLst/>
           </a:prstGeom>
           <a:solidFill>
-            <a:srgbClr val="282828"/>
+            <a:srgbClr val="323232"/>
           </a:solidFill>
           <a:ln>
             <a:noFill/>
@@ -9185,14 +9149,14 @@
       </p:sp>
       <p:sp>
         <p:nvSpPr>
-          <p:cNvPr id="48" name="Rounded Rectangle 47"/>
-          <p:cNvSpPr/>
-          <p:nvPr/>
-        </p:nvSpPr>
-        <p:spPr>
-          <a:xfrm>
-            <a:off x="6387084" y="2560320"/>
-            <a:ext cx="2084831" cy="219456"/>
+          <p:cNvPr id="49" name="Rounded Rectangle 48"/>
+          <p:cNvSpPr/>
+          <p:nvPr/>
+        </p:nvSpPr>
+        <p:spPr>
+          <a:xfrm>
+            <a:off x="6382512" y="2450592"/>
+            <a:ext cx="2084831" cy="256032"/>
           </a:xfrm>
           <a:prstGeom prst="roundRect">
             <a:avLst/>
@@ -9200,9 +9164,9 @@
           <a:solidFill>
             <a:srgbClr val="FFFFFF"/>
           </a:solidFill>
-          <a:ln w="6350">
+          <a:ln w="9525">
             <a:solidFill>
-              <a:srgbClr val="282828"/>
+              <a:srgbClr val="323232"/>
             </a:solidFill>
           </a:ln>
         </p:spPr>
@@ -9221,11 +9185,11 @@
           </a:fontRef>
         </p:style>
         <p:txBody>
-          <a:bodyPr rtlCol="0" anchor="ctr" lIns="54864" rIns="54864"/>
+          <a:bodyPr rtlCol="0" anchor="ctr" lIns="73152" rIns="73152"/>
           <a:lstStyle/>
           <a:p>
             <a:pPr algn="ctr">
-              <a:defRPr sz="819">
+              <a:defRPr sz="1050">
                 <a:solidFill>
                   <a:srgbClr val="000000"/>
                 </a:solidFill>
@@ -9233,27 +9197,27 @@
               </a:defRPr>
             </a:pPr>
             <a:r>
-              <a:t>6.3 Defect Detection Architectures</a:t>
-            </a:r>
-          </a:p>
-        </p:txBody>
-      </p:sp>
-      <p:sp>
-        <p:nvSpPr>
-          <p:cNvPr id="49" name="Rectangle 48"/>
-          <p:cNvSpPr/>
-          <p:nvPr/>
-        </p:nvSpPr>
-        <p:spPr>
-          <a:xfrm>
-            <a:off x="6295644" y="2907792"/>
-            <a:ext cx="73152" cy="7315"/>
+              <a:t>• Instance Seg.</a:t>
+            </a:r>
+          </a:p>
+        </p:txBody>
+      </p:sp>
+      <p:sp>
+        <p:nvSpPr>
+          <p:cNvPr id="50" name="Rectangle 49"/>
+          <p:cNvSpPr/>
+          <p:nvPr/>
+        </p:nvSpPr>
+        <p:spPr>
+          <a:xfrm>
+            <a:off x="6291072" y="2871216"/>
+            <a:ext cx="82296" cy="7315"/>
           </a:xfrm>
           <a:prstGeom prst="rect">
             <a:avLst/>
           </a:prstGeom>
           <a:solidFill>
-            <a:srgbClr val="282828"/>
+            <a:srgbClr val="323232"/>
           </a:solidFill>
           <a:ln>
             <a:noFill/>
@@ -9283,14 +9247,14 @@
       </p:sp>
       <p:sp>
         <p:nvSpPr>
-          <p:cNvPr id="50" name="Rounded Rectangle 49"/>
-          <p:cNvSpPr/>
-          <p:nvPr/>
-        </p:nvSpPr>
-        <p:spPr>
-          <a:xfrm>
-            <a:off x="6387084" y="2816352"/>
-            <a:ext cx="2084831" cy="219456"/>
+          <p:cNvPr id="51" name="Rounded Rectangle 50"/>
+          <p:cNvSpPr/>
+          <p:nvPr/>
+        </p:nvSpPr>
+        <p:spPr>
+          <a:xfrm>
+            <a:off x="6382512" y="2761488"/>
+            <a:ext cx="2084831" cy="256032"/>
           </a:xfrm>
           <a:prstGeom prst="roundRect">
             <a:avLst/>
@@ -9298,9 +9262,9 @@
           <a:solidFill>
             <a:srgbClr val="FFFFFF"/>
           </a:solidFill>
-          <a:ln w="6350">
+          <a:ln w="9525">
             <a:solidFill>
-              <a:srgbClr val="282828"/>
+              <a:srgbClr val="323232"/>
             </a:solidFill>
           </a:ln>
         </p:spPr>
@@ -9319,11 +9283,11 @@
           </a:fontRef>
         </p:style>
         <p:txBody>
-          <a:bodyPr rtlCol="0" anchor="ctr" lIns="54864" rIns="54864"/>
+          <a:bodyPr rtlCol="0" anchor="ctr" lIns="73152" rIns="73152"/>
           <a:lstStyle/>
           <a:p>
             <a:pPr algn="ctr">
-              <a:defRPr sz="819">
+              <a:defRPr sz="1050">
                 <a:solidFill>
                   <a:srgbClr val="000000"/>
                 </a:solidFill>
@@ -9331,27 +9295,27 @@
               </a:defRPr>
             </a:pPr>
             <a:r>
-              <a:t>6.4 Instance Seg. &amp; Metrics</a:t>
-            </a:r>
-          </a:p>
-        </p:txBody>
-      </p:sp>
-      <p:sp>
-        <p:nvSpPr>
-          <p:cNvPr id="51" name="Rectangle 50"/>
-          <p:cNvSpPr/>
-          <p:nvPr/>
-        </p:nvSpPr>
-        <p:spPr>
-          <a:xfrm>
-            <a:off x="6295644" y="3163824"/>
-            <a:ext cx="73152" cy="7315"/>
-          </a:xfrm>
-          <a:prstGeom prst="rect">
-            <a:avLst/>
-          </a:prstGeom>
-          <a:solidFill>
-            <a:srgbClr val="282828"/>
+              <a:t>• Edge Validation</a:t>
+            </a:r>
+          </a:p>
+        </p:txBody>
+      </p:sp>
+      <p:sp>
+        <p:nvSpPr>
+          <p:cNvPr id="52" name="Right Arrow 51"/>
+          <p:cNvSpPr/>
+          <p:nvPr/>
+        </p:nvSpPr>
+        <p:spPr>
+          <a:xfrm>
+            <a:off x="8686800" y="658368"/>
+            <a:ext cx="182880" cy="219456"/>
+          </a:xfrm>
+          <a:prstGeom prst="rightArrow">
+            <a:avLst/>
+          </a:prstGeom>
+          <a:solidFill>
+            <a:srgbClr val="000000"/>
           </a:solidFill>
           <a:ln>
             <a:noFill/>
@@ -9381,14 +9345,14 @@
       </p:sp>
       <p:sp>
         <p:nvSpPr>
-          <p:cNvPr id="52" name="Rounded Rectangle 51"/>
-          <p:cNvSpPr/>
-          <p:nvPr/>
-        </p:nvSpPr>
-        <p:spPr>
-          <a:xfrm>
-            <a:off x="6387084" y="3072384"/>
-            <a:ext cx="2084831" cy="219456"/>
+          <p:cNvPr id="53" name="Rounded Rectangle 52"/>
+          <p:cNvSpPr/>
+          <p:nvPr/>
+        </p:nvSpPr>
+        <p:spPr>
+          <a:xfrm>
+            <a:off x="8887968" y="548640"/>
+            <a:ext cx="2560320" cy="438912"/>
           </a:xfrm>
           <a:prstGeom prst="roundRect">
             <a:avLst/>
@@ -9396,9 +9360,9 @@
           <a:solidFill>
             <a:srgbClr val="FFFFFF"/>
           </a:solidFill>
-          <a:ln w="6350">
+          <a:ln w="19050">
             <a:solidFill>
-              <a:srgbClr val="282828"/>
+              <a:srgbClr val="000000"/>
             </a:solidFill>
           </a:ln>
         </p:spPr>
@@ -9417,11 +9381,11 @@
           </a:fontRef>
         </p:style>
         <p:txBody>
-          <a:bodyPr rtlCol="0" anchor="ctr" lIns="54864" rIns="54864"/>
+          <a:bodyPr rtlCol="0" anchor="ctr" lIns="45720" rIns="45720"/>
           <a:lstStyle/>
           <a:p>
             <a:pPr algn="ctr">
-              <a:defRPr sz="819">
+              <a:defRPr sz="1300" b="1">
                 <a:solidFill>
                   <a:srgbClr val="000000"/>
                 </a:solidFill>
@@ -9429,27 +9393,27 @@
               </a:defRPr>
             </a:pPr>
             <a:r>
-              <a:t>6.6 Edge Deployment Validation</a:t>
-            </a:r>
-          </a:p>
-        </p:txBody>
-      </p:sp>
-      <p:sp>
-        <p:nvSpPr>
-          <p:cNvPr id="53" name="Right Arrow 52"/>
-          <p:cNvSpPr/>
-          <p:nvPr/>
-        </p:nvSpPr>
-        <p:spPr>
-          <a:xfrm>
-            <a:off x="8686800" y="1307592"/>
-            <a:ext cx="182880" cy="201168"/>
-          </a:xfrm>
-          <a:prstGeom prst="rightArrow">
-            <a:avLst/>
-          </a:prstGeom>
-          <a:solidFill>
-            <a:srgbClr val="000000"/>
+              <a:t>Phase IV: Digital Twin &amp; LLM</a:t>
+            </a:r>
+          </a:p>
+        </p:txBody>
+      </p:sp>
+      <p:sp>
+        <p:nvSpPr>
+          <p:cNvPr id="54" name="Rectangle 53"/>
+          <p:cNvSpPr/>
+          <p:nvPr/>
+        </p:nvSpPr>
+        <p:spPr>
+          <a:xfrm>
+            <a:off x="10163556" y="987552"/>
+            <a:ext cx="9144" cy="4133088"/>
+          </a:xfrm>
+          <a:prstGeom prst="rect">
+            <a:avLst/>
+          </a:prstGeom>
+          <a:solidFill>
+            <a:srgbClr val="323232"/>
           </a:solidFill>
           <a:ln>
             <a:noFill/>
@@ -9479,14 +9443,14 @@
       </p:sp>
       <p:sp>
         <p:nvSpPr>
-          <p:cNvPr id="54" name="Rounded Rectangle 53"/>
-          <p:cNvSpPr/>
-          <p:nvPr/>
-        </p:nvSpPr>
-        <p:spPr>
-          <a:xfrm>
-            <a:off x="8887968" y="1234440"/>
-            <a:ext cx="2560320" cy="347472"/>
+          <p:cNvPr id="55" name="Rounded Rectangle 54"/>
+          <p:cNvSpPr/>
+          <p:nvPr/>
+        </p:nvSpPr>
+        <p:spPr>
+          <a:xfrm>
+            <a:off x="8979408" y="1371600"/>
+            <a:ext cx="2377440" cy="384048"/>
           </a:xfrm>
           <a:prstGeom prst="roundRect">
             <a:avLst/>
@@ -9494,7 +9458,7 @@
           <a:solidFill>
             <a:srgbClr val="FFFFFF"/>
           </a:solidFill>
-          <a:ln w="15875">
+          <a:ln w="15240">
             <a:solidFill>
               <a:srgbClr val="000000"/>
             </a:solidFill>
@@ -9515,11 +9479,11 @@
           </a:fontRef>
         </p:style>
         <p:txBody>
-          <a:bodyPr rtlCol="0" anchor="ctr" lIns="45720" rIns="45720"/>
+          <a:bodyPr rtlCol="0" anchor="ctr" lIns="73152" rIns="73152"/>
           <a:lstStyle/>
           <a:p>
             <a:pPr algn="ctr">
-              <a:defRPr sz="1000" b="1">
+              <a:defRPr sz="1150" b="1">
                 <a:solidFill>
                   <a:srgbClr val="000000"/>
                 </a:solidFill>
@@ -9527,27 +9491,27 @@
               </a:defRPr>
             </a:pPr>
             <a:r>
-              <a:t>Phase IV: Digital Twin &amp; LLM</a:t>
-            </a:r>
-          </a:p>
-        </p:txBody>
-      </p:sp>
-      <p:sp>
-        <p:nvSpPr>
-          <p:cNvPr id="55" name="Rectangle 54"/>
-          <p:cNvSpPr/>
-          <p:nvPr/>
-        </p:nvSpPr>
-        <p:spPr>
-          <a:xfrm>
-            <a:off x="10163556" y="1581912"/>
-            <a:ext cx="9144" cy="3813048"/>
+              <a:t>Chapter 7: GIS &amp; GeoBIM</a:t>
+            </a:r>
+          </a:p>
+        </p:txBody>
+      </p:sp>
+      <p:sp>
+        <p:nvSpPr>
+          <p:cNvPr id="56" name="Rectangle 55"/>
+          <p:cNvSpPr/>
+          <p:nvPr/>
+        </p:nvSpPr>
+        <p:spPr>
+          <a:xfrm>
+            <a:off x="9070848" y="1773936"/>
+            <a:ext cx="7315" cy="749808"/>
           </a:xfrm>
           <a:prstGeom prst="rect">
             <a:avLst/>
           </a:prstGeom>
           <a:solidFill>
-            <a:srgbClr val="282828"/>
+            <a:srgbClr val="323232"/>
           </a:solidFill>
           <a:ln>
             <a:noFill/>
@@ -9577,14 +9541,57 @@
       </p:sp>
       <p:sp>
         <p:nvSpPr>
-          <p:cNvPr id="56" name="Rounded Rectangle 55"/>
-          <p:cNvSpPr/>
-          <p:nvPr/>
-        </p:nvSpPr>
-        <p:spPr>
-          <a:xfrm>
-            <a:off x="9002268" y="1920240"/>
-            <a:ext cx="2331720" cy="329184"/>
+          <p:cNvPr id="57" name="Rectangle 56"/>
+          <p:cNvSpPr/>
+          <p:nvPr/>
+        </p:nvSpPr>
+        <p:spPr>
+          <a:xfrm>
+            <a:off x="9070848" y="1938528"/>
+            <a:ext cx="82296" cy="7315"/>
+          </a:xfrm>
+          <a:prstGeom prst="rect">
+            <a:avLst/>
+          </a:prstGeom>
+          <a:solidFill>
+            <a:srgbClr val="323232"/>
+          </a:solidFill>
+          <a:ln>
+            <a:noFill/>
+          </a:ln>
+        </p:spPr>
+        <p:style>
+          <a:lnRef idx="1">
+            <a:schemeClr val="accent1"/>
+          </a:lnRef>
+          <a:fillRef idx="3">
+            <a:schemeClr val="accent1"/>
+          </a:fillRef>
+          <a:effectRef idx="2">
+            <a:schemeClr val="accent1"/>
+          </a:effectRef>
+          <a:fontRef idx="minor">
+            <a:schemeClr val="lt1"/>
+          </a:fontRef>
+        </p:style>
+        <p:txBody>
+          <a:bodyPr rtlCol="0" anchor="ctr"/>
+          <a:lstStyle/>
+          <a:p>
+            <a:pPr algn="ctr"/>
+          </a:p>
+        </p:txBody>
+      </p:sp>
+      <p:sp>
+        <p:nvSpPr>
+          <p:cNvPr id="58" name="Rounded Rectangle 57"/>
+          <p:cNvSpPr/>
+          <p:nvPr/>
+        </p:nvSpPr>
+        <p:spPr>
+          <a:xfrm>
+            <a:off x="9162288" y="1828800"/>
+            <a:ext cx="2084831" cy="256032"/>
           </a:xfrm>
           <a:prstGeom prst="roundRect">
             <a:avLst/>
@@ -9592,9 +9599,9 @@
           <a:solidFill>
             <a:srgbClr val="FFFFFF"/>
           </a:solidFill>
-          <a:ln w="12700">
+          <a:ln w="9525">
             <a:solidFill>
-              <a:srgbClr val="000000"/>
+              <a:srgbClr val="323232"/>
             </a:solidFill>
           </a:ln>
         </p:spPr>
@@ -9617,7 +9624,7 @@
           <a:lstStyle/>
           <a:p>
             <a:pPr algn="ctr">
-              <a:defRPr sz="919" b="1">
+              <a:defRPr sz="1050">
                 <a:solidFill>
                   <a:srgbClr val="000000"/>
                 </a:solidFill>
@@ -9625,27 +9632,27 @@
               </a:defRPr>
             </a:pPr>
             <a:r>
-              <a:t>Chapter 7: GIS &amp; GeoBIM (Jihan Zhang)</a:t>
-            </a:r>
-          </a:p>
-        </p:txBody>
-      </p:sp>
-      <p:sp>
-        <p:nvSpPr>
-          <p:cNvPr id="57" name="Rectangle 56"/>
-          <p:cNvSpPr/>
-          <p:nvPr/>
-        </p:nvSpPr>
-        <p:spPr>
-          <a:xfrm>
-            <a:off x="9075420" y="2249424"/>
-            <a:ext cx="7315" cy="621792"/>
+              <a:t>• GeoBIM Mapping</a:t>
+            </a:r>
+          </a:p>
+        </p:txBody>
+      </p:sp>
+      <p:sp>
+        <p:nvSpPr>
+          <p:cNvPr id="59" name="Rectangle 58"/>
+          <p:cNvSpPr/>
+          <p:nvPr/>
+        </p:nvSpPr>
+        <p:spPr>
+          <a:xfrm>
+            <a:off x="9070848" y="2249424"/>
+            <a:ext cx="82296" cy="7315"/>
           </a:xfrm>
           <a:prstGeom prst="rect">
             <a:avLst/>
           </a:prstGeom>
           <a:solidFill>
-            <a:srgbClr val="282828"/>
+            <a:srgbClr val="323232"/>
           </a:solidFill>
           <a:ln>
             <a:noFill/>
@@ -9675,57 +9682,14 @@
       </p:sp>
       <p:sp>
         <p:nvSpPr>
-          <p:cNvPr id="58" name="Rectangle 57"/>
-          <p:cNvSpPr/>
-          <p:nvPr/>
-        </p:nvSpPr>
-        <p:spPr>
-          <a:xfrm>
-            <a:off x="9075420" y="2395728"/>
-            <a:ext cx="73152" cy="7315"/>
-          </a:xfrm>
-          <a:prstGeom prst="rect">
-            <a:avLst/>
-          </a:prstGeom>
-          <a:solidFill>
-            <a:srgbClr val="282828"/>
-          </a:solidFill>
-          <a:ln>
-            <a:noFill/>
-          </a:ln>
-        </p:spPr>
-        <p:style>
-          <a:lnRef idx="1">
-            <a:schemeClr val="accent1"/>
-          </a:lnRef>
-          <a:fillRef idx="3">
-            <a:schemeClr val="accent1"/>
-          </a:fillRef>
-          <a:effectRef idx="2">
-            <a:schemeClr val="accent1"/>
-          </a:effectRef>
-          <a:fontRef idx="minor">
-            <a:schemeClr val="lt1"/>
-          </a:fontRef>
-        </p:style>
-        <p:txBody>
-          <a:bodyPr rtlCol="0" anchor="ctr"/>
-          <a:lstStyle/>
-          <a:p>
-            <a:pPr algn="ctr"/>
-          </a:p>
-        </p:txBody>
-      </p:sp>
-      <p:sp>
-        <p:nvSpPr>
-          <p:cNvPr id="59" name="Rounded Rectangle 58"/>
-          <p:cNvSpPr/>
-          <p:nvPr/>
-        </p:nvSpPr>
-        <p:spPr>
-          <a:xfrm>
-            <a:off x="9166860" y="2304288"/>
-            <a:ext cx="2084831" cy="219456"/>
+          <p:cNvPr id="60" name="Rounded Rectangle 59"/>
+          <p:cNvSpPr/>
+          <p:nvPr/>
+        </p:nvSpPr>
+        <p:spPr>
+          <a:xfrm>
+            <a:off x="9162288" y="2139696"/>
+            <a:ext cx="2084831" cy="256032"/>
           </a:xfrm>
           <a:prstGeom prst="roundRect">
             <a:avLst/>
@@ -9733,9 +9697,9 @@
           <a:solidFill>
             <a:srgbClr val="FFFFFF"/>
           </a:solidFill>
-          <a:ln w="6350">
+          <a:ln w="9525">
             <a:solidFill>
-              <a:srgbClr val="282828"/>
+              <a:srgbClr val="323232"/>
             </a:solidFill>
           </a:ln>
         </p:spPr>
@@ -9754,11 +9718,11 @@
           </a:fontRef>
         </p:style>
         <p:txBody>
-          <a:bodyPr rtlCol="0" anchor="ctr" lIns="54864" rIns="54864"/>
+          <a:bodyPr rtlCol="0" anchor="ctr" lIns="73152" rIns="73152"/>
           <a:lstStyle/>
           <a:p>
             <a:pPr algn="ctr">
-              <a:defRPr sz="819">
+              <a:defRPr sz="1050">
                 <a:solidFill>
                   <a:srgbClr val="000000"/>
                 </a:solidFill>
@@ -9766,27 +9730,27 @@
               </a:defRPr>
             </a:pPr>
             <a:r>
-              <a:t>7.2 Mapping UAV/3D to GeoBIM</a:t>
-            </a:r>
-          </a:p>
-        </p:txBody>
-      </p:sp>
-      <p:sp>
-        <p:nvSpPr>
-          <p:cNvPr id="60" name="Rectangle 59"/>
-          <p:cNvSpPr/>
-          <p:nvPr/>
-        </p:nvSpPr>
-        <p:spPr>
-          <a:xfrm>
-            <a:off x="9075420" y="2651760"/>
-            <a:ext cx="73152" cy="7315"/>
+              <a:t>• Degradation Analysis</a:t>
+            </a:r>
+          </a:p>
+        </p:txBody>
+      </p:sp>
+      <p:sp>
+        <p:nvSpPr>
+          <p:cNvPr id="61" name="Rectangle 60"/>
+          <p:cNvSpPr/>
+          <p:nvPr/>
+        </p:nvSpPr>
+        <p:spPr>
+          <a:xfrm>
+            <a:off x="9070848" y="2560320"/>
+            <a:ext cx="82296" cy="7315"/>
           </a:xfrm>
           <a:prstGeom prst="rect">
             <a:avLst/>
           </a:prstGeom>
           <a:solidFill>
-            <a:srgbClr val="282828"/>
+            <a:srgbClr val="323232"/>
           </a:solidFill>
           <a:ln>
             <a:noFill/>
@@ -9816,14 +9780,14 @@
       </p:sp>
       <p:sp>
         <p:nvSpPr>
-          <p:cNvPr id="61" name="Rounded Rectangle 60"/>
-          <p:cNvSpPr/>
-          <p:nvPr/>
-        </p:nvSpPr>
-        <p:spPr>
-          <a:xfrm>
-            <a:off x="9166860" y="2560320"/>
-            <a:ext cx="2084831" cy="219456"/>
+          <p:cNvPr id="62" name="Rounded Rectangle 61"/>
+          <p:cNvSpPr/>
+          <p:nvPr/>
+        </p:nvSpPr>
+        <p:spPr>
+          <a:xfrm>
+            <a:off x="9162288" y="2450592"/>
+            <a:ext cx="2084831" cy="256032"/>
           </a:xfrm>
           <a:prstGeom prst="roundRect">
             <a:avLst/>
@@ -9831,9 +9795,9 @@
           <a:solidFill>
             <a:srgbClr val="FFFFFF"/>
           </a:solidFill>
-          <a:ln w="6350">
+          <a:ln w="9525">
             <a:solidFill>
-              <a:srgbClr val="282828"/>
+              <a:srgbClr val="323232"/>
             </a:solidFill>
           </a:ln>
         </p:spPr>
@@ -9852,11 +9816,11 @@
           </a:fontRef>
         </p:style>
         <p:txBody>
-          <a:bodyPr rtlCol="0" anchor="ctr" lIns="54864" rIns="54864"/>
+          <a:bodyPr rtlCol="0" anchor="ctr" lIns="73152" rIns="73152"/>
           <a:lstStyle/>
           <a:p>
             <a:pPr algn="ctr">
-              <a:defRPr sz="819">
+              <a:defRPr sz="1050">
                 <a:solidFill>
                   <a:srgbClr val="000000"/>
                 </a:solidFill>
@@ -9864,51 +9828,8 @@
               </a:defRPr>
             </a:pPr>
             <a:r>
-              <a:t>7.3 Spatiotemporal Degradation</a:t>
-            </a:r>
-          </a:p>
-        </p:txBody>
-      </p:sp>
-      <p:sp>
-        <p:nvSpPr>
-          <p:cNvPr id="62" name="Rectangle 61"/>
-          <p:cNvSpPr/>
-          <p:nvPr/>
-        </p:nvSpPr>
-        <p:spPr>
-          <a:xfrm>
-            <a:off x="9075420" y="2907792"/>
-            <a:ext cx="73152" cy="7315"/>
-          </a:xfrm>
-          <a:prstGeom prst="rect">
-            <a:avLst/>
-          </a:prstGeom>
-          <a:solidFill>
-            <a:srgbClr val="282828"/>
-          </a:solidFill>
-          <a:ln>
-            <a:noFill/>
-          </a:ln>
-        </p:spPr>
-        <p:style>
-          <a:lnRef idx="1">
-            <a:schemeClr val="accent1"/>
-          </a:lnRef>
-          <a:fillRef idx="3">
-            <a:schemeClr val="accent1"/>
-          </a:fillRef>
-          <a:effectRef idx="2">
-            <a:schemeClr val="accent1"/>
-          </a:effectRef>
-          <a:fontRef idx="minor">
-            <a:schemeClr val="lt1"/>
-          </a:fontRef>
-        </p:style>
-        <p:txBody>
-          <a:bodyPr rtlCol="0" anchor="ctr"/>
-          <a:lstStyle/>
-          <a:p>
-            <a:pPr algn="ctr"/>
+              <a:t>• Asset Passports</a:t>
+            </a:r>
           </a:p>
         </p:txBody>
       </p:sp>
@@ -9920,8 +9841,8 @@
         </p:nvSpPr>
         <p:spPr>
           <a:xfrm>
-            <a:off x="9166860" y="2816352"/>
-            <a:ext cx="2084831" cy="219456"/>
+            <a:off x="8979408" y="3291840"/>
+            <a:ext cx="2377440" cy="384048"/>
           </a:xfrm>
           <a:prstGeom prst="roundRect">
             <a:avLst/>
@@ -9929,9 +9850,9 @@
           <a:solidFill>
             <a:srgbClr val="FFFFFF"/>
           </a:solidFill>
-          <a:ln w="6350">
+          <a:ln w="15240">
             <a:solidFill>
-              <a:srgbClr val="282828"/>
+              <a:srgbClr val="000000"/>
             </a:solidFill>
           </a:ln>
         </p:spPr>
@@ -9950,11 +9871,11 @@
           </a:fontRef>
         </p:style>
         <p:txBody>
-          <a:bodyPr rtlCol="0" anchor="ctr" lIns="54864" rIns="54864"/>
+          <a:bodyPr rtlCol="0" anchor="ctr" lIns="73152" rIns="73152"/>
           <a:lstStyle/>
           <a:p>
             <a:pPr algn="ctr">
-              <a:defRPr sz="819">
+              <a:defRPr sz="1150" b="1">
                 <a:solidFill>
                   <a:srgbClr val="000000"/>
                 </a:solidFill>
@@ -9962,21 +9883,107 @@
               </a:defRPr>
             </a:pPr>
             <a:r>
-              <a:t>7.5 City Asset Passport Mgmt</a:t>
-            </a:r>
-          </a:p>
-        </p:txBody>
-      </p:sp>
-      <p:sp>
-        <p:nvSpPr>
-          <p:cNvPr id="64" name="Rounded Rectangle 63"/>
-          <p:cNvSpPr/>
-          <p:nvPr/>
-        </p:nvSpPr>
-        <p:spPr>
-          <a:xfrm>
-            <a:off x="9002268" y="3657600"/>
-            <a:ext cx="2331720" cy="329184"/>
+              <a:t>Chapter 8: Digital Twin &amp; LLM</a:t>
+            </a:r>
+          </a:p>
+        </p:txBody>
+      </p:sp>
+      <p:sp>
+        <p:nvSpPr>
+          <p:cNvPr id="64" name="Rectangle 63"/>
+          <p:cNvSpPr/>
+          <p:nvPr/>
+        </p:nvSpPr>
+        <p:spPr>
+          <a:xfrm>
+            <a:off x="9070848" y="3694176"/>
+            <a:ext cx="7315" cy="749808"/>
+          </a:xfrm>
+          <a:prstGeom prst="rect">
+            <a:avLst/>
+          </a:prstGeom>
+          <a:solidFill>
+            <a:srgbClr val="323232"/>
+          </a:solidFill>
+          <a:ln>
+            <a:noFill/>
+          </a:ln>
+        </p:spPr>
+        <p:style>
+          <a:lnRef idx="1">
+            <a:schemeClr val="accent1"/>
+          </a:lnRef>
+          <a:fillRef idx="3">
+            <a:schemeClr val="accent1"/>
+          </a:fillRef>
+          <a:effectRef idx="2">
+            <a:schemeClr val="accent1"/>
+          </a:effectRef>
+          <a:fontRef idx="minor">
+            <a:schemeClr val="lt1"/>
+          </a:fontRef>
+        </p:style>
+        <p:txBody>
+          <a:bodyPr rtlCol="0" anchor="ctr"/>
+          <a:lstStyle/>
+          <a:p>
+            <a:pPr algn="ctr"/>
+          </a:p>
+        </p:txBody>
+      </p:sp>
+      <p:sp>
+        <p:nvSpPr>
+          <p:cNvPr id="65" name="Rectangle 64"/>
+          <p:cNvSpPr/>
+          <p:nvPr/>
+        </p:nvSpPr>
+        <p:spPr>
+          <a:xfrm>
+            <a:off x="9070848" y="3858768"/>
+            <a:ext cx="82296" cy="7315"/>
+          </a:xfrm>
+          <a:prstGeom prst="rect">
+            <a:avLst/>
+          </a:prstGeom>
+          <a:solidFill>
+            <a:srgbClr val="323232"/>
+          </a:solidFill>
+          <a:ln>
+            <a:noFill/>
+          </a:ln>
+        </p:spPr>
+        <p:style>
+          <a:lnRef idx="1">
+            <a:schemeClr val="accent1"/>
+          </a:lnRef>
+          <a:fillRef idx="3">
+            <a:schemeClr val="accent1"/>
+          </a:fillRef>
+          <a:effectRef idx="2">
+            <a:schemeClr val="accent1"/>
+          </a:effectRef>
+          <a:fontRef idx="minor">
+            <a:schemeClr val="lt1"/>
+          </a:fontRef>
+        </p:style>
+        <p:txBody>
+          <a:bodyPr rtlCol="0" anchor="ctr"/>
+          <a:lstStyle/>
+          <a:p>
+            <a:pPr algn="ctr"/>
+          </a:p>
+        </p:txBody>
+      </p:sp>
+      <p:sp>
+        <p:nvSpPr>
+          <p:cNvPr id="66" name="Rounded Rectangle 65"/>
+          <p:cNvSpPr/>
+          <p:nvPr/>
+        </p:nvSpPr>
+        <p:spPr>
+          <a:xfrm>
+            <a:off x="9162288" y="3749040"/>
+            <a:ext cx="2084831" cy="256032"/>
           </a:xfrm>
           <a:prstGeom prst="roundRect">
             <a:avLst/>
@@ -9984,9 +9991,9 @@
           <a:solidFill>
             <a:srgbClr val="FFFFFF"/>
           </a:solidFill>
-          <a:ln w="12700">
+          <a:ln w="9525">
             <a:solidFill>
-              <a:srgbClr val="000000"/>
+              <a:srgbClr val="323232"/>
             </a:solidFill>
           </a:ln>
         </p:spPr>
@@ -10009,7 +10016,7 @@
           <a:lstStyle/>
           <a:p>
             <a:pPr algn="ctr">
-              <a:defRPr sz="919" b="1">
+              <a:defRPr sz="1050">
                 <a:solidFill>
                   <a:srgbClr val="000000"/>
                 </a:solidFill>
@@ -10017,27 +10024,27 @@
               </a:defRPr>
             </a:pPr>
             <a:r>
-              <a:t>Chapter 8: Digital Twin &amp; LLM (Yijun Huang)</a:t>
-            </a:r>
-          </a:p>
-        </p:txBody>
-      </p:sp>
-      <p:sp>
-        <p:nvSpPr>
-          <p:cNvPr id="65" name="Rectangle 64"/>
-          <p:cNvSpPr/>
-          <p:nvPr/>
-        </p:nvSpPr>
-        <p:spPr>
-          <a:xfrm>
-            <a:off x="9075420" y="3986784"/>
-            <a:ext cx="7315" cy="621792"/>
+              <a:t>• LLM/VLM Reasoning</a:t>
+            </a:r>
+          </a:p>
+        </p:txBody>
+      </p:sp>
+      <p:sp>
+        <p:nvSpPr>
+          <p:cNvPr id="67" name="Rectangle 66"/>
+          <p:cNvSpPr/>
+          <p:nvPr/>
+        </p:nvSpPr>
+        <p:spPr>
+          <a:xfrm>
+            <a:off x="9070848" y="4169664"/>
+            <a:ext cx="82296" cy="7315"/>
           </a:xfrm>
           <a:prstGeom prst="rect">
             <a:avLst/>
           </a:prstGeom>
           <a:solidFill>
-            <a:srgbClr val="282828"/>
+            <a:srgbClr val="323232"/>
           </a:solidFill>
           <a:ln>
             <a:noFill/>
@@ -10067,57 +10074,14 @@
       </p:sp>
       <p:sp>
         <p:nvSpPr>
-          <p:cNvPr id="66" name="Rectangle 65"/>
-          <p:cNvSpPr/>
-          <p:nvPr/>
-        </p:nvSpPr>
-        <p:spPr>
-          <a:xfrm>
-            <a:off x="9075420" y="4133088"/>
-            <a:ext cx="73152" cy="7315"/>
-          </a:xfrm>
-          <a:prstGeom prst="rect">
-            <a:avLst/>
-          </a:prstGeom>
-          <a:solidFill>
-            <a:srgbClr val="282828"/>
-          </a:solidFill>
-          <a:ln>
-            <a:noFill/>
-          </a:ln>
-        </p:spPr>
-        <p:style>
-          <a:lnRef idx="1">
-            <a:schemeClr val="accent1"/>
-          </a:lnRef>
-          <a:fillRef idx="3">
-            <a:schemeClr val="accent1"/>
-          </a:fillRef>
-          <a:effectRef idx="2">
-            <a:schemeClr val="accent1"/>
-          </a:effectRef>
-          <a:fontRef idx="minor">
-            <a:schemeClr val="lt1"/>
-          </a:fontRef>
-        </p:style>
-        <p:txBody>
-          <a:bodyPr rtlCol="0" anchor="ctr"/>
-          <a:lstStyle/>
-          <a:p>
-            <a:pPr algn="ctr"/>
-          </a:p>
-        </p:txBody>
-      </p:sp>
-      <p:sp>
-        <p:nvSpPr>
-          <p:cNvPr id="67" name="Rounded Rectangle 66"/>
-          <p:cNvSpPr/>
-          <p:nvPr/>
-        </p:nvSpPr>
-        <p:spPr>
-          <a:xfrm>
-            <a:off x="9166860" y="4041648"/>
-            <a:ext cx="2084831" cy="219456"/>
+          <p:cNvPr id="68" name="Rounded Rectangle 67"/>
+          <p:cNvSpPr/>
+          <p:nvPr/>
+        </p:nvSpPr>
+        <p:spPr>
+          <a:xfrm>
+            <a:off x="9162288" y="4059936"/>
+            <a:ext cx="2084831" cy="256032"/>
           </a:xfrm>
           <a:prstGeom prst="roundRect">
             <a:avLst/>
@@ -10125,9 +10089,9 @@
           <a:solidFill>
             <a:srgbClr val="FFFFFF"/>
           </a:solidFill>
-          <a:ln w="6350">
+          <a:ln w="9525">
             <a:solidFill>
-              <a:srgbClr val="282828"/>
+              <a:srgbClr val="323232"/>
             </a:solidFill>
           </a:ln>
         </p:spPr>
@@ -10146,11 +10110,11 @@
           </a:fontRef>
         </p:style>
         <p:txBody>
-          <a:bodyPr rtlCol="0" anchor="ctr" lIns="54864" rIns="54864"/>
+          <a:bodyPr rtlCol="0" anchor="ctr" lIns="73152" rIns="73152"/>
           <a:lstStyle/>
           <a:p>
             <a:pPr algn="ctr">
-              <a:defRPr sz="819">
+              <a:defRPr sz="1050">
                 <a:solidFill>
                   <a:srgbClr val="000000"/>
                 </a:solidFill>
@@ -10158,27 +10122,27 @@
               </a:defRPr>
             </a:pPr>
             <a:r>
-              <a:t>8.2 LLM / VLM Domain Reasoning</a:t>
-            </a:r>
-          </a:p>
-        </p:txBody>
-      </p:sp>
-      <p:sp>
-        <p:nvSpPr>
-          <p:cNvPr id="68" name="Rectangle 67"/>
-          <p:cNvSpPr/>
-          <p:nvPr/>
-        </p:nvSpPr>
-        <p:spPr>
-          <a:xfrm>
-            <a:off x="9075420" y="4389120"/>
-            <a:ext cx="73152" cy="7315"/>
+              <a:t>• Twin Memory &amp; RAG</a:t>
+            </a:r>
+          </a:p>
+        </p:txBody>
+      </p:sp>
+      <p:sp>
+        <p:nvSpPr>
+          <p:cNvPr id="69" name="Rectangle 68"/>
+          <p:cNvSpPr/>
+          <p:nvPr/>
+        </p:nvSpPr>
+        <p:spPr>
+          <a:xfrm>
+            <a:off x="9070848" y="4480560"/>
+            <a:ext cx="82296" cy="7315"/>
           </a:xfrm>
           <a:prstGeom prst="rect">
             <a:avLst/>
           </a:prstGeom>
           <a:solidFill>
-            <a:srgbClr val="282828"/>
+            <a:srgbClr val="323232"/>
           </a:solidFill>
           <a:ln>
             <a:noFill/>
@@ -10208,14 +10172,14 @@
       </p:sp>
       <p:sp>
         <p:nvSpPr>
-          <p:cNvPr id="69" name="Rounded Rectangle 68"/>
-          <p:cNvSpPr/>
-          <p:nvPr/>
-        </p:nvSpPr>
-        <p:spPr>
-          <a:xfrm>
-            <a:off x="9166860" y="4297680"/>
-            <a:ext cx="2084831" cy="219456"/>
+          <p:cNvPr id="70" name="Rounded Rectangle 69"/>
+          <p:cNvSpPr/>
+          <p:nvPr/>
+        </p:nvSpPr>
+        <p:spPr>
+          <a:xfrm>
+            <a:off x="9162288" y="4370832"/>
+            <a:ext cx="2084831" cy="256032"/>
           </a:xfrm>
           <a:prstGeom prst="roundRect">
             <a:avLst/>
@@ -10223,9 +10187,9 @@
           <a:solidFill>
             <a:srgbClr val="FFFFFF"/>
           </a:solidFill>
-          <a:ln w="6350">
+          <a:ln w="9525">
             <a:solidFill>
-              <a:srgbClr val="282828"/>
+              <a:srgbClr val="323232"/>
             </a:solidFill>
           </a:ln>
         </p:spPr>
@@ -10244,11 +10208,11 @@
           </a:fontRef>
         </p:style>
         <p:txBody>
-          <a:bodyPr rtlCol="0" anchor="ctr" lIns="54864" rIns="54864"/>
+          <a:bodyPr rtlCol="0" anchor="ctr" lIns="73152" rIns="73152"/>
           <a:lstStyle/>
           <a:p>
             <a:pPr algn="ctr">
-              <a:defRPr sz="819">
+              <a:defRPr sz="1050">
                 <a:solidFill>
                   <a:srgbClr val="000000"/>
                 </a:solidFill>
@@ -10256,51 +10220,8 @@
               </a:defRPr>
             </a:pPr>
             <a:r>
-              <a:t>8.3 Twin Memory &amp; RAG Retrieval</a:t>
-            </a:r>
-          </a:p>
-        </p:txBody>
-      </p:sp>
-      <p:sp>
-        <p:nvSpPr>
-          <p:cNvPr id="70" name="Rectangle 69"/>
-          <p:cNvSpPr/>
-          <p:nvPr/>
-        </p:nvSpPr>
-        <p:spPr>
-          <a:xfrm>
-            <a:off x="9075420" y="4645152"/>
-            <a:ext cx="73152" cy="7315"/>
-          </a:xfrm>
-          <a:prstGeom prst="rect">
-            <a:avLst/>
-          </a:prstGeom>
-          <a:solidFill>
-            <a:srgbClr val="282828"/>
-          </a:solidFill>
-          <a:ln>
-            <a:noFill/>
-          </a:ln>
-        </p:spPr>
-        <p:style>
-          <a:lnRef idx="1">
-            <a:schemeClr val="accent1"/>
-          </a:lnRef>
-          <a:fillRef idx="3">
-            <a:schemeClr val="accent1"/>
-          </a:fillRef>
-          <a:effectRef idx="2">
-            <a:schemeClr val="accent1"/>
-          </a:effectRef>
-          <a:fontRef idx="minor">
-            <a:schemeClr val="lt1"/>
-          </a:fontRef>
-        </p:style>
-        <p:txBody>
-          <a:bodyPr rtlCol="0" anchor="ctr"/>
-          <a:lstStyle/>
-          <a:p>
-            <a:pPr algn="ctr"/>
+              <a:t>• Maintenance DSS</a:t>
+            </a:r>
           </a:p>
         </p:txBody>
       </p:sp>
@@ -10312,8 +10233,8 @@
         </p:nvSpPr>
         <p:spPr>
           <a:xfrm>
-            <a:off x="9166860" y="4553712"/>
-            <a:ext cx="2084831" cy="219456"/>
+            <a:off x="8979408" y="5120640"/>
+            <a:ext cx="2377440" cy="384048"/>
           </a:xfrm>
           <a:prstGeom prst="roundRect">
             <a:avLst/>
@@ -10321,9 +10242,9 @@
           <a:solidFill>
             <a:srgbClr val="FFFFFF"/>
           </a:solidFill>
-          <a:ln w="6350">
+          <a:ln w="15240">
             <a:solidFill>
-              <a:srgbClr val="282828"/>
+              <a:srgbClr val="000000"/>
             </a:solidFill>
           </a:ln>
         </p:spPr>
@@ -10342,11 +10263,11 @@
           </a:fontRef>
         </p:style>
         <p:txBody>
-          <a:bodyPr rtlCol="0" anchor="ctr" lIns="54864" rIns="54864"/>
+          <a:bodyPr rtlCol="0" anchor="ctr" lIns="73152" rIns="73152"/>
           <a:lstStyle/>
           <a:p>
             <a:pPr algn="ctr">
-              <a:defRPr sz="819">
+              <a:defRPr sz="1150" b="1">
                 <a:solidFill>
                   <a:srgbClr val="000000"/>
                 </a:solidFill>
@@ -10354,21 +10275,107 @@
               </a:defRPr>
             </a:pPr>
             <a:r>
-              <a:t>8.5/8.6 Report &amp; Maintenance DSS</a:t>
-            </a:r>
-          </a:p>
-        </p:txBody>
-      </p:sp>
-      <p:sp>
-        <p:nvSpPr>
-          <p:cNvPr id="72" name="Rounded Rectangle 71"/>
-          <p:cNvSpPr/>
-          <p:nvPr/>
-        </p:nvSpPr>
-        <p:spPr>
-          <a:xfrm>
-            <a:off x="9002268" y="5394960"/>
-            <a:ext cx="2331720" cy="329184"/>
+              <a:t>Chapter 9: Conclusion</a:t>
+            </a:r>
+          </a:p>
+        </p:txBody>
+      </p:sp>
+      <p:sp>
+        <p:nvSpPr>
+          <p:cNvPr id="72" name="Rectangle 71"/>
+          <p:cNvSpPr/>
+          <p:nvPr/>
+        </p:nvSpPr>
+        <p:spPr>
+          <a:xfrm>
+            <a:off x="9070848" y="5522976"/>
+            <a:ext cx="7315" cy="749808"/>
+          </a:xfrm>
+          <a:prstGeom prst="rect">
+            <a:avLst/>
+          </a:prstGeom>
+          <a:solidFill>
+            <a:srgbClr val="323232"/>
+          </a:solidFill>
+          <a:ln>
+            <a:noFill/>
+          </a:ln>
+        </p:spPr>
+        <p:style>
+          <a:lnRef idx="1">
+            <a:schemeClr val="accent1"/>
+          </a:lnRef>
+          <a:fillRef idx="3">
+            <a:schemeClr val="accent1"/>
+          </a:fillRef>
+          <a:effectRef idx="2">
+            <a:schemeClr val="accent1"/>
+          </a:effectRef>
+          <a:fontRef idx="minor">
+            <a:schemeClr val="lt1"/>
+          </a:fontRef>
+        </p:style>
+        <p:txBody>
+          <a:bodyPr rtlCol="0" anchor="ctr"/>
+          <a:lstStyle/>
+          <a:p>
+            <a:pPr algn="ctr"/>
+          </a:p>
+        </p:txBody>
+      </p:sp>
+      <p:sp>
+        <p:nvSpPr>
+          <p:cNvPr id="73" name="Rectangle 72"/>
+          <p:cNvSpPr/>
+          <p:nvPr/>
+        </p:nvSpPr>
+        <p:spPr>
+          <a:xfrm>
+            <a:off x="9070848" y="5687568"/>
+            <a:ext cx="82296" cy="7315"/>
+          </a:xfrm>
+          <a:prstGeom prst="rect">
+            <a:avLst/>
+          </a:prstGeom>
+          <a:solidFill>
+            <a:srgbClr val="323232"/>
+          </a:solidFill>
+          <a:ln>
+            <a:noFill/>
+          </a:ln>
+        </p:spPr>
+        <p:style>
+          <a:lnRef idx="1">
+            <a:schemeClr val="accent1"/>
+          </a:lnRef>
+          <a:fillRef idx="3">
+            <a:schemeClr val="accent1"/>
+          </a:fillRef>
+          <a:effectRef idx="2">
+            <a:schemeClr val="accent1"/>
+          </a:effectRef>
+          <a:fontRef idx="minor">
+            <a:schemeClr val="lt1"/>
+          </a:fontRef>
+        </p:style>
+        <p:txBody>
+          <a:bodyPr rtlCol="0" anchor="ctr"/>
+          <a:lstStyle/>
+          <a:p>
+            <a:pPr algn="ctr"/>
+          </a:p>
+        </p:txBody>
+      </p:sp>
+      <p:sp>
+        <p:nvSpPr>
+          <p:cNvPr id="74" name="Rounded Rectangle 73"/>
+          <p:cNvSpPr/>
+          <p:nvPr/>
+        </p:nvSpPr>
+        <p:spPr>
+          <a:xfrm>
+            <a:off x="9162288" y="5577840"/>
+            <a:ext cx="2084831" cy="256032"/>
           </a:xfrm>
           <a:prstGeom prst="roundRect">
             <a:avLst/>
@@ -10376,9 +10383,9 @@
           <a:solidFill>
             <a:srgbClr val="FFFFFF"/>
           </a:solidFill>
-          <a:ln w="12700">
+          <a:ln w="9525">
             <a:solidFill>
-              <a:srgbClr val="000000"/>
+              <a:srgbClr val="323232"/>
             </a:solidFill>
           </a:ln>
         </p:spPr>
@@ -10401,7 +10408,7 @@
           <a:lstStyle/>
           <a:p>
             <a:pPr algn="ctr">
-              <a:defRPr sz="919" b="1">
+              <a:defRPr sz="1050">
                 <a:solidFill>
                   <a:srgbClr val="000000"/>
                 </a:solidFill>
@@ -10409,27 +10416,27 @@
               </a:defRPr>
             </a:pPr>
             <a:r>
-              <a:t>Chapter 9: Conclusion &amp; Outlook (Ben M. Chen et al.)</a:t>
-            </a:r>
-          </a:p>
-        </p:txBody>
-      </p:sp>
-      <p:sp>
-        <p:nvSpPr>
-          <p:cNvPr id="73" name="Rectangle 72"/>
-          <p:cNvSpPr/>
-          <p:nvPr/>
-        </p:nvSpPr>
-        <p:spPr>
-          <a:xfrm>
-            <a:off x="9075420" y="5724144"/>
-            <a:ext cx="7315" cy="621792"/>
+              <a:t>• System Summary</a:t>
+            </a:r>
+          </a:p>
+        </p:txBody>
+      </p:sp>
+      <p:sp>
+        <p:nvSpPr>
+          <p:cNvPr id="75" name="Rectangle 74"/>
+          <p:cNvSpPr/>
+          <p:nvPr/>
+        </p:nvSpPr>
+        <p:spPr>
+          <a:xfrm>
+            <a:off x="9070848" y="5998464"/>
+            <a:ext cx="82296" cy="7315"/>
           </a:xfrm>
           <a:prstGeom prst="rect">
             <a:avLst/>
           </a:prstGeom>
           <a:solidFill>
-            <a:srgbClr val="282828"/>
+            <a:srgbClr val="323232"/>
           </a:solidFill>
           <a:ln>
             <a:noFill/>
@@ -10459,57 +10466,14 @@
       </p:sp>
       <p:sp>
         <p:nvSpPr>
-          <p:cNvPr id="74" name="Rectangle 73"/>
-          <p:cNvSpPr/>
-          <p:nvPr/>
-        </p:nvSpPr>
-        <p:spPr>
-          <a:xfrm>
-            <a:off x="9075420" y="5870448"/>
-            <a:ext cx="73152" cy="7315"/>
-          </a:xfrm>
-          <a:prstGeom prst="rect">
-            <a:avLst/>
-          </a:prstGeom>
-          <a:solidFill>
-            <a:srgbClr val="282828"/>
-          </a:solidFill>
-          <a:ln>
-            <a:noFill/>
-          </a:ln>
-        </p:spPr>
-        <p:style>
-          <a:lnRef idx="1">
-            <a:schemeClr val="accent1"/>
-          </a:lnRef>
-          <a:fillRef idx="3">
-            <a:schemeClr val="accent1"/>
-          </a:fillRef>
-          <a:effectRef idx="2">
-            <a:schemeClr val="accent1"/>
-          </a:effectRef>
-          <a:fontRef idx="minor">
-            <a:schemeClr val="lt1"/>
-          </a:fontRef>
-        </p:style>
-        <p:txBody>
-          <a:bodyPr rtlCol="0" anchor="ctr"/>
-          <a:lstStyle/>
-          <a:p>
-            <a:pPr algn="ctr"/>
-          </a:p>
-        </p:txBody>
-      </p:sp>
-      <p:sp>
-        <p:nvSpPr>
-          <p:cNvPr id="75" name="Rounded Rectangle 74"/>
-          <p:cNvSpPr/>
-          <p:nvPr/>
-        </p:nvSpPr>
-        <p:spPr>
-          <a:xfrm>
-            <a:off x="9166860" y="5779008"/>
-            <a:ext cx="2084831" cy="219456"/>
+          <p:cNvPr id="76" name="Rounded Rectangle 75"/>
+          <p:cNvSpPr/>
+          <p:nvPr/>
+        </p:nvSpPr>
+        <p:spPr>
+          <a:xfrm>
+            <a:off x="9162288" y="5888736"/>
+            <a:ext cx="2084831" cy="256032"/>
           </a:xfrm>
           <a:prstGeom prst="roundRect">
             <a:avLst/>
@@ -10517,9 +10481,9 @@
           <a:solidFill>
             <a:srgbClr val="FFFFFF"/>
           </a:solidFill>
-          <a:ln w="6350">
+          <a:ln w="9525">
             <a:solidFill>
-              <a:srgbClr val="282828"/>
+              <a:srgbClr val="323232"/>
             </a:solidFill>
           </a:ln>
         </p:spPr>
@@ -10538,11 +10502,11 @@
           </a:fontRef>
         </p:style>
         <p:txBody>
-          <a:bodyPr rtlCol="0" anchor="ctr" lIns="54864" rIns="54864"/>
+          <a:bodyPr rtlCol="0" anchor="ctr" lIns="73152" rIns="73152"/>
           <a:lstStyle/>
           <a:p>
             <a:pPr algn="ctr">
-              <a:defRPr sz="819">
+              <a:defRPr sz="1050">
                 <a:solidFill>
                   <a:srgbClr val="000000"/>
                 </a:solidFill>
@@ -10550,27 +10514,27 @@
               </a:defRPr>
             </a:pPr>
             <a:r>
-              <a:t>9.1 End-to-End System Summary</a:t>
-            </a:r>
-          </a:p>
-        </p:txBody>
-      </p:sp>
-      <p:sp>
-        <p:nvSpPr>
-          <p:cNvPr id="76" name="Rectangle 75"/>
-          <p:cNvSpPr/>
-          <p:nvPr/>
-        </p:nvSpPr>
-        <p:spPr>
-          <a:xfrm>
-            <a:off x="9075420" y="6126480"/>
-            <a:ext cx="73152" cy="7315"/>
+              <a:t>• Safety &amp; Bounds</a:t>
+            </a:r>
+          </a:p>
+        </p:txBody>
+      </p:sp>
+      <p:sp>
+        <p:nvSpPr>
+          <p:cNvPr id="77" name="Rectangle 76"/>
+          <p:cNvSpPr/>
+          <p:nvPr/>
+        </p:nvSpPr>
+        <p:spPr>
+          <a:xfrm>
+            <a:off x="9070848" y="6309360"/>
+            <a:ext cx="82296" cy="7315"/>
           </a:xfrm>
           <a:prstGeom prst="rect">
             <a:avLst/>
           </a:prstGeom>
           <a:solidFill>
-            <a:srgbClr val="282828"/>
+            <a:srgbClr val="323232"/>
           </a:solidFill>
           <a:ln>
             <a:noFill/>
@@ -10600,14 +10564,14 @@
       </p:sp>
       <p:sp>
         <p:nvSpPr>
-          <p:cNvPr id="77" name="Rounded Rectangle 76"/>
-          <p:cNvSpPr/>
-          <p:nvPr/>
-        </p:nvSpPr>
-        <p:spPr>
-          <a:xfrm>
-            <a:off x="9166860" y="6035040"/>
-            <a:ext cx="2084831" cy="219456"/>
+          <p:cNvPr id="78" name="Rounded Rectangle 77"/>
+          <p:cNvSpPr/>
+          <p:nvPr/>
+        </p:nvSpPr>
+        <p:spPr>
+          <a:xfrm>
+            <a:off x="9162288" y="6199632"/>
+            <a:ext cx="2084831" cy="256032"/>
           </a:xfrm>
           <a:prstGeom prst="roundRect">
             <a:avLst/>
@@ -10615,9 +10579,9 @@
           <a:solidFill>
             <a:srgbClr val="FFFFFF"/>
           </a:solidFill>
-          <a:ln w="6350">
+          <a:ln w="9525">
             <a:solidFill>
-              <a:srgbClr val="282828"/>
+              <a:srgbClr val="323232"/>
             </a:solidFill>
           </a:ln>
         </p:spPr>
@@ -10636,11 +10600,11 @@
           </a:fontRef>
         </p:style>
         <p:txBody>
-          <a:bodyPr rtlCol="0" anchor="ctr" lIns="54864" rIns="54864"/>
+          <a:bodyPr rtlCol="0" anchor="ctr" lIns="73152" rIns="73152"/>
           <a:lstStyle/>
           <a:p>
             <a:pPr algn="ctr">
-              <a:defRPr sz="819">
+              <a:defRPr sz="1050">
                 <a:solidFill>
                   <a:srgbClr val="000000"/>
                 </a:solidFill>
@@ -10648,141 +10612,7 @@
               </a:defRPr>
             </a:pPr>
             <a:r>
-              <a:t>9.2 Regulatory &amp; Safety Bounds</a:t>
-            </a:r>
-          </a:p>
-        </p:txBody>
-      </p:sp>
-      <p:sp>
-        <p:nvSpPr>
-          <p:cNvPr id="78" name="Rectangle 77"/>
-          <p:cNvSpPr/>
-          <p:nvPr/>
-        </p:nvSpPr>
-        <p:spPr>
-          <a:xfrm>
-            <a:off x="9075420" y="6382512"/>
-            <a:ext cx="73152" cy="7315"/>
-          </a:xfrm>
-          <a:prstGeom prst="rect">
-            <a:avLst/>
-          </a:prstGeom>
-          <a:solidFill>
-            <a:srgbClr val="282828"/>
-          </a:solidFill>
-          <a:ln>
-            <a:noFill/>
-          </a:ln>
-        </p:spPr>
-        <p:style>
-          <a:lnRef idx="1">
-            <a:schemeClr val="accent1"/>
-          </a:lnRef>
-          <a:fillRef idx="3">
-            <a:schemeClr val="accent1"/>
-          </a:fillRef>
-          <a:effectRef idx="2">
-            <a:schemeClr val="accent1"/>
-          </a:effectRef>
-          <a:fontRef idx="minor">
-            <a:schemeClr val="lt1"/>
-          </a:fontRef>
-        </p:style>
-        <p:txBody>
-          <a:bodyPr rtlCol="0" anchor="ctr"/>
-          <a:lstStyle/>
-          <a:p>
-            <a:pPr algn="ctr"/>
-          </a:p>
-        </p:txBody>
-      </p:sp>
-      <p:sp>
-        <p:nvSpPr>
-          <p:cNvPr id="79" name="Rounded Rectangle 78"/>
-          <p:cNvSpPr/>
-          <p:nvPr/>
-        </p:nvSpPr>
-        <p:spPr>
-          <a:xfrm>
-            <a:off x="9166860" y="6291072"/>
-            <a:ext cx="2084831" cy="219456"/>
-          </a:xfrm>
-          <a:prstGeom prst="roundRect">
-            <a:avLst/>
-          </a:prstGeom>
-          <a:solidFill>
-            <a:srgbClr val="FFFFFF"/>
-          </a:solidFill>
-          <a:ln w="6350">
-            <a:solidFill>
-              <a:srgbClr val="282828"/>
-            </a:solidFill>
-          </a:ln>
-        </p:spPr>
-        <p:style>
-          <a:lnRef idx="1">
-            <a:schemeClr val="accent1"/>
-          </a:lnRef>
-          <a:fillRef idx="3">
-            <a:schemeClr val="accent1"/>
-          </a:fillRef>
-          <a:effectRef idx="2">
-            <a:schemeClr val="accent1"/>
-          </a:effectRef>
-          <a:fontRef idx="minor">
-            <a:schemeClr val="lt1"/>
-          </a:fontRef>
-        </p:style>
-        <p:txBody>
-          <a:bodyPr rtlCol="0" anchor="ctr" lIns="54864" rIns="54864"/>
-          <a:lstStyle/>
-          <a:p>
-            <a:pPr algn="ctr">
-              <a:defRPr sz="819">
-                <a:solidFill>
-                  <a:srgbClr val="000000"/>
-                </a:solidFill>
-                <a:latin typeface="Times New Roman"/>
-              </a:defRPr>
-            </a:pPr>
-            <a:r>
-              <a:t>9.3 Autonomous Swarms &amp; AI</a:t>
-            </a:r>
-          </a:p>
-        </p:txBody>
-      </p:sp>
-      <p:sp>
-        <p:nvSpPr>
-          <p:cNvPr id="80" name="TextBox 79"/>
-          <p:cNvSpPr txBox="1"/>
-          <p:nvPr/>
-        </p:nvSpPr>
-        <p:spPr>
-          <a:xfrm>
-            <a:off x="548640" y="6236208"/>
-            <a:ext cx="11094415" cy="365760"/>
-          </a:xfrm>
-          <a:prstGeom prst="rect">
-            <a:avLst/>
-          </a:prstGeom>
-          <a:noFill/>
-        </p:spPr>
-        <p:txBody>
-          <a:bodyPr wrap="none">
-            <a:spAutoFit/>
-          </a:bodyPr>
-          <a:lstStyle/>
-          <a:p>
-            <a:pPr>
-              <a:defRPr sz="950" b="1">
-                <a:solidFill>
-                  <a:srgbClr val="000000"/>
-                </a:solidFill>
-                <a:latin typeface="Times New Roman"/>
-              </a:defRPr>
-            </a:pPr>
-            <a:r>
-              <a:t>Figure 1.1: Four-phase end-to-end methodology and detailed chapter tree roadmap of the monograph (Chapters 1–9).</a:t>
+              <a:t>• Autonomous Swarms</a:t>
             </a:r>
           </a:p>
         </p:txBody>
